--- a/kits/kit02/Kit02_PresentationDeck.pptx
+++ b/kits/kit02/Kit02_PresentationDeck.pptx
@@ -1235,7 +1235,7 @@
           <a:p>
             <a:r>
               <a:rPr lang="en-US" dirty="0"/>
-              <a:t>YOUR TAKE slot lands here; read the authors’ stated boundary from the script: what they refuse to let AI write, and why.</a:t>
+              <a:t>Read the authors’ shared take from the script: voice matters most in personal communication with parents and students; academic language has its place, but empathetic personal messages should be in the teacher’s own words.</a:t>
             </a:r>
             <a:endParaRPr lang="en-US" dirty="0"/>
           </a:p>
@@ -1411,7 +1411,7 @@
           <a:p>
             <a:r>
               <a:rPr lang="en-US" dirty="0"/>
-              <a:t>Circulate. Weak prompts usually lack context; nudge with "what would a substitute need to know to do this right?"</a:t>
+              <a:t>Circulate. Weak prompts usually lack context; nudge with "what would a substitute need to know to do this right?" Then read Adam’s real CNC table-leg prompt from the script as the worked example (three stacked roles, one task, SVG-for-CNC format).</a:t>
             </a:r>
             <a:endParaRPr lang="en-US" dirty="0"/>
           </a:p>
@@ -2995,7 +2995,7 @@
           <a:p>
             <a:r>
               <a:rPr lang="en-US" dirty="0"/>
-              <a:t>FOUNDER STORY slot lands here; read it from the script: a time a genuinely good prompt still produced something confidently wrong, and the review caught it.</a:t>
+              <a:t>Read Adam’s french-polish story from the script: a well-iterated prompt for guitar-finishing instructions confidently claimed shellac was not a necessary ingredient for a french polish (a finish that IS shellac). His expertise caught it; the writing looked perfect.</a:t>
             </a:r>
             <a:endParaRPr lang="en-US" dirty="0"/>
           </a:p>

--- a/kits/kit02/Kit02_PresentationDeck.pptx
+++ b/kits/kit02/Kit02_PresentationDeck.pptx
@@ -1323,7 +1323,7 @@
           <a:p>
             <a:r>
               <a:rPr lang="en-US" dirty="0"/>
-              <a:t>Pairs, devices out inside two minutes, announce the tool. LOCAL EXAMPLE slot: share one of the authors’ real reusable prompts from the script.</a:t>
+              <a:t>Pairs, devices out inside two minutes, announce the tool. The script’s worked example under slide 19 is a real reusable prompt from a working carpentry program.</a:t>
             </a:r>
             <a:endParaRPr lang="en-US" dirty="0"/>
           </a:p>
@@ -1411,7 +1411,7 @@
           <a:p>
             <a:r>
               <a:rPr lang="en-US" dirty="0"/>
-              <a:t>Circulate. Weak prompts usually lack context; nudge with "what would a substitute need to know to do this right?" Then read Adam’s real CNC table-leg prompt from the script as the worked example (three stacked roles, one task, SVG-for-CNC format).</a:t>
+              <a:t>Circulate. Weak prompts usually lack context; nudge with "what would a substitute need to know to do this right?" Then read the real carpentry CNC table-leg prompt from the script as the worked example (three stacked roles, one task, SVG-for-CNC format).</a:t>
             </a:r>
             <a:endParaRPr lang="en-US" dirty="0"/>
           </a:p>
@@ -2995,7 +2995,7 @@
           <a:p>
             <a:r>
               <a:rPr lang="en-US" dirty="0"/>
-              <a:t>Read Adam’s french-polish story from the script: a well-iterated prompt for guitar-finishing instructions confidently claimed shellac was not a necessary ingredient for a french polish (a finish that IS shellac). His expertise caught it; the writing looked perfect.</a:t>
+              <a:t>Land this honestly: even a well-iterated, careful prompt can produce a confident factual error that only subject expertise catches. Expertise is the safety net; never lend yours out.</a:t>
             </a:r>
             <a:endParaRPr lang="en-US" dirty="0"/>
           </a:p>

--- a/kits/kit02/Kit02_PresentationDeck.pptx
+++ b/kits/kit02/Kit02_PresentationDeck.pptx
@@ -883,7 +883,7 @@
           <a:p>
             <a:r>
               <a:rPr lang="en-US" dirty="0"/>
-              <a:t>Answers: A missing context (grade? focus?). B missing format (what should "help" look like?). C missing task entirely (a topic, not a request). D has all four. Brisk; 3 minutes.</a:t>
+              <a:t>Let the room call each one before you confirm with the answer line at the bottom. Brisk; 3 minutes.</a:t>
             </a:r>
             <a:endParaRPr lang="en-US" dirty="0"/>
           </a:p>
@@ -2643,7 +2643,7 @@
           <a:p>
             <a:r>
               <a:rPr lang="en-US" dirty="0"/>
-              <a:t>Keep this quick. The promise line matters: staff leave with a tool, not notes.</a:t>
+              <a:t>Say: four stops this hour: the anatomy of a prompt that works, live makeovers of real prompts, learning to iterate instead of settling, and a lab where you build a reusable prompt for a task you do every week. The promise line matters: staff leave with a tool, not notes. Keep this quick.</a:t>
             </a:r>
             <a:endParaRPr lang="en-US" dirty="0"/>
           </a:p>
@@ -6023,6 +6023,45 @@
           </a:p>
         </p:txBody>
       </p:sp>
+      <p:sp>
+        <p:nvSpPr>
+          <p:cNvPr id="23" name="Text 20"/>
+          <p:cNvSpPr/>
+          <p:nvPr/>
+        </p:nvSpPr>
+        <p:spPr>
+          <a:xfrm>
+            <a:off x="640080" y="5870448"/>
+            <a:ext cx="10972800" cy="365760"/>
+          </a:xfrm>
+          <a:prstGeom prst="rect">
+            <a:avLst/>
+          </a:prstGeom>
+          <a:noFill/>
+          <a:ln/>
+        </p:spPr>
+        <p:txBody>
+          <a:bodyPr wrap="square" lIns="0" tIns="0" rIns="0" bIns="0" rtlCol="0" anchor="ctr"/>
+          <a:lstStyle/>
+          <a:p>
+            <a:pPr algn="ctr" indent="0" marL="0">
+              <a:buNone/>
+            </a:pPr>
+            <a:r>
+              <a:rPr lang="en-US" sz="1350" i="1" dirty="0">
+                <a:solidFill>
+                  <a:srgbClr val="5B6B7A"/>
+                </a:solidFill>
+                <a:latin typeface="Inter" pitchFamily="34" charset="0"/>
+                <a:ea typeface="Inter" pitchFamily="34" charset="-122"/>
+                <a:cs typeface="Inter" pitchFamily="34" charset="-120"/>
+              </a:rPr>
+              <a:t>Answers: A missing context (grade? focus?) · B missing format (what should "help" look like?) · C missing the task itself · D has all four parts</a:t>
+            </a:r>
+            <a:endParaRPr lang="en-US" sz="1350" dirty="0"/>
+          </a:p>
+        </p:txBody>
+      </p:sp>
     </p:spTree>
   </p:cSld>
   <p:clrMapOvr>

--- a/kits/kit02/Kit02_PresentationDeck.pptx
+++ b/kits/kit02/Kit02_PresentationDeck.pptx
@@ -3083,7 +3083,7 @@
           <a:p>
             <a:r>
               <a:rPr lang="en-US" dirty="0"/>
-              <a:t>Count the four parts out loud with the room: role (teacher), task (45-min intro lesson), context (mastered notation, confuse numerator/denominator), format (table with timings, named components). Same request, completely different result.</a:t>
+              <a:t>Say: watch the same request go from beige to usable on our example teacher's screen. Ms. Rivera appears in every kit; she's a composite, not a real teacher, and her screen is the thing to mimic in the lab. Count the four color-coded parts out loud: role in teal, task in navy, context in amber, format in green. Same request, completely different result.</a:t>
             </a:r>
             <a:endParaRPr lang="en-US" dirty="0"/>
           </a:p>
@@ -17997,7 +17997,7 @@
                 <a:ea typeface="Inter" pitchFamily="34" charset="-122"/>
                 <a:cs typeface="Inter" pitchFamily="34" charset="-120"/>
               </a:rPr>
-              <a:t>MAKEOVER #1 · PLANNING</a:t>
+              <a:t>MAKEOVER #1 · PLANNING · ON MS. RIVERA'S SCREEN</a:t>
             </a:r>
             <a:endParaRPr lang="en-US" sz="1200" dirty="0"/>
           </a:p>
@@ -18044,26 +18044,106 @@
       </p:sp>
       <p:sp>
         <p:nvSpPr>
-          <p:cNvPr id="7" name="Shape 4"/>
-          <p:cNvSpPr/>
-          <p:nvPr/>
-        </p:nvSpPr>
-        <p:spPr>
-          <a:xfrm>
-            <a:off x="640080" y="1417320"/>
-            <a:ext cx="10972800" cy="1371600"/>
+          <p:cNvPr id="7" name="Text 4"/>
+          <p:cNvSpPr/>
+          <p:nvPr/>
+        </p:nvSpPr>
+        <p:spPr>
+          <a:xfrm>
+            <a:off x="640080" y="1298448"/>
+            <a:ext cx="10972800" cy="365760"/>
+          </a:xfrm>
+          <a:prstGeom prst="rect">
+            <a:avLst/>
+          </a:prstGeom>
+          <a:noFill/>
+          <a:ln/>
+        </p:spPr>
+        <p:txBody>
+          <a:bodyPr wrap="square" lIns="0" tIns="0" rIns="0" bIns="0" rtlCol="0" anchor="ctr"/>
+          <a:lstStyle/>
+          <a:p>
+            <a:pPr indent="0" marL="0">
+              <a:buNone/>
+            </a:pPr>
+            <a:r>
+              <a:rPr lang="en-US" sz="1600" b="1" dirty="0">
+                <a:solidFill>
+                  <a:srgbClr val="B4453A"/>
+                </a:solidFill>
+                <a:latin typeface="Inter" pitchFamily="34" charset="0"/>
+                <a:ea typeface="Inter" pitchFamily="34" charset="-122"/>
+                <a:cs typeface="Inter" pitchFamily="34" charset="-120"/>
+              </a:rPr>
+              <a:t>BEFORE   </a:t>
+            </a:r>
+            <a:pPr indent="0" marL="0">
+              <a:buNone/>
+            </a:pPr>
+            <a:r>
+              <a:rPr lang="en-US" sz="1600" i="1" dirty="0">
+                <a:solidFill>
+                  <a:srgbClr val="5B6B7A"/>
+                </a:solidFill>
+                <a:latin typeface="Inter" pitchFamily="34" charset="0"/>
+                <a:ea typeface="Inter" pitchFamily="34" charset="-122"/>
+                <a:cs typeface="Inter" pitchFamily="34" charset="-120"/>
+              </a:rPr>
+              <a:t>“Write a lesson on fractions.”</a:t>
+            </a:r>
+            <a:endParaRPr lang="en-US" sz="1600" dirty="0"/>
+          </a:p>
+        </p:txBody>
+      </p:sp>
+      <p:sp>
+        <p:nvSpPr>
+          <p:cNvPr id="8" name="Shape 5"/>
+          <p:cNvSpPr/>
+          <p:nvPr/>
+        </p:nvSpPr>
+        <p:spPr>
+          <a:xfrm>
+            <a:off x="640080" y="1783080"/>
+            <a:ext cx="10972800" cy="3520440"/>
           </a:xfrm>
           <a:prstGeom prst="roundRect">
             <a:avLst>
-              <a:gd name="adj" fmla="val 6000"/>
+              <a:gd name="adj" fmla="val 2597"/>
             </a:avLst>
           </a:prstGeom>
           <a:solidFill>
-            <a:srgbClr val="FBEFED"/>
+            <a:srgbClr val="FFFFFF"/>
+          </a:solidFill>
+          <a:ln w="19050">
+            <a:solidFill>
+              <a:srgbClr val="DCE3EA"/>
+            </a:solidFill>
+            <a:prstDash val="solid"/>
+          </a:ln>
+        </p:spPr>
+      </p:sp>
+      <p:sp>
+        <p:nvSpPr>
+          <p:cNvPr id="9" name="Shape 6"/>
+          <p:cNvSpPr/>
+          <p:nvPr/>
+        </p:nvSpPr>
+        <p:spPr>
+          <a:xfrm>
+            <a:off x="640080" y="1783080"/>
+            <a:ext cx="10972800" cy="384048"/>
+          </a:xfrm>
+          <a:prstGeom prst="roundRect">
+            <a:avLst>
+              <a:gd name="adj" fmla="val 23810"/>
+            </a:avLst>
+          </a:prstGeom>
+          <a:solidFill>
+            <a:srgbClr val="13293D"/>
           </a:solidFill>
           <a:ln w="12700">
             <a:solidFill>
-              <a:srgbClr val="FBEFED"/>
+              <a:srgbClr val="13293D"/>
             </a:solidFill>
             <a:prstDash val="solid"/>
           </a:ln>
@@ -18071,104 +18151,24 @@
       </p:sp>
       <p:sp>
         <p:nvSpPr>
-          <p:cNvPr id="8" name="Text 5"/>
-          <p:cNvSpPr/>
-          <p:nvPr/>
-        </p:nvSpPr>
-        <p:spPr>
-          <a:xfrm>
-            <a:off x="914400" y="1554480"/>
-            <a:ext cx="1828800" cy="320040"/>
-          </a:xfrm>
-          <a:prstGeom prst="rect">
-            <a:avLst/>
-          </a:prstGeom>
-          <a:noFill/>
-          <a:ln/>
-        </p:spPr>
-        <p:txBody>
-          <a:bodyPr wrap="square" lIns="0" tIns="0" rIns="0" bIns="0" rtlCol="0" anchor="ctr"/>
-          <a:lstStyle/>
-          <a:p>
-            <a:pPr indent="0" marL="0">
-              <a:buNone/>
-            </a:pPr>
-            <a:r>
-              <a:rPr lang="en-US" sz="1400" b="1" dirty="0">
-                <a:solidFill>
-                  <a:srgbClr val="B4453A"/>
-                </a:solidFill>
-                <a:latin typeface="Inter" pitchFamily="34" charset="0"/>
-                <a:ea typeface="Inter" pitchFamily="34" charset="-122"/>
-                <a:cs typeface="Inter" pitchFamily="34" charset="-120"/>
-              </a:rPr>
-              <a:t>BEFORE</a:t>
-            </a:r>
-            <a:endParaRPr lang="en-US" sz="1400" dirty="0"/>
-          </a:p>
-        </p:txBody>
-      </p:sp>
-      <p:sp>
-        <p:nvSpPr>
-          <p:cNvPr id="9" name="Text 6"/>
-          <p:cNvSpPr/>
-          <p:nvPr/>
-        </p:nvSpPr>
-        <p:spPr>
-          <a:xfrm>
-            <a:off x="914400" y="1874520"/>
-            <a:ext cx="10424160" cy="822960"/>
-          </a:xfrm>
-          <a:prstGeom prst="rect">
-            <a:avLst/>
-          </a:prstGeom>
-          <a:noFill/>
-          <a:ln/>
-        </p:spPr>
-        <p:txBody>
-          <a:bodyPr wrap="square" lIns="0" tIns="0" rIns="0" bIns="0" rtlCol="0" anchor="ctr"/>
-          <a:lstStyle/>
-          <a:p>
-            <a:pPr indent="0" marL="0">
-              <a:buNone/>
-            </a:pPr>
-            <a:r>
-              <a:rPr lang="en-US" sz="1800" i="1" dirty="0">
-                <a:solidFill>
-                  <a:srgbClr val="1B1F24"/>
-                </a:solidFill>
-                <a:latin typeface="Inter" pitchFamily="34" charset="0"/>
-                <a:ea typeface="Inter" pitchFamily="34" charset="-122"/>
-                <a:cs typeface="Inter" pitchFamily="34" charset="-120"/>
-              </a:rPr>
-              <a:t>“Write a lesson on fractions.”</a:t>
-            </a:r>
-            <a:endParaRPr lang="en-US" sz="1800" dirty="0"/>
-          </a:p>
-        </p:txBody>
-      </p:sp>
-      <p:sp>
-        <p:nvSpPr>
           <p:cNvPr id="10" name="Shape 7"/>
           <p:cNvSpPr/>
           <p:nvPr/>
         </p:nvSpPr>
         <p:spPr>
           <a:xfrm>
-            <a:off x="640080" y="3017520"/>
-            <a:ext cx="10972800" cy="2651760"/>
-          </a:xfrm>
-          <a:prstGeom prst="roundRect">
-            <a:avLst>
-              <a:gd name="adj" fmla="val 3103"/>
-            </a:avLst>
+            <a:off x="868680" y="1901952"/>
+            <a:ext cx="146304" cy="146304"/>
+          </a:xfrm>
+          <a:prstGeom prst="ellipse">
+            <a:avLst/>
           </a:prstGeom>
           <a:solidFill>
-            <a:srgbClr val="EAF5F3"/>
+            <a:srgbClr val="E8837A"/>
           </a:solidFill>
           <a:ln w="12700">
             <a:solidFill>
-              <a:srgbClr val="EAF5F3"/>
+              <a:srgbClr val="E8837A"/>
             </a:solidFill>
             <a:prstDash val="solid"/>
           </a:ln>
@@ -18176,30 +18176,200 @@
       </p:sp>
       <p:sp>
         <p:nvSpPr>
-          <p:cNvPr id="11" name="Text 8"/>
-          <p:cNvSpPr/>
-          <p:nvPr/>
-        </p:nvSpPr>
-        <p:spPr>
-          <a:xfrm>
-            <a:off x="914400" y="3154680"/>
-            <a:ext cx="1828800" cy="320040"/>
-          </a:xfrm>
-          <a:prstGeom prst="rect">
-            <a:avLst/>
-          </a:prstGeom>
-          <a:noFill/>
-          <a:ln/>
-        </p:spPr>
-        <p:txBody>
-          <a:bodyPr wrap="square" lIns="0" tIns="0" rIns="0" bIns="0" rtlCol="0" anchor="ctr"/>
-          <a:lstStyle/>
-          <a:p>
-            <a:pPr indent="0" marL="0">
-              <a:buNone/>
-            </a:pPr>
-            <a:r>
-              <a:rPr lang="en-US" sz="1400" b="1" dirty="0">
+          <p:cNvPr id="11" name="Shape 8"/>
+          <p:cNvSpPr/>
+          <p:nvPr/>
+        </p:nvSpPr>
+        <p:spPr>
+          <a:xfrm>
+            <a:off x="1115568" y="1901952"/>
+            <a:ext cx="146304" cy="146304"/>
+          </a:xfrm>
+          <a:prstGeom prst="ellipse">
+            <a:avLst/>
+          </a:prstGeom>
+          <a:solidFill>
+            <a:srgbClr val="F4A825"/>
+          </a:solidFill>
+          <a:ln w="12700">
+            <a:solidFill>
+              <a:srgbClr val="F4A825"/>
+            </a:solidFill>
+            <a:prstDash val="solid"/>
+          </a:ln>
+        </p:spPr>
+      </p:sp>
+      <p:sp>
+        <p:nvSpPr>
+          <p:cNvPr id="12" name="Shape 9"/>
+          <p:cNvSpPr/>
+          <p:nvPr/>
+        </p:nvSpPr>
+        <p:spPr>
+          <a:xfrm>
+            <a:off x="1362456" y="1901952"/>
+            <a:ext cx="146304" cy="146304"/>
+          </a:xfrm>
+          <a:prstGeom prst="ellipse">
+            <a:avLst/>
+          </a:prstGeom>
+          <a:solidFill>
+            <a:srgbClr val="2E7D5B"/>
+          </a:solidFill>
+          <a:ln w="12700">
+            <a:solidFill>
+              <a:srgbClr val="2E7D5B"/>
+            </a:solidFill>
+            <a:prstDash val="solid"/>
+          </a:ln>
+        </p:spPr>
+      </p:sp>
+      <p:sp>
+        <p:nvSpPr>
+          <p:cNvPr id="13" name="Text 10"/>
+          <p:cNvSpPr/>
+          <p:nvPr/>
+        </p:nvSpPr>
+        <p:spPr>
+          <a:xfrm>
+            <a:off x="1783080" y="1783080"/>
+            <a:ext cx="9692640" cy="384048"/>
+          </a:xfrm>
+          <a:prstGeom prst="rect">
+            <a:avLst/>
+          </a:prstGeom>
+          <a:noFill/>
+          <a:ln/>
+        </p:spPr>
+        <p:txBody>
+          <a:bodyPr wrap="square" lIns="0" tIns="0" rIns="0" bIns="0" rtlCol="0" anchor="ctr"/>
+          <a:lstStyle/>
+          <a:p>
+            <a:pPr indent="0" marL="0">
+              <a:buNone/>
+            </a:pPr>
+            <a:r>
+              <a:rPr lang="en-US" sz="1100" dirty="0">
+                <a:solidFill>
+                  <a:srgbClr val="9FB2C2"/>
+                </a:solidFill>
+                <a:latin typeface="Inter" pitchFamily="34" charset="0"/>
+                <a:ea typeface="Inter" pitchFamily="34" charset="-122"/>
+                <a:cs typeface="Inter" pitchFamily="34" charset="-120"/>
+              </a:rPr>
+              <a:t>AI chat tool (any of them) · Ms. Rivera, our running example teacher (a composite, not a real person)</a:t>
+            </a:r>
+            <a:endParaRPr lang="en-US" sz="1100" dirty="0"/>
+          </a:p>
+        </p:txBody>
+      </p:sp>
+      <p:sp>
+        <p:nvSpPr>
+          <p:cNvPr id="14" name="Shape 11"/>
+          <p:cNvSpPr/>
+          <p:nvPr/>
+        </p:nvSpPr>
+        <p:spPr>
+          <a:xfrm>
+            <a:off x="1554480" y="2377440"/>
+            <a:ext cx="9646920" cy="2148840"/>
+          </a:xfrm>
+          <a:prstGeom prst="roundRect">
+            <a:avLst>
+              <a:gd name="adj" fmla="val 5106"/>
+            </a:avLst>
+          </a:prstGeom>
+          <a:solidFill>
+            <a:srgbClr val="F7F5F0"/>
+          </a:solidFill>
+          <a:ln w="12700">
+            <a:solidFill>
+              <a:srgbClr val="F7F5F0"/>
+            </a:solidFill>
+            <a:prstDash val="solid"/>
+          </a:ln>
+        </p:spPr>
+      </p:sp>
+      <p:sp>
+        <p:nvSpPr>
+          <p:cNvPr id="15" name="Text 12"/>
+          <p:cNvSpPr/>
+          <p:nvPr/>
+        </p:nvSpPr>
+        <p:spPr>
+          <a:xfrm>
+            <a:off x="1783080" y="2514600"/>
+            <a:ext cx="9189720" cy="1920240"/>
+          </a:xfrm>
+          <a:prstGeom prst="rect">
+            <a:avLst/>
+          </a:prstGeom>
+          <a:noFill/>
+          <a:ln/>
+        </p:spPr>
+        <p:txBody>
+          <a:bodyPr wrap="square" lIns="0" tIns="0" rIns="0" bIns="0" rtlCol="0" anchor="t"/>
+          <a:lstStyle/>
+          <a:p>
+            <a:pPr indent="0" marL="0">
+              <a:lnSpc>
+                <a:spcPct val="112000"/>
+              </a:lnSpc>
+              <a:buNone/>
+            </a:pPr>
+            <a:r>
+              <a:rPr lang="en-US" sz="1600" b="1" dirty="0">
+                <a:solidFill>
+                  <a:srgbClr val="2A9D8F"/>
+                </a:solidFill>
+                <a:latin typeface="Inter" pitchFamily="34" charset="0"/>
+                <a:ea typeface="Inter" pitchFamily="34" charset="-122"/>
+                <a:cs typeface="Inter" pitchFamily="34" charset="-120"/>
+              </a:rPr>
+              <a:t>“You are an experienced 4th grade teacher. </a:t>
+            </a:r>
+            <a:pPr indent="0" marL="0">
+              <a:lnSpc>
+                <a:spcPct val="112000"/>
+              </a:lnSpc>
+              <a:buNone/>
+            </a:pPr>
+            <a:r>
+              <a:rPr lang="en-US" sz="1600" b="1" dirty="0">
+                <a:solidFill>
+                  <a:srgbClr val="13293D"/>
+                </a:solidFill>
+                <a:latin typeface="Inter" pitchFamily="34" charset="0"/>
+                <a:ea typeface="Inter" pitchFamily="34" charset="-122"/>
+                <a:cs typeface="Inter" pitchFamily="34" charset="-120"/>
+              </a:rPr>
+              <a:t>Draft a 45-minute introductory lesson on equivalent fractions </a:t>
+            </a:r>
+            <a:pPr indent="0" marL="0">
+              <a:lnSpc>
+                <a:spcPct val="112000"/>
+              </a:lnSpc>
+              <a:buNone/>
+            </a:pPr>
+            <a:r>
+              <a:rPr lang="en-US" sz="1600" b="1" dirty="0">
+                <a:solidFill>
+                  <a:srgbClr val="B07914"/>
+                </a:solidFill>
+                <a:latin typeface="Inter" pitchFamily="34" charset="0"/>
+                <a:ea typeface="Inter" pitchFamily="34" charset="-122"/>
+                <a:cs typeface="Inter" pitchFamily="34" charset="-120"/>
+              </a:rPr>
+              <a:t>for a class that has mastered basic fraction notation but confuses numerator and denominator when simplifying. Include a 5-minute warm-up, a hands-on activity using paper folding, and a 3-question exit check. </a:t>
+            </a:r>
+            <a:pPr indent="0" marL="0">
+              <a:lnSpc>
+                <a:spcPct val="112000"/>
+              </a:lnSpc>
+              <a:buNone/>
+            </a:pPr>
+            <a:r>
+              <a:rPr lang="en-US" sz="1600" b="1" dirty="0">
                 <a:solidFill>
                   <a:srgbClr val="2E7D5B"/>
                 </a:solidFill>
@@ -18207,7 +18377,112 @@
                 <a:ea typeface="Inter" pitchFamily="34" charset="-122"/>
                 <a:cs typeface="Inter" pitchFamily="34" charset="-120"/>
               </a:rPr>
-              <a:t>AFTER</a:t>
+              <a:t>Format as a table with timings.”</a:t>
+            </a:r>
+            <a:endParaRPr lang="en-US" sz="1600" dirty="0"/>
+          </a:p>
+        </p:txBody>
+      </p:sp>
+      <p:sp>
+        <p:nvSpPr>
+          <p:cNvPr id="16" name="Text 13"/>
+          <p:cNvSpPr/>
+          <p:nvPr/>
+        </p:nvSpPr>
+        <p:spPr>
+          <a:xfrm>
+            <a:off x="1554480" y="4617720"/>
+            <a:ext cx="5486400" cy="365760"/>
+          </a:xfrm>
+          <a:prstGeom prst="rect">
+            <a:avLst/>
+          </a:prstGeom>
+          <a:noFill/>
+          <a:ln/>
+        </p:spPr>
+        <p:txBody>
+          <a:bodyPr wrap="square" lIns="0" tIns="0" rIns="0" bIns="0" rtlCol="0" anchor="ctr"/>
+          <a:lstStyle/>
+          <a:p>
+            <a:pPr indent="0" marL="0">
+              <a:buNone/>
+            </a:pPr>
+            <a:r>
+              <a:rPr lang="en-US" sz="1300" i="1" dirty="0">
+                <a:solidFill>
+                  <a:srgbClr val="5B6B7A"/>
+                </a:solidFill>
+                <a:latin typeface="Inter" pitchFamily="34" charset="0"/>
+                <a:ea typeface="Inter" pitchFamily="34" charset="-122"/>
+                <a:cs typeface="Inter" pitchFamily="34" charset="-120"/>
+              </a:rPr>
+              <a:t>AI: drafting the table…</a:t>
+            </a:r>
+            <a:endParaRPr lang="en-US" sz="1300" dirty="0"/>
+          </a:p>
+        </p:txBody>
+      </p:sp>
+      <p:sp>
+        <p:nvSpPr>
+          <p:cNvPr id="17" name="Shape 14"/>
+          <p:cNvSpPr/>
+          <p:nvPr/>
+        </p:nvSpPr>
+        <p:spPr>
+          <a:xfrm>
+            <a:off x="640080" y="5532120"/>
+            <a:ext cx="2606040" cy="457200"/>
+          </a:xfrm>
+          <a:prstGeom prst="roundRect">
+            <a:avLst>
+              <a:gd name="adj" fmla="val 50000"/>
+            </a:avLst>
+          </a:prstGeom>
+          <a:solidFill>
+            <a:srgbClr val="2A9D8F"/>
+          </a:solidFill>
+          <a:ln w="12700">
+            <a:solidFill>
+              <a:srgbClr val="2A9D8F"/>
+            </a:solidFill>
+            <a:prstDash val="solid"/>
+          </a:ln>
+        </p:spPr>
+      </p:sp>
+      <p:sp>
+        <p:nvSpPr>
+          <p:cNvPr id="18" name="Text 15"/>
+          <p:cNvSpPr/>
+          <p:nvPr/>
+        </p:nvSpPr>
+        <p:spPr>
+          <a:xfrm>
+            <a:off x="640080" y="5532120"/>
+            <a:ext cx="2606040" cy="457200"/>
+          </a:xfrm>
+          <a:prstGeom prst="rect">
+            <a:avLst/>
+          </a:prstGeom>
+          <a:noFill/>
+          <a:ln/>
+        </p:spPr>
+        <p:txBody>
+          <a:bodyPr wrap="square" lIns="0" tIns="0" rIns="0" bIns="0" rtlCol="0" anchor="ctr"/>
+          <a:lstStyle/>
+          <a:p>
+            <a:pPr algn="ctr" indent="0" marL="0">
+              <a:buNone/>
+            </a:pPr>
+            <a:r>
+              <a:rPr lang="en-US" sz="1400" b="1" spc="200" kern="0" dirty="0">
+                <a:solidFill>
+                  <a:srgbClr val="FFFFFF"/>
+                </a:solidFill>
+                <a:latin typeface="Inter" pitchFamily="34" charset="0"/>
+                <a:ea typeface="Inter" pitchFamily="34" charset="-122"/>
+                <a:cs typeface="Inter" pitchFamily="34" charset="-120"/>
+              </a:rPr>
+              <a:t>ROLE</a:t>
             </a:r>
             <a:endParaRPr lang="en-US" sz="1400" dirty="0"/>
           </a:p>
@@ -18215,40 +18490,199 @@
       </p:sp>
       <p:sp>
         <p:nvSpPr>
-          <p:cNvPr id="12" name="Text 9"/>
-          <p:cNvSpPr/>
-          <p:nvPr/>
-        </p:nvSpPr>
-        <p:spPr>
-          <a:xfrm>
-            <a:off x="914400" y="3474720"/>
-            <a:ext cx="10424160" cy="2103120"/>
-          </a:xfrm>
-          <a:prstGeom prst="rect">
-            <a:avLst/>
-          </a:prstGeom>
-          <a:noFill/>
-          <a:ln/>
-        </p:spPr>
-        <p:txBody>
-          <a:bodyPr wrap="square" lIns="0" tIns="0" rIns="0" bIns="0" rtlCol="0" anchor="t"/>
-          <a:lstStyle/>
-          <a:p>
-            <a:pPr indent="0" marL="0">
-              <a:buNone/>
-            </a:pPr>
-            <a:r>
-              <a:rPr lang="en-US" sz="1550" i="1" dirty="0">
-                <a:solidFill>
-                  <a:srgbClr val="1B1F24"/>
-                </a:solidFill>
-                <a:latin typeface="Inter" pitchFamily="34" charset="0"/>
-                <a:ea typeface="Inter" pitchFamily="34" charset="-122"/>
-                <a:cs typeface="Inter" pitchFamily="34" charset="-120"/>
-              </a:rPr>
-              <a:t>“You are an experienced 4th grade teacher. Draft a 45-minute introductory lesson on equivalent fractions for a class that has mastered basic fraction notation but confuses numerator and denominator when simplifying. Include a 5-minute warm-up, a hands-on activity using paper folding, and a 3-question exit check. Format as a table with timings.”</a:t>
-            </a:r>
-            <a:endParaRPr lang="en-US" sz="1550" dirty="0"/>
+          <p:cNvPr id="19" name="Shape 16"/>
+          <p:cNvSpPr/>
+          <p:nvPr/>
+        </p:nvSpPr>
+        <p:spPr>
+          <a:xfrm>
+            <a:off x="3456432" y="5532120"/>
+            <a:ext cx="2606040" cy="457200"/>
+          </a:xfrm>
+          <a:prstGeom prst="roundRect">
+            <a:avLst>
+              <a:gd name="adj" fmla="val 50000"/>
+            </a:avLst>
+          </a:prstGeom>
+          <a:solidFill>
+            <a:srgbClr val="13293D"/>
+          </a:solidFill>
+          <a:ln w="12700">
+            <a:solidFill>
+              <a:srgbClr val="13293D"/>
+            </a:solidFill>
+            <a:prstDash val="solid"/>
+          </a:ln>
+        </p:spPr>
+      </p:sp>
+      <p:sp>
+        <p:nvSpPr>
+          <p:cNvPr id="20" name="Text 17"/>
+          <p:cNvSpPr/>
+          <p:nvPr/>
+        </p:nvSpPr>
+        <p:spPr>
+          <a:xfrm>
+            <a:off x="3456432" y="5532120"/>
+            <a:ext cx="2606040" cy="457200"/>
+          </a:xfrm>
+          <a:prstGeom prst="rect">
+            <a:avLst/>
+          </a:prstGeom>
+          <a:noFill/>
+          <a:ln/>
+        </p:spPr>
+        <p:txBody>
+          <a:bodyPr wrap="square" lIns="0" tIns="0" rIns="0" bIns="0" rtlCol="0" anchor="ctr"/>
+          <a:lstStyle/>
+          <a:p>
+            <a:pPr algn="ctr" indent="0" marL="0">
+              <a:buNone/>
+            </a:pPr>
+            <a:r>
+              <a:rPr lang="en-US" sz="1400" b="1" spc="200" kern="0" dirty="0">
+                <a:solidFill>
+                  <a:srgbClr val="FFFFFF"/>
+                </a:solidFill>
+                <a:latin typeface="Inter" pitchFamily="34" charset="0"/>
+                <a:ea typeface="Inter" pitchFamily="34" charset="-122"/>
+                <a:cs typeface="Inter" pitchFamily="34" charset="-120"/>
+              </a:rPr>
+              <a:t>TASK</a:t>
+            </a:r>
+            <a:endParaRPr lang="en-US" sz="1400" dirty="0"/>
+          </a:p>
+        </p:txBody>
+      </p:sp>
+      <p:sp>
+        <p:nvSpPr>
+          <p:cNvPr id="21" name="Shape 18"/>
+          <p:cNvSpPr/>
+          <p:nvPr/>
+        </p:nvSpPr>
+        <p:spPr>
+          <a:xfrm>
+            <a:off x="6272784" y="5532120"/>
+            <a:ext cx="2606040" cy="457200"/>
+          </a:xfrm>
+          <a:prstGeom prst="roundRect">
+            <a:avLst>
+              <a:gd name="adj" fmla="val 50000"/>
+            </a:avLst>
+          </a:prstGeom>
+          <a:solidFill>
+            <a:srgbClr val="B07914"/>
+          </a:solidFill>
+          <a:ln w="12700">
+            <a:solidFill>
+              <a:srgbClr val="B07914"/>
+            </a:solidFill>
+            <a:prstDash val="solid"/>
+          </a:ln>
+        </p:spPr>
+      </p:sp>
+      <p:sp>
+        <p:nvSpPr>
+          <p:cNvPr id="22" name="Text 19"/>
+          <p:cNvSpPr/>
+          <p:nvPr/>
+        </p:nvSpPr>
+        <p:spPr>
+          <a:xfrm>
+            <a:off x="6272784" y="5532120"/>
+            <a:ext cx="2606040" cy="457200"/>
+          </a:xfrm>
+          <a:prstGeom prst="rect">
+            <a:avLst/>
+          </a:prstGeom>
+          <a:noFill/>
+          <a:ln/>
+        </p:spPr>
+        <p:txBody>
+          <a:bodyPr wrap="square" lIns="0" tIns="0" rIns="0" bIns="0" rtlCol="0" anchor="ctr"/>
+          <a:lstStyle/>
+          <a:p>
+            <a:pPr algn="ctr" indent="0" marL="0">
+              <a:buNone/>
+            </a:pPr>
+            <a:r>
+              <a:rPr lang="en-US" sz="1400" b="1" spc="200" kern="0" dirty="0">
+                <a:solidFill>
+                  <a:srgbClr val="FFFFFF"/>
+                </a:solidFill>
+                <a:latin typeface="Inter" pitchFamily="34" charset="0"/>
+                <a:ea typeface="Inter" pitchFamily="34" charset="-122"/>
+                <a:cs typeface="Inter" pitchFamily="34" charset="-120"/>
+              </a:rPr>
+              <a:t>CONTEXT</a:t>
+            </a:r>
+            <a:endParaRPr lang="en-US" sz="1400" dirty="0"/>
+          </a:p>
+        </p:txBody>
+      </p:sp>
+      <p:sp>
+        <p:nvSpPr>
+          <p:cNvPr id="23" name="Shape 20"/>
+          <p:cNvSpPr/>
+          <p:nvPr/>
+        </p:nvSpPr>
+        <p:spPr>
+          <a:xfrm>
+            <a:off x="9089136" y="5532120"/>
+            <a:ext cx="2606040" cy="457200"/>
+          </a:xfrm>
+          <a:prstGeom prst="roundRect">
+            <a:avLst>
+              <a:gd name="adj" fmla="val 50000"/>
+            </a:avLst>
+          </a:prstGeom>
+          <a:solidFill>
+            <a:srgbClr val="2E7D5B"/>
+          </a:solidFill>
+          <a:ln w="12700">
+            <a:solidFill>
+              <a:srgbClr val="2E7D5B"/>
+            </a:solidFill>
+            <a:prstDash val="solid"/>
+          </a:ln>
+        </p:spPr>
+      </p:sp>
+      <p:sp>
+        <p:nvSpPr>
+          <p:cNvPr id="24" name="Text 21"/>
+          <p:cNvSpPr/>
+          <p:nvPr/>
+        </p:nvSpPr>
+        <p:spPr>
+          <a:xfrm>
+            <a:off x="9089136" y="5532120"/>
+            <a:ext cx="2606040" cy="457200"/>
+          </a:xfrm>
+          <a:prstGeom prst="rect">
+            <a:avLst/>
+          </a:prstGeom>
+          <a:noFill/>
+          <a:ln/>
+        </p:spPr>
+        <p:txBody>
+          <a:bodyPr wrap="square" lIns="0" tIns="0" rIns="0" bIns="0" rtlCol="0" anchor="ctr"/>
+          <a:lstStyle/>
+          <a:p>
+            <a:pPr algn="ctr" indent="0" marL="0">
+              <a:buNone/>
+            </a:pPr>
+            <a:r>
+              <a:rPr lang="en-US" sz="1400" b="1" spc="200" kern="0" dirty="0">
+                <a:solidFill>
+                  <a:srgbClr val="FFFFFF"/>
+                </a:solidFill>
+                <a:latin typeface="Inter" pitchFamily="34" charset="0"/>
+                <a:ea typeface="Inter" pitchFamily="34" charset="-122"/>
+                <a:cs typeface="Inter" pitchFamily="34" charset="-120"/>
+              </a:rPr>
+              <a:t>FORMAT</a:t>
+            </a:r>
+            <a:endParaRPr lang="en-US" sz="1400" dirty="0"/>
           </a:p>
         </p:txBody>
       </p:sp>

--- a/kits/kit02/Kit02_PresentationDeck.pptx
+++ b/kits/kit02/Kit02_PresentationDeck.pptx
@@ -3862,7 +3862,214 @@
       </p:sp>
       <p:sp>
         <p:nvSpPr>
-          <p:cNvPr id="5" name="Text 2"/>
+          <p:cNvPr id="5" name="Shape 2"/>
+          <p:cNvSpPr/>
+          <p:nvPr/>
+        </p:nvSpPr>
+        <p:spPr>
+          <a:xfrm>
+            <a:off x="8732520" y="109728"/>
+            <a:ext cx="2926080" cy="896112"/>
+          </a:xfrm>
+          <a:prstGeom prst="roundRect">
+            <a:avLst>
+              <a:gd name="adj" fmla="val 7143"/>
+            </a:avLst>
+          </a:prstGeom>
+          <a:solidFill>
+            <a:srgbClr val="F7F5F0"/>
+          </a:solidFill>
+          <a:ln w="12700">
+            <a:solidFill>
+              <a:srgbClr val="DCE3EA"/>
+            </a:solidFill>
+            <a:prstDash val="solid"/>
+          </a:ln>
+        </p:spPr>
+      </p:sp>
+      <p:sp>
+        <p:nvSpPr>
+          <p:cNvPr id="6" name="Shape 3"/>
+          <p:cNvSpPr/>
+          <p:nvPr/>
+        </p:nvSpPr>
+        <p:spPr>
+          <a:xfrm>
+            <a:off x="8732520" y="109728"/>
+            <a:ext cx="2926080" cy="237744"/>
+          </a:xfrm>
+          <a:prstGeom prst="roundRect">
+            <a:avLst>
+              <a:gd name="adj" fmla="val 26923"/>
+            </a:avLst>
+          </a:prstGeom>
+          <a:solidFill>
+            <a:srgbClr val="0D1E2E"/>
+          </a:solidFill>
+          <a:ln w="12700">
+            <a:solidFill>
+              <a:srgbClr val="0D1E2E"/>
+            </a:solidFill>
+            <a:prstDash val="solid"/>
+          </a:ln>
+        </p:spPr>
+      </p:sp>
+      <p:sp>
+        <p:nvSpPr>
+          <p:cNvPr id="7" name="Shape 4"/>
+          <p:cNvSpPr/>
+          <p:nvPr/>
+        </p:nvSpPr>
+        <p:spPr>
+          <a:xfrm>
+            <a:off x="8823960" y="182880"/>
+            <a:ext cx="91440" cy="91440"/>
+          </a:xfrm>
+          <a:prstGeom prst="ellipse">
+            <a:avLst/>
+          </a:prstGeom>
+          <a:solidFill>
+            <a:srgbClr val="E8837A"/>
+          </a:solidFill>
+          <a:ln w="12700">
+            <a:solidFill>
+              <a:srgbClr val="E8837A"/>
+            </a:solidFill>
+            <a:prstDash val="solid"/>
+          </a:ln>
+        </p:spPr>
+      </p:sp>
+      <p:sp>
+        <p:nvSpPr>
+          <p:cNvPr id="8" name="Shape 5"/>
+          <p:cNvSpPr/>
+          <p:nvPr/>
+        </p:nvSpPr>
+        <p:spPr>
+          <a:xfrm>
+            <a:off x="8970264" y="182880"/>
+            <a:ext cx="91440" cy="91440"/>
+          </a:xfrm>
+          <a:prstGeom prst="ellipse">
+            <a:avLst/>
+          </a:prstGeom>
+          <a:solidFill>
+            <a:srgbClr val="F4A825"/>
+          </a:solidFill>
+          <a:ln w="12700">
+            <a:solidFill>
+              <a:srgbClr val="F4A825"/>
+            </a:solidFill>
+            <a:prstDash val="solid"/>
+          </a:ln>
+        </p:spPr>
+      </p:sp>
+      <p:sp>
+        <p:nvSpPr>
+          <p:cNvPr id="9" name="Shape 6"/>
+          <p:cNvSpPr/>
+          <p:nvPr/>
+        </p:nvSpPr>
+        <p:spPr>
+          <a:xfrm>
+            <a:off x="9116568" y="182880"/>
+            <a:ext cx="91440" cy="91440"/>
+          </a:xfrm>
+          <a:prstGeom prst="ellipse">
+            <a:avLst/>
+          </a:prstGeom>
+          <a:solidFill>
+            <a:srgbClr val="2E7D5B"/>
+          </a:solidFill>
+          <a:ln w="12700">
+            <a:solidFill>
+              <a:srgbClr val="2E7D5B"/>
+            </a:solidFill>
+            <a:prstDash val="solid"/>
+          </a:ln>
+        </p:spPr>
+      </p:sp>
+      <p:sp>
+        <p:nvSpPr>
+          <p:cNvPr id="10" name="Text 7"/>
+          <p:cNvSpPr/>
+          <p:nvPr/>
+        </p:nvSpPr>
+        <p:spPr>
+          <a:xfrm>
+            <a:off x="9299448" y="109728"/>
+            <a:ext cx="2286000" cy="237744"/>
+          </a:xfrm>
+          <a:prstGeom prst="rect">
+            <a:avLst/>
+          </a:prstGeom>
+          <a:noFill/>
+          <a:ln/>
+        </p:spPr>
+        <p:txBody>
+          <a:bodyPr wrap="square" lIns="0" tIns="0" rIns="0" bIns="0" rtlCol="0" anchor="ctr"/>
+          <a:lstStyle/>
+          <a:p>
+            <a:pPr indent="0" marL="0">
+              <a:buNone/>
+            </a:pPr>
+            <a:r>
+              <a:rPr lang="en-US" sz="800" b="1" spc="100" kern="0" dirty="0">
+                <a:solidFill>
+                  <a:srgbClr val="9FB2C2"/>
+                </a:solidFill>
+                <a:latin typeface="Inter" pitchFamily="34" charset="0"/>
+                <a:ea typeface="Inter" pitchFamily="34" charset="-122"/>
+                <a:cs typeface="Inter" pitchFamily="34" charset="-120"/>
+              </a:rPr>
+              <a:t>MS. RIVERA'S SCREEN · SO FAR</a:t>
+            </a:r>
+            <a:endParaRPr lang="en-US" sz="800" dirty="0"/>
+          </a:p>
+        </p:txBody>
+      </p:sp>
+      <p:sp>
+        <p:nvSpPr>
+          <p:cNvPr id="11" name="Text 8"/>
+          <p:cNvSpPr/>
+          <p:nvPr/>
+        </p:nvSpPr>
+        <p:spPr>
+          <a:xfrm>
+            <a:off x="8860536" y="365760"/>
+            <a:ext cx="2670048" cy="566928"/>
+          </a:xfrm>
+          <a:prstGeom prst="rect">
+            <a:avLst/>
+          </a:prstGeom>
+          <a:noFill/>
+          <a:ln/>
+        </p:spPr>
+        <p:txBody>
+          <a:bodyPr wrap="square" lIns="0" tIns="0" rIns="0" bIns="0" rtlCol="0" anchor="ctr"/>
+          <a:lstStyle/>
+          <a:p>
+            <a:pPr indent="0" marL="0">
+              <a:buNone/>
+            </a:pPr>
+            <a:r>
+              <a:rPr lang="en-US" sz="1000" dirty="0">
+                <a:solidFill>
+                  <a:srgbClr val="1B1F24"/>
+                </a:solidFill>
+                <a:latin typeface="Inter" pitchFamily="34" charset="0"/>
+                <a:ea typeface="Inter" pitchFamily="34" charset="-122"/>
+                <a:cs typeface="Inter" pitchFamily="34" charset="-120"/>
+              </a:rPr>
+              <a:t>Her note-home prompt: the situation, never the child. Kit 1 rides along.</a:t>
+            </a:r>
+            <a:endParaRPr lang="en-US" sz="1000" dirty="0"/>
+          </a:p>
+        </p:txBody>
+      </p:sp>
+      <p:sp>
+        <p:nvSpPr>
+          <p:cNvPr id="12" name="Text 9"/>
           <p:cNvSpPr/>
           <p:nvPr/>
         </p:nvSpPr>
@@ -3901,7 +4108,7 @@
       </p:sp>
       <p:sp>
         <p:nvSpPr>
-          <p:cNvPr id="6" name="Text 3"/>
+          <p:cNvPr id="13" name="Text 10"/>
           <p:cNvSpPr/>
           <p:nvPr/>
         </p:nvSpPr>
@@ -3940,7 +4147,7 @@
       </p:sp>
       <p:sp>
         <p:nvSpPr>
-          <p:cNvPr id="7" name="Shape 4"/>
+          <p:cNvPr id="14" name="Shape 11"/>
           <p:cNvSpPr/>
           <p:nvPr/>
         </p:nvSpPr>
@@ -3967,7 +4174,7 @@
       </p:sp>
       <p:sp>
         <p:nvSpPr>
-          <p:cNvPr id="8" name="Text 5"/>
+          <p:cNvPr id="15" name="Text 12"/>
           <p:cNvSpPr/>
           <p:nvPr/>
         </p:nvSpPr>
@@ -4006,7 +4213,7 @@
       </p:sp>
       <p:sp>
         <p:nvSpPr>
-          <p:cNvPr id="9" name="Text 6"/>
+          <p:cNvPr id="16" name="Text 13"/>
           <p:cNvSpPr/>
           <p:nvPr/>
         </p:nvSpPr>
@@ -4045,7 +4252,7 @@
       </p:sp>
       <p:sp>
         <p:nvSpPr>
-          <p:cNvPr id="10" name="Shape 7"/>
+          <p:cNvPr id="17" name="Shape 14"/>
           <p:cNvSpPr/>
           <p:nvPr/>
         </p:nvSpPr>
@@ -4072,7 +4279,7 @@
       </p:sp>
       <p:sp>
         <p:nvSpPr>
-          <p:cNvPr id="11" name="Text 8"/>
+          <p:cNvPr id="18" name="Text 15"/>
           <p:cNvSpPr/>
           <p:nvPr/>
         </p:nvSpPr>
@@ -4111,7 +4318,7 @@
       </p:sp>
       <p:sp>
         <p:nvSpPr>
-          <p:cNvPr id="12" name="Text 9"/>
+          <p:cNvPr id="19" name="Text 16"/>
           <p:cNvSpPr/>
           <p:nvPr/>
         </p:nvSpPr>
@@ -4298,7 +4505,214 @@
       </p:sp>
       <p:sp>
         <p:nvSpPr>
-          <p:cNvPr id="5" name="Text 2"/>
+          <p:cNvPr id="5" name="Shape 2"/>
+          <p:cNvSpPr/>
+          <p:nvPr/>
+        </p:nvSpPr>
+        <p:spPr>
+          <a:xfrm>
+            <a:off x="8732520" y="109728"/>
+            <a:ext cx="2926080" cy="896112"/>
+          </a:xfrm>
+          <a:prstGeom prst="roundRect">
+            <a:avLst>
+              <a:gd name="adj" fmla="val 7143"/>
+            </a:avLst>
+          </a:prstGeom>
+          <a:solidFill>
+            <a:srgbClr val="F7F5F0"/>
+          </a:solidFill>
+          <a:ln w="12700">
+            <a:solidFill>
+              <a:srgbClr val="DCE3EA"/>
+            </a:solidFill>
+            <a:prstDash val="solid"/>
+          </a:ln>
+        </p:spPr>
+      </p:sp>
+      <p:sp>
+        <p:nvSpPr>
+          <p:cNvPr id="6" name="Shape 3"/>
+          <p:cNvSpPr/>
+          <p:nvPr/>
+        </p:nvSpPr>
+        <p:spPr>
+          <a:xfrm>
+            <a:off x="8732520" y="109728"/>
+            <a:ext cx="2926080" cy="237744"/>
+          </a:xfrm>
+          <a:prstGeom prst="roundRect">
+            <a:avLst>
+              <a:gd name="adj" fmla="val 26923"/>
+            </a:avLst>
+          </a:prstGeom>
+          <a:solidFill>
+            <a:srgbClr val="0D1E2E"/>
+          </a:solidFill>
+          <a:ln w="12700">
+            <a:solidFill>
+              <a:srgbClr val="0D1E2E"/>
+            </a:solidFill>
+            <a:prstDash val="solid"/>
+          </a:ln>
+        </p:spPr>
+      </p:sp>
+      <p:sp>
+        <p:nvSpPr>
+          <p:cNvPr id="7" name="Shape 4"/>
+          <p:cNvSpPr/>
+          <p:nvPr/>
+        </p:nvSpPr>
+        <p:spPr>
+          <a:xfrm>
+            <a:off x="8823960" y="182880"/>
+            <a:ext cx="91440" cy="91440"/>
+          </a:xfrm>
+          <a:prstGeom prst="ellipse">
+            <a:avLst/>
+          </a:prstGeom>
+          <a:solidFill>
+            <a:srgbClr val="E8837A"/>
+          </a:solidFill>
+          <a:ln w="12700">
+            <a:solidFill>
+              <a:srgbClr val="E8837A"/>
+            </a:solidFill>
+            <a:prstDash val="solid"/>
+          </a:ln>
+        </p:spPr>
+      </p:sp>
+      <p:sp>
+        <p:nvSpPr>
+          <p:cNvPr id="8" name="Shape 5"/>
+          <p:cNvSpPr/>
+          <p:nvPr/>
+        </p:nvSpPr>
+        <p:spPr>
+          <a:xfrm>
+            <a:off x="8970264" y="182880"/>
+            <a:ext cx="91440" cy="91440"/>
+          </a:xfrm>
+          <a:prstGeom prst="ellipse">
+            <a:avLst/>
+          </a:prstGeom>
+          <a:solidFill>
+            <a:srgbClr val="F4A825"/>
+          </a:solidFill>
+          <a:ln w="12700">
+            <a:solidFill>
+              <a:srgbClr val="F4A825"/>
+            </a:solidFill>
+            <a:prstDash val="solid"/>
+          </a:ln>
+        </p:spPr>
+      </p:sp>
+      <p:sp>
+        <p:nvSpPr>
+          <p:cNvPr id="9" name="Shape 6"/>
+          <p:cNvSpPr/>
+          <p:nvPr/>
+        </p:nvSpPr>
+        <p:spPr>
+          <a:xfrm>
+            <a:off x="9116568" y="182880"/>
+            <a:ext cx="91440" cy="91440"/>
+          </a:xfrm>
+          <a:prstGeom prst="ellipse">
+            <a:avLst/>
+          </a:prstGeom>
+          <a:solidFill>
+            <a:srgbClr val="2E7D5B"/>
+          </a:solidFill>
+          <a:ln w="12700">
+            <a:solidFill>
+              <a:srgbClr val="2E7D5B"/>
+            </a:solidFill>
+            <a:prstDash val="solid"/>
+          </a:ln>
+        </p:spPr>
+      </p:sp>
+      <p:sp>
+        <p:nvSpPr>
+          <p:cNvPr id="10" name="Text 7"/>
+          <p:cNvSpPr/>
+          <p:nvPr/>
+        </p:nvSpPr>
+        <p:spPr>
+          <a:xfrm>
+            <a:off x="9299448" y="109728"/>
+            <a:ext cx="2286000" cy="237744"/>
+          </a:xfrm>
+          <a:prstGeom prst="rect">
+            <a:avLst/>
+          </a:prstGeom>
+          <a:noFill/>
+          <a:ln/>
+        </p:spPr>
+        <p:txBody>
+          <a:bodyPr wrap="square" lIns="0" tIns="0" rIns="0" bIns="0" rtlCol="0" anchor="ctr"/>
+          <a:lstStyle/>
+          <a:p>
+            <a:pPr indent="0" marL="0">
+              <a:buNone/>
+            </a:pPr>
+            <a:r>
+              <a:rPr lang="en-US" sz="800" b="1" spc="100" kern="0" dirty="0">
+                <a:solidFill>
+                  <a:srgbClr val="9FB2C2"/>
+                </a:solidFill>
+                <a:latin typeface="Inter" pitchFamily="34" charset="0"/>
+                <a:ea typeface="Inter" pitchFamily="34" charset="-122"/>
+                <a:cs typeface="Inter" pitchFamily="34" charset="-120"/>
+              </a:rPr>
+              <a:t>MS. RIVERA'S SCREEN · SO FAR</a:t>
+            </a:r>
+            <a:endParaRPr lang="en-US" sz="800" dirty="0"/>
+          </a:p>
+        </p:txBody>
+      </p:sp>
+      <p:sp>
+        <p:nvSpPr>
+          <p:cNvPr id="11" name="Text 8"/>
+          <p:cNvSpPr/>
+          <p:nvPr/>
+        </p:nvSpPr>
+        <p:spPr>
+          <a:xfrm>
+            <a:off x="8860536" y="365760"/>
+            <a:ext cx="2670048" cy="566928"/>
+          </a:xfrm>
+          <a:prstGeom prst="rect">
+            <a:avLst/>
+          </a:prstGeom>
+          <a:noFill/>
+          <a:ln/>
+        </p:spPr>
+        <p:txBody>
+          <a:bodyPr wrap="square" lIns="0" tIns="0" rIns="0" bIns="0" rtlCol="0" anchor="ctr"/>
+          <a:lstStyle/>
+          <a:p>
+            <a:pPr indent="0" marL="0">
+              <a:buNone/>
+            </a:pPr>
+            <a:r>
+              <a:rPr lang="en-US" sz="1000" dirty="0">
+                <a:solidFill>
+                  <a:srgbClr val="1B1F24"/>
+                </a:solidFill>
+                <a:latin typeface="Inter" pitchFamily="34" charset="0"/>
+                <a:ea typeface="Inter" pitchFamily="34" charset="-122"/>
+                <a:cs typeface="Inter" pitchFamily="34" charset="-120"/>
+              </a:rPr>
+              <a:t>Her leveling spec: grade level, keep key ideas, sentence limits, vocab box.</a:t>
+            </a:r>
+            <a:endParaRPr lang="en-US" sz="1000" dirty="0"/>
+          </a:p>
+        </p:txBody>
+      </p:sp>
+      <p:sp>
+        <p:nvSpPr>
+          <p:cNvPr id="12" name="Text 9"/>
           <p:cNvSpPr/>
           <p:nvPr/>
         </p:nvSpPr>
@@ -4337,7 +4751,7 @@
       </p:sp>
       <p:sp>
         <p:nvSpPr>
-          <p:cNvPr id="6" name="Text 3"/>
+          <p:cNvPr id="13" name="Text 10"/>
           <p:cNvSpPr/>
           <p:nvPr/>
         </p:nvSpPr>
@@ -4376,7 +4790,7 @@
       </p:sp>
       <p:sp>
         <p:nvSpPr>
-          <p:cNvPr id="7" name="Shape 4"/>
+          <p:cNvPr id="14" name="Shape 11"/>
           <p:cNvSpPr/>
           <p:nvPr/>
         </p:nvSpPr>
@@ -4403,7 +4817,7 @@
       </p:sp>
       <p:sp>
         <p:nvSpPr>
-          <p:cNvPr id="8" name="Text 5"/>
+          <p:cNvPr id="15" name="Text 12"/>
           <p:cNvSpPr/>
           <p:nvPr/>
         </p:nvSpPr>
@@ -4442,7 +4856,7 @@
       </p:sp>
       <p:sp>
         <p:nvSpPr>
-          <p:cNvPr id="9" name="Text 6"/>
+          <p:cNvPr id="16" name="Text 13"/>
           <p:cNvSpPr/>
           <p:nvPr/>
         </p:nvSpPr>
@@ -4481,7 +4895,7 @@
       </p:sp>
       <p:sp>
         <p:nvSpPr>
-          <p:cNvPr id="10" name="Shape 7"/>
+          <p:cNvPr id="17" name="Shape 14"/>
           <p:cNvSpPr/>
           <p:nvPr/>
         </p:nvSpPr>
@@ -4508,7 +4922,7 @@
       </p:sp>
       <p:sp>
         <p:nvSpPr>
-          <p:cNvPr id="11" name="Text 8"/>
+          <p:cNvPr id="18" name="Text 15"/>
           <p:cNvSpPr/>
           <p:nvPr/>
         </p:nvSpPr>
@@ -4547,7 +4961,7 @@
       </p:sp>
       <p:sp>
         <p:nvSpPr>
-          <p:cNvPr id="12" name="Text 9"/>
+          <p:cNvPr id="19" name="Text 16"/>
           <p:cNvSpPr/>
           <p:nvPr/>
         </p:nvSpPr>
@@ -4586,7 +5000,7 @@
       </p:sp>
       <p:sp>
         <p:nvSpPr>
-          <p:cNvPr id="13" name="Text 10"/>
+          <p:cNvPr id="20" name="Text 17"/>
           <p:cNvSpPr/>
           <p:nvPr/>
         </p:nvSpPr>
@@ -4773,7 +5187,214 @@
       </p:sp>
       <p:sp>
         <p:nvSpPr>
-          <p:cNvPr id="5" name="Text 2"/>
+          <p:cNvPr id="5" name="Shape 2"/>
+          <p:cNvSpPr/>
+          <p:nvPr/>
+        </p:nvSpPr>
+        <p:spPr>
+          <a:xfrm>
+            <a:off x="8732520" y="109728"/>
+            <a:ext cx="2926080" cy="896112"/>
+          </a:xfrm>
+          <a:prstGeom prst="roundRect">
+            <a:avLst>
+              <a:gd name="adj" fmla="val 7143"/>
+            </a:avLst>
+          </a:prstGeom>
+          <a:solidFill>
+            <a:srgbClr val="F7F5F0"/>
+          </a:solidFill>
+          <a:ln w="12700">
+            <a:solidFill>
+              <a:srgbClr val="DCE3EA"/>
+            </a:solidFill>
+            <a:prstDash val="solid"/>
+          </a:ln>
+        </p:spPr>
+      </p:sp>
+      <p:sp>
+        <p:nvSpPr>
+          <p:cNvPr id="6" name="Shape 3"/>
+          <p:cNvSpPr/>
+          <p:nvPr/>
+        </p:nvSpPr>
+        <p:spPr>
+          <a:xfrm>
+            <a:off x="8732520" y="109728"/>
+            <a:ext cx="2926080" cy="237744"/>
+          </a:xfrm>
+          <a:prstGeom prst="roundRect">
+            <a:avLst>
+              <a:gd name="adj" fmla="val 26923"/>
+            </a:avLst>
+          </a:prstGeom>
+          <a:solidFill>
+            <a:srgbClr val="0D1E2E"/>
+          </a:solidFill>
+          <a:ln w="12700">
+            <a:solidFill>
+              <a:srgbClr val="0D1E2E"/>
+            </a:solidFill>
+            <a:prstDash val="solid"/>
+          </a:ln>
+        </p:spPr>
+      </p:sp>
+      <p:sp>
+        <p:nvSpPr>
+          <p:cNvPr id="7" name="Shape 4"/>
+          <p:cNvSpPr/>
+          <p:nvPr/>
+        </p:nvSpPr>
+        <p:spPr>
+          <a:xfrm>
+            <a:off x="8823960" y="182880"/>
+            <a:ext cx="91440" cy="91440"/>
+          </a:xfrm>
+          <a:prstGeom prst="ellipse">
+            <a:avLst/>
+          </a:prstGeom>
+          <a:solidFill>
+            <a:srgbClr val="E8837A"/>
+          </a:solidFill>
+          <a:ln w="12700">
+            <a:solidFill>
+              <a:srgbClr val="E8837A"/>
+            </a:solidFill>
+            <a:prstDash val="solid"/>
+          </a:ln>
+        </p:spPr>
+      </p:sp>
+      <p:sp>
+        <p:nvSpPr>
+          <p:cNvPr id="8" name="Shape 5"/>
+          <p:cNvSpPr/>
+          <p:nvPr/>
+        </p:nvSpPr>
+        <p:spPr>
+          <a:xfrm>
+            <a:off x="8970264" y="182880"/>
+            <a:ext cx="91440" cy="91440"/>
+          </a:xfrm>
+          <a:prstGeom prst="ellipse">
+            <a:avLst/>
+          </a:prstGeom>
+          <a:solidFill>
+            <a:srgbClr val="F4A825"/>
+          </a:solidFill>
+          <a:ln w="12700">
+            <a:solidFill>
+              <a:srgbClr val="F4A825"/>
+            </a:solidFill>
+            <a:prstDash val="solid"/>
+          </a:ln>
+        </p:spPr>
+      </p:sp>
+      <p:sp>
+        <p:nvSpPr>
+          <p:cNvPr id="9" name="Shape 6"/>
+          <p:cNvSpPr/>
+          <p:nvPr/>
+        </p:nvSpPr>
+        <p:spPr>
+          <a:xfrm>
+            <a:off x="9116568" y="182880"/>
+            <a:ext cx="91440" cy="91440"/>
+          </a:xfrm>
+          <a:prstGeom prst="ellipse">
+            <a:avLst/>
+          </a:prstGeom>
+          <a:solidFill>
+            <a:srgbClr val="2E7D5B"/>
+          </a:solidFill>
+          <a:ln w="12700">
+            <a:solidFill>
+              <a:srgbClr val="2E7D5B"/>
+            </a:solidFill>
+            <a:prstDash val="solid"/>
+          </a:ln>
+        </p:spPr>
+      </p:sp>
+      <p:sp>
+        <p:nvSpPr>
+          <p:cNvPr id="10" name="Text 7"/>
+          <p:cNvSpPr/>
+          <p:nvPr/>
+        </p:nvSpPr>
+        <p:spPr>
+          <a:xfrm>
+            <a:off x="9299448" y="109728"/>
+            <a:ext cx="2286000" cy="237744"/>
+          </a:xfrm>
+          <a:prstGeom prst="rect">
+            <a:avLst/>
+          </a:prstGeom>
+          <a:noFill/>
+          <a:ln/>
+        </p:spPr>
+        <p:txBody>
+          <a:bodyPr wrap="square" lIns="0" tIns="0" rIns="0" bIns="0" rtlCol="0" anchor="ctr"/>
+          <a:lstStyle/>
+          <a:p>
+            <a:pPr indent="0" marL="0">
+              <a:buNone/>
+            </a:pPr>
+            <a:r>
+              <a:rPr lang="en-US" sz="800" b="1" spc="100" kern="0" dirty="0">
+                <a:solidFill>
+                  <a:srgbClr val="9FB2C2"/>
+                </a:solidFill>
+                <a:latin typeface="Inter" pitchFamily="34" charset="0"/>
+                <a:ea typeface="Inter" pitchFamily="34" charset="-122"/>
+                <a:cs typeface="Inter" pitchFamily="34" charset="-120"/>
+              </a:rPr>
+              <a:t>MS. RIVERA'S SCREEN · SO FAR</a:t>
+            </a:r>
+            <a:endParaRPr lang="en-US" sz="800" dirty="0"/>
+          </a:p>
+        </p:txBody>
+      </p:sp>
+      <p:sp>
+        <p:nvSpPr>
+          <p:cNvPr id="11" name="Text 8"/>
+          <p:cNvSpPr/>
+          <p:nvPr/>
+        </p:nvSpPr>
+        <p:spPr>
+          <a:xfrm>
+            <a:off x="8860536" y="365760"/>
+            <a:ext cx="2670048" cy="566928"/>
+          </a:xfrm>
+          <a:prstGeom prst="rect">
+            <a:avLst/>
+          </a:prstGeom>
+          <a:noFill/>
+          <a:ln/>
+        </p:spPr>
+        <p:txBody>
+          <a:bodyPr wrap="square" lIns="0" tIns="0" rIns="0" bIns="0" rtlCol="0" anchor="ctr"/>
+          <a:lstStyle/>
+          <a:p>
+            <a:pPr indent="0" marL="0">
+              <a:buNone/>
+            </a:pPr>
+            <a:r>
+              <a:rPr lang="en-US" sz="1000" dirty="0">
+                <a:solidFill>
+                  <a:srgbClr val="1B1F24"/>
+                </a:solidFill>
+                <a:latin typeface="Inter" pitchFamily="34" charset="0"/>
+                <a:ea typeface="Inter" pitchFamily="34" charset="-122"/>
+                <a:cs typeface="Inter" pitchFamily="34" charset="-120"/>
+              </a:rPr>
+              <a:t>Her spice rack: constraints, audience, an example, 'ask me questions first.'</a:t>
+            </a:r>
+            <a:endParaRPr lang="en-US" sz="1000" dirty="0"/>
+          </a:p>
+        </p:txBody>
+      </p:sp>
+      <p:sp>
+        <p:nvSpPr>
+          <p:cNvPr id="12" name="Text 9"/>
           <p:cNvSpPr/>
           <p:nvPr/>
         </p:nvSpPr>
@@ -4812,7 +5433,7 @@
       </p:sp>
       <p:sp>
         <p:nvSpPr>
-          <p:cNvPr id="6" name="Text 3"/>
+          <p:cNvPr id="13" name="Text 10"/>
           <p:cNvSpPr/>
           <p:nvPr/>
         </p:nvSpPr>
@@ -4851,7 +5472,7 @@
       </p:sp>
       <p:sp>
         <p:nvSpPr>
-          <p:cNvPr id="7" name="Shape 4"/>
+          <p:cNvPr id="14" name="Shape 11"/>
           <p:cNvSpPr/>
           <p:nvPr/>
         </p:nvSpPr>
@@ -4878,7 +5499,7 @@
       </p:sp>
       <p:sp>
         <p:nvSpPr>
-          <p:cNvPr id="8" name="Text 5"/>
+          <p:cNvPr id="15" name="Text 12"/>
           <p:cNvSpPr/>
           <p:nvPr/>
         </p:nvSpPr>
@@ -4917,7 +5538,7 @@
       </p:sp>
       <p:sp>
         <p:nvSpPr>
-          <p:cNvPr id="9" name="Text 6"/>
+          <p:cNvPr id="16" name="Text 13"/>
           <p:cNvSpPr/>
           <p:nvPr/>
         </p:nvSpPr>
@@ -4956,7 +5577,7 @@
       </p:sp>
       <p:sp>
         <p:nvSpPr>
-          <p:cNvPr id="10" name="Shape 7"/>
+          <p:cNvPr id="17" name="Shape 14"/>
           <p:cNvSpPr/>
           <p:nvPr/>
         </p:nvSpPr>
@@ -4983,7 +5604,7 @@
       </p:sp>
       <p:sp>
         <p:nvSpPr>
-          <p:cNvPr id="11" name="Text 8"/>
+          <p:cNvPr id="18" name="Text 15"/>
           <p:cNvSpPr/>
           <p:nvPr/>
         </p:nvSpPr>
@@ -5022,7 +5643,7 @@
       </p:sp>
       <p:sp>
         <p:nvSpPr>
-          <p:cNvPr id="12" name="Text 9"/>
+          <p:cNvPr id="19" name="Text 16"/>
           <p:cNvSpPr/>
           <p:nvPr/>
         </p:nvSpPr>
@@ -5061,7 +5682,7 @@
       </p:sp>
       <p:sp>
         <p:nvSpPr>
-          <p:cNvPr id="13" name="Shape 10"/>
+          <p:cNvPr id="20" name="Shape 17"/>
           <p:cNvSpPr/>
           <p:nvPr/>
         </p:nvSpPr>
@@ -5088,7 +5709,7 @@
       </p:sp>
       <p:sp>
         <p:nvSpPr>
-          <p:cNvPr id="14" name="Text 11"/>
+          <p:cNvPr id="21" name="Text 18"/>
           <p:cNvSpPr/>
           <p:nvPr/>
         </p:nvSpPr>
@@ -5127,7 +5748,7 @@
       </p:sp>
       <p:sp>
         <p:nvSpPr>
-          <p:cNvPr id="15" name="Text 12"/>
+          <p:cNvPr id="22" name="Text 19"/>
           <p:cNvSpPr/>
           <p:nvPr/>
         </p:nvSpPr>
@@ -5166,7 +5787,7 @@
       </p:sp>
       <p:sp>
         <p:nvSpPr>
-          <p:cNvPr id="16" name="Shape 13"/>
+          <p:cNvPr id="23" name="Shape 20"/>
           <p:cNvSpPr/>
           <p:nvPr/>
         </p:nvSpPr>
@@ -5193,7 +5814,7 @@
       </p:sp>
       <p:sp>
         <p:nvSpPr>
-          <p:cNvPr id="17" name="Text 14"/>
+          <p:cNvPr id="24" name="Text 21"/>
           <p:cNvSpPr/>
           <p:nvPr/>
         </p:nvSpPr>
@@ -5232,7 +5853,7 @@
       </p:sp>
       <p:sp>
         <p:nvSpPr>
-          <p:cNvPr id="18" name="Text 15"/>
+          <p:cNvPr id="25" name="Text 22"/>
           <p:cNvSpPr/>
           <p:nvPr/>
         </p:nvSpPr>
@@ -5419,7 +6040,214 @@
       </p:sp>
       <p:sp>
         <p:nvSpPr>
-          <p:cNvPr id="5" name="Text 2"/>
+          <p:cNvPr id="5" name="Shape 2"/>
+          <p:cNvSpPr/>
+          <p:nvPr/>
+        </p:nvSpPr>
+        <p:spPr>
+          <a:xfrm>
+            <a:off x="8732520" y="109728"/>
+            <a:ext cx="2926080" cy="896112"/>
+          </a:xfrm>
+          <a:prstGeom prst="roundRect">
+            <a:avLst>
+              <a:gd name="adj" fmla="val 7143"/>
+            </a:avLst>
+          </a:prstGeom>
+          <a:solidFill>
+            <a:srgbClr val="F7F5F0"/>
+          </a:solidFill>
+          <a:ln w="12700">
+            <a:solidFill>
+              <a:srgbClr val="DCE3EA"/>
+            </a:solidFill>
+            <a:prstDash val="solid"/>
+          </a:ln>
+        </p:spPr>
+      </p:sp>
+      <p:sp>
+        <p:nvSpPr>
+          <p:cNvPr id="6" name="Shape 3"/>
+          <p:cNvSpPr/>
+          <p:nvPr/>
+        </p:nvSpPr>
+        <p:spPr>
+          <a:xfrm>
+            <a:off x="8732520" y="109728"/>
+            <a:ext cx="2926080" cy="237744"/>
+          </a:xfrm>
+          <a:prstGeom prst="roundRect">
+            <a:avLst>
+              <a:gd name="adj" fmla="val 26923"/>
+            </a:avLst>
+          </a:prstGeom>
+          <a:solidFill>
+            <a:srgbClr val="0D1E2E"/>
+          </a:solidFill>
+          <a:ln w="12700">
+            <a:solidFill>
+              <a:srgbClr val="0D1E2E"/>
+            </a:solidFill>
+            <a:prstDash val="solid"/>
+          </a:ln>
+        </p:spPr>
+      </p:sp>
+      <p:sp>
+        <p:nvSpPr>
+          <p:cNvPr id="7" name="Shape 4"/>
+          <p:cNvSpPr/>
+          <p:nvPr/>
+        </p:nvSpPr>
+        <p:spPr>
+          <a:xfrm>
+            <a:off x="8823960" y="182880"/>
+            <a:ext cx="91440" cy="91440"/>
+          </a:xfrm>
+          <a:prstGeom prst="ellipse">
+            <a:avLst/>
+          </a:prstGeom>
+          <a:solidFill>
+            <a:srgbClr val="E8837A"/>
+          </a:solidFill>
+          <a:ln w="12700">
+            <a:solidFill>
+              <a:srgbClr val="E8837A"/>
+            </a:solidFill>
+            <a:prstDash val="solid"/>
+          </a:ln>
+        </p:spPr>
+      </p:sp>
+      <p:sp>
+        <p:nvSpPr>
+          <p:cNvPr id="8" name="Shape 5"/>
+          <p:cNvSpPr/>
+          <p:nvPr/>
+        </p:nvSpPr>
+        <p:spPr>
+          <a:xfrm>
+            <a:off x="8970264" y="182880"/>
+            <a:ext cx="91440" cy="91440"/>
+          </a:xfrm>
+          <a:prstGeom prst="ellipse">
+            <a:avLst/>
+          </a:prstGeom>
+          <a:solidFill>
+            <a:srgbClr val="F4A825"/>
+          </a:solidFill>
+          <a:ln w="12700">
+            <a:solidFill>
+              <a:srgbClr val="F4A825"/>
+            </a:solidFill>
+            <a:prstDash val="solid"/>
+          </a:ln>
+        </p:spPr>
+      </p:sp>
+      <p:sp>
+        <p:nvSpPr>
+          <p:cNvPr id="9" name="Shape 6"/>
+          <p:cNvSpPr/>
+          <p:nvPr/>
+        </p:nvSpPr>
+        <p:spPr>
+          <a:xfrm>
+            <a:off x="9116568" y="182880"/>
+            <a:ext cx="91440" cy="91440"/>
+          </a:xfrm>
+          <a:prstGeom prst="ellipse">
+            <a:avLst/>
+          </a:prstGeom>
+          <a:solidFill>
+            <a:srgbClr val="2E7D5B"/>
+          </a:solidFill>
+          <a:ln w="12700">
+            <a:solidFill>
+              <a:srgbClr val="2E7D5B"/>
+            </a:solidFill>
+            <a:prstDash val="solid"/>
+          </a:ln>
+        </p:spPr>
+      </p:sp>
+      <p:sp>
+        <p:nvSpPr>
+          <p:cNvPr id="10" name="Text 7"/>
+          <p:cNvSpPr/>
+          <p:nvPr/>
+        </p:nvSpPr>
+        <p:spPr>
+          <a:xfrm>
+            <a:off x="9299448" y="109728"/>
+            <a:ext cx="2286000" cy="237744"/>
+          </a:xfrm>
+          <a:prstGeom prst="rect">
+            <a:avLst/>
+          </a:prstGeom>
+          <a:noFill/>
+          <a:ln/>
+        </p:spPr>
+        <p:txBody>
+          <a:bodyPr wrap="square" lIns="0" tIns="0" rIns="0" bIns="0" rtlCol="0" anchor="ctr"/>
+          <a:lstStyle/>
+          <a:p>
+            <a:pPr indent="0" marL="0">
+              <a:buNone/>
+            </a:pPr>
+            <a:r>
+              <a:rPr lang="en-US" sz="800" b="1" spc="100" kern="0" dirty="0">
+                <a:solidFill>
+                  <a:srgbClr val="9FB2C2"/>
+                </a:solidFill>
+                <a:latin typeface="Inter" pitchFamily="34" charset="0"/>
+                <a:ea typeface="Inter" pitchFamily="34" charset="-122"/>
+                <a:cs typeface="Inter" pitchFamily="34" charset="-120"/>
+              </a:rPr>
+              <a:t>MS. RIVERA'S SCREEN · SO FAR</a:t>
+            </a:r>
+            <a:endParaRPr lang="en-US" sz="800" dirty="0"/>
+          </a:p>
+        </p:txBody>
+      </p:sp>
+      <p:sp>
+        <p:nvSpPr>
+          <p:cNvPr id="11" name="Text 8"/>
+          <p:cNvSpPr/>
+          <p:nvPr/>
+        </p:nvSpPr>
+        <p:spPr>
+          <a:xfrm>
+            <a:off x="8860536" y="365760"/>
+            <a:ext cx="2670048" cy="566928"/>
+          </a:xfrm>
+          <a:prstGeom prst="rect">
+            <a:avLst/>
+          </a:prstGeom>
+          <a:noFill/>
+          <a:ln/>
+        </p:spPr>
+        <p:txBody>
+          <a:bodyPr wrap="square" lIns="0" tIns="0" rIns="0" bIns="0" rtlCol="0" anchor="ctr"/>
+          <a:lstStyle/>
+          <a:p>
+            <a:pPr indent="0" marL="0">
+              <a:buNone/>
+            </a:pPr>
+            <a:r>
+              <a:rPr lang="en-US" sz="1000" dirty="0">
+                <a:solidFill>
+                  <a:srgbClr val="1B1F24"/>
+                </a:solidFill>
+                <a:latin typeface="Inter" pitchFamily="34" charset="0"/>
+                <a:ea typeface="Inter" pitchFamily="34" charset="-122"/>
+                <a:cs typeface="Inter" pitchFamily="34" charset="-120"/>
+              </a:rPr>
+              <a:t>Her diagnosis eye: when output disappoints, context is usually missing.</a:t>
+            </a:r>
+            <a:endParaRPr lang="en-US" sz="1000" dirty="0"/>
+          </a:p>
+        </p:txBody>
+      </p:sp>
+      <p:sp>
+        <p:nvSpPr>
+          <p:cNvPr id="12" name="Text 9"/>
           <p:cNvSpPr/>
           <p:nvPr/>
         </p:nvSpPr>
@@ -5458,7 +6286,7 @@
       </p:sp>
       <p:sp>
         <p:nvSpPr>
-          <p:cNvPr id="6" name="Text 3"/>
+          <p:cNvPr id="13" name="Text 10"/>
           <p:cNvSpPr/>
           <p:nvPr/>
         </p:nvSpPr>
@@ -5497,7 +6325,7 @@
       </p:sp>
       <p:sp>
         <p:nvSpPr>
-          <p:cNvPr id="7" name="Shape 4"/>
+          <p:cNvPr id="14" name="Shape 11"/>
           <p:cNvSpPr/>
           <p:nvPr/>
         </p:nvSpPr>
@@ -5524,7 +6352,7 @@
       </p:sp>
       <p:sp>
         <p:nvSpPr>
-          <p:cNvPr id="8" name="Text 5"/>
+          <p:cNvPr id="15" name="Text 12"/>
           <p:cNvSpPr/>
           <p:nvPr/>
         </p:nvSpPr>
@@ -5563,7 +6391,7 @@
       </p:sp>
       <p:sp>
         <p:nvSpPr>
-          <p:cNvPr id="9" name="Shape 6"/>
+          <p:cNvPr id="16" name="Shape 13"/>
           <p:cNvSpPr/>
           <p:nvPr/>
         </p:nvSpPr>
@@ -5590,7 +6418,7 @@
       </p:sp>
       <p:sp>
         <p:nvSpPr>
-          <p:cNvPr id="10" name="Text 7"/>
+          <p:cNvPr id="17" name="Text 14"/>
           <p:cNvSpPr/>
           <p:nvPr/>
         </p:nvSpPr>
@@ -5629,7 +6457,7 @@
       </p:sp>
       <p:sp>
         <p:nvSpPr>
-          <p:cNvPr id="11" name="Shape 8"/>
+          <p:cNvPr id="18" name="Shape 15"/>
           <p:cNvSpPr/>
           <p:nvPr/>
         </p:nvSpPr>
@@ -5656,7 +6484,7 @@
       </p:sp>
       <p:sp>
         <p:nvSpPr>
-          <p:cNvPr id="12" name="Text 9"/>
+          <p:cNvPr id="19" name="Text 16"/>
           <p:cNvSpPr/>
           <p:nvPr/>
         </p:nvSpPr>
@@ -5695,7 +6523,7 @@
       </p:sp>
       <p:sp>
         <p:nvSpPr>
-          <p:cNvPr id="13" name="Shape 10"/>
+          <p:cNvPr id="20" name="Shape 17"/>
           <p:cNvSpPr/>
           <p:nvPr/>
         </p:nvSpPr>
@@ -5722,7 +6550,7 @@
       </p:sp>
       <p:sp>
         <p:nvSpPr>
-          <p:cNvPr id="14" name="Text 11"/>
+          <p:cNvPr id="21" name="Text 18"/>
           <p:cNvSpPr/>
           <p:nvPr/>
         </p:nvSpPr>
@@ -5761,7 +6589,7 @@
       </p:sp>
       <p:sp>
         <p:nvSpPr>
-          <p:cNvPr id="15" name="Shape 12"/>
+          <p:cNvPr id="22" name="Shape 19"/>
           <p:cNvSpPr/>
           <p:nvPr/>
         </p:nvSpPr>
@@ -5788,7 +6616,7 @@
       </p:sp>
       <p:sp>
         <p:nvSpPr>
-          <p:cNvPr id="16" name="Text 13"/>
+          <p:cNvPr id="23" name="Text 20"/>
           <p:cNvSpPr/>
           <p:nvPr/>
         </p:nvSpPr>
@@ -5827,7 +6655,7 @@
       </p:sp>
       <p:sp>
         <p:nvSpPr>
-          <p:cNvPr id="17" name="Shape 14"/>
+          <p:cNvPr id="24" name="Shape 21"/>
           <p:cNvSpPr/>
           <p:nvPr/>
         </p:nvSpPr>
@@ -5854,7 +6682,7 @@
       </p:sp>
       <p:sp>
         <p:nvSpPr>
-          <p:cNvPr id="18" name="Text 15"/>
+          <p:cNvPr id="25" name="Text 22"/>
           <p:cNvSpPr/>
           <p:nvPr/>
         </p:nvSpPr>
@@ -5893,7 +6721,7 @@
       </p:sp>
       <p:sp>
         <p:nvSpPr>
-          <p:cNvPr id="19" name="Shape 16"/>
+          <p:cNvPr id="26" name="Shape 23"/>
           <p:cNvSpPr/>
           <p:nvPr/>
         </p:nvSpPr>
@@ -5920,7 +6748,7 @@
       </p:sp>
       <p:sp>
         <p:nvSpPr>
-          <p:cNvPr id="20" name="Text 17"/>
+          <p:cNvPr id="27" name="Text 24"/>
           <p:cNvSpPr/>
           <p:nvPr/>
         </p:nvSpPr>
@@ -5959,7 +6787,7 @@
       </p:sp>
       <p:sp>
         <p:nvSpPr>
-          <p:cNvPr id="21" name="Shape 18"/>
+          <p:cNvPr id="28" name="Shape 25"/>
           <p:cNvSpPr/>
           <p:nvPr/>
         </p:nvSpPr>
@@ -5986,7 +6814,7 @@
       </p:sp>
       <p:sp>
         <p:nvSpPr>
-          <p:cNvPr id="22" name="Text 19"/>
+          <p:cNvPr id="29" name="Text 26"/>
           <p:cNvSpPr/>
           <p:nvPr/>
         </p:nvSpPr>
@@ -6025,7 +6853,7 @@
       </p:sp>
       <p:sp>
         <p:nvSpPr>
-          <p:cNvPr id="23" name="Text 20"/>
+          <p:cNvPr id="30" name="Text 27"/>
           <p:cNvSpPr/>
           <p:nvPr/>
         </p:nvSpPr>
@@ -6212,7 +7040,214 @@
       </p:sp>
       <p:sp>
         <p:nvSpPr>
-          <p:cNvPr id="5" name="Text 2"/>
+          <p:cNvPr id="5" name="Shape 2"/>
+          <p:cNvSpPr/>
+          <p:nvPr/>
+        </p:nvSpPr>
+        <p:spPr>
+          <a:xfrm>
+            <a:off x="8732520" y="109728"/>
+            <a:ext cx="2926080" cy="896112"/>
+          </a:xfrm>
+          <a:prstGeom prst="roundRect">
+            <a:avLst>
+              <a:gd name="adj" fmla="val 7143"/>
+            </a:avLst>
+          </a:prstGeom>
+          <a:solidFill>
+            <a:srgbClr val="F7F5F0"/>
+          </a:solidFill>
+          <a:ln w="12700">
+            <a:solidFill>
+              <a:srgbClr val="DCE3EA"/>
+            </a:solidFill>
+            <a:prstDash val="solid"/>
+          </a:ln>
+        </p:spPr>
+      </p:sp>
+      <p:sp>
+        <p:nvSpPr>
+          <p:cNvPr id="6" name="Shape 3"/>
+          <p:cNvSpPr/>
+          <p:nvPr/>
+        </p:nvSpPr>
+        <p:spPr>
+          <a:xfrm>
+            <a:off x="8732520" y="109728"/>
+            <a:ext cx="2926080" cy="237744"/>
+          </a:xfrm>
+          <a:prstGeom prst="roundRect">
+            <a:avLst>
+              <a:gd name="adj" fmla="val 26923"/>
+            </a:avLst>
+          </a:prstGeom>
+          <a:solidFill>
+            <a:srgbClr val="0D1E2E"/>
+          </a:solidFill>
+          <a:ln w="12700">
+            <a:solidFill>
+              <a:srgbClr val="0D1E2E"/>
+            </a:solidFill>
+            <a:prstDash val="solid"/>
+          </a:ln>
+        </p:spPr>
+      </p:sp>
+      <p:sp>
+        <p:nvSpPr>
+          <p:cNvPr id="7" name="Shape 4"/>
+          <p:cNvSpPr/>
+          <p:nvPr/>
+        </p:nvSpPr>
+        <p:spPr>
+          <a:xfrm>
+            <a:off x="8823960" y="182880"/>
+            <a:ext cx="91440" cy="91440"/>
+          </a:xfrm>
+          <a:prstGeom prst="ellipse">
+            <a:avLst/>
+          </a:prstGeom>
+          <a:solidFill>
+            <a:srgbClr val="E8837A"/>
+          </a:solidFill>
+          <a:ln w="12700">
+            <a:solidFill>
+              <a:srgbClr val="E8837A"/>
+            </a:solidFill>
+            <a:prstDash val="solid"/>
+          </a:ln>
+        </p:spPr>
+      </p:sp>
+      <p:sp>
+        <p:nvSpPr>
+          <p:cNvPr id="8" name="Shape 5"/>
+          <p:cNvSpPr/>
+          <p:nvPr/>
+        </p:nvSpPr>
+        <p:spPr>
+          <a:xfrm>
+            <a:off x="8970264" y="182880"/>
+            <a:ext cx="91440" cy="91440"/>
+          </a:xfrm>
+          <a:prstGeom prst="ellipse">
+            <a:avLst/>
+          </a:prstGeom>
+          <a:solidFill>
+            <a:srgbClr val="F4A825"/>
+          </a:solidFill>
+          <a:ln w="12700">
+            <a:solidFill>
+              <a:srgbClr val="F4A825"/>
+            </a:solidFill>
+            <a:prstDash val="solid"/>
+          </a:ln>
+        </p:spPr>
+      </p:sp>
+      <p:sp>
+        <p:nvSpPr>
+          <p:cNvPr id="9" name="Shape 6"/>
+          <p:cNvSpPr/>
+          <p:nvPr/>
+        </p:nvSpPr>
+        <p:spPr>
+          <a:xfrm>
+            <a:off x="9116568" y="182880"/>
+            <a:ext cx="91440" cy="91440"/>
+          </a:xfrm>
+          <a:prstGeom prst="ellipse">
+            <a:avLst/>
+          </a:prstGeom>
+          <a:solidFill>
+            <a:srgbClr val="2E7D5B"/>
+          </a:solidFill>
+          <a:ln w="12700">
+            <a:solidFill>
+              <a:srgbClr val="2E7D5B"/>
+            </a:solidFill>
+            <a:prstDash val="solid"/>
+          </a:ln>
+        </p:spPr>
+      </p:sp>
+      <p:sp>
+        <p:nvSpPr>
+          <p:cNvPr id="10" name="Text 7"/>
+          <p:cNvSpPr/>
+          <p:nvPr/>
+        </p:nvSpPr>
+        <p:spPr>
+          <a:xfrm>
+            <a:off x="9299448" y="109728"/>
+            <a:ext cx="2286000" cy="237744"/>
+          </a:xfrm>
+          <a:prstGeom prst="rect">
+            <a:avLst/>
+          </a:prstGeom>
+          <a:noFill/>
+          <a:ln/>
+        </p:spPr>
+        <p:txBody>
+          <a:bodyPr wrap="square" lIns="0" tIns="0" rIns="0" bIns="0" rtlCol="0" anchor="ctr"/>
+          <a:lstStyle/>
+          <a:p>
+            <a:pPr indent="0" marL="0">
+              <a:buNone/>
+            </a:pPr>
+            <a:r>
+              <a:rPr lang="en-US" sz="800" b="1" spc="100" kern="0" dirty="0">
+                <a:solidFill>
+                  <a:srgbClr val="9FB2C2"/>
+                </a:solidFill>
+                <a:latin typeface="Inter" pitchFamily="34" charset="0"/>
+                <a:ea typeface="Inter" pitchFamily="34" charset="-122"/>
+                <a:cs typeface="Inter" pitchFamily="34" charset="-120"/>
+              </a:rPr>
+              <a:t>MS. RIVERA'S SCREEN · SO FAR</a:t>
+            </a:r>
+            <a:endParaRPr lang="en-US" sz="800" dirty="0"/>
+          </a:p>
+        </p:txBody>
+      </p:sp>
+      <p:sp>
+        <p:nvSpPr>
+          <p:cNvPr id="11" name="Text 8"/>
+          <p:cNvSpPr/>
+          <p:nvPr/>
+        </p:nvSpPr>
+        <p:spPr>
+          <a:xfrm>
+            <a:off x="8860536" y="365760"/>
+            <a:ext cx="2670048" cy="566928"/>
+          </a:xfrm>
+          <a:prstGeom prst="rect">
+            <a:avLst/>
+          </a:prstGeom>
+          <a:noFill/>
+          <a:ln/>
+        </p:spPr>
+        <p:txBody>
+          <a:bodyPr wrap="square" lIns="0" tIns="0" rIns="0" bIns="0" rtlCol="0" anchor="ctr"/>
+          <a:lstStyle/>
+          <a:p>
+            <a:pPr indent="0" marL="0">
+              <a:buNone/>
+            </a:pPr>
+            <a:r>
+              <a:rPr lang="en-US" sz="1000" dirty="0">
+                <a:solidFill>
+                  <a:srgbClr val="1B1F24"/>
+                </a:solidFill>
+                <a:latin typeface="Inter" pitchFamily="34" charset="0"/>
+                <a:ea typeface="Inter" pitchFamily="34" charset="-122"/>
+                <a:cs typeface="Inter" pitchFamily="34" charset="-120"/>
+              </a:rPr>
+              <a:t>Her template: blanks for topic, grade, count, format. Twenty seconds to reuse.</a:t>
+            </a:r>
+            <a:endParaRPr lang="en-US" sz="1000" dirty="0"/>
+          </a:p>
+        </p:txBody>
+      </p:sp>
+      <p:sp>
+        <p:nvSpPr>
+          <p:cNvPr id="12" name="Text 9"/>
           <p:cNvSpPr/>
           <p:nvPr/>
         </p:nvSpPr>
@@ -6251,7 +7286,7 @@
       </p:sp>
       <p:sp>
         <p:nvSpPr>
-          <p:cNvPr id="6" name="Text 3"/>
+          <p:cNvPr id="13" name="Text 10"/>
           <p:cNvSpPr/>
           <p:nvPr/>
         </p:nvSpPr>
@@ -6290,7 +7325,7 @@
       </p:sp>
       <p:sp>
         <p:nvSpPr>
-          <p:cNvPr id="7" name="Shape 4"/>
+          <p:cNvPr id="14" name="Shape 11"/>
           <p:cNvSpPr/>
           <p:nvPr/>
         </p:nvSpPr>
@@ -6317,7 +7352,7 @@
       </p:sp>
       <p:sp>
         <p:nvSpPr>
-          <p:cNvPr id="8" name="Text 5"/>
+          <p:cNvPr id="15" name="Text 12"/>
           <p:cNvSpPr/>
           <p:nvPr/>
         </p:nvSpPr>
@@ -6356,7 +7391,7 @@
       </p:sp>
       <p:sp>
         <p:nvSpPr>
-          <p:cNvPr id="9" name="Text 6"/>
+          <p:cNvPr id="16" name="Text 13"/>
           <p:cNvSpPr/>
           <p:nvPr/>
         </p:nvSpPr>
@@ -6589,7 +7624,214 @@
       </p:sp>
       <p:sp>
         <p:nvSpPr>
-          <p:cNvPr id="5" name="Text 2"/>
+          <p:cNvPr id="5" name="Shape 2"/>
+          <p:cNvSpPr/>
+          <p:nvPr/>
+        </p:nvSpPr>
+        <p:spPr>
+          <a:xfrm>
+            <a:off x="8732520" y="109728"/>
+            <a:ext cx="2926080" cy="896112"/>
+          </a:xfrm>
+          <a:prstGeom prst="roundRect">
+            <a:avLst>
+              <a:gd name="adj" fmla="val 7143"/>
+            </a:avLst>
+          </a:prstGeom>
+          <a:solidFill>
+            <a:srgbClr val="1E3A50"/>
+          </a:solidFill>
+          <a:ln w="12700">
+            <a:solidFill>
+              <a:srgbClr val="2A4A63"/>
+            </a:solidFill>
+            <a:prstDash val="solid"/>
+          </a:ln>
+        </p:spPr>
+      </p:sp>
+      <p:sp>
+        <p:nvSpPr>
+          <p:cNvPr id="6" name="Shape 3"/>
+          <p:cNvSpPr/>
+          <p:nvPr/>
+        </p:nvSpPr>
+        <p:spPr>
+          <a:xfrm>
+            <a:off x="8732520" y="109728"/>
+            <a:ext cx="2926080" cy="237744"/>
+          </a:xfrm>
+          <a:prstGeom prst="roundRect">
+            <a:avLst>
+              <a:gd name="adj" fmla="val 26923"/>
+            </a:avLst>
+          </a:prstGeom>
+          <a:solidFill>
+            <a:srgbClr val="0D1E2E"/>
+          </a:solidFill>
+          <a:ln w="12700">
+            <a:solidFill>
+              <a:srgbClr val="0D1E2E"/>
+            </a:solidFill>
+            <a:prstDash val="solid"/>
+          </a:ln>
+        </p:spPr>
+      </p:sp>
+      <p:sp>
+        <p:nvSpPr>
+          <p:cNvPr id="7" name="Shape 4"/>
+          <p:cNvSpPr/>
+          <p:nvPr/>
+        </p:nvSpPr>
+        <p:spPr>
+          <a:xfrm>
+            <a:off x="8823960" y="182880"/>
+            <a:ext cx="91440" cy="91440"/>
+          </a:xfrm>
+          <a:prstGeom prst="ellipse">
+            <a:avLst/>
+          </a:prstGeom>
+          <a:solidFill>
+            <a:srgbClr val="E8837A"/>
+          </a:solidFill>
+          <a:ln w="12700">
+            <a:solidFill>
+              <a:srgbClr val="E8837A"/>
+            </a:solidFill>
+            <a:prstDash val="solid"/>
+          </a:ln>
+        </p:spPr>
+      </p:sp>
+      <p:sp>
+        <p:nvSpPr>
+          <p:cNvPr id="8" name="Shape 5"/>
+          <p:cNvSpPr/>
+          <p:nvPr/>
+        </p:nvSpPr>
+        <p:spPr>
+          <a:xfrm>
+            <a:off x="8970264" y="182880"/>
+            <a:ext cx="91440" cy="91440"/>
+          </a:xfrm>
+          <a:prstGeom prst="ellipse">
+            <a:avLst/>
+          </a:prstGeom>
+          <a:solidFill>
+            <a:srgbClr val="F4A825"/>
+          </a:solidFill>
+          <a:ln w="12700">
+            <a:solidFill>
+              <a:srgbClr val="F4A825"/>
+            </a:solidFill>
+            <a:prstDash val="solid"/>
+          </a:ln>
+        </p:spPr>
+      </p:sp>
+      <p:sp>
+        <p:nvSpPr>
+          <p:cNvPr id="9" name="Shape 6"/>
+          <p:cNvSpPr/>
+          <p:nvPr/>
+        </p:nvSpPr>
+        <p:spPr>
+          <a:xfrm>
+            <a:off x="9116568" y="182880"/>
+            <a:ext cx="91440" cy="91440"/>
+          </a:xfrm>
+          <a:prstGeom prst="ellipse">
+            <a:avLst/>
+          </a:prstGeom>
+          <a:solidFill>
+            <a:srgbClr val="2E7D5B"/>
+          </a:solidFill>
+          <a:ln w="12700">
+            <a:solidFill>
+              <a:srgbClr val="2E7D5B"/>
+            </a:solidFill>
+            <a:prstDash val="solid"/>
+          </a:ln>
+        </p:spPr>
+      </p:sp>
+      <p:sp>
+        <p:nvSpPr>
+          <p:cNvPr id="10" name="Text 7"/>
+          <p:cNvSpPr/>
+          <p:nvPr/>
+        </p:nvSpPr>
+        <p:spPr>
+          <a:xfrm>
+            <a:off x="9299448" y="109728"/>
+            <a:ext cx="2286000" cy="237744"/>
+          </a:xfrm>
+          <a:prstGeom prst="rect">
+            <a:avLst/>
+          </a:prstGeom>
+          <a:noFill/>
+          <a:ln/>
+        </p:spPr>
+        <p:txBody>
+          <a:bodyPr wrap="square" lIns="0" tIns="0" rIns="0" bIns="0" rtlCol="0" anchor="ctr"/>
+          <a:lstStyle/>
+          <a:p>
+            <a:pPr indent="0" marL="0">
+              <a:buNone/>
+            </a:pPr>
+            <a:r>
+              <a:rPr lang="en-US" sz="800" b="1" spc="100" kern="0" dirty="0">
+                <a:solidFill>
+                  <a:srgbClr val="9FB2C2"/>
+                </a:solidFill>
+                <a:latin typeface="Inter" pitchFamily="34" charset="0"/>
+                <a:ea typeface="Inter" pitchFamily="34" charset="-122"/>
+                <a:cs typeface="Inter" pitchFamily="34" charset="-120"/>
+              </a:rPr>
+              <a:t>MS. RIVERA'S SCREEN · SO FAR</a:t>
+            </a:r>
+            <a:endParaRPr lang="en-US" sz="800" dirty="0"/>
+          </a:p>
+        </p:txBody>
+      </p:sp>
+      <p:sp>
+        <p:nvSpPr>
+          <p:cNvPr id="11" name="Text 8"/>
+          <p:cNvSpPr/>
+          <p:nvPr/>
+        </p:nvSpPr>
+        <p:spPr>
+          <a:xfrm>
+            <a:off x="8860536" y="365760"/>
+            <a:ext cx="2670048" cy="566928"/>
+          </a:xfrm>
+          <a:prstGeom prst="rect">
+            <a:avLst/>
+          </a:prstGeom>
+          <a:noFill/>
+          <a:ln/>
+        </p:spPr>
+        <p:txBody>
+          <a:bodyPr wrap="square" lIns="0" tIns="0" rIns="0" bIns="0" rtlCol="0" anchor="ctr"/>
+          <a:lstStyle/>
+          <a:p>
+            <a:pPr indent="0" marL="0">
+              <a:buNone/>
+            </a:pPr>
+            <a:r>
+              <a:rPr lang="en-US" sz="1000" dirty="0">
+                <a:solidFill>
+                  <a:srgbClr val="C9D4DE"/>
+                </a:solidFill>
+                <a:latin typeface="Inter" pitchFamily="34" charset="0"/>
+                <a:ea typeface="Inter" pitchFamily="34" charset="-122"/>
+                <a:cs typeface="Inter" pitchFamily="34" charset="-120"/>
+              </a:rPr>
+              <a:t>Her iteration rounds, in order: content, then voice, then details.</a:t>
+            </a:r>
+            <a:endParaRPr lang="en-US" sz="1000" dirty="0"/>
+          </a:p>
+        </p:txBody>
+      </p:sp>
+      <p:sp>
+        <p:nvSpPr>
+          <p:cNvPr id="12" name="Text 9"/>
           <p:cNvSpPr/>
           <p:nvPr/>
         </p:nvSpPr>
@@ -6628,7 +7870,7 @@
       </p:sp>
       <p:sp>
         <p:nvSpPr>
-          <p:cNvPr id="6" name="Text 3"/>
+          <p:cNvPr id="13" name="Text 10"/>
           <p:cNvSpPr/>
           <p:nvPr/>
         </p:nvSpPr>
@@ -6690,7 +7932,7 @@
       </p:sp>
       <p:sp>
         <p:nvSpPr>
-          <p:cNvPr id="7" name="Text 4"/>
+          <p:cNvPr id="14" name="Text 11"/>
           <p:cNvSpPr/>
           <p:nvPr/>
         </p:nvSpPr>
@@ -6729,7 +7971,7 @@
       </p:sp>
       <p:sp>
         <p:nvSpPr>
-          <p:cNvPr id="8" name="Text 5"/>
+          <p:cNvPr id="15" name="Text 12"/>
           <p:cNvSpPr/>
           <p:nvPr/>
         </p:nvSpPr>
@@ -6768,7 +8010,7 @@
       </p:sp>
       <p:sp>
         <p:nvSpPr>
-          <p:cNvPr id="9" name="Text 6"/>
+          <p:cNvPr id="16" name="Text 13"/>
           <p:cNvSpPr/>
           <p:nvPr/>
         </p:nvSpPr>
@@ -6807,7 +8049,7 @@
       </p:sp>
       <p:sp>
         <p:nvSpPr>
-          <p:cNvPr id="10" name="Text 7"/>
+          <p:cNvPr id="17" name="Text 14"/>
           <p:cNvSpPr/>
           <p:nvPr/>
         </p:nvSpPr>
@@ -6846,7 +8088,7 @@
       </p:sp>
       <p:sp>
         <p:nvSpPr>
-          <p:cNvPr id="11" name="Text 8"/>
+          <p:cNvPr id="18" name="Text 15"/>
           <p:cNvSpPr/>
           <p:nvPr/>
         </p:nvSpPr>
@@ -6885,7 +8127,7 @@
       </p:sp>
       <p:sp>
         <p:nvSpPr>
-          <p:cNvPr id="12" name="Text 9"/>
+          <p:cNvPr id="19" name="Text 16"/>
           <p:cNvSpPr/>
           <p:nvPr/>
         </p:nvSpPr>
@@ -6924,7 +8166,7 @@
       </p:sp>
       <p:sp>
         <p:nvSpPr>
-          <p:cNvPr id="13" name="Text 10"/>
+          <p:cNvPr id="20" name="Text 17"/>
           <p:cNvSpPr/>
           <p:nvPr/>
         </p:nvSpPr>
@@ -7111,7 +8353,214 @@
       </p:sp>
       <p:sp>
         <p:nvSpPr>
-          <p:cNvPr id="5" name="Text 2"/>
+          <p:cNvPr id="5" name="Shape 2"/>
+          <p:cNvSpPr/>
+          <p:nvPr/>
+        </p:nvSpPr>
+        <p:spPr>
+          <a:xfrm>
+            <a:off x="8732520" y="109728"/>
+            <a:ext cx="2926080" cy="896112"/>
+          </a:xfrm>
+          <a:prstGeom prst="roundRect">
+            <a:avLst>
+              <a:gd name="adj" fmla="val 7143"/>
+            </a:avLst>
+          </a:prstGeom>
+          <a:solidFill>
+            <a:srgbClr val="F7F5F0"/>
+          </a:solidFill>
+          <a:ln w="12700">
+            <a:solidFill>
+              <a:srgbClr val="DCE3EA"/>
+            </a:solidFill>
+            <a:prstDash val="solid"/>
+          </a:ln>
+        </p:spPr>
+      </p:sp>
+      <p:sp>
+        <p:nvSpPr>
+          <p:cNvPr id="6" name="Shape 3"/>
+          <p:cNvSpPr/>
+          <p:nvPr/>
+        </p:nvSpPr>
+        <p:spPr>
+          <a:xfrm>
+            <a:off x="8732520" y="109728"/>
+            <a:ext cx="2926080" cy="237744"/>
+          </a:xfrm>
+          <a:prstGeom prst="roundRect">
+            <a:avLst>
+              <a:gd name="adj" fmla="val 26923"/>
+            </a:avLst>
+          </a:prstGeom>
+          <a:solidFill>
+            <a:srgbClr val="0D1E2E"/>
+          </a:solidFill>
+          <a:ln w="12700">
+            <a:solidFill>
+              <a:srgbClr val="0D1E2E"/>
+            </a:solidFill>
+            <a:prstDash val="solid"/>
+          </a:ln>
+        </p:spPr>
+      </p:sp>
+      <p:sp>
+        <p:nvSpPr>
+          <p:cNvPr id="7" name="Shape 4"/>
+          <p:cNvSpPr/>
+          <p:nvPr/>
+        </p:nvSpPr>
+        <p:spPr>
+          <a:xfrm>
+            <a:off x="8823960" y="182880"/>
+            <a:ext cx="91440" cy="91440"/>
+          </a:xfrm>
+          <a:prstGeom prst="ellipse">
+            <a:avLst/>
+          </a:prstGeom>
+          <a:solidFill>
+            <a:srgbClr val="E8837A"/>
+          </a:solidFill>
+          <a:ln w="12700">
+            <a:solidFill>
+              <a:srgbClr val="E8837A"/>
+            </a:solidFill>
+            <a:prstDash val="solid"/>
+          </a:ln>
+        </p:spPr>
+      </p:sp>
+      <p:sp>
+        <p:nvSpPr>
+          <p:cNvPr id="8" name="Shape 5"/>
+          <p:cNvSpPr/>
+          <p:nvPr/>
+        </p:nvSpPr>
+        <p:spPr>
+          <a:xfrm>
+            <a:off x="8970264" y="182880"/>
+            <a:ext cx="91440" cy="91440"/>
+          </a:xfrm>
+          <a:prstGeom prst="ellipse">
+            <a:avLst/>
+          </a:prstGeom>
+          <a:solidFill>
+            <a:srgbClr val="F4A825"/>
+          </a:solidFill>
+          <a:ln w="12700">
+            <a:solidFill>
+              <a:srgbClr val="F4A825"/>
+            </a:solidFill>
+            <a:prstDash val="solid"/>
+          </a:ln>
+        </p:spPr>
+      </p:sp>
+      <p:sp>
+        <p:nvSpPr>
+          <p:cNvPr id="9" name="Shape 6"/>
+          <p:cNvSpPr/>
+          <p:nvPr/>
+        </p:nvSpPr>
+        <p:spPr>
+          <a:xfrm>
+            <a:off x="9116568" y="182880"/>
+            <a:ext cx="91440" cy="91440"/>
+          </a:xfrm>
+          <a:prstGeom prst="ellipse">
+            <a:avLst/>
+          </a:prstGeom>
+          <a:solidFill>
+            <a:srgbClr val="2E7D5B"/>
+          </a:solidFill>
+          <a:ln w="12700">
+            <a:solidFill>
+              <a:srgbClr val="2E7D5B"/>
+            </a:solidFill>
+            <a:prstDash val="solid"/>
+          </a:ln>
+        </p:spPr>
+      </p:sp>
+      <p:sp>
+        <p:nvSpPr>
+          <p:cNvPr id="10" name="Text 7"/>
+          <p:cNvSpPr/>
+          <p:nvPr/>
+        </p:nvSpPr>
+        <p:spPr>
+          <a:xfrm>
+            <a:off x="9299448" y="109728"/>
+            <a:ext cx="2286000" cy="237744"/>
+          </a:xfrm>
+          <a:prstGeom prst="rect">
+            <a:avLst/>
+          </a:prstGeom>
+          <a:noFill/>
+          <a:ln/>
+        </p:spPr>
+        <p:txBody>
+          <a:bodyPr wrap="square" lIns="0" tIns="0" rIns="0" bIns="0" rtlCol="0" anchor="ctr"/>
+          <a:lstStyle/>
+          <a:p>
+            <a:pPr indent="0" marL="0">
+              <a:buNone/>
+            </a:pPr>
+            <a:r>
+              <a:rPr lang="en-US" sz="800" b="1" spc="100" kern="0" dirty="0">
+                <a:solidFill>
+                  <a:srgbClr val="9FB2C2"/>
+                </a:solidFill>
+                <a:latin typeface="Inter" pitchFamily="34" charset="0"/>
+                <a:ea typeface="Inter" pitchFamily="34" charset="-122"/>
+                <a:cs typeface="Inter" pitchFamily="34" charset="-120"/>
+              </a:rPr>
+              <a:t>MS. RIVERA'S SCREEN · SO FAR</a:t>
+            </a:r>
+            <a:endParaRPr lang="en-US" sz="800" dirty="0"/>
+          </a:p>
+        </p:txBody>
+      </p:sp>
+      <p:sp>
+        <p:nvSpPr>
+          <p:cNvPr id="11" name="Text 8"/>
+          <p:cNvSpPr/>
+          <p:nvPr/>
+        </p:nvSpPr>
+        <p:spPr>
+          <a:xfrm>
+            <a:off x="8860536" y="365760"/>
+            <a:ext cx="2670048" cy="566928"/>
+          </a:xfrm>
+          <a:prstGeom prst="rect">
+            <a:avLst/>
+          </a:prstGeom>
+          <a:noFill/>
+          <a:ln/>
+        </p:spPr>
+        <p:txBody>
+          <a:bodyPr wrap="square" lIns="0" tIns="0" rIns="0" bIns="0" rtlCol="0" anchor="ctr"/>
+          <a:lstStyle/>
+          <a:p>
+            <a:pPr indent="0" marL="0">
+              <a:buNone/>
+            </a:pPr>
+            <a:r>
+              <a:rPr lang="en-US" sz="1000" dirty="0">
+                <a:solidFill>
+                  <a:srgbClr val="1B1F24"/>
+                </a:solidFill>
+                <a:latin typeface="Inter" pitchFamily="34" charset="0"/>
+                <a:ea typeface="Inter" pitchFamily="34" charset="-122"/>
+                <a:cs typeface="Inter" pitchFamily="34" charset="-120"/>
+              </a:rPr>
+              <a:t>Her judgment call: 80% right, iterate. Wrong thing entirely, fresh prompt.</a:t>
+            </a:r>
+            <a:endParaRPr lang="en-US" sz="1000" dirty="0"/>
+          </a:p>
+        </p:txBody>
+      </p:sp>
+      <p:sp>
+        <p:nvSpPr>
+          <p:cNvPr id="12" name="Text 9"/>
           <p:cNvSpPr/>
           <p:nvPr/>
         </p:nvSpPr>
@@ -7150,7 +8599,7 @@
       </p:sp>
       <p:sp>
         <p:nvSpPr>
-          <p:cNvPr id="6" name="Text 3"/>
+          <p:cNvPr id="13" name="Text 10"/>
           <p:cNvSpPr/>
           <p:nvPr/>
         </p:nvSpPr>
@@ -7189,7 +8638,7 @@
       </p:sp>
       <p:sp>
         <p:nvSpPr>
-          <p:cNvPr id="7" name="Shape 4"/>
+          <p:cNvPr id="14" name="Shape 11"/>
           <p:cNvSpPr/>
           <p:nvPr/>
         </p:nvSpPr>
@@ -7216,7 +8665,7 @@
       </p:sp>
       <p:sp>
         <p:nvSpPr>
-          <p:cNvPr id="8" name="Text 5"/>
+          <p:cNvPr id="15" name="Text 12"/>
           <p:cNvSpPr/>
           <p:nvPr/>
         </p:nvSpPr>
@@ -7255,7 +8704,7 @@
       </p:sp>
       <p:sp>
         <p:nvSpPr>
-          <p:cNvPr id="9" name="Text 6"/>
+          <p:cNvPr id="16" name="Text 13"/>
           <p:cNvSpPr/>
           <p:nvPr/>
         </p:nvSpPr>
@@ -7294,7 +8743,7 @@
       </p:sp>
       <p:sp>
         <p:nvSpPr>
-          <p:cNvPr id="10" name="Shape 7"/>
+          <p:cNvPr id="17" name="Shape 14"/>
           <p:cNvSpPr/>
           <p:nvPr/>
         </p:nvSpPr>
@@ -7321,7 +8770,7 @@
       </p:sp>
       <p:sp>
         <p:nvSpPr>
-          <p:cNvPr id="11" name="Text 8"/>
+          <p:cNvPr id="18" name="Text 15"/>
           <p:cNvSpPr/>
           <p:nvPr/>
         </p:nvSpPr>
@@ -7360,7 +8809,7 @@
       </p:sp>
       <p:sp>
         <p:nvSpPr>
-          <p:cNvPr id="12" name="Text 9"/>
+          <p:cNvPr id="19" name="Text 16"/>
           <p:cNvSpPr/>
           <p:nvPr/>
         </p:nvSpPr>
@@ -7399,7 +8848,7 @@
       </p:sp>
       <p:sp>
         <p:nvSpPr>
-          <p:cNvPr id="13" name="Text 10"/>
+          <p:cNvPr id="20" name="Text 17"/>
           <p:cNvSpPr/>
           <p:nvPr/>
         </p:nvSpPr>
@@ -7586,7 +9035,214 @@
       </p:sp>
       <p:sp>
         <p:nvSpPr>
-          <p:cNvPr id="5" name="Text 2"/>
+          <p:cNvPr id="5" name="Shape 2"/>
+          <p:cNvSpPr/>
+          <p:nvPr/>
+        </p:nvSpPr>
+        <p:spPr>
+          <a:xfrm>
+            <a:off x="8732520" y="109728"/>
+            <a:ext cx="2926080" cy="896112"/>
+          </a:xfrm>
+          <a:prstGeom prst="roundRect">
+            <a:avLst>
+              <a:gd name="adj" fmla="val 7143"/>
+            </a:avLst>
+          </a:prstGeom>
+          <a:solidFill>
+            <a:srgbClr val="F7F5F0"/>
+          </a:solidFill>
+          <a:ln w="12700">
+            <a:solidFill>
+              <a:srgbClr val="DCE3EA"/>
+            </a:solidFill>
+            <a:prstDash val="solid"/>
+          </a:ln>
+        </p:spPr>
+      </p:sp>
+      <p:sp>
+        <p:nvSpPr>
+          <p:cNvPr id="6" name="Shape 3"/>
+          <p:cNvSpPr/>
+          <p:nvPr/>
+        </p:nvSpPr>
+        <p:spPr>
+          <a:xfrm>
+            <a:off x="8732520" y="109728"/>
+            <a:ext cx="2926080" cy="237744"/>
+          </a:xfrm>
+          <a:prstGeom prst="roundRect">
+            <a:avLst>
+              <a:gd name="adj" fmla="val 26923"/>
+            </a:avLst>
+          </a:prstGeom>
+          <a:solidFill>
+            <a:srgbClr val="0D1E2E"/>
+          </a:solidFill>
+          <a:ln w="12700">
+            <a:solidFill>
+              <a:srgbClr val="0D1E2E"/>
+            </a:solidFill>
+            <a:prstDash val="solid"/>
+          </a:ln>
+        </p:spPr>
+      </p:sp>
+      <p:sp>
+        <p:nvSpPr>
+          <p:cNvPr id="7" name="Shape 4"/>
+          <p:cNvSpPr/>
+          <p:nvPr/>
+        </p:nvSpPr>
+        <p:spPr>
+          <a:xfrm>
+            <a:off x="8823960" y="182880"/>
+            <a:ext cx="91440" cy="91440"/>
+          </a:xfrm>
+          <a:prstGeom prst="ellipse">
+            <a:avLst/>
+          </a:prstGeom>
+          <a:solidFill>
+            <a:srgbClr val="E8837A"/>
+          </a:solidFill>
+          <a:ln w="12700">
+            <a:solidFill>
+              <a:srgbClr val="E8837A"/>
+            </a:solidFill>
+            <a:prstDash val="solid"/>
+          </a:ln>
+        </p:spPr>
+      </p:sp>
+      <p:sp>
+        <p:nvSpPr>
+          <p:cNvPr id="8" name="Shape 5"/>
+          <p:cNvSpPr/>
+          <p:nvPr/>
+        </p:nvSpPr>
+        <p:spPr>
+          <a:xfrm>
+            <a:off x="8970264" y="182880"/>
+            <a:ext cx="91440" cy="91440"/>
+          </a:xfrm>
+          <a:prstGeom prst="ellipse">
+            <a:avLst/>
+          </a:prstGeom>
+          <a:solidFill>
+            <a:srgbClr val="F4A825"/>
+          </a:solidFill>
+          <a:ln w="12700">
+            <a:solidFill>
+              <a:srgbClr val="F4A825"/>
+            </a:solidFill>
+            <a:prstDash val="solid"/>
+          </a:ln>
+        </p:spPr>
+      </p:sp>
+      <p:sp>
+        <p:nvSpPr>
+          <p:cNvPr id="9" name="Shape 6"/>
+          <p:cNvSpPr/>
+          <p:nvPr/>
+        </p:nvSpPr>
+        <p:spPr>
+          <a:xfrm>
+            <a:off x="9116568" y="182880"/>
+            <a:ext cx="91440" cy="91440"/>
+          </a:xfrm>
+          <a:prstGeom prst="ellipse">
+            <a:avLst/>
+          </a:prstGeom>
+          <a:solidFill>
+            <a:srgbClr val="2E7D5B"/>
+          </a:solidFill>
+          <a:ln w="12700">
+            <a:solidFill>
+              <a:srgbClr val="2E7D5B"/>
+            </a:solidFill>
+            <a:prstDash val="solid"/>
+          </a:ln>
+        </p:spPr>
+      </p:sp>
+      <p:sp>
+        <p:nvSpPr>
+          <p:cNvPr id="10" name="Text 7"/>
+          <p:cNvSpPr/>
+          <p:nvPr/>
+        </p:nvSpPr>
+        <p:spPr>
+          <a:xfrm>
+            <a:off x="9299448" y="109728"/>
+            <a:ext cx="2286000" cy="237744"/>
+          </a:xfrm>
+          <a:prstGeom prst="rect">
+            <a:avLst/>
+          </a:prstGeom>
+          <a:noFill/>
+          <a:ln/>
+        </p:spPr>
+        <p:txBody>
+          <a:bodyPr wrap="square" lIns="0" tIns="0" rIns="0" bIns="0" rtlCol="0" anchor="ctr"/>
+          <a:lstStyle/>
+          <a:p>
+            <a:pPr indent="0" marL="0">
+              <a:buNone/>
+            </a:pPr>
+            <a:r>
+              <a:rPr lang="en-US" sz="800" b="1" spc="100" kern="0" dirty="0">
+                <a:solidFill>
+                  <a:srgbClr val="9FB2C2"/>
+                </a:solidFill>
+                <a:latin typeface="Inter" pitchFamily="34" charset="0"/>
+                <a:ea typeface="Inter" pitchFamily="34" charset="-122"/>
+                <a:cs typeface="Inter" pitchFamily="34" charset="-120"/>
+              </a:rPr>
+              <a:t>MS. RIVERA'S SCREEN · SO FAR</a:t>
+            </a:r>
+            <a:endParaRPr lang="en-US" sz="800" dirty="0"/>
+          </a:p>
+        </p:txBody>
+      </p:sp>
+      <p:sp>
+        <p:nvSpPr>
+          <p:cNvPr id="11" name="Text 8"/>
+          <p:cNvSpPr/>
+          <p:nvPr/>
+        </p:nvSpPr>
+        <p:spPr>
+          <a:xfrm>
+            <a:off x="8860536" y="365760"/>
+            <a:ext cx="2670048" cy="566928"/>
+          </a:xfrm>
+          <a:prstGeom prst="rect">
+            <a:avLst/>
+          </a:prstGeom>
+          <a:noFill/>
+          <a:ln/>
+        </p:spPr>
+        <p:txBody>
+          <a:bodyPr wrap="square" lIns="0" tIns="0" rIns="0" bIns="0" rtlCol="0" anchor="ctr"/>
+          <a:lstStyle/>
+          <a:p>
+            <a:pPr indent="0" marL="0">
+              <a:buNone/>
+            </a:pPr>
+            <a:r>
+              <a:rPr lang="en-US" sz="1000" dirty="0">
+                <a:solidFill>
+                  <a:srgbClr val="1B1F24"/>
+                </a:solidFill>
+                <a:latin typeface="Inter" pitchFamily="34" charset="0"/>
+                <a:ea typeface="Inter" pitchFamily="34" charset="-122"/>
+                <a:cs typeface="Inter" pitchFamily="34" charset="-120"/>
+              </a:rPr>
+              <a:t>Her voice check: read it aloud; if it isn't her, she says 'warmer' or 'blunter.'</a:t>
+            </a:r>
+            <a:endParaRPr lang="en-US" sz="1000" dirty="0"/>
+          </a:p>
+        </p:txBody>
+      </p:sp>
+      <p:sp>
+        <p:nvSpPr>
+          <p:cNvPr id="12" name="Text 9"/>
           <p:cNvSpPr/>
           <p:nvPr/>
         </p:nvSpPr>
@@ -7625,7 +9281,7 @@
       </p:sp>
       <p:sp>
         <p:nvSpPr>
-          <p:cNvPr id="6" name="Text 3"/>
+          <p:cNvPr id="13" name="Text 10"/>
           <p:cNvSpPr/>
           <p:nvPr/>
         </p:nvSpPr>
@@ -7664,7 +9320,7 @@
       </p:sp>
       <p:sp>
         <p:nvSpPr>
-          <p:cNvPr id="7" name="Text 4"/>
+          <p:cNvPr id="14" name="Text 11"/>
           <p:cNvSpPr/>
           <p:nvPr/>
         </p:nvSpPr>
@@ -7749,7 +9405,7 @@
       </p:sp>
       <p:sp>
         <p:nvSpPr>
-          <p:cNvPr id="8" name="Shape 5"/>
+          <p:cNvPr id="15" name="Shape 12"/>
           <p:cNvSpPr/>
           <p:nvPr/>
         </p:nvSpPr>
@@ -7776,7 +9432,7 @@
       </p:sp>
       <p:sp>
         <p:nvSpPr>
-          <p:cNvPr id="9" name="Text 6"/>
+          <p:cNvPr id="16" name="Text 13"/>
           <p:cNvSpPr/>
           <p:nvPr/>
         </p:nvSpPr>
@@ -7963,7 +9619,214 @@
       </p:sp>
       <p:sp>
         <p:nvSpPr>
-          <p:cNvPr id="5" name="Text 2"/>
+          <p:cNvPr id="5" name="Shape 2"/>
+          <p:cNvSpPr/>
+          <p:nvPr/>
+        </p:nvSpPr>
+        <p:spPr>
+          <a:xfrm>
+            <a:off x="8732520" y="109728"/>
+            <a:ext cx="2926080" cy="896112"/>
+          </a:xfrm>
+          <a:prstGeom prst="roundRect">
+            <a:avLst>
+              <a:gd name="adj" fmla="val 7143"/>
+            </a:avLst>
+          </a:prstGeom>
+          <a:solidFill>
+            <a:srgbClr val="1E3A50"/>
+          </a:solidFill>
+          <a:ln w="12700">
+            <a:solidFill>
+              <a:srgbClr val="2A4A63"/>
+            </a:solidFill>
+            <a:prstDash val="solid"/>
+          </a:ln>
+        </p:spPr>
+      </p:sp>
+      <p:sp>
+        <p:nvSpPr>
+          <p:cNvPr id="6" name="Shape 3"/>
+          <p:cNvSpPr/>
+          <p:nvPr/>
+        </p:nvSpPr>
+        <p:spPr>
+          <a:xfrm>
+            <a:off x="8732520" y="109728"/>
+            <a:ext cx="2926080" cy="237744"/>
+          </a:xfrm>
+          <a:prstGeom prst="roundRect">
+            <a:avLst>
+              <a:gd name="adj" fmla="val 26923"/>
+            </a:avLst>
+          </a:prstGeom>
+          <a:solidFill>
+            <a:srgbClr val="0D1E2E"/>
+          </a:solidFill>
+          <a:ln w="12700">
+            <a:solidFill>
+              <a:srgbClr val="0D1E2E"/>
+            </a:solidFill>
+            <a:prstDash val="solid"/>
+          </a:ln>
+        </p:spPr>
+      </p:sp>
+      <p:sp>
+        <p:nvSpPr>
+          <p:cNvPr id="7" name="Shape 4"/>
+          <p:cNvSpPr/>
+          <p:nvPr/>
+        </p:nvSpPr>
+        <p:spPr>
+          <a:xfrm>
+            <a:off x="8823960" y="182880"/>
+            <a:ext cx="91440" cy="91440"/>
+          </a:xfrm>
+          <a:prstGeom prst="ellipse">
+            <a:avLst/>
+          </a:prstGeom>
+          <a:solidFill>
+            <a:srgbClr val="E8837A"/>
+          </a:solidFill>
+          <a:ln w="12700">
+            <a:solidFill>
+              <a:srgbClr val="E8837A"/>
+            </a:solidFill>
+            <a:prstDash val="solid"/>
+          </a:ln>
+        </p:spPr>
+      </p:sp>
+      <p:sp>
+        <p:nvSpPr>
+          <p:cNvPr id="8" name="Shape 5"/>
+          <p:cNvSpPr/>
+          <p:nvPr/>
+        </p:nvSpPr>
+        <p:spPr>
+          <a:xfrm>
+            <a:off x="8970264" y="182880"/>
+            <a:ext cx="91440" cy="91440"/>
+          </a:xfrm>
+          <a:prstGeom prst="ellipse">
+            <a:avLst/>
+          </a:prstGeom>
+          <a:solidFill>
+            <a:srgbClr val="F4A825"/>
+          </a:solidFill>
+          <a:ln w="12700">
+            <a:solidFill>
+              <a:srgbClr val="F4A825"/>
+            </a:solidFill>
+            <a:prstDash val="solid"/>
+          </a:ln>
+        </p:spPr>
+      </p:sp>
+      <p:sp>
+        <p:nvSpPr>
+          <p:cNvPr id="9" name="Shape 6"/>
+          <p:cNvSpPr/>
+          <p:nvPr/>
+        </p:nvSpPr>
+        <p:spPr>
+          <a:xfrm>
+            <a:off x="9116568" y="182880"/>
+            <a:ext cx="91440" cy="91440"/>
+          </a:xfrm>
+          <a:prstGeom prst="ellipse">
+            <a:avLst/>
+          </a:prstGeom>
+          <a:solidFill>
+            <a:srgbClr val="2E7D5B"/>
+          </a:solidFill>
+          <a:ln w="12700">
+            <a:solidFill>
+              <a:srgbClr val="2E7D5B"/>
+            </a:solidFill>
+            <a:prstDash val="solid"/>
+          </a:ln>
+        </p:spPr>
+      </p:sp>
+      <p:sp>
+        <p:nvSpPr>
+          <p:cNvPr id="10" name="Text 7"/>
+          <p:cNvSpPr/>
+          <p:nvPr/>
+        </p:nvSpPr>
+        <p:spPr>
+          <a:xfrm>
+            <a:off x="9299448" y="109728"/>
+            <a:ext cx="2286000" cy="237744"/>
+          </a:xfrm>
+          <a:prstGeom prst="rect">
+            <a:avLst/>
+          </a:prstGeom>
+          <a:noFill/>
+          <a:ln/>
+        </p:spPr>
+        <p:txBody>
+          <a:bodyPr wrap="square" lIns="0" tIns="0" rIns="0" bIns="0" rtlCol="0" anchor="ctr"/>
+          <a:lstStyle/>
+          <a:p>
+            <a:pPr indent="0" marL="0">
+              <a:buNone/>
+            </a:pPr>
+            <a:r>
+              <a:rPr lang="en-US" sz="800" b="1" spc="100" kern="0" dirty="0">
+                <a:solidFill>
+                  <a:srgbClr val="9FB2C2"/>
+                </a:solidFill>
+                <a:latin typeface="Inter" pitchFamily="34" charset="0"/>
+                <a:ea typeface="Inter" pitchFamily="34" charset="-122"/>
+                <a:cs typeface="Inter" pitchFamily="34" charset="-120"/>
+              </a:rPr>
+              <a:t>MS. RIVERA'S SCREEN · SO FAR</a:t>
+            </a:r>
+            <a:endParaRPr lang="en-US" sz="800" dirty="0"/>
+          </a:p>
+        </p:txBody>
+      </p:sp>
+      <p:sp>
+        <p:nvSpPr>
+          <p:cNvPr id="11" name="Text 8"/>
+          <p:cNvSpPr/>
+          <p:nvPr/>
+        </p:nvSpPr>
+        <p:spPr>
+          <a:xfrm>
+            <a:off x="8860536" y="365760"/>
+            <a:ext cx="2670048" cy="566928"/>
+          </a:xfrm>
+          <a:prstGeom prst="rect">
+            <a:avLst/>
+          </a:prstGeom>
+          <a:noFill/>
+          <a:ln/>
+        </p:spPr>
+        <p:txBody>
+          <a:bodyPr wrap="square" lIns="0" tIns="0" rIns="0" bIns="0" rtlCol="0" anchor="ctr"/>
+          <a:lstStyle/>
+          <a:p>
+            <a:pPr indent="0" marL="0">
+              <a:buNone/>
+            </a:pPr>
+            <a:r>
+              <a:rPr lang="en-US" sz="1000" dirty="0">
+                <a:solidFill>
+                  <a:srgbClr val="C9D4DE"/>
+                </a:solidFill>
+                <a:latin typeface="Inter" pitchFamily="34" charset="0"/>
+                <a:ea typeface="Inter" pitchFamily="34" charset="-122"/>
+                <a:cs typeface="Inter" pitchFamily="34" charset="-120"/>
+              </a:rPr>
+              <a:t>Her lab pick: the Friday newsletter. Weekly task, real payoff.</a:t>
+            </a:r>
+            <a:endParaRPr lang="en-US" sz="1000" dirty="0"/>
+          </a:p>
+        </p:txBody>
+      </p:sp>
+      <p:sp>
+        <p:nvSpPr>
+          <p:cNvPr id="12" name="Text 9"/>
           <p:cNvSpPr/>
           <p:nvPr/>
         </p:nvSpPr>
@@ -8002,7 +9865,7 @@
       </p:sp>
       <p:sp>
         <p:nvSpPr>
-          <p:cNvPr id="6" name="Text 3"/>
+          <p:cNvPr id="13" name="Text 10"/>
           <p:cNvSpPr/>
           <p:nvPr/>
         </p:nvSpPr>
@@ -8041,7 +9904,7 @@
       </p:sp>
       <p:sp>
         <p:nvSpPr>
-          <p:cNvPr id="7" name="Text 4"/>
+          <p:cNvPr id="14" name="Text 11"/>
           <p:cNvSpPr/>
           <p:nvPr/>
         </p:nvSpPr>
@@ -8080,7 +9943,7 @@
       </p:sp>
       <p:sp>
         <p:nvSpPr>
-          <p:cNvPr id="8" name="Shape 5"/>
+          <p:cNvPr id="15" name="Shape 12"/>
           <p:cNvSpPr/>
           <p:nvPr/>
         </p:nvSpPr>
@@ -8105,7 +9968,7 @@
       </p:sp>
       <p:sp>
         <p:nvSpPr>
-          <p:cNvPr id="9" name="Text 6"/>
+          <p:cNvPr id="16" name="Text 13"/>
           <p:cNvSpPr/>
           <p:nvPr/>
         </p:nvSpPr>
@@ -8144,7 +10007,7 @@
       </p:sp>
       <p:sp>
         <p:nvSpPr>
-          <p:cNvPr id="10" name="Text 7"/>
+          <p:cNvPr id="17" name="Text 14"/>
           <p:cNvSpPr/>
           <p:nvPr/>
         </p:nvSpPr>
@@ -8183,7 +10046,7 @@
       </p:sp>
       <p:sp>
         <p:nvSpPr>
-          <p:cNvPr id="11" name="Shape 8"/>
+          <p:cNvPr id="18" name="Shape 15"/>
           <p:cNvSpPr/>
           <p:nvPr/>
         </p:nvSpPr>
@@ -8208,7 +10071,7 @@
       </p:sp>
       <p:sp>
         <p:nvSpPr>
-          <p:cNvPr id="12" name="Text 9"/>
+          <p:cNvPr id="19" name="Text 16"/>
           <p:cNvSpPr/>
           <p:nvPr/>
         </p:nvSpPr>
@@ -8247,7 +10110,7 @@
       </p:sp>
       <p:sp>
         <p:nvSpPr>
-          <p:cNvPr id="13" name="Text 10"/>
+          <p:cNvPr id="20" name="Text 17"/>
           <p:cNvSpPr/>
           <p:nvPr/>
         </p:nvSpPr>
@@ -8286,7 +10149,7 @@
       </p:sp>
       <p:sp>
         <p:nvSpPr>
-          <p:cNvPr id="14" name="Shape 11"/>
+          <p:cNvPr id="21" name="Shape 18"/>
           <p:cNvSpPr/>
           <p:nvPr/>
         </p:nvSpPr>
@@ -8311,7 +10174,7 @@
       </p:sp>
       <p:sp>
         <p:nvSpPr>
-          <p:cNvPr id="15" name="Text 12"/>
+          <p:cNvPr id="22" name="Text 19"/>
           <p:cNvSpPr/>
           <p:nvPr/>
         </p:nvSpPr>
@@ -8350,7 +10213,7 @@
       </p:sp>
       <p:sp>
         <p:nvSpPr>
-          <p:cNvPr id="16" name="Text 13"/>
+          <p:cNvPr id="23" name="Text 20"/>
           <p:cNvSpPr/>
           <p:nvPr/>
         </p:nvSpPr>
@@ -8537,7 +10400,214 @@
       </p:sp>
       <p:sp>
         <p:nvSpPr>
-          <p:cNvPr id="5" name="Text 2"/>
+          <p:cNvPr id="5" name="Shape 2"/>
+          <p:cNvSpPr/>
+          <p:nvPr/>
+        </p:nvSpPr>
+        <p:spPr>
+          <a:xfrm>
+            <a:off x="8732520" y="109728"/>
+            <a:ext cx="2926080" cy="896112"/>
+          </a:xfrm>
+          <a:prstGeom prst="roundRect">
+            <a:avLst>
+              <a:gd name="adj" fmla="val 7143"/>
+            </a:avLst>
+          </a:prstGeom>
+          <a:solidFill>
+            <a:srgbClr val="F7F5F0"/>
+          </a:solidFill>
+          <a:ln w="12700">
+            <a:solidFill>
+              <a:srgbClr val="DCE3EA"/>
+            </a:solidFill>
+            <a:prstDash val="solid"/>
+          </a:ln>
+        </p:spPr>
+      </p:sp>
+      <p:sp>
+        <p:nvSpPr>
+          <p:cNvPr id="6" name="Shape 3"/>
+          <p:cNvSpPr/>
+          <p:nvPr/>
+        </p:nvSpPr>
+        <p:spPr>
+          <a:xfrm>
+            <a:off x="8732520" y="109728"/>
+            <a:ext cx="2926080" cy="237744"/>
+          </a:xfrm>
+          <a:prstGeom prst="roundRect">
+            <a:avLst>
+              <a:gd name="adj" fmla="val 26923"/>
+            </a:avLst>
+          </a:prstGeom>
+          <a:solidFill>
+            <a:srgbClr val="0D1E2E"/>
+          </a:solidFill>
+          <a:ln w="12700">
+            <a:solidFill>
+              <a:srgbClr val="0D1E2E"/>
+            </a:solidFill>
+            <a:prstDash val="solid"/>
+          </a:ln>
+        </p:spPr>
+      </p:sp>
+      <p:sp>
+        <p:nvSpPr>
+          <p:cNvPr id="7" name="Shape 4"/>
+          <p:cNvSpPr/>
+          <p:nvPr/>
+        </p:nvSpPr>
+        <p:spPr>
+          <a:xfrm>
+            <a:off x="8823960" y="182880"/>
+            <a:ext cx="91440" cy="91440"/>
+          </a:xfrm>
+          <a:prstGeom prst="ellipse">
+            <a:avLst/>
+          </a:prstGeom>
+          <a:solidFill>
+            <a:srgbClr val="E8837A"/>
+          </a:solidFill>
+          <a:ln w="12700">
+            <a:solidFill>
+              <a:srgbClr val="E8837A"/>
+            </a:solidFill>
+            <a:prstDash val="solid"/>
+          </a:ln>
+        </p:spPr>
+      </p:sp>
+      <p:sp>
+        <p:nvSpPr>
+          <p:cNvPr id="8" name="Shape 5"/>
+          <p:cNvSpPr/>
+          <p:nvPr/>
+        </p:nvSpPr>
+        <p:spPr>
+          <a:xfrm>
+            <a:off x="8970264" y="182880"/>
+            <a:ext cx="91440" cy="91440"/>
+          </a:xfrm>
+          <a:prstGeom prst="ellipse">
+            <a:avLst/>
+          </a:prstGeom>
+          <a:solidFill>
+            <a:srgbClr val="F4A825"/>
+          </a:solidFill>
+          <a:ln w="12700">
+            <a:solidFill>
+              <a:srgbClr val="F4A825"/>
+            </a:solidFill>
+            <a:prstDash val="solid"/>
+          </a:ln>
+        </p:spPr>
+      </p:sp>
+      <p:sp>
+        <p:nvSpPr>
+          <p:cNvPr id="9" name="Shape 6"/>
+          <p:cNvSpPr/>
+          <p:nvPr/>
+        </p:nvSpPr>
+        <p:spPr>
+          <a:xfrm>
+            <a:off x="9116568" y="182880"/>
+            <a:ext cx="91440" cy="91440"/>
+          </a:xfrm>
+          <a:prstGeom prst="ellipse">
+            <a:avLst/>
+          </a:prstGeom>
+          <a:solidFill>
+            <a:srgbClr val="2E7D5B"/>
+          </a:solidFill>
+          <a:ln w="12700">
+            <a:solidFill>
+              <a:srgbClr val="2E7D5B"/>
+            </a:solidFill>
+            <a:prstDash val="solid"/>
+          </a:ln>
+        </p:spPr>
+      </p:sp>
+      <p:sp>
+        <p:nvSpPr>
+          <p:cNvPr id="10" name="Text 7"/>
+          <p:cNvSpPr/>
+          <p:nvPr/>
+        </p:nvSpPr>
+        <p:spPr>
+          <a:xfrm>
+            <a:off x="9299448" y="109728"/>
+            <a:ext cx="2286000" cy="237744"/>
+          </a:xfrm>
+          <a:prstGeom prst="rect">
+            <a:avLst/>
+          </a:prstGeom>
+          <a:noFill/>
+          <a:ln/>
+        </p:spPr>
+        <p:txBody>
+          <a:bodyPr wrap="square" lIns="0" tIns="0" rIns="0" bIns="0" rtlCol="0" anchor="ctr"/>
+          <a:lstStyle/>
+          <a:p>
+            <a:pPr indent="0" marL="0">
+              <a:buNone/>
+            </a:pPr>
+            <a:r>
+              <a:rPr lang="en-US" sz="800" b="1" spc="100" kern="0" dirty="0">
+                <a:solidFill>
+                  <a:srgbClr val="9FB2C2"/>
+                </a:solidFill>
+                <a:latin typeface="Inter" pitchFamily="34" charset="0"/>
+                <a:ea typeface="Inter" pitchFamily="34" charset="-122"/>
+                <a:cs typeface="Inter" pitchFamily="34" charset="-120"/>
+              </a:rPr>
+              <a:t>MS. RIVERA'S SCREEN · SO FAR</a:t>
+            </a:r>
+            <a:endParaRPr lang="en-US" sz="800" dirty="0"/>
+          </a:p>
+        </p:txBody>
+      </p:sp>
+      <p:sp>
+        <p:nvSpPr>
+          <p:cNvPr id="11" name="Text 8"/>
+          <p:cNvSpPr/>
+          <p:nvPr/>
+        </p:nvSpPr>
+        <p:spPr>
+          <a:xfrm>
+            <a:off x="8860536" y="365760"/>
+            <a:ext cx="2670048" cy="566928"/>
+          </a:xfrm>
+          <a:prstGeom prst="rect">
+            <a:avLst/>
+          </a:prstGeom>
+          <a:noFill/>
+          <a:ln/>
+        </p:spPr>
+        <p:txBody>
+          <a:bodyPr wrap="square" lIns="0" tIns="0" rIns="0" bIns="0" rtlCol="0" anchor="ctr"/>
+          <a:lstStyle/>
+          <a:p>
+            <a:pPr indent="0" marL="0">
+              <a:buNone/>
+            </a:pPr>
+            <a:r>
+              <a:rPr lang="en-US" sz="1000" dirty="0">
+                <a:solidFill>
+                  <a:srgbClr val="1B1F24"/>
+                </a:solidFill>
+                <a:latin typeface="Inter" pitchFamily="34" charset="0"/>
+                <a:ea typeface="Inter" pitchFamily="34" charset="-122"/>
+                <a:cs typeface="Inter" pitchFamily="34" charset="-120"/>
+              </a:rPr>
+              <a:t>On her screen: the four-part draft, run once, read like an editor.</a:t>
+            </a:r>
+            <a:endParaRPr lang="en-US" sz="1000" dirty="0"/>
+          </a:p>
+        </p:txBody>
+      </p:sp>
+      <p:sp>
+        <p:nvSpPr>
+          <p:cNvPr id="12" name="Text 9"/>
           <p:cNvSpPr/>
           <p:nvPr/>
         </p:nvSpPr>
@@ -8576,7 +10646,7 @@
       </p:sp>
       <p:sp>
         <p:nvSpPr>
-          <p:cNvPr id="6" name="Text 3"/>
+          <p:cNvPr id="13" name="Text 10"/>
           <p:cNvSpPr/>
           <p:nvPr/>
         </p:nvSpPr>
@@ -8615,7 +10685,7 @@
       </p:sp>
       <p:sp>
         <p:nvSpPr>
-          <p:cNvPr id="7" name="Shape 4"/>
+          <p:cNvPr id="14" name="Shape 11"/>
           <p:cNvSpPr/>
           <p:nvPr/>
         </p:nvSpPr>
@@ -8642,7 +10712,7 @@
       </p:sp>
       <p:sp>
         <p:nvSpPr>
-          <p:cNvPr id="8" name="Text 5"/>
+          <p:cNvPr id="15" name="Text 12"/>
           <p:cNvSpPr/>
           <p:nvPr/>
         </p:nvSpPr>
@@ -8681,7 +10751,7 @@
       </p:sp>
       <p:sp>
         <p:nvSpPr>
-          <p:cNvPr id="9" name="Shape 6"/>
+          <p:cNvPr id="16" name="Shape 13"/>
           <p:cNvSpPr/>
           <p:nvPr/>
         </p:nvSpPr>
@@ -8708,7 +10778,7 @@
       </p:sp>
       <p:sp>
         <p:nvSpPr>
-          <p:cNvPr id="10" name="Text 7"/>
+          <p:cNvPr id="17" name="Text 14"/>
           <p:cNvSpPr/>
           <p:nvPr/>
         </p:nvSpPr>
@@ -8747,7 +10817,7 @@
       </p:sp>
       <p:sp>
         <p:nvSpPr>
-          <p:cNvPr id="11" name="Shape 8"/>
+          <p:cNvPr id="18" name="Shape 15"/>
           <p:cNvSpPr/>
           <p:nvPr/>
         </p:nvSpPr>
@@ -8774,7 +10844,7 @@
       </p:sp>
       <p:sp>
         <p:nvSpPr>
-          <p:cNvPr id="12" name="Text 9"/>
+          <p:cNvPr id="19" name="Text 16"/>
           <p:cNvSpPr/>
           <p:nvPr/>
         </p:nvSpPr>
@@ -8813,7 +10883,7 @@
       </p:sp>
       <p:sp>
         <p:nvSpPr>
-          <p:cNvPr id="13" name="Shape 10"/>
+          <p:cNvPr id="20" name="Shape 17"/>
           <p:cNvSpPr/>
           <p:nvPr/>
         </p:nvSpPr>
@@ -8840,7 +10910,7 @@
       </p:sp>
       <p:sp>
         <p:nvSpPr>
-          <p:cNvPr id="14" name="Text 11"/>
+          <p:cNvPr id="21" name="Text 18"/>
           <p:cNvSpPr/>
           <p:nvPr/>
         </p:nvSpPr>
@@ -8879,7 +10949,7 @@
       </p:sp>
       <p:sp>
         <p:nvSpPr>
-          <p:cNvPr id="15" name="Text 12"/>
+          <p:cNvPr id="22" name="Text 19"/>
           <p:cNvSpPr/>
           <p:nvPr/>
         </p:nvSpPr>
@@ -9066,7 +11136,214 @@
       </p:sp>
       <p:sp>
         <p:nvSpPr>
-          <p:cNvPr id="5" name="Text 2"/>
+          <p:cNvPr id="5" name="Shape 2"/>
+          <p:cNvSpPr/>
+          <p:nvPr/>
+        </p:nvSpPr>
+        <p:spPr>
+          <a:xfrm>
+            <a:off x="8732520" y="109728"/>
+            <a:ext cx="2926080" cy="896112"/>
+          </a:xfrm>
+          <a:prstGeom prst="roundRect">
+            <a:avLst>
+              <a:gd name="adj" fmla="val 7143"/>
+            </a:avLst>
+          </a:prstGeom>
+          <a:solidFill>
+            <a:srgbClr val="F7F5F0"/>
+          </a:solidFill>
+          <a:ln w="12700">
+            <a:solidFill>
+              <a:srgbClr val="DCE3EA"/>
+            </a:solidFill>
+            <a:prstDash val="solid"/>
+          </a:ln>
+        </p:spPr>
+      </p:sp>
+      <p:sp>
+        <p:nvSpPr>
+          <p:cNvPr id="6" name="Shape 3"/>
+          <p:cNvSpPr/>
+          <p:nvPr/>
+        </p:nvSpPr>
+        <p:spPr>
+          <a:xfrm>
+            <a:off x="8732520" y="109728"/>
+            <a:ext cx="2926080" cy="237744"/>
+          </a:xfrm>
+          <a:prstGeom prst="roundRect">
+            <a:avLst>
+              <a:gd name="adj" fmla="val 26923"/>
+            </a:avLst>
+          </a:prstGeom>
+          <a:solidFill>
+            <a:srgbClr val="0D1E2E"/>
+          </a:solidFill>
+          <a:ln w="12700">
+            <a:solidFill>
+              <a:srgbClr val="0D1E2E"/>
+            </a:solidFill>
+            <a:prstDash val="solid"/>
+          </a:ln>
+        </p:spPr>
+      </p:sp>
+      <p:sp>
+        <p:nvSpPr>
+          <p:cNvPr id="7" name="Shape 4"/>
+          <p:cNvSpPr/>
+          <p:nvPr/>
+        </p:nvSpPr>
+        <p:spPr>
+          <a:xfrm>
+            <a:off x="8823960" y="182880"/>
+            <a:ext cx="91440" cy="91440"/>
+          </a:xfrm>
+          <a:prstGeom prst="ellipse">
+            <a:avLst/>
+          </a:prstGeom>
+          <a:solidFill>
+            <a:srgbClr val="E8837A"/>
+          </a:solidFill>
+          <a:ln w="12700">
+            <a:solidFill>
+              <a:srgbClr val="E8837A"/>
+            </a:solidFill>
+            <a:prstDash val="solid"/>
+          </a:ln>
+        </p:spPr>
+      </p:sp>
+      <p:sp>
+        <p:nvSpPr>
+          <p:cNvPr id="8" name="Shape 5"/>
+          <p:cNvSpPr/>
+          <p:nvPr/>
+        </p:nvSpPr>
+        <p:spPr>
+          <a:xfrm>
+            <a:off x="8970264" y="182880"/>
+            <a:ext cx="91440" cy="91440"/>
+          </a:xfrm>
+          <a:prstGeom prst="ellipse">
+            <a:avLst/>
+          </a:prstGeom>
+          <a:solidFill>
+            <a:srgbClr val="F4A825"/>
+          </a:solidFill>
+          <a:ln w="12700">
+            <a:solidFill>
+              <a:srgbClr val="F4A825"/>
+            </a:solidFill>
+            <a:prstDash val="solid"/>
+          </a:ln>
+        </p:spPr>
+      </p:sp>
+      <p:sp>
+        <p:nvSpPr>
+          <p:cNvPr id="9" name="Shape 6"/>
+          <p:cNvSpPr/>
+          <p:nvPr/>
+        </p:nvSpPr>
+        <p:spPr>
+          <a:xfrm>
+            <a:off x="9116568" y="182880"/>
+            <a:ext cx="91440" cy="91440"/>
+          </a:xfrm>
+          <a:prstGeom prst="ellipse">
+            <a:avLst/>
+          </a:prstGeom>
+          <a:solidFill>
+            <a:srgbClr val="2E7D5B"/>
+          </a:solidFill>
+          <a:ln w="12700">
+            <a:solidFill>
+              <a:srgbClr val="2E7D5B"/>
+            </a:solidFill>
+            <a:prstDash val="solid"/>
+          </a:ln>
+        </p:spPr>
+      </p:sp>
+      <p:sp>
+        <p:nvSpPr>
+          <p:cNvPr id="10" name="Text 7"/>
+          <p:cNvSpPr/>
+          <p:nvPr/>
+        </p:nvSpPr>
+        <p:spPr>
+          <a:xfrm>
+            <a:off x="9299448" y="109728"/>
+            <a:ext cx="2286000" cy="237744"/>
+          </a:xfrm>
+          <a:prstGeom prst="rect">
+            <a:avLst/>
+          </a:prstGeom>
+          <a:noFill/>
+          <a:ln/>
+        </p:spPr>
+        <p:txBody>
+          <a:bodyPr wrap="square" lIns="0" tIns="0" rIns="0" bIns="0" rtlCol="0" anchor="ctr"/>
+          <a:lstStyle/>
+          <a:p>
+            <a:pPr indent="0" marL="0">
+              <a:buNone/>
+            </a:pPr>
+            <a:r>
+              <a:rPr lang="en-US" sz="800" b="1" spc="100" kern="0" dirty="0">
+                <a:solidFill>
+                  <a:srgbClr val="9FB2C2"/>
+                </a:solidFill>
+                <a:latin typeface="Inter" pitchFamily="34" charset="0"/>
+                <a:ea typeface="Inter" pitchFamily="34" charset="-122"/>
+                <a:cs typeface="Inter" pitchFamily="34" charset="-120"/>
+              </a:rPr>
+              <a:t>MS. RIVERA'S SCREEN · SO FAR</a:t>
+            </a:r>
+            <a:endParaRPr lang="en-US" sz="800" dirty="0"/>
+          </a:p>
+        </p:txBody>
+      </p:sp>
+      <p:sp>
+        <p:nvSpPr>
+          <p:cNvPr id="11" name="Text 8"/>
+          <p:cNvSpPr/>
+          <p:nvPr/>
+        </p:nvSpPr>
+        <p:spPr>
+          <a:xfrm>
+            <a:off x="8860536" y="365760"/>
+            <a:ext cx="2670048" cy="566928"/>
+          </a:xfrm>
+          <a:prstGeom prst="rect">
+            <a:avLst/>
+          </a:prstGeom>
+          <a:noFill/>
+          <a:ln/>
+        </p:spPr>
+        <p:txBody>
+          <a:bodyPr wrap="square" lIns="0" tIns="0" rIns="0" bIns="0" rtlCol="0" anchor="ctr"/>
+          <a:lstStyle/>
+          <a:p>
+            <a:pPr indent="0" marL="0">
+              <a:buNone/>
+            </a:pPr>
+            <a:r>
+              <a:rPr lang="en-US" sz="1000" dirty="0">
+                <a:solidFill>
+                  <a:srgbClr val="1B1F24"/>
+                </a:solidFill>
+                <a:latin typeface="Inter" pitchFamily="34" charset="0"/>
+                <a:ea typeface="Inter" pitchFamily="34" charset="-122"/>
+                <a:cs typeface="Inter" pitchFamily="34" charset="-120"/>
+              </a:rPr>
+              <a:t>Her gap: same tools as the weekly savers. The skill is what differs.</a:t>
+            </a:r>
+            <a:endParaRPr lang="en-US" sz="1000" dirty="0"/>
+          </a:p>
+        </p:txBody>
+      </p:sp>
+      <p:sp>
+        <p:nvSpPr>
+          <p:cNvPr id="12" name="Text 9"/>
           <p:cNvSpPr/>
           <p:nvPr/>
         </p:nvSpPr>
@@ -9105,7 +11382,7 @@
       </p:sp>
       <p:sp>
         <p:nvSpPr>
-          <p:cNvPr id="6" name="Text 3"/>
+          <p:cNvPr id="13" name="Text 10"/>
           <p:cNvSpPr/>
           <p:nvPr/>
         </p:nvSpPr>
@@ -9144,7 +11421,7 @@
       </p:sp>
       <p:sp>
         <p:nvSpPr>
-          <p:cNvPr id="7" name="Shape 4"/>
+          <p:cNvPr id="14" name="Shape 11"/>
           <p:cNvSpPr/>
           <p:nvPr/>
         </p:nvSpPr>
@@ -9171,7 +11448,7 @@
       </p:sp>
       <p:sp>
         <p:nvSpPr>
-          <p:cNvPr id="8" name="Text 5"/>
+          <p:cNvPr id="15" name="Text 12"/>
           <p:cNvSpPr/>
           <p:nvPr/>
         </p:nvSpPr>
@@ -9210,7 +11487,7 @@
       </p:sp>
       <p:sp>
         <p:nvSpPr>
-          <p:cNvPr id="9" name="Text 6"/>
+          <p:cNvPr id="16" name="Text 13"/>
           <p:cNvSpPr/>
           <p:nvPr/>
         </p:nvSpPr>
@@ -9283,7 +11560,7 @@
       </p:sp>
       <p:sp>
         <p:nvSpPr>
-          <p:cNvPr id="10" name="Shape 7"/>
+          <p:cNvPr id="17" name="Shape 14"/>
           <p:cNvSpPr/>
           <p:nvPr/>
         </p:nvSpPr>
@@ -9310,7 +11587,7 @@
       </p:sp>
       <p:sp>
         <p:nvSpPr>
-          <p:cNvPr id="11" name="Text 8"/>
+          <p:cNvPr id="18" name="Text 15"/>
           <p:cNvSpPr/>
           <p:nvPr/>
         </p:nvSpPr>
@@ -9349,7 +11626,7 @@
       </p:sp>
       <p:sp>
         <p:nvSpPr>
-          <p:cNvPr id="12" name="Text 9"/>
+          <p:cNvPr id="19" name="Text 16"/>
           <p:cNvSpPr/>
           <p:nvPr/>
         </p:nvSpPr>
@@ -9422,7 +11699,7 @@
       </p:sp>
       <p:sp>
         <p:nvSpPr>
-          <p:cNvPr id="13" name="Text 10"/>
+          <p:cNvPr id="20" name="Text 17"/>
           <p:cNvSpPr/>
           <p:nvPr/>
         </p:nvSpPr>
@@ -9609,7 +11886,214 @@
       </p:sp>
       <p:sp>
         <p:nvSpPr>
-          <p:cNvPr id="5" name="Text 2"/>
+          <p:cNvPr id="5" name="Shape 2"/>
+          <p:cNvSpPr/>
+          <p:nvPr/>
+        </p:nvSpPr>
+        <p:spPr>
+          <a:xfrm>
+            <a:off x="8732520" y="109728"/>
+            <a:ext cx="2926080" cy="896112"/>
+          </a:xfrm>
+          <a:prstGeom prst="roundRect">
+            <a:avLst>
+              <a:gd name="adj" fmla="val 7143"/>
+            </a:avLst>
+          </a:prstGeom>
+          <a:solidFill>
+            <a:srgbClr val="F7F5F0"/>
+          </a:solidFill>
+          <a:ln w="12700">
+            <a:solidFill>
+              <a:srgbClr val="DCE3EA"/>
+            </a:solidFill>
+            <a:prstDash val="solid"/>
+          </a:ln>
+        </p:spPr>
+      </p:sp>
+      <p:sp>
+        <p:nvSpPr>
+          <p:cNvPr id="6" name="Shape 3"/>
+          <p:cNvSpPr/>
+          <p:nvPr/>
+        </p:nvSpPr>
+        <p:spPr>
+          <a:xfrm>
+            <a:off x="8732520" y="109728"/>
+            <a:ext cx="2926080" cy="237744"/>
+          </a:xfrm>
+          <a:prstGeom prst="roundRect">
+            <a:avLst>
+              <a:gd name="adj" fmla="val 26923"/>
+            </a:avLst>
+          </a:prstGeom>
+          <a:solidFill>
+            <a:srgbClr val="0D1E2E"/>
+          </a:solidFill>
+          <a:ln w="12700">
+            <a:solidFill>
+              <a:srgbClr val="0D1E2E"/>
+            </a:solidFill>
+            <a:prstDash val="solid"/>
+          </a:ln>
+        </p:spPr>
+      </p:sp>
+      <p:sp>
+        <p:nvSpPr>
+          <p:cNvPr id="7" name="Shape 4"/>
+          <p:cNvSpPr/>
+          <p:nvPr/>
+        </p:nvSpPr>
+        <p:spPr>
+          <a:xfrm>
+            <a:off x="8823960" y="182880"/>
+            <a:ext cx="91440" cy="91440"/>
+          </a:xfrm>
+          <a:prstGeom prst="ellipse">
+            <a:avLst/>
+          </a:prstGeom>
+          <a:solidFill>
+            <a:srgbClr val="E8837A"/>
+          </a:solidFill>
+          <a:ln w="12700">
+            <a:solidFill>
+              <a:srgbClr val="E8837A"/>
+            </a:solidFill>
+            <a:prstDash val="solid"/>
+          </a:ln>
+        </p:spPr>
+      </p:sp>
+      <p:sp>
+        <p:nvSpPr>
+          <p:cNvPr id="8" name="Shape 5"/>
+          <p:cNvSpPr/>
+          <p:nvPr/>
+        </p:nvSpPr>
+        <p:spPr>
+          <a:xfrm>
+            <a:off x="8970264" y="182880"/>
+            <a:ext cx="91440" cy="91440"/>
+          </a:xfrm>
+          <a:prstGeom prst="ellipse">
+            <a:avLst/>
+          </a:prstGeom>
+          <a:solidFill>
+            <a:srgbClr val="F4A825"/>
+          </a:solidFill>
+          <a:ln w="12700">
+            <a:solidFill>
+              <a:srgbClr val="F4A825"/>
+            </a:solidFill>
+            <a:prstDash val="solid"/>
+          </a:ln>
+        </p:spPr>
+      </p:sp>
+      <p:sp>
+        <p:nvSpPr>
+          <p:cNvPr id="9" name="Shape 6"/>
+          <p:cNvSpPr/>
+          <p:nvPr/>
+        </p:nvSpPr>
+        <p:spPr>
+          <a:xfrm>
+            <a:off x="9116568" y="182880"/>
+            <a:ext cx="91440" cy="91440"/>
+          </a:xfrm>
+          <a:prstGeom prst="ellipse">
+            <a:avLst/>
+          </a:prstGeom>
+          <a:solidFill>
+            <a:srgbClr val="2E7D5B"/>
+          </a:solidFill>
+          <a:ln w="12700">
+            <a:solidFill>
+              <a:srgbClr val="2E7D5B"/>
+            </a:solidFill>
+            <a:prstDash val="solid"/>
+          </a:ln>
+        </p:spPr>
+      </p:sp>
+      <p:sp>
+        <p:nvSpPr>
+          <p:cNvPr id="10" name="Text 7"/>
+          <p:cNvSpPr/>
+          <p:nvPr/>
+        </p:nvSpPr>
+        <p:spPr>
+          <a:xfrm>
+            <a:off x="9299448" y="109728"/>
+            <a:ext cx="2286000" cy="237744"/>
+          </a:xfrm>
+          <a:prstGeom prst="rect">
+            <a:avLst/>
+          </a:prstGeom>
+          <a:noFill/>
+          <a:ln/>
+        </p:spPr>
+        <p:txBody>
+          <a:bodyPr wrap="square" lIns="0" tIns="0" rIns="0" bIns="0" rtlCol="0" anchor="ctr"/>
+          <a:lstStyle/>
+          <a:p>
+            <a:pPr indent="0" marL="0">
+              <a:buNone/>
+            </a:pPr>
+            <a:r>
+              <a:rPr lang="en-US" sz="800" b="1" spc="100" kern="0" dirty="0">
+                <a:solidFill>
+                  <a:srgbClr val="9FB2C2"/>
+                </a:solidFill>
+                <a:latin typeface="Inter" pitchFamily="34" charset="0"/>
+                <a:ea typeface="Inter" pitchFamily="34" charset="-122"/>
+                <a:cs typeface="Inter" pitchFamily="34" charset="-120"/>
+              </a:rPr>
+              <a:t>MS. RIVERA'S SCREEN · SO FAR</a:t>
+            </a:r>
+            <a:endParaRPr lang="en-US" sz="800" dirty="0"/>
+          </a:p>
+        </p:txBody>
+      </p:sp>
+      <p:sp>
+        <p:nvSpPr>
+          <p:cNvPr id="11" name="Text 8"/>
+          <p:cNvSpPr/>
+          <p:nvPr/>
+        </p:nvSpPr>
+        <p:spPr>
+          <a:xfrm>
+            <a:off x="8860536" y="365760"/>
+            <a:ext cx="2670048" cy="566928"/>
+          </a:xfrm>
+          <a:prstGeom prst="rect">
+            <a:avLst/>
+          </a:prstGeom>
+          <a:noFill/>
+          <a:ln/>
+        </p:spPr>
+        <p:txBody>
+          <a:bodyPr wrap="square" lIns="0" tIns="0" rIns="0" bIns="0" rtlCol="0" anchor="ctr"/>
+          <a:lstStyle/>
+          <a:p>
+            <a:pPr indent="0" marL="0">
+              <a:buNone/>
+            </a:pPr>
+            <a:r>
+              <a:rPr lang="en-US" sz="1000" dirty="0">
+                <a:solidFill>
+                  <a:srgbClr val="1B1F24"/>
+                </a:solidFill>
+                <a:latin typeface="Inter" pitchFamily="34" charset="0"/>
+                <a:ea typeface="Inter" pitchFamily="34" charset="-122"/>
+                <a:cs typeface="Inter" pitchFamily="34" charset="-120"/>
+              </a:rPr>
+              <a:t>Her three rounds, live: fixed content, warmed the voice, tightened details.</a:t>
+            </a:r>
+            <a:endParaRPr lang="en-US" sz="1000" dirty="0"/>
+          </a:p>
+        </p:txBody>
+      </p:sp>
+      <p:sp>
+        <p:nvSpPr>
+          <p:cNvPr id="12" name="Text 9"/>
           <p:cNvSpPr/>
           <p:nvPr/>
         </p:nvSpPr>
@@ -9648,7 +12132,7 @@
       </p:sp>
       <p:sp>
         <p:nvSpPr>
-          <p:cNvPr id="6" name="Text 3"/>
+          <p:cNvPr id="13" name="Text 10"/>
           <p:cNvSpPr/>
           <p:nvPr/>
         </p:nvSpPr>
@@ -9687,7 +12171,7 @@
       </p:sp>
       <p:sp>
         <p:nvSpPr>
-          <p:cNvPr id="7" name="Shape 4"/>
+          <p:cNvPr id="14" name="Shape 11"/>
           <p:cNvSpPr/>
           <p:nvPr/>
         </p:nvSpPr>
@@ -9714,7 +12198,7 @@
       </p:sp>
       <p:sp>
         <p:nvSpPr>
-          <p:cNvPr id="8" name="Shape 5"/>
+          <p:cNvPr id="15" name="Shape 12"/>
           <p:cNvSpPr/>
           <p:nvPr/>
         </p:nvSpPr>
@@ -9739,7 +12223,7 @@
       </p:sp>
       <p:sp>
         <p:nvSpPr>
-          <p:cNvPr id="9" name="Text 6"/>
+          <p:cNvPr id="16" name="Text 13"/>
           <p:cNvSpPr/>
           <p:nvPr/>
         </p:nvSpPr>
@@ -9778,7 +12262,7 @@
       </p:sp>
       <p:sp>
         <p:nvSpPr>
-          <p:cNvPr id="10" name="Text 7"/>
+          <p:cNvPr id="17" name="Text 14"/>
           <p:cNvSpPr/>
           <p:nvPr/>
         </p:nvSpPr>
@@ -9817,7 +12301,7 @@
       </p:sp>
       <p:sp>
         <p:nvSpPr>
-          <p:cNvPr id="11" name="Text 8"/>
+          <p:cNvPr id="18" name="Text 15"/>
           <p:cNvSpPr/>
           <p:nvPr/>
         </p:nvSpPr>
@@ -9856,7 +12340,7 @@
       </p:sp>
       <p:sp>
         <p:nvSpPr>
-          <p:cNvPr id="12" name="Shape 9"/>
+          <p:cNvPr id="19" name="Shape 16"/>
           <p:cNvSpPr/>
           <p:nvPr/>
         </p:nvSpPr>
@@ -9883,7 +12367,7 @@
       </p:sp>
       <p:sp>
         <p:nvSpPr>
-          <p:cNvPr id="13" name="Shape 10"/>
+          <p:cNvPr id="20" name="Shape 17"/>
           <p:cNvSpPr/>
           <p:nvPr/>
         </p:nvSpPr>
@@ -9908,7 +12392,7 @@
       </p:sp>
       <p:sp>
         <p:nvSpPr>
-          <p:cNvPr id="14" name="Text 11"/>
+          <p:cNvPr id="21" name="Text 18"/>
           <p:cNvSpPr/>
           <p:nvPr/>
         </p:nvSpPr>
@@ -9947,7 +12431,7 @@
       </p:sp>
       <p:sp>
         <p:nvSpPr>
-          <p:cNvPr id="15" name="Text 12"/>
+          <p:cNvPr id="22" name="Text 19"/>
           <p:cNvSpPr/>
           <p:nvPr/>
         </p:nvSpPr>
@@ -9986,7 +12470,7 @@
       </p:sp>
       <p:sp>
         <p:nvSpPr>
-          <p:cNvPr id="16" name="Text 13"/>
+          <p:cNvPr id="23" name="Text 20"/>
           <p:cNvSpPr/>
           <p:nvPr/>
         </p:nvSpPr>
@@ -10025,7 +12509,7 @@
       </p:sp>
       <p:sp>
         <p:nvSpPr>
-          <p:cNvPr id="17" name="Shape 14"/>
+          <p:cNvPr id="24" name="Shape 21"/>
           <p:cNvSpPr/>
           <p:nvPr/>
         </p:nvSpPr>
@@ -10052,7 +12536,7 @@
       </p:sp>
       <p:sp>
         <p:nvSpPr>
-          <p:cNvPr id="18" name="Shape 15"/>
+          <p:cNvPr id="25" name="Shape 22"/>
           <p:cNvSpPr/>
           <p:nvPr/>
         </p:nvSpPr>
@@ -10077,7 +12561,7 @@
       </p:sp>
       <p:sp>
         <p:nvSpPr>
-          <p:cNvPr id="19" name="Text 16"/>
+          <p:cNvPr id="26" name="Text 23"/>
           <p:cNvSpPr/>
           <p:nvPr/>
         </p:nvSpPr>
@@ -10116,7 +12600,7 @@
       </p:sp>
       <p:sp>
         <p:nvSpPr>
-          <p:cNvPr id="20" name="Text 17"/>
+          <p:cNvPr id="27" name="Text 24"/>
           <p:cNvSpPr/>
           <p:nvPr/>
         </p:nvSpPr>
@@ -10155,7 +12639,7 @@
       </p:sp>
       <p:sp>
         <p:nvSpPr>
-          <p:cNvPr id="21" name="Text 18"/>
+          <p:cNvPr id="28" name="Text 25"/>
           <p:cNvSpPr/>
           <p:nvPr/>
         </p:nvSpPr>
@@ -10194,7 +12678,7 @@
       </p:sp>
       <p:sp>
         <p:nvSpPr>
-          <p:cNvPr id="22" name="Text 19"/>
+          <p:cNvPr id="29" name="Text 26"/>
           <p:cNvSpPr/>
           <p:nvPr/>
         </p:nvSpPr>
@@ -10381,7 +12865,214 @@
       </p:sp>
       <p:sp>
         <p:nvSpPr>
-          <p:cNvPr id="5" name="Text 2"/>
+          <p:cNvPr id="5" name="Shape 2"/>
+          <p:cNvSpPr/>
+          <p:nvPr/>
+        </p:nvSpPr>
+        <p:spPr>
+          <a:xfrm>
+            <a:off x="8732520" y="109728"/>
+            <a:ext cx="2926080" cy="896112"/>
+          </a:xfrm>
+          <a:prstGeom prst="roundRect">
+            <a:avLst>
+              <a:gd name="adj" fmla="val 7143"/>
+            </a:avLst>
+          </a:prstGeom>
+          <a:solidFill>
+            <a:srgbClr val="F7F5F0"/>
+          </a:solidFill>
+          <a:ln w="12700">
+            <a:solidFill>
+              <a:srgbClr val="DCE3EA"/>
+            </a:solidFill>
+            <a:prstDash val="solid"/>
+          </a:ln>
+        </p:spPr>
+      </p:sp>
+      <p:sp>
+        <p:nvSpPr>
+          <p:cNvPr id="6" name="Shape 3"/>
+          <p:cNvSpPr/>
+          <p:nvPr/>
+        </p:nvSpPr>
+        <p:spPr>
+          <a:xfrm>
+            <a:off x="8732520" y="109728"/>
+            <a:ext cx="2926080" cy="237744"/>
+          </a:xfrm>
+          <a:prstGeom prst="roundRect">
+            <a:avLst>
+              <a:gd name="adj" fmla="val 26923"/>
+            </a:avLst>
+          </a:prstGeom>
+          <a:solidFill>
+            <a:srgbClr val="0D1E2E"/>
+          </a:solidFill>
+          <a:ln w="12700">
+            <a:solidFill>
+              <a:srgbClr val="0D1E2E"/>
+            </a:solidFill>
+            <a:prstDash val="solid"/>
+          </a:ln>
+        </p:spPr>
+      </p:sp>
+      <p:sp>
+        <p:nvSpPr>
+          <p:cNvPr id="7" name="Shape 4"/>
+          <p:cNvSpPr/>
+          <p:nvPr/>
+        </p:nvSpPr>
+        <p:spPr>
+          <a:xfrm>
+            <a:off x="8823960" y="182880"/>
+            <a:ext cx="91440" cy="91440"/>
+          </a:xfrm>
+          <a:prstGeom prst="ellipse">
+            <a:avLst/>
+          </a:prstGeom>
+          <a:solidFill>
+            <a:srgbClr val="E8837A"/>
+          </a:solidFill>
+          <a:ln w="12700">
+            <a:solidFill>
+              <a:srgbClr val="E8837A"/>
+            </a:solidFill>
+            <a:prstDash val="solid"/>
+          </a:ln>
+        </p:spPr>
+      </p:sp>
+      <p:sp>
+        <p:nvSpPr>
+          <p:cNvPr id="8" name="Shape 5"/>
+          <p:cNvSpPr/>
+          <p:nvPr/>
+        </p:nvSpPr>
+        <p:spPr>
+          <a:xfrm>
+            <a:off x="8970264" y="182880"/>
+            <a:ext cx="91440" cy="91440"/>
+          </a:xfrm>
+          <a:prstGeom prst="ellipse">
+            <a:avLst/>
+          </a:prstGeom>
+          <a:solidFill>
+            <a:srgbClr val="F4A825"/>
+          </a:solidFill>
+          <a:ln w="12700">
+            <a:solidFill>
+              <a:srgbClr val="F4A825"/>
+            </a:solidFill>
+            <a:prstDash val="solid"/>
+          </a:ln>
+        </p:spPr>
+      </p:sp>
+      <p:sp>
+        <p:nvSpPr>
+          <p:cNvPr id="9" name="Shape 6"/>
+          <p:cNvSpPr/>
+          <p:nvPr/>
+        </p:nvSpPr>
+        <p:spPr>
+          <a:xfrm>
+            <a:off x="9116568" y="182880"/>
+            <a:ext cx="91440" cy="91440"/>
+          </a:xfrm>
+          <a:prstGeom prst="ellipse">
+            <a:avLst/>
+          </a:prstGeom>
+          <a:solidFill>
+            <a:srgbClr val="2E7D5B"/>
+          </a:solidFill>
+          <a:ln w="12700">
+            <a:solidFill>
+              <a:srgbClr val="2E7D5B"/>
+            </a:solidFill>
+            <a:prstDash val="solid"/>
+          </a:ln>
+        </p:spPr>
+      </p:sp>
+      <p:sp>
+        <p:nvSpPr>
+          <p:cNvPr id="10" name="Text 7"/>
+          <p:cNvSpPr/>
+          <p:nvPr/>
+        </p:nvSpPr>
+        <p:spPr>
+          <a:xfrm>
+            <a:off x="9299448" y="109728"/>
+            <a:ext cx="2286000" cy="237744"/>
+          </a:xfrm>
+          <a:prstGeom prst="rect">
+            <a:avLst/>
+          </a:prstGeom>
+          <a:noFill/>
+          <a:ln/>
+        </p:spPr>
+        <p:txBody>
+          <a:bodyPr wrap="square" lIns="0" tIns="0" rIns="0" bIns="0" rtlCol="0" anchor="ctr"/>
+          <a:lstStyle/>
+          <a:p>
+            <a:pPr indent="0" marL="0">
+              <a:buNone/>
+            </a:pPr>
+            <a:r>
+              <a:rPr lang="en-US" sz="800" b="1" spc="100" kern="0" dirty="0">
+                <a:solidFill>
+                  <a:srgbClr val="9FB2C2"/>
+                </a:solidFill>
+                <a:latin typeface="Inter" pitchFamily="34" charset="0"/>
+                <a:ea typeface="Inter" pitchFamily="34" charset="-122"/>
+                <a:cs typeface="Inter" pitchFamily="34" charset="-120"/>
+              </a:rPr>
+              <a:t>MS. RIVERA'S SCREEN · SO FAR</a:t>
+            </a:r>
+            <a:endParaRPr lang="en-US" sz="800" dirty="0"/>
+          </a:p>
+        </p:txBody>
+      </p:sp>
+      <p:sp>
+        <p:nvSpPr>
+          <p:cNvPr id="11" name="Text 8"/>
+          <p:cNvSpPr/>
+          <p:nvPr/>
+        </p:nvSpPr>
+        <p:spPr>
+          <a:xfrm>
+            <a:off x="8860536" y="365760"/>
+            <a:ext cx="2670048" cy="566928"/>
+          </a:xfrm>
+          <a:prstGeom prst="rect">
+            <a:avLst/>
+          </a:prstGeom>
+          <a:noFill/>
+          <a:ln/>
+        </p:spPr>
+        <p:txBody>
+          <a:bodyPr wrap="square" lIns="0" tIns="0" rIns="0" bIns="0" rtlCol="0" anchor="ctr"/>
+          <a:lstStyle/>
+          <a:p>
+            <a:pPr indent="0" marL="0">
+              <a:buNone/>
+            </a:pPr>
+            <a:r>
+              <a:rPr lang="en-US" sz="1000" dirty="0">
+                <a:solidFill>
+                  <a:srgbClr val="1B1F24"/>
+                </a:solidFill>
+                <a:latin typeface="Inter" pitchFamily="34" charset="0"/>
+                <a:ea typeface="Inter" pitchFamily="34" charset="-122"/>
+                <a:cs typeface="Inter" pitchFamily="34" charset="-120"/>
+              </a:rPr>
+              <a:t>Her template, saved: her name, one line on what it's for, in the staff doc.</a:t>
+            </a:r>
+            <a:endParaRPr lang="en-US" sz="1000" dirty="0"/>
+          </a:p>
+        </p:txBody>
+      </p:sp>
+      <p:sp>
+        <p:nvSpPr>
+          <p:cNvPr id="12" name="Text 9"/>
           <p:cNvSpPr/>
           <p:nvPr/>
         </p:nvSpPr>
@@ -10420,7 +13111,7 @@
       </p:sp>
       <p:sp>
         <p:nvSpPr>
-          <p:cNvPr id="6" name="Text 3"/>
+          <p:cNvPr id="13" name="Text 10"/>
           <p:cNvSpPr/>
           <p:nvPr/>
         </p:nvSpPr>
@@ -10459,7 +13150,7 @@
       </p:sp>
       <p:sp>
         <p:nvSpPr>
-          <p:cNvPr id="7" name="Text 4"/>
+          <p:cNvPr id="14" name="Text 11"/>
           <p:cNvSpPr/>
           <p:nvPr/>
         </p:nvSpPr>
@@ -10544,7 +13235,7 @@
       </p:sp>
       <p:sp>
         <p:nvSpPr>
-          <p:cNvPr id="8" name="Shape 5"/>
+          <p:cNvPr id="15" name="Shape 12"/>
           <p:cNvSpPr/>
           <p:nvPr/>
         </p:nvSpPr>
@@ -10571,7 +13262,7 @@
       </p:sp>
       <p:sp>
         <p:nvSpPr>
-          <p:cNvPr id="9" name="Text 6"/>
+          <p:cNvPr id="16" name="Text 13"/>
           <p:cNvSpPr/>
           <p:nvPr/>
         </p:nvSpPr>
@@ -10758,7 +13449,214 @@
       </p:sp>
       <p:sp>
         <p:nvSpPr>
-          <p:cNvPr id="5" name="Text 2"/>
+          <p:cNvPr id="5" name="Shape 2"/>
+          <p:cNvSpPr/>
+          <p:nvPr/>
+        </p:nvSpPr>
+        <p:spPr>
+          <a:xfrm>
+            <a:off x="8732520" y="109728"/>
+            <a:ext cx="2926080" cy="896112"/>
+          </a:xfrm>
+          <a:prstGeom prst="roundRect">
+            <a:avLst>
+              <a:gd name="adj" fmla="val 7143"/>
+            </a:avLst>
+          </a:prstGeom>
+          <a:solidFill>
+            <a:srgbClr val="F7F5F0"/>
+          </a:solidFill>
+          <a:ln w="12700">
+            <a:solidFill>
+              <a:srgbClr val="DCE3EA"/>
+            </a:solidFill>
+            <a:prstDash val="solid"/>
+          </a:ln>
+        </p:spPr>
+      </p:sp>
+      <p:sp>
+        <p:nvSpPr>
+          <p:cNvPr id="6" name="Shape 3"/>
+          <p:cNvSpPr/>
+          <p:nvPr/>
+        </p:nvSpPr>
+        <p:spPr>
+          <a:xfrm>
+            <a:off x="8732520" y="109728"/>
+            <a:ext cx="2926080" cy="237744"/>
+          </a:xfrm>
+          <a:prstGeom prst="roundRect">
+            <a:avLst>
+              <a:gd name="adj" fmla="val 26923"/>
+            </a:avLst>
+          </a:prstGeom>
+          <a:solidFill>
+            <a:srgbClr val="0D1E2E"/>
+          </a:solidFill>
+          <a:ln w="12700">
+            <a:solidFill>
+              <a:srgbClr val="0D1E2E"/>
+            </a:solidFill>
+            <a:prstDash val="solid"/>
+          </a:ln>
+        </p:spPr>
+      </p:sp>
+      <p:sp>
+        <p:nvSpPr>
+          <p:cNvPr id="7" name="Shape 4"/>
+          <p:cNvSpPr/>
+          <p:nvPr/>
+        </p:nvSpPr>
+        <p:spPr>
+          <a:xfrm>
+            <a:off x="8823960" y="182880"/>
+            <a:ext cx="91440" cy="91440"/>
+          </a:xfrm>
+          <a:prstGeom prst="ellipse">
+            <a:avLst/>
+          </a:prstGeom>
+          <a:solidFill>
+            <a:srgbClr val="E8837A"/>
+          </a:solidFill>
+          <a:ln w="12700">
+            <a:solidFill>
+              <a:srgbClr val="E8837A"/>
+            </a:solidFill>
+            <a:prstDash val="solid"/>
+          </a:ln>
+        </p:spPr>
+      </p:sp>
+      <p:sp>
+        <p:nvSpPr>
+          <p:cNvPr id="8" name="Shape 5"/>
+          <p:cNvSpPr/>
+          <p:nvPr/>
+        </p:nvSpPr>
+        <p:spPr>
+          <a:xfrm>
+            <a:off x="8970264" y="182880"/>
+            <a:ext cx="91440" cy="91440"/>
+          </a:xfrm>
+          <a:prstGeom prst="ellipse">
+            <a:avLst/>
+          </a:prstGeom>
+          <a:solidFill>
+            <a:srgbClr val="F4A825"/>
+          </a:solidFill>
+          <a:ln w="12700">
+            <a:solidFill>
+              <a:srgbClr val="F4A825"/>
+            </a:solidFill>
+            <a:prstDash val="solid"/>
+          </a:ln>
+        </p:spPr>
+      </p:sp>
+      <p:sp>
+        <p:nvSpPr>
+          <p:cNvPr id="9" name="Shape 6"/>
+          <p:cNvSpPr/>
+          <p:nvPr/>
+        </p:nvSpPr>
+        <p:spPr>
+          <a:xfrm>
+            <a:off x="9116568" y="182880"/>
+            <a:ext cx="91440" cy="91440"/>
+          </a:xfrm>
+          <a:prstGeom prst="ellipse">
+            <a:avLst/>
+          </a:prstGeom>
+          <a:solidFill>
+            <a:srgbClr val="2E7D5B"/>
+          </a:solidFill>
+          <a:ln w="12700">
+            <a:solidFill>
+              <a:srgbClr val="2E7D5B"/>
+            </a:solidFill>
+            <a:prstDash val="solid"/>
+          </a:ln>
+        </p:spPr>
+      </p:sp>
+      <p:sp>
+        <p:nvSpPr>
+          <p:cNvPr id="10" name="Text 7"/>
+          <p:cNvSpPr/>
+          <p:nvPr/>
+        </p:nvSpPr>
+        <p:spPr>
+          <a:xfrm>
+            <a:off x="9299448" y="109728"/>
+            <a:ext cx="2286000" cy="237744"/>
+          </a:xfrm>
+          <a:prstGeom prst="rect">
+            <a:avLst/>
+          </a:prstGeom>
+          <a:noFill/>
+          <a:ln/>
+        </p:spPr>
+        <p:txBody>
+          <a:bodyPr wrap="square" lIns="0" tIns="0" rIns="0" bIns="0" rtlCol="0" anchor="ctr"/>
+          <a:lstStyle/>
+          <a:p>
+            <a:pPr indent="0" marL="0">
+              <a:buNone/>
+            </a:pPr>
+            <a:r>
+              <a:rPr lang="en-US" sz="800" b="1" spc="100" kern="0" dirty="0">
+                <a:solidFill>
+                  <a:srgbClr val="9FB2C2"/>
+                </a:solidFill>
+                <a:latin typeface="Inter" pitchFamily="34" charset="0"/>
+                <a:ea typeface="Inter" pitchFamily="34" charset="-122"/>
+                <a:cs typeface="Inter" pitchFamily="34" charset="-120"/>
+              </a:rPr>
+              <a:t>MS. RIVERA'S SCREEN · SO FAR</a:t>
+            </a:r>
+            <a:endParaRPr lang="en-US" sz="800" dirty="0"/>
+          </a:p>
+        </p:txBody>
+      </p:sp>
+      <p:sp>
+        <p:nvSpPr>
+          <p:cNvPr id="11" name="Text 8"/>
+          <p:cNvSpPr/>
+          <p:nvPr/>
+        </p:nvSpPr>
+        <p:spPr>
+          <a:xfrm>
+            <a:off x="8860536" y="365760"/>
+            <a:ext cx="2670048" cy="566928"/>
+          </a:xfrm>
+          <a:prstGeom prst="rect">
+            <a:avLst/>
+          </a:prstGeom>
+          <a:noFill/>
+          <a:ln/>
+        </p:spPr>
+        <p:txBody>
+          <a:bodyPr wrap="square" lIns="0" tIns="0" rIns="0" bIns="0" rtlCol="0" anchor="ctr"/>
+          <a:lstStyle/>
+          <a:p>
+            <a:pPr indent="0" marL="0">
+              <a:buNone/>
+            </a:pPr>
+            <a:r>
+              <a:rPr lang="en-US" sz="1000" dirty="0">
+                <a:solidFill>
+                  <a:srgbClr val="1B1F24"/>
+                </a:solidFill>
+                <a:latin typeface="Inter" pitchFamily="34" charset="0"/>
+                <a:ea typeface="Inter" pitchFamily="34" charset="-122"/>
+                <a:cs typeface="Inter" pitchFamily="34" charset="-120"/>
+              </a:rPr>
+              <a:t>Her before and after, read aloud: the delta is the lesson.</a:t>
+            </a:r>
+            <a:endParaRPr lang="en-US" sz="1000" dirty="0"/>
+          </a:p>
+        </p:txBody>
+      </p:sp>
+      <p:sp>
+        <p:nvSpPr>
+          <p:cNvPr id="12" name="Text 9"/>
           <p:cNvSpPr/>
           <p:nvPr/>
         </p:nvSpPr>
@@ -10797,7 +13695,7 @@
       </p:sp>
       <p:sp>
         <p:nvSpPr>
-          <p:cNvPr id="6" name="Text 3"/>
+          <p:cNvPr id="13" name="Text 10"/>
           <p:cNvSpPr/>
           <p:nvPr/>
         </p:nvSpPr>
@@ -10836,7 +13734,7 @@
       </p:sp>
       <p:sp>
         <p:nvSpPr>
-          <p:cNvPr id="7" name="Text 4"/>
+          <p:cNvPr id="14" name="Text 11"/>
           <p:cNvSpPr/>
           <p:nvPr/>
         </p:nvSpPr>
@@ -11069,7 +13967,214 @@
       </p:sp>
       <p:sp>
         <p:nvSpPr>
-          <p:cNvPr id="5" name="Text 2"/>
+          <p:cNvPr id="5" name="Shape 2"/>
+          <p:cNvSpPr/>
+          <p:nvPr/>
+        </p:nvSpPr>
+        <p:spPr>
+          <a:xfrm>
+            <a:off x="8732520" y="109728"/>
+            <a:ext cx="2926080" cy="896112"/>
+          </a:xfrm>
+          <a:prstGeom prst="roundRect">
+            <a:avLst>
+              <a:gd name="adj" fmla="val 7143"/>
+            </a:avLst>
+          </a:prstGeom>
+          <a:solidFill>
+            <a:srgbClr val="F7F5F0"/>
+          </a:solidFill>
+          <a:ln w="12700">
+            <a:solidFill>
+              <a:srgbClr val="DCE3EA"/>
+            </a:solidFill>
+            <a:prstDash val="solid"/>
+          </a:ln>
+        </p:spPr>
+      </p:sp>
+      <p:sp>
+        <p:nvSpPr>
+          <p:cNvPr id="6" name="Shape 3"/>
+          <p:cNvSpPr/>
+          <p:nvPr/>
+        </p:nvSpPr>
+        <p:spPr>
+          <a:xfrm>
+            <a:off x="8732520" y="109728"/>
+            <a:ext cx="2926080" cy="237744"/>
+          </a:xfrm>
+          <a:prstGeom prst="roundRect">
+            <a:avLst>
+              <a:gd name="adj" fmla="val 26923"/>
+            </a:avLst>
+          </a:prstGeom>
+          <a:solidFill>
+            <a:srgbClr val="0D1E2E"/>
+          </a:solidFill>
+          <a:ln w="12700">
+            <a:solidFill>
+              <a:srgbClr val="0D1E2E"/>
+            </a:solidFill>
+            <a:prstDash val="solid"/>
+          </a:ln>
+        </p:spPr>
+      </p:sp>
+      <p:sp>
+        <p:nvSpPr>
+          <p:cNvPr id="7" name="Shape 4"/>
+          <p:cNvSpPr/>
+          <p:nvPr/>
+        </p:nvSpPr>
+        <p:spPr>
+          <a:xfrm>
+            <a:off x="8823960" y="182880"/>
+            <a:ext cx="91440" cy="91440"/>
+          </a:xfrm>
+          <a:prstGeom prst="ellipse">
+            <a:avLst/>
+          </a:prstGeom>
+          <a:solidFill>
+            <a:srgbClr val="E8837A"/>
+          </a:solidFill>
+          <a:ln w="12700">
+            <a:solidFill>
+              <a:srgbClr val="E8837A"/>
+            </a:solidFill>
+            <a:prstDash val="solid"/>
+          </a:ln>
+        </p:spPr>
+      </p:sp>
+      <p:sp>
+        <p:nvSpPr>
+          <p:cNvPr id="8" name="Shape 5"/>
+          <p:cNvSpPr/>
+          <p:nvPr/>
+        </p:nvSpPr>
+        <p:spPr>
+          <a:xfrm>
+            <a:off x="8970264" y="182880"/>
+            <a:ext cx="91440" cy="91440"/>
+          </a:xfrm>
+          <a:prstGeom prst="ellipse">
+            <a:avLst/>
+          </a:prstGeom>
+          <a:solidFill>
+            <a:srgbClr val="F4A825"/>
+          </a:solidFill>
+          <a:ln w="12700">
+            <a:solidFill>
+              <a:srgbClr val="F4A825"/>
+            </a:solidFill>
+            <a:prstDash val="solid"/>
+          </a:ln>
+        </p:spPr>
+      </p:sp>
+      <p:sp>
+        <p:nvSpPr>
+          <p:cNvPr id="9" name="Shape 6"/>
+          <p:cNvSpPr/>
+          <p:nvPr/>
+        </p:nvSpPr>
+        <p:spPr>
+          <a:xfrm>
+            <a:off x="9116568" y="182880"/>
+            <a:ext cx="91440" cy="91440"/>
+          </a:xfrm>
+          <a:prstGeom prst="ellipse">
+            <a:avLst/>
+          </a:prstGeom>
+          <a:solidFill>
+            <a:srgbClr val="2E7D5B"/>
+          </a:solidFill>
+          <a:ln w="12700">
+            <a:solidFill>
+              <a:srgbClr val="2E7D5B"/>
+            </a:solidFill>
+            <a:prstDash val="solid"/>
+          </a:ln>
+        </p:spPr>
+      </p:sp>
+      <p:sp>
+        <p:nvSpPr>
+          <p:cNvPr id="10" name="Text 7"/>
+          <p:cNvSpPr/>
+          <p:nvPr/>
+        </p:nvSpPr>
+        <p:spPr>
+          <a:xfrm>
+            <a:off x="9299448" y="109728"/>
+            <a:ext cx="2286000" cy="237744"/>
+          </a:xfrm>
+          <a:prstGeom prst="rect">
+            <a:avLst/>
+          </a:prstGeom>
+          <a:noFill/>
+          <a:ln/>
+        </p:spPr>
+        <p:txBody>
+          <a:bodyPr wrap="square" lIns="0" tIns="0" rIns="0" bIns="0" rtlCol="0" anchor="ctr"/>
+          <a:lstStyle/>
+          <a:p>
+            <a:pPr indent="0" marL="0">
+              <a:buNone/>
+            </a:pPr>
+            <a:r>
+              <a:rPr lang="en-US" sz="800" b="1" spc="100" kern="0" dirty="0">
+                <a:solidFill>
+                  <a:srgbClr val="9FB2C2"/>
+                </a:solidFill>
+                <a:latin typeface="Inter" pitchFamily="34" charset="0"/>
+                <a:ea typeface="Inter" pitchFamily="34" charset="-122"/>
+                <a:cs typeface="Inter" pitchFamily="34" charset="-120"/>
+              </a:rPr>
+              <a:t>MS. RIVERA'S SCREEN · SO FAR</a:t>
+            </a:r>
+            <a:endParaRPr lang="en-US" sz="800" dirty="0"/>
+          </a:p>
+        </p:txBody>
+      </p:sp>
+      <p:sp>
+        <p:nvSpPr>
+          <p:cNvPr id="11" name="Text 8"/>
+          <p:cNvSpPr/>
+          <p:nvPr/>
+        </p:nvSpPr>
+        <p:spPr>
+          <a:xfrm>
+            <a:off x="8860536" y="365760"/>
+            <a:ext cx="2670048" cy="566928"/>
+          </a:xfrm>
+          <a:prstGeom prst="rect">
+            <a:avLst/>
+          </a:prstGeom>
+          <a:noFill/>
+          <a:ln/>
+        </p:spPr>
+        <p:txBody>
+          <a:bodyPr wrap="square" lIns="0" tIns="0" rIns="0" bIns="0" rtlCol="0" anchor="ctr"/>
+          <a:lstStyle/>
+          <a:p>
+            <a:pPr indent="0" marL="0">
+              <a:buNone/>
+            </a:pPr>
+            <a:r>
+              <a:rPr lang="en-US" sz="1000" dirty="0">
+                <a:solidFill>
+                  <a:srgbClr val="1B1F24"/>
+                </a:solidFill>
+                <a:latin typeface="Inter" pitchFamily="34" charset="0"/>
+                <a:ea typeface="Inter" pitchFamily="34" charset="-122"/>
+                <a:cs typeface="Inter" pitchFamily="34" charset="-120"/>
+              </a:rPr>
+              <a:t>Her library: one entry today. It compounds from here.</a:t>
+            </a:r>
+            <a:endParaRPr lang="en-US" sz="1000" dirty="0"/>
+          </a:p>
+        </p:txBody>
+      </p:sp>
+      <p:sp>
+        <p:nvSpPr>
+          <p:cNvPr id="12" name="Text 9"/>
           <p:cNvSpPr/>
           <p:nvPr/>
         </p:nvSpPr>
@@ -11108,7 +14213,7 @@
       </p:sp>
       <p:sp>
         <p:nvSpPr>
-          <p:cNvPr id="6" name="Text 3"/>
+          <p:cNvPr id="13" name="Text 10"/>
           <p:cNvSpPr/>
           <p:nvPr/>
         </p:nvSpPr>
@@ -11147,7 +14252,7 @@
       </p:sp>
       <p:sp>
         <p:nvSpPr>
-          <p:cNvPr id="7" name="Shape 4"/>
+          <p:cNvPr id="14" name="Shape 11"/>
           <p:cNvSpPr/>
           <p:nvPr/>
         </p:nvSpPr>
@@ -11174,7 +14279,7 @@
       </p:sp>
       <p:sp>
         <p:nvSpPr>
-          <p:cNvPr id="8" name="Text 5"/>
+          <p:cNvPr id="15" name="Text 12"/>
           <p:cNvSpPr/>
           <p:nvPr/>
         </p:nvSpPr>
@@ -11376,7 +14481,214 @@
       </p:sp>
       <p:sp>
         <p:nvSpPr>
-          <p:cNvPr id="5" name="Text 2"/>
+          <p:cNvPr id="5" name="Shape 2"/>
+          <p:cNvSpPr/>
+          <p:nvPr/>
+        </p:nvSpPr>
+        <p:spPr>
+          <a:xfrm>
+            <a:off x="8732520" y="109728"/>
+            <a:ext cx="2926080" cy="896112"/>
+          </a:xfrm>
+          <a:prstGeom prst="roundRect">
+            <a:avLst>
+              <a:gd name="adj" fmla="val 7143"/>
+            </a:avLst>
+          </a:prstGeom>
+          <a:solidFill>
+            <a:srgbClr val="1E3A50"/>
+          </a:solidFill>
+          <a:ln w="12700">
+            <a:solidFill>
+              <a:srgbClr val="2A4A63"/>
+            </a:solidFill>
+            <a:prstDash val="solid"/>
+          </a:ln>
+        </p:spPr>
+      </p:sp>
+      <p:sp>
+        <p:nvSpPr>
+          <p:cNvPr id="6" name="Shape 3"/>
+          <p:cNvSpPr/>
+          <p:nvPr/>
+        </p:nvSpPr>
+        <p:spPr>
+          <a:xfrm>
+            <a:off x="8732520" y="109728"/>
+            <a:ext cx="2926080" cy="237744"/>
+          </a:xfrm>
+          <a:prstGeom prst="roundRect">
+            <a:avLst>
+              <a:gd name="adj" fmla="val 26923"/>
+            </a:avLst>
+          </a:prstGeom>
+          <a:solidFill>
+            <a:srgbClr val="0D1E2E"/>
+          </a:solidFill>
+          <a:ln w="12700">
+            <a:solidFill>
+              <a:srgbClr val="0D1E2E"/>
+            </a:solidFill>
+            <a:prstDash val="solid"/>
+          </a:ln>
+        </p:spPr>
+      </p:sp>
+      <p:sp>
+        <p:nvSpPr>
+          <p:cNvPr id="7" name="Shape 4"/>
+          <p:cNvSpPr/>
+          <p:nvPr/>
+        </p:nvSpPr>
+        <p:spPr>
+          <a:xfrm>
+            <a:off x="8823960" y="182880"/>
+            <a:ext cx="91440" cy="91440"/>
+          </a:xfrm>
+          <a:prstGeom prst="ellipse">
+            <a:avLst/>
+          </a:prstGeom>
+          <a:solidFill>
+            <a:srgbClr val="E8837A"/>
+          </a:solidFill>
+          <a:ln w="12700">
+            <a:solidFill>
+              <a:srgbClr val="E8837A"/>
+            </a:solidFill>
+            <a:prstDash val="solid"/>
+          </a:ln>
+        </p:spPr>
+      </p:sp>
+      <p:sp>
+        <p:nvSpPr>
+          <p:cNvPr id="8" name="Shape 5"/>
+          <p:cNvSpPr/>
+          <p:nvPr/>
+        </p:nvSpPr>
+        <p:spPr>
+          <a:xfrm>
+            <a:off x="8970264" y="182880"/>
+            <a:ext cx="91440" cy="91440"/>
+          </a:xfrm>
+          <a:prstGeom prst="ellipse">
+            <a:avLst/>
+          </a:prstGeom>
+          <a:solidFill>
+            <a:srgbClr val="F4A825"/>
+          </a:solidFill>
+          <a:ln w="12700">
+            <a:solidFill>
+              <a:srgbClr val="F4A825"/>
+            </a:solidFill>
+            <a:prstDash val="solid"/>
+          </a:ln>
+        </p:spPr>
+      </p:sp>
+      <p:sp>
+        <p:nvSpPr>
+          <p:cNvPr id="9" name="Shape 6"/>
+          <p:cNvSpPr/>
+          <p:nvPr/>
+        </p:nvSpPr>
+        <p:spPr>
+          <a:xfrm>
+            <a:off x="9116568" y="182880"/>
+            <a:ext cx="91440" cy="91440"/>
+          </a:xfrm>
+          <a:prstGeom prst="ellipse">
+            <a:avLst/>
+          </a:prstGeom>
+          <a:solidFill>
+            <a:srgbClr val="2E7D5B"/>
+          </a:solidFill>
+          <a:ln w="12700">
+            <a:solidFill>
+              <a:srgbClr val="2E7D5B"/>
+            </a:solidFill>
+            <a:prstDash val="solid"/>
+          </a:ln>
+        </p:spPr>
+      </p:sp>
+      <p:sp>
+        <p:nvSpPr>
+          <p:cNvPr id="10" name="Text 7"/>
+          <p:cNvSpPr/>
+          <p:nvPr/>
+        </p:nvSpPr>
+        <p:spPr>
+          <a:xfrm>
+            <a:off x="9299448" y="109728"/>
+            <a:ext cx="2286000" cy="237744"/>
+          </a:xfrm>
+          <a:prstGeom prst="rect">
+            <a:avLst/>
+          </a:prstGeom>
+          <a:noFill/>
+          <a:ln/>
+        </p:spPr>
+        <p:txBody>
+          <a:bodyPr wrap="square" lIns="0" tIns="0" rIns="0" bIns="0" rtlCol="0" anchor="ctr"/>
+          <a:lstStyle/>
+          <a:p>
+            <a:pPr indent="0" marL="0">
+              <a:buNone/>
+            </a:pPr>
+            <a:r>
+              <a:rPr lang="en-US" sz="800" b="1" spc="100" kern="0" dirty="0">
+                <a:solidFill>
+                  <a:srgbClr val="9FB2C2"/>
+                </a:solidFill>
+                <a:latin typeface="Inter" pitchFamily="34" charset="0"/>
+                <a:ea typeface="Inter" pitchFamily="34" charset="-122"/>
+                <a:cs typeface="Inter" pitchFamily="34" charset="-120"/>
+              </a:rPr>
+              <a:t>MS. RIVERA'S SCREEN · SO FAR</a:t>
+            </a:r>
+            <a:endParaRPr lang="en-US" sz="800" dirty="0"/>
+          </a:p>
+        </p:txBody>
+      </p:sp>
+      <p:sp>
+        <p:nvSpPr>
+          <p:cNvPr id="11" name="Text 8"/>
+          <p:cNvSpPr/>
+          <p:nvPr/>
+        </p:nvSpPr>
+        <p:spPr>
+          <a:xfrm>
+            <a:off x="8860536" y="365760"/>
+            <a:ext cx="2670048" cy="566928"/>
+          </a:xfrm>
+          <a:prstGeom prst="rect">
+            <a:avLst/>
+          </a:prstGeom>
+          <a:noFill/>
+          <a:ln/>
+        </p:spPr>
+        <p:txBody>
+          <a:bodyPr wrap="square" lIns="0" tIns="0" rIns="0" bIns="0" rtlCol="0" anchor="ctr"/>
+          <a:lstStyle/>
+          <a:p>
+            <a:pPr indent="0" marL="0">
+              <a:buNone/>
+            </a:pPr>
+            <a:r>
+              <a:rPr lang="en-US" sz="1000" dirty="0">
+                <a:solidFill>
+                  <a:srgbClr val="C9D4DE"/>
+                </a:solidFill>
+                <a:latin typeface="Inter" pitchFamily="34" charset="0"/>
+                <a:ea typeface="Inter" pitchFamily="34" charset="-122"/>
+                <a:cs typeface="Inter" pitchFamily="34" charset="-120"/>
+              </a:rPr>
+              <a:t>Her one-slide system: formula, colleague test, three rounds, template it.</a:t>
+            </a:r>
+            <a:endParaRPr lang="en-US" sz="1000" dirty="0"/>
+          </a:p>
+        </p:txBody>
+      </p:sp>
+      <p:sp>
+        <p:nvSpPr>
+          <p:cNvPr id="12" name="Text 9"/>
           <p:cNvSpPr/>
           <p:nvPr/>
         </p:nvSpPr>
@@ -11415,7 +14727,7 @@
       </p:sp>
       <p:sp>
         <p:nvSpPr>
-          <p:cNvPr id="6" name="Text 3"/>
+          <p:cNvPr id="13" name="Text 10"/>
           <p:cNvSpPr/>
           <p:nvPr/>
         </p:nvSpPr>
@@ -11454,7 +14766,7 @@
       </p:sp>
       <p:sp>
         <p:nvSpPr>
-          <p:cNvPr id="7" name="Text 4"/>
+          <p:cNvPr id="14" name="Text 11"/>
           <p:cNvSpPr/>
           <p:nvPr/>
         </p:nvSpPr>
@@ -11493,7 +14805,7 @@
       </p:sp>
       <p:sp>
         <p:nvSpPr>
-          <p:cNvPr id="8" name="Text 5"/>
+          <p:cNvPr id="15" name="Text 12"/>
           <p:cNvSpPr/>
           <p:nvPr/>
         </p:nvSpPr>
@@ -11532,7 +14844,7 @@
       </p:sp>
       <p:sp>
         <p:nvSpPr>
-          <p:cNvPr id="9" name="Text 6"/>
+          <p:cNvPr id="16" name="Text 13"/>
           <p:cNvSpPr/>
           <p:nvPr/>
         </p:nvSpPr>
@@ -11571,7 +14883,7 @@
       </p:sp>
       <p:sp>
         <p:nvSpPr>
-          <p:cNvPr id="10" name="Text 7"/>
+          <p:cNvPr id="17" name="Text 14"/>
           <p:cNvSpPr/>
           <p:nvPr/>
         </p:nvSpPr>
@@ -11610,7 +14922,7 @@
       </p:sp>
       <p:sp>
         <p:nvSpPr>
-          <p:cNvPr id="11" name="Text 8"/>
+          <p:cNvPr id="18" name="Text 15"/>
           <p:cNvSpPr/>
           <p:nvPr/>
         </p:nvSpPr>
@@ -11649,7 +14961,7 @@
       </p:sp>
       <p:sp>
         <p:nvSpPr>
-          <p:cNvPr id="12" name="Text 9"/>
+          <p:cNvPr id="19" name="Text 16"/>
           <p:cNvSpPr/>
           <p:nvPr/>
         </p:nvSpPr>
@@ -11688,7 +15000,7 @@
       </p:sp>
       <p:sp>
         <p:nvSpPr>
-          <p:cNvPr id="13" name="Text 10"/>
+          <p:cNvPr id="20" name="Text 17"/>
           <p:cNvSpPr/>
           <p:nvPr/>
         </p:nvSpPr>
@@ -11727,7 +15039,7 @@
       </p:sp>
       <p:sp>
         <p:nvSpPr>
-          <p:cNvPr id="14" name="Text 11"/>
+          <p:cNvPr id="21" name="Text 18"/>
           <p:cNvSpPr/>
           <p:nvPr/>
         </p:nvSpPr>
@@ -11914,7 +15226,214 @@
       </p:sp>
       <p:sp>
         <p:nvSpPr>
-          <p:cNvPr id="5" name="Text 2"/>
+          <p:cNvPr id="5" name="Shape 2"/>
+          <p:cNvSpPr/>
+          <p:nvPr/>
+        </p:nvSpPr>
+        <p:spPr>
+          <a:xfrm>
+            <a:off x="8732520" y="109728"/>
+            <a:ext cx="2926080" cy="896112"/>
+          </a:xfrm>
+          <a:prstGeom prst="roundRect">
+            <a:avLst>
+              <a:gd name="adj" fmla="val 7143"/>
+            </a:avLst>
+          </a:prstGeom>
+          <a:solidFill>
+            <a:srgbClr val="F7F5F0"/>
+          </a:solidFill>
+          <a:ln w="12700">
+            <a:solidFill>
+              <a:srgbClr val="DCE3EA"/>
+            </a:solidFill>
+            <a:prstDash val="solid"/>
+          </a:ln>
+        </p:spPr>
+      </p:sp>
+      <p:sp>
+        <p:nvSpPr>
+          <p:cNvPr id="6" name="Shape 3"/>
+          <p:cNvSpPr/>
+          <p:nvPr/>
+        </p:nvSpPr>
+        <p:spPr>
+          <a:xfrm>
+            <a:off x="8732520" y="109728"/>
+            <a:ext cx="2926080" cy="237744"/>
+          </a:xfrm>
+          <a:prstGeom prst="roundRect">
+            <a:avLst>
+              <a:gd name="adj" fmla="val 26923"/>
+            </a:avLst>
+          </a:prstGeom>
+          <a:solidFill>
+            <a:srgbClr val="0D1E2E"/>
+          </a:solidFill>
+          <a:ln w="12700">
+            <a:solidFill>
+              <a:srgbClr val="0D1E2E"/>
+            </a:solidFill>
+            <a:prstDash val="solid"/>
+          </a:ln>
+        </p:spPr>
+      </p:sp>
+      <p:sp>
+        <p:nvSpPr>
+          <p:cNvPr id="7" name="Shape 4"/>
+          <p:cNvSpPr/>
+          <p:nvPr/>
+        </p:nvSpPr>
+        <p:spPr>
+          <a:xfrm>
+            <a:off x="8823960" y="182880"/>
+            <a:ext cx="91440" cy="91440"/>
+          </a:xfrm>
+          <a:prstGeom prst="ellipse">
+            <a:avLst/>
+          </a:prstGeom>
+          <a:solidFill>
+            <a:srgbClr val="E8837A"/>
+          </a:solidFill>
+          <a:ln w="12700">
+            <a:solidFill>
+              <a:srgbClr val="E8837A"/>
+            </a:solidFill>
+            <a:prstDash val="solid"/>
+          </a:ln>
+        </p:spPr>
+      </p:sp>
+      <p:sp>
+        <p:nvSpPr>
+          <p:cNvPr id="8" name="Shape 5"/>
+          <p:cNvSpPr/>
+          <p:nvPr/>
+        </p:nvSpPr>
+        <p:spPr>
+          <a:xfrm>
+            <a:off x="8970264" y="182880"/>
+            <a:ext cx="91440" cy="91440"/>
+          </a:xfrm>
+          <a:prstGeom prst="ellipse">
+            <a:avLst/>
+          </a:prstGeom>
+          <a:solidFill>
+            <a:srgbClr val="F4A825"/>
+          </a:solidFill>
+          <a:ln w="12700">
+            <a:solidFill>
+              <a:srgbClr val="F4A825"/>
+            </a:solidFill>
+            <a:prstDash val="solid"/>
+          </a:ln>
+        </p:spPr>
+      </p:sp>
+      <p:sp>
+        <p:nvSpPr>
+          <p:cNvPr id="9" name="Shape 6"/>
+          <p:cNvSpPr/>
+          <p:nvPr/>
+        </p:nvSpPr>
+        <p:spPr>
+          <a:xfrm>
+            <a:off x="9116568" y="182880"/>
+            <a:ext cx="91440" cy="91440"/>
+          </a:xfrm>
+          <a:prstGeom prst="ellipse">
+            <a:avLst/>
+          </a:prstGeom>
+          <a:solidFill>
+            <a:srgbClr val="2E7D5B"/>
+          </a:solidFill>
+          <a:ln w="12700">
+            <a:solidFill>
+              <a:srgbClr val="2E7D5B"/>
+            </a:solidFill>
+            <a:prstDash val="solid"/>
+          </a:ln>
+        </p:spPr>
+      </p:sp>
+      <p:sp>
+        <p:nvSpPr>
+          <p:cNvPr id="10" name="Text 7"/>
+          <p:cNvSpPr/>
+          <p:nvPr/>
+        </p:nvSpPr>
+        <p:spPr>
+          <a:xfrm>
+            <a:off x="9299448" y="109728"/>
+            <a:ext cx="2286000" cy="237744"/>
+          </a:xfrm>
+          <a:prstGeom prst="rect">
+            <a:avLst/>
+          </a:prstGeom>
+          <a:noFill/>
+          <a:ln/>
+        </p:spPr>
+        <p:txBody>
+          <a:bodyPr wrap="square" lIns="0" tIns="0" rIns="0" bIns="0" rtlCol="0" anchor="ctr"/>
+          <a:lstStyle/>
+          <a:p>
+            <a:pPr indent="0" marL="0">
+              <a:buNone/>
+            </a:pPr>
+            <a:r>
+              <a:rPr lang="en-US" sz="800" b="1" spc="100" kern="0" dirty="0">
+                <a:solidFill>
+                  <a:srgbClr val="9FB2C2"/>
+                </a:solidFill>
+                <a:latin typeface="Inter" pitchFamily="34" charset="0"/>
+                <a:ea typeface="Inter" pitchFamily="34" charset="-122"/>
+                <a:cs typeface="Inter" pitchFamily="34" charset="-120"/>
+              </a:rPr>
+              <a:t>MS. RIVERA'S SCREEN · SO FAR</a:t>
+            </a:r>
+            <a:endParaRPr lang="en-US" sz="800" dirty="0"/>
+          </a:p>
+        </p:txBody>
+      </p:sp>
+      <p:sp>
+        <p:nvSpPr>
+          <p:cNvPr id="11" name="Text 8"/>
+          <p:cNvSpPr/>
+          <p:nvPr/>
+        </p:nvSpPr>
+        <p:spPr>
+          <a:xfrm>
+            <a:off x="8860536" y="365760"/>
+            <a:ext cx="2670048" cy="566928"/>
+          </a:xfrm>
+          <a:prstGeom prst="rect">
+            <a:avLst/>
+          </a:prstGeom>
+          <a:noFill/>
+          <a:ln/>
+        </p:spPr>
+        <p:txBody>
+          <a:bodyPr wrap="square" lIns="0" tIns="0" rIns="0" bIns="0" rtlCol="0" anchor="ctr"/>
+          <a:lstStyle/>
+          <a:p>
+            <a:pPr indent="0" marL="0">
+              <a:buNone/>
+            </a:pPr>
+            <a:r>
+              <a:rPr lang="en-US" sz="1000" dirty="0">
+                <a:solidFill>
+                  <a:srgbClr val="1B1F24"/>
+                </a:solidFill>
+                <a:latin typeface="Inter" pitchFamily="34" charset="0"/>
+                <a:ea typeface="Inter" pitchFamily="34" charset="-122"/>
+                <a:cs typeface="Inter" pitchFamily="34" charset="-120"/>
+              </a:rPr>
+              <a:t>Her limits list: can't check facts, know her kids, or pick what matters.</a:t>
+            </a:r>
+            <a:endParaRPr lang="en-US" sz="1000" dirty="0"/>
+          </a:p>
+        </p:txBody>
+      </p:sp>
+      <p:sp>
+        <p:nvSpPr>
+          <p:cNvPr id="12" name="Text 9"/>
           <p:cNvSpPr/>
           <p:nvPr/>
         </p:nvSpPr>
@@ -11953,7 +15472,7 @@
       </p:sp>
       <p:sp>
         <p:nvSpPr>
-          <p:cNvPr id="6" name="Text 3"/>
+          <p:cNvPr id="13" name="Text 10"/>
           <p:cNvSpPr/>
           <p:nvPr/>
         </p:nvSpPr>
@@ -11992,7 +15511,7 @@
       </p:sp>
       <p:sp>
         <p:nvSpPr>
-          <p:cNvPr id="7" name="Shape 4"/>
+          <p:cNvPr id="14" name="Shape 11"/>
           <p:cNvSpPr/>
           <p:nvPr/>
         </p:nvSpPr>
@@ -12019,7 +15538,7 @@
       </p:sp>
       <p:sp>
         <p:nvSpPr>
-          <p:cNvPr id="8" name="Text 5"/>
+          <p:cNvPr id="15" name="Text 12"/>
           <p:cNvSpPr/>
           <p:nvPr/>
         </p:nvSpPr>
@@ -12058,7 +15577,7 @@
       </p:sp>
       <p:sp>
         <p:nvSpPr>
-          <p:cNvPr id="9" name="Text 6"/>
+          <p:cNvPr id="16" name="Text 13"/>
           <p:cNvSpPr/>
           <p:nvPr/>
         </p:nvSpPr>
@@ -12097,7 +15616,7 @@
       </p:sp>
       <p:sp>
         <p:nvSpPr>
-          <p:cNvPr id="10" name="Shape 7"/>
+          <p:cNvPr id="17" name="Shape 14"/>
           <p:cNvSpPr/>
           <p:nvPr/>
         </p:nvSpPr>
@@ -12124,7 +15643,7 @@
       </p:sp>
       <p:sp>
         <p:nvSpPr>
-          <p:cNvPr id="11" name="Text 8"/>
+          <p:cNvPr id="18" name="Text 15"/>
           <p:cNvSpPr/>
           <p:nvPr/>
         </p:nvSpPr>
@@ -12163,7 +15682,7 @@
       </p:sp>
       <p:sp>
         <p:nvSpPr>
-          <p:cNvPr id="12" name="Text 9"/>
+          <p:cNvPr id="19" name="Text 16"/>
           <p:cNvSpPr/>
           <p:nvPr/>
         </p:nvSpPr>
@@ -12202,7 +15721,7 @@
       </p:sp>
       <p:sp>
         <p:nvSpPr>
-          <p:cNvPr id="13" name="Shape 10"/>
+          <p:cNvPr id="20" name="Shape 17"/>
           <p:cNvSpPr/>
           <p:nvPr/>
         </p:nvSpPr>
@@ -12229,7 +15748,7 @@
       </p:sp>
       <p:sp>
         <p:nvSpPr>
-          <p:cNvPr id="14" name="Text 11"/>
+          <p:cNvPr id="21" name="Text 18"/>
           <p:cNvSpPr/>
           <p:nvPr/>
         </p:nvSpPr>
@@ -12268,7 +15787,7 @@
       </p:sp>
       <p:sp>
         <p:nvSpPr>
-          <p:cNvPr id="15" name="Text 12"/>
+          <p:cNvPr id="22" name="Text 19"/>
           <p:cNvSpPr/>
           <p:nvPr/>
         </p:nvSpPr>
@@ -12307,7 +15826,7 @@
       </p:sp>
       <p:sp>
         <p:nvSpPr>
-          <p:cNvPr id="16" name="Text 13"/>
+          <p:cNvPr id="23" name="Text 20"/>
           <p:cNvSpPr/>
           <p:nvPr/>
         </p:nvSpPr>
@@ -12494,7 +16013,214 @@
       </p:sp>
       <p:sp>
         <p:nvSpPr>
-          <p:cNvPr id="5" name="Text 2"/>
+          <p:cNvPr id="5" name="Shape 2"/>
+          <p:cNvSpPr/>
+          <p:nvPr/>
+        </p:nvSpPr>
+        <p:spPr>
+          <a:xfrm>
+            <a:off x="8732520" y="109728"/>
+            <a:ext cx="2926080" cy="896112"/>
+          </a:xfrm>
+          <a:prstGeom prst="roundRect">
+            <a:avLst>
+              <a:gd name="adj" fmla="val 7143"/>
+            </a:avLst>
+          </a:prstGeom>
+          <a:solidFill>
+            <a:srgbClr val="1E3A50"/>
+          </a:solidFill>
+          <a:ln w="12700">
+            <a:solidFill>
+              <a:srgbClr val="2A4A63"/>
+            </a:solidFill>
+            <a:prstDash val="solid"/>
+          </a:ln>
+        </p:spPr>
+      </p:sp>
+      <p:sp>
+        <p:nvSpPr>
+          <p:cNvPr id="6" name="Shape 3"/>
+          <p:cNvSpPr/>
+          <p:nvPr/>
+        </p:nvSpPr>
+        <p:spPr>
+          <a:xfrm>
+            <a:off x="8732520" y="109728"/>
+            <a:ext cx="2926080" cy="237744"/>
+          </a:xfrm>
+          <a:prstGeom prst="roundRect">
+            <a:avLst>
+              <a:gd name="adj" fmla="val 26923"/>
+            </a:avLst>
+          </a:prstGeom>
+          <a:solidFill>
+            <a:srgbClr val="0D1E2E"/>
+          </a:solidFill>
+          <a:ln w="12700">
+            <a:solidFill>
+              <a:srgbClr val="0D1E2E"/>
+            </a:solidFill>
+            <a:prstDash val="solid"/>
+          </a:ln>
+        </p:spPr>
+      </p:sp>
+      <p:sp>
+        <p:nvSpPr>
+          <p:cNvPr id="7" name="Shape 4"/>
+          <p:cNvSpPr/>
+          <p:nvPr/>
+        </p:nvSpPr>
+        <p:spPr>
+          <a:xfrm>
+            <a:off x="8823960" y="182880"/>
+            <a:ext cx="91440" cy="91440"/>
+          </a:xfrm>
+          <a:prstGeom prst="ellipse">
+            <a:avLst/>
+          </a:prstGeom>
+          <a:solidFill>
+            <a:srgbClr val="E8837A"/>
+          </a:solidFill>
+          <a:ln w="12700">
+            <a:solidFill>
+              <a:srgbClr val="E8837A"/>
+            </a:solidFill>
+            <a:prstDash val="solid"/>
+          </a:ln>
+        </p:spPr>
+      </p:sp>
+      <p:sp>
+        <p:nvSpPr>
+          <p:cNvPr id="8" name="Shape 5"/>
+          <p:cNvSpPr/>
+          <p:nvPr/>
+        </p:nvSpPr>
+        <p:spPr>
+          <a:xfrm>
+            <a:off x="8970264" y="182880"/>
+            <a:ext cx="91440" cy="91440"/>
+          </a:xfrm>
+          <a:prstGeom prst="ellipse">
+            <a:avLst/>
+          </a:prstGeom>
+          <a:solidFill>
+            <a:srgbClr val="F4A825"/>
+          </a:solidFill>
+          <a:ln w="12700">
+            <a:solidFill>
+              <a:srgbClr val="F4A825"/>
+            </a:solidFill>
+            <a:prstDash val="solid"/>
+          </a:ln>
+        </p:spPr>
+      </p:sp>
+      <p:sp>
+        <p:nvSpPr>
+          <p:cNvPr id="9" name="Shape 6"/>
+          <p:cNvSpPr/>
+          <p:nvPr/>
+        </p:nvSpPr>
+        <p:spPr>
+          <a:xfrm>
+            <a:off x="9116568" y="182880"/>
+            <a:ext cx="91440" cy="91440"/>
+          </a:xfrm>
+          <a:prstGeom prst="ellipse">
+            <a:avLst/>
+          </a:prstGeom>
+          <a:solidFill>
+            <a:srgbClr val="2E7D5B"/>
+          </a:solidFill>
+          <a:ln w="12700">
+            <a:solidFill>
+              <a:srgbClr val="2E7D5B"/>
+            </a:solidFill>
+            <a:prstDash val="solid"/>
+          </a:ln>
+        </p:spPr>
+      </p:sp>
+      <p:sp>
+        <p:nvSpPr>
+          <p:cNvPr id="10" name="Text 7"/>
+          <p:cNvSpPr/>
+          <p:nvPr/>
+        </p:nvSpPr>
+        <p:spPr>
+          <a:xfrm>
+            <a:off x="9299448" y="109728"/>
+            <a:ext cx="2286000" cy="237744"/>
+          </a:xfrm>
+          <a:prstGeom prst="rect">
+            <a:avLst/>
+          </a:prstGeom>
+          <a:noFill/>
+          <a:ln/>
+        </p:spPr>
+        <p:txBody>
+          <a:bodyPr wrap="square" lIns="0" tIns="0" rIns="0" bIns="0" rtlCol="0" anchor="ctr"/>
+          <a:lstStyle/>
+          <a:p>
+            <a:pPr indent="0" marL="0">
+              <a:buNone/>
+            </a:pPr>
+            <a:r>
+              <a:rPr lang="en-US" sz="800" b="1" spc="100" kern="0" dirty="0">
+                <a:solidFill>
+                  <a:srgbClr val="9FB2C2"/>
+                </a:solidFill>
+                <a:latin typeface="Inter" pitchFamily="34" charset="0"/>
+                <a:ea typeface="Inter" pitchFamily="34" charset="-122"/>
+                <a:cs typeface="Inter" pitchFamily="34" charset="-120"/>
+              </a:rPr>
+              <a:t>MS. RIVERA'S SCREEN · SO FAR</a:t>
+            </a:r>
+            <a:endParaRPr lang="en-US" sz="800" dirty="0"/>
+          </a:p>
+        </p:txBody>
+      </p:sp>
+      <p:sp>
+        <p:nvSpPr>
+          <p:cNvPr id="11" name="Text 8"/>
+          <p:cNvSpPr/>
+          <p:nvPr/>
+        </p:nvSpPr>
+        <p:spPr>
+          <a:xfrm>
+            <a:off x="8860536" y="365760"/>
+            <a:ext cx="2670048" cy="566928"/>
+          </a:xfrm>
+          <a:prstGeom prst="rect">
+            <a:avLst/>
+          </a:prstGeom>
+          <a:noFill/>
+          <a:ln/>
+        </p:spPr>
+        <p:txBody>
+          <a:bodyPr wrap="square" lIns="0" tIns="0" rIns="0" bIns="0" rtlCol="0" anchor="ctr"/>
+          <a:lstStyle/>
+          <a:p>
+            <a:pPr indent="0" marL="0">
+              <a:buNone/>
+            </a:pPr>
+            <a:r>
+              <a:rPr lang="en-US" sz="1000" dirty="0">
+                <a:solidFill>
+                  <a:srgbClr val="C9D4DE"/>
+                </a:solidFill>
+                <a:latin typeface="Inter" pitchFamily="34" charset="0"/>
+                <a:ea typeface="Inter" pitchFamily="34" charset="-122"/>
+                <a:cs typeface="Inter" pitchFamily="34" charset="-120"/>
+              </a:rPr>
+              <a:t>Her new norm: working prompts go in the staff doc. Nobody solves twice.</a:t>
+            </a:r>
+            <a:endParaRPr lang="en-US" sz="1000" dirty="0"/>
+          </a:p>
+        </p:txBody>
+      </p:sp>
+      <p:sp>
+        <p:nvSpPr>
+          <p:cNvPr id="12" name="Text 9"/>
           <p:cNvSpPr/>
           <p:nvPr/>
         </p:nvSpPr>
@@ -12533,7 +16259,7 @@
       </p:sp>
       <p:sp>
         <p:nvSpPr>
-          <p:cNvPr id="6" name="Text 3"/>
+          <p:cNvPr id="13" name="Text 10"/>
           <p:cNvSpPr/>
           <p:nvPr/>
         </p:nvSpPr>
@@ -12572,7 +16298,7 @@
       </p:sp>
       <p:sp>
         <p:nvSpPr>
-          <p:cNvPr id="7" name="Text 4"/>
+          <p:cNvPr id="14" name="Text 11"/>
           <p:cNvSpPr/>
           <p:nvPr/>
         </p:nvSpPr>
@@ -12634,7 +16360,7 @@
       </p:sp>
       <p:sp>
         <p:nvSpPr>
-          <p:cNvPr id="8" name="Text 5"/>
+          <p:cNvPr id="15" name="Text 12"/>
           <p:cNvSpPr/>
           <p:nvPr/>
         </p:nvSpPr>
@@ -12821,7 +16547,214 @@
       </p:sp>
       <p:sp>
         <p:nvSpPr>
-          <p:cNvPr id="5" name="Text 2"/>
+          <p:cNvPr id="5" name="Shape 2"/>
+          <p:cNvSpPr/>
+          <p:nvPr/>
+        </p:nvSpPr>
+        <p:spPr>
+          <a:xfrm>
+            <a:off x="8732520" y="109728"/>
+            <a:ext cx="2926080" cy="896112"/>
+          </a:xfrm>
+          <a:prstGeom prst="roundRect">
+            <a:avLst>
+              <a:gd name="adj" fmla="val 7143"/>
+            </a:avLst>
+          </a:prstGeom>
+          <a:solidFill>
+            <a:srgbClr val="F7F5F0"/>
+          </a:solidFill>
+          <a:ln w="12700">
+            <a:solidFill>
+              <a:srgbClr val="DCE3EA"/>
+            </a:solidFill>
+            <a:prstDash val="solid"/>
+          </a:ln>
+        </p:spPr>
+      </p:sp>
+      <p:sp>
+        <p:nvSpPr>
+          <p:cNvPr id="6" name="Shape 3"/>
+          <p:cNvSpPr/>
+          <p:nvPr/>
+        </p:nvSpPr>
+        <p:spPr>
+          <a:xfrm>
+            <a:off x="8732520" y="109728"/>
+            <a:ext cx="2926080" cy="237744"/>
+          </a:xfrm>
+          <a:prstGeom prst="roundRect">
+            <a:avLst>
+              <a:gd name="adj" fmla="val 26923"/>
+            </a:avLst>
+          </a:prstGeom>
+          <a:solidFill>
+            <a:srgbClr val="0D1E2E"/>
+          </a:solidFill>
+          <a:ln w="12700">
+            <a:solidFill>
+              <a:srgbClr val="0D1E2E"/>
+            </a:solidFill>
+            <a:prstDash val="solid"/>
+          </a:ln>
+        </p:spPr>
+      </p:sp>
+      <p:sp>
+        <p:nvSpPr>
+          <p:cNvPr id="7" name="Shape 4"/>
+          <p:cNvSpPr/>
+          <p:nvPr/>
+        </p:nvSpPr>
+        <p:spPr>
+          <a:xfrm>
+            <a:off x="8823960" y="182880"/>
+            <a:ext cx="91440" cy="91440"/>
+          </a:xfrm>
+          <a:prstGeom prst="ellipse">
+            <a:avLst/>
+          </a:prstGeom>
+          <a:solidFill>
+            <a:srgbClr val="E8837A"/>
+          </a:solidFill>
+          <a:ln w="12700">
+            <a:solidFill>
+              <a:srgbClr val="E8837A"/>
+            </a:solidFill>
+            <a:prstDash val="solid"/>
+          </a:ln>
+        </p:spPr>
+      </p:sp>
+      <p:sp>
+        <p:nvSpPr>
+          <p:cNvPr id="8" name="Shape 5"/>
+          <p:cNvSpPr/>
+          <p:nvPr/>
+        </p:nvSpPr>
+        <p:spPr>
+          <a:xfrm>
+            <a:off x="8970264" y="182880"/>
+            <a:ext cx="91440" cy="91440"/>
+          </a:xfrm>
+          <a:prstGeom prst="ellipse">
+            <a:avLst/>
+          </a:prstGeom>
+          <a:solidFill>
+            <a:srgbClr val="F4A825"/>
+          </a:solidFill>
+          <a:ln w="12700">
+            <a:solidFill>
+              <a:srgbClr val="F4A825"/>
+            </a:solidFill>
+            <a:prstDash val="solid"/>
+          </a:ln>
+        </p:spPr>
+      </p:sp>
+      <p:sp>
+        <p:nvSpPr>
+          <p:cNvPr id="9" name="Shape 6"/>
+          <p:cNvSpPr/>
+          <p:nvPr/>
+        </p:nvSpPr>
+        <p:spPr>
+          <a:xfrm>
+            <a:off x="9116568" y="182880"/>
+            <a:ext cx="91440" cy="91440"/>
+          </a:xfrm>
+          <a:prstGeom prst="ellipse">
+            <a:avLst/>
+          </a:prstGeom>
+          <a:solidFill>
+            <a:srgbClr val="2E7D5B"/>
+          </a:solidFill>
+          <a:ln w="12700">
+            <a:solidFill>
+              <a:srgbClr val="2E7D5B"/>
+            </a:solidFill>
+            <a:prstDash val="solid"/>
+          </a:ln>
+        </p:spPr>
+      </p:sp>
+      <p:sp>
+        <p:nvSpPr>
+          <p:cNvPr id="10" name="Text 7"/>
+          <p:cNvSpPr/>
+          <p:nvPr/>
+        </p:nvSpPr>
+        <p:spPr>
+          <a:xfrm>
+            <a:off x="9299448" y="109728"/>
+            <a:ext cx="2286000" cy="237744"/>
+          </a:xfrm>
+          <a:prstGeom prst="rect">
+            <a:avLst/>
+          </a:prstGeom>
+          <a:noFill/>
+          <a:ln/>
+        </p:spPr>
+        <p:txBody>
+          <a:bodyPr wrap="square" lIns="0" tIns="0" rIns="0" bIns="0" rtlCol="0" anchor="ctr"/>
+          <a:lstStyle/>
+          <a:p>
+            <a:pPr indent="0" marL="0">
+              <a:buNone/>
+            </a:pPr>
+            <a:r>
+              <a:rPr lang="en-US" sz="800" b="1" spc="100" kern="0" dirty="0">
+                <a:solidFill>
+                  <a:srgbClr val="9FB2C2"/>
+                </a:solidFill>
+                <a:latin typeface="Inter" pitchFamily="34" charset="0"/>
+                <a:ea typeface="Inter" pitchFamily="34" charset="-122"/>
+                <a:cs typeface="Inter" pitchFamily="34" charset="-120"/>
+              </a:rPr>
+              <a:t>MS. RIVERA'S SCREEN · SO FAR</a:t>
+            </a:r>
+            <a:endParaRPr lang="en-US" sz="800" dirty="0"/>
+          </a:p>
+        </p:txBody>
+      </p:sp>
+      <p:sp>
+        <p:nvSpPr>
+          <p:cNvPr id="11" name="Text 8"/>
+          <p:cNvSpPr/>
+          <p:nvPr/>
+        </p:nvSpPr>
+        <p:spPr>
+          <a:xfrm>
+            <a:off x="8860536" y="365760"/>
+            <a:ext cx="2670048" cy="566928"/>
+          </a:xfrm>
+          <a:prstGeom prst="rect">
+            <a:avLst/>
+          </a:prstGeom>
+          <a:noFill/>
+          <a:ln/>
+        </p:spPr>
+        <p:txBody>
+          <a:bodyPr wrap="square" lIns="0" tIns="0" rIns="0" bIns="0" rtlCol="0" anchor="ctr"/>
+          <a:lstStyle/>
+          <a:p>
+            <a:pPr indent="0" marL="0">
+              <a:buNone/>
+            </a:pPr>
+            <a:r>
+              <a:rPr lang="en-US" sz="1000" dirty="0">
+                <a:solidFill>
+                  <a:srgbClr val="1B1F24"/>
+                </a:solidFill>
+                <a:latin typeface="Inter" pitchFamily="34" charset="0"/>
+                <a:ea typeface="Inter" pitchFamily="34" charset="-122"/>
+                <a:cs typeface="Inter" pitchFamily="34" charset="-120"/>
+              </a:rPr>
+              <a:t>Her next kit: the formula starts differentiating for her whole roster.</a:t>
+            </a:r>
+            <a:endParaRPr lang="en-US" sz="1000" dirty="0"/>
+          </a:p>
+        </p:txBody>
+      </p:sp>
+      <p:sp>
+        <p:nvSpPr>
+          <p:cNvPr id="12" name="Text 9"/>
           <p:cNvSpPr/>
           <p:nvPr/>
         </p:nvSpPr>
@@ -12860,7 +16793,7 @@
       </p:sp>
       <p:sp>
         <p:nvSpPr>
-          <p:cNvPr id="6" name="Text 3"/>
+          <p:cNvPr id="13" name="Text 10"/>
           <p:cNvSpPr/>
           <p:nvPr/>
         </p:nvSpPr>
@@ -12899,7 +16832,7 @@
       </p:sp>
       <p:sp>
         <p:nvSpPr>
-          <p:cNvPr id="7" name="Shape 4"/>
+          <p:cNvPr id="14" name="Shape 11"/>
           <p:cNvSpPr/>
           <p:nvPr/>
         </p:nvSpPr>
@@ -12926,7 +16859,7 @@
       </p:sp>
       <p:sp>
         <p:nvSpPr>
-          <p:cNvPr id="8" name="Text 5"/>
+          <p:cNvPr id="15" name="Text 12"/>
           <p:cNvSpPr/>
           <p:nvPr/>
         </p:nvSpPr>
@@ -12965,7 +16898,7 @@
       </p:sp>
       <p:sp>
         <p:nvSpPr>
-          <p:cNvPr id="9" name="Shape 6"/>
+          <p:cNvPr id="16" name="Shape 13"/>
           <p:cNvSpPr/>
           <p:nvPr/>
         </p:nvSpPr>
@@ -12992,7 +16925,7 @@
       </p:sp>
       <p:sp>
         <p:nvSpPr>
-          <p:cNvPr id="10" name="Text 7"/>
+          <p:cNvPr id="17" name="Text 14"/>
           <p:cNvSpPr/>
           <p:nvPr/>
         </p:nvSpPr>
@@ -13031,7 +16964,7 @@
       </p:sp>
       <p:sp>
         <p:nvSpPr>
-          <p:cNvPr id="11" name="Shape 8"/>
+          <p:cNvPr id="18" name="Shape 15"/>
           <p:cNvSpPr/>
           <p:nvPr/>
         </p:nvSpPr>
@@ -13058,7 +16991,7 @@
       </p:sp>
       <p:sp>
         <p:nvSpPr>
-          <p:cNvPr id="12" name="Text 9"/>
+          <p:cNvPr id="19" name="Text 16"/>
           <p:cNvSpPr/>
           <p:nvPr/>
         </p:nvSpPr>
@@ -13097,7 +17030,7 @@
       </p:sp>
       <p:sp>
         <p:nvSpPr>
-          <p:cNvPr id="13" name="Shape 10"/>
+          <p:cNvPr id="20" name="Shape 17"/>
           <p:cNvSpPr/>
           <p:nvPr/>
         </p:nvSpPr>
@@ -13124,7 +17057,7 @@
       </p:sp>
       <p:sp>
         <p:nvSpPr>
-          <p:cNvPr id="14" name="Text 11"/>
+          <p:cNvPr id="21" name="Text 18"/>
           <p:cNvSpPr/>
           <p:nvPr/>
         </p:nvSpPr>
@@ -13163,7 +17096,7 @@
       </p:sp>
       <p:sp>
         <p:nvSpPr>
-          <p:cNvPr id="15" name="Shape 12"/>
+          <p:cNvPr id="22" name="Shape 19"/>
           <p:cNvSpPr/>
           <p:nvPr/>
         </p:nvSpPr>
@@ -13190,7 +17123,7 @@
       </p:sp>
       <p:sp>
         <p:nvSpPr>
-          <p:cNvPr id="16" name="Text 13"/>
+          <p:cNvPr id="23" name="Text 20"/>
           <p:cNvSpPr/>
           <p:nvPr/>
         </p:nvSpPr>
@@ -13229,7 +17162,7 @@
       </p:sp>
       <p:sp>
         <p:nvSpPr>
-          <p:cNvPr id="17" name="Shape 14"/>
+          <p:cNvPr id="24" name="Shape 21"/>
           <p:cNvSpPr/>
           <p:nvPr/>
         </p:nvSpPr>
@@ -13256,7 +17189,7 @@
       </p:sp>
       <p:sp>
         <p:nvSpPr>
-          <p:cNvPr id="18" name="Text 15"/>
+          <p:cNvPr id="25" name="Text 22"/>
           <p:cNvSpPr/>
           <p:nvPr/>
         </p:nvSpPr>
@@ -13295,7 +17228,7 @@
       </p:sp>
       <p:sp>
         <p:nvSpPr>
-          <p:cNvPr id="19" name="Shape 16"/>
+          <p:cNvPr id="26" name="Shape 23"/>
           <p:cNvSpPr/>
           <p:nvPr/>
         </p:nvSpPr>
@@ -13322,7 +17255,7 @@
       </p:sp>
       <p:sp>
         <p:nvSpPr>
-          <p:cNvPr id="20" name="Text 17"/>
+          <p:cNvPr id="27" name="Text 24"/>
           <p:cNvSpPr/>
           <p:nvPr/>
         </p:nvSpPr>
@@ -13361,7 +17294,7 @@
       </p:sp>
       <p:sp>
         <p:nvSpPr>
-          <p:cNvPr id="21" name="Shape 18"/>
+          <p:cNvPr id="28" name="Shape 25"/>
           <p:cNvSpPr/>
           <p:nvPr/>
         </p:nvSpPr>
@@ -13388,7 +17321,7 @@
       </p:sp>
       <p:sp>
         <p:nvSpPr>
-          <p:cNvPr id="22" name="Text 19"/>
+          <p:cNvPr id="29" name="Text 26"/>
           <p:cNvSpPr/>
           <p:nvPr/>
         </p:nvSpPr>
@@ -13427,7 +17360,7 @@
       </p:sp>
       <p:sp>
         <p:nvSpPr>
-          <p:cNvPr id="23" name="Shape 20"/>
+          <p:cNvPr id="30" name="Shape 27"/>
           <p:cNvSpPr/>
           <p:nvPr/>
         </p:nvSpPr>
@@ -13454,7 +17387,7 @@
       </p:sp>
       <p:sp>
         <p:nvSpPr>
-          <p:cNvPr id="24" name="Text 21"/>
+          <p:cNvPr id="31" name="Text 28"/>
           <p:cNvSpPr/>
           <p:nvPr/>
         </p:nvSpPr>
@@ -13655,7 +17588,214 @@
       </p:sp>
       <p:sp>
         <p:nvSpPr>
-          <p:cNvPr id="5" name="Text 2"/>
+          <p:cNvPr id="5" name="Shape 2"/>
+          <p:cNvSpPr/>
+          <p:nvPr/>
+        </p:nvSpPr>
+        <p:spPr>
+          <a:xfrm>
+            <a:off x="8732520" y="109728"/>
+            <a:ext cx="2926080" cy="896112"/>
+          </a:xfrm>
+          <a:prstGeom prst="roundRect">
+            <a:avLst>
+              <a:gd name="adj" fmla="val 7143"/>
+            </a:avLst>
+          </a:prstGeom>
+          <a:solidFill>
+            <a:srgbClr val="F7F5F0"/>
+          </a:solidFill>
+          <a:ln w="12700">
+            <a:solidFill>
+              <a:srgbClr val="DCE3EA"/>
+            </a:solidFill>
+            <a:prstDash val="solid"/>
+          </a:ln>
+        </p:spPr>
+      </p:sp>
+      <p:sp>
+        <p:nvSpPr>
+          <p:cNvPr id="6" name="Shape 3"/>
+          <p:cNvSpPr/>
+          <p:nvPr/>
+        </p:nvSpPr>
+        <p:spPr>
+          <a:xfrm>
+            <a:off x="8732520" y="109728"/>
+            <a:ext cx="2926080" cy="237744"/>
+          </a:xfrm>
+          <a:prstGeom prst="roundRect">
+            <a:avLst>
+              <a:gd name="adj" fmla="val 26923"/>
+            </a:avLst>
+          </a:prstGeom>
+          <a:solidFill>
+            <a:srgbClr val="0D1E2E"/>
+          </a:solidFill>
+          <a:ln w="12700">
+            <a:solidFill>
+              <a:srgbClr val="0D1E2E"/>
+            </a:solidFill>
+            <a:prstDash val="solid"/>
+          </a:ln>
+        </p:spPr>
+      </p:sp>
+      <p:sp>
+        <p:nvSpPr>
+          <p:cNvPr id="7" name="Shape 4"/>
+          <p:cNvSpPr/>
+          <p:nvPr/>
+        </p:nvSpPr>
+        <p:spPr>
+          <a:xfrm>
+            <a:off x="8823960" y="182880"/>
+            <a:ext cx="91440" cy="91440"/>
+          </a:xfrm>
+          <a:prstGeom prst="ellipse">
+            <a:avLst/>
+          </a:prstGeom>
+          <a:solidFill>
+            <a:srgbClr val="E8837A"/>
+          </a:solidFill>
+          <a:ln w="12700">
+            <a:solidFill>
+              <a:srgbClr val="E8837A"/>
+            </a:solidFill>
+            <a:prstDash val="solid"/>
+          </a:ln>
+        </p:spPr>
+      </p:sp>
+      <p:sp>
+        <p:nvSpPr>
+          <p:cNvPr id="8" name="Shape 5"/>
+          <p:cNvSpPr/>
+          <p:nvPr/>
+        </p:nvSpPr>
+        <p:spPr>
+          <a:xfrm>
+            <a:off x="8970264" y="182880"/>
+            <a:ext cx="91440" cy="91440"/>
+          </a:xfrm>
+          <a:prstGeom prst="ellipse">
+            <a:avLst/>
+          </a:prstGeom>
+          <a:solidFill>
+            <a:srgbClr val="F4A825"/>
+          </a:solidFill>
+          <a:ln w="12700">
+            <a:solidFill>
+              <a:srgbClr val="F4A825"/>
+            </a:solidFill>
+            <a:prstDash val="solid"/>
+          </a:ln>
+        </p:spPr>
+      </p:sp>
+      <p:sp>
+        <p:nvSpPr>
+          <p:cNvPr id="9" name="Shape 6"/>
+          <p:cNvSpPr/>
+          <p:nvPr/>
+        </p:nvSpPr>
+        <p:spPr>
+          <a:xfrm>
+            <a:off x="9116568" y="182880"/>
+            <a:ext cx="91440" cy="91440"/>
+          </a:xfrm>
+          <a:prstGeom prst="ellipse">
+            <a:avLst/>
+          </a:prstGeom>
+          <a:solidFill>
+            <a:srgbClr val="2E7D5B"/>
+          </a:solidFill>
+          <a:ln w="12700">
+            <a:solidFill>
+              <a:srgbClr val="2E7D5B"/>
+            </a:solidFill>
+            <a:prstDash val="solid"/>
+          </a:ln>
+        </p:spPr>
+      </p:sp>
+      <p:sp>
+        <p:nvSpPr>
+          <p:cNvPr id="10" name="Text 7"/>
+          <p:cNvSpPr/>
+          <p:nvPr/>
+        </p:nvSpPr>
+        <p:spPr>
+          <a:xfrm>
+            <a:off x="9299448" y="109728"/>
+            <a:ext cx="2286000" cy="237744"/>
+          </a:xfrm>
+          <a:prstGeom prst="rect">
+            <a:avLst/>
+          </a:prstGeom>
+          <a:noFill/>
+          <a:ln/>
+        </p:spPr>
+        <p:txBody>
+          <a:bodyPr wrap="square" lIns="0" tIns="0" rIns="0" bIns="0" rtlCol="0" anchor="ctr"/>
+          <a:lstStyle/>
+          <a:p>
+            <a:pPr indent="0" marL="0">
+              <a:buNone/>
+            </a:pPr>
+            <a:r>
+              <a:rPr lang="en-US" sz="800" b="1" spc="100" kern="0" dirty="0">
+                <a:solidFill>
+                  <a:srgbClr val="9FB2C2"/>
+                </a:solidFill>
+                <a:latin typeface="Inter" pitchFamily="34" charset="0"/>
+                <a:ea typeface="Inter" pitchFamily="34" charset="-122"/>
+                <a:cs typeface="Inter" pitchFamily="34" charset="-120"/>
+              </a:rPr>
+              <a:t>MS. RIVERA'S SCREEN · SO FAR</a:t>
+            </a:r>
+            <a:endParaRPr lang="en-US" sz="800" dirty="0"/>
+          </a:p>
+        </p:txBody>
+      </p:sp>
+      <p:sp>
+        <p:nvSpPr>
+          <p:cNvPr id="11" name="Text 8"/>
+          <p:cNvSpPr/>
+          <p:nvPr/>
+        </p:nvSpPr>
+        <p:spPr>
+          <a:xfrm>
+            <a:off x="8860536" y="365760"/>
+            <a:ext cx="2670048" cy="566928"/>
+          </a:xfrm>
+          <a:prstGeom prst="rect">
+            <a:avLst/>
+          </a:prstGeom>
+          <a:noFill/>
+          <a:ln/>
+        </p:spPr>
+        <p:txBody>
+          <a:bodyPr wrap="square" lIns="0" tIns="0" rIns="0" bIns="0" rtlCol="0" anchor="ctr"/>
+          <a:lstStyle/>
+          <a:p>
+            <a:pPr indent="0" marL="0">
+              <a:buNone/>
+            </a:pPr>
+            <a:r>
+              <a:rPr lang="en-US" sz="1000" dirty="0">
+                <a:solidFill>
+                  <a:srgbClr val="1B1F24"/>
+                </a:solidFill>
+                <a:latin typeface="Inter" pitchFamily="34" charset="0"/>
+                <a:ea typeface="Inter" pitchFamily="34" charset="-122"/>
+                <a:cs typeface="Inter" pitchFamily="34" charset="-120"/>
+              </a:rPr>
+              <a:t>Her 48 hours: run the template for real, one colleague test, one post.</a:t>
+            </a:r>
+            <a:endParaRPr lang="en-US" sz="1000" dirty="0"/>
+          </a:p>
+        </p:txBody>
+      </p:sp>
+      <p:sp>
+        <p:nvSpPr>
+          <p:cNvPr id="12" name="Text 9"/>
           <p:cNvSpPr/>
           <p:nvPr/>
         </p:nvSpPr>
@@ -13694,7 +17834,7 @@
       </p:sp>
       <p:sp>
         <p:nvSpPr>
-          <p:cNvPr id="6" name="Text 3"/>
+          <p:cNvPr id="13" name="Text 10"/>
           <p:cNvSpPr/>
           <p:nvPr/>
         </p:nvSpPr>
@@ -13733,7 +17873,7 @@
       </p:sp>
       <p:sp>
         <p:nvSpPr>
-          <p:cNvPr id="7" name="Shape 4"/>
+          <p:cNvPr id="14" name="Shape 11"/>
           <p:cNvSpPr/>
           <p:nvPr/>
         </p:nvSpPr>
@@ -13760,7 +17900,7 @@
       </p:sp>
       <p:sp>
         <p:nvSpPr>
-          <p:cNvPr id="8" name="Text 5"/>
+          <p:cNvPr id="15" name="Text 12"/>
           <p:cNvSpPr/>
           <p:nvPr/>
         </p:nvSpPr>
@@ -13799,7 +17939,7 @@
       </p:sp>
       <p:sp>
         <p:nvSpPr>
-          <p:cNvPr id="9" name="Text 6"/>
+          <p:cNvPr id="16" name="Text 13"/>
           <p:cNvSpPr/>
           <p:nvPr/>
         </p:nvSpPr>
@@ -13838,7 +17978,7 @@
       </p:sp>
       <p:sp>
         <p:nvSpPr>
-          <p:cNvPr id="10" name="Text 7"/>
+          <p:cNvPr id="17" name="Text 14"/>
           <p:cNvSpPr/>
           <p:nvPr/>
         </p:nvSpPr>
@@ -13877,7 +18017,7 @@
       </p:sp>
       <p:sp>
         <p:nvSpPr>
-          <p:cNvPr id="11" name="Shape 8"/>
+          <p:cNvPr id="18" name="Shape 15"/>
           <p:cNvSpPr/>
           <p:nvPr/>
         </p:nvSpPr>
@@ -13904,7 +18044,7 @@
       </p:sp>
       <p:sp>
         <p:nvSpPr>
-          <p:cNvPr id="12" name="Text 9"/>
+          <p:cNvPr id="19" name="Text 16"/>
           <p:cNvSpPr/>
           <p:nvPr/>
         </p:nvSpPr>
@@ -13943,7 +18083,7 @@
       </p:sp>
       <p:sp>
         <p:nvSpPr>
-          <p:cNvPr id="13" name="Text 10"/>
+          <p:cNvPr id="20" name="Text 17"/>
           <p:cNvSpPr/>
           <p:nvPr/>
         </p:nvSpPr>
@@ -13982,7 +18122,7 @@
       </p:sp>
       <p:sp>
         <p:nvSpPr>
-          <p:cNvPr id="14" name="Text 11"/>
+          <p:cNvPr id="21" name="Text 18"/>
           <p:cNvSpPr/>
           <p:nvPr/>
         </p:nvSpPr>
@@ -14021,7 +18161,7 @@
       </p:sp>
       <p:sp>
         <p:nvSpPr>
-          <p:cNvPr id="15" name="Shape 12"/>
+          <p:cNvPr id="22" name="Shape 19"/>
           <p:cNvSpPr/>
           <p:nvPr/>
         </p:nvSpPr>
@@ -14048,7 +18188,7 @@
       </p:sp>
       <p:sp>
         <p:nvSpPr>
-          <p:cNvPr id="16" name="Text 13"/>
+          <p:cNvPr id="23" name="Text 20"/>
           <p:cNvSpPr/>
           <p:nvPr/>
         </p:nvSpPr>
@@ -14087,7 +18227,7 @@
       </p:sp>
       <p:sp>
         <p:nvSpPr>
-          <p:cNvPr id="17" name="Text 14"/>
+          <p:cNvPr id="24" name="Text 21"/>
           <p:cNvSpPr/>
           <p:nvPr/>
         </p:nvSpPr>
@@ -14126,7 +18266,7 @@
       </p:sp>
       <p:sp>
         <p:nvSpPr>
-          <p:cNvPr id="18" name="Text 15"/>
+          <p:cNvPr id="25" name="Text 22"/>
           <p:cNvSpPr/>
           <p:nvPr/>
         </p:nvSpPr>
@@ -14313,7 +18453,214 @@
       </p:sp>
       <p:sp>
         <p:nvSpPr>
-          <p:cNvPr id="5" name="Text 2"/>
+          <p:cNvPr id="5" name="Shape 2"/>
+          <p:cNvSpPr/>
+          <p:nvPr/>
+        </p:nvSpPr>
+        <p:spPr>
+          <a:xfrm>
+            <a:off x="8732520" y="109728"/>
+            <a:ext cx="2926080" cy="896112"/>
+          </a:xfrm>
+          <a:prstGeom prst="roundRect">
+            <a:avLst>
+              <a:gd name="adj" fmla="val 7143"/>
+            </a:avLst>
+          </a:prstGeom>
+          <a:solidFill>
+            <a:srgbClr val="F7F5F0"/>
+          </a:solidFill>
+          <a:ln w="12700">
+            <a:solidFill>
+              <a:srgbClr val="DCE3EA"/>
+            </a:solidFill>
+            <a:prstDash val="solid"/>
+          </a:ln>
+        </p:spPr>
+      </p:sp>
+      <p:sp>
+        <p:nvSpPr>
+          <p:cNvPr id="6" name="Shape 3"/>
+          <p:cNvSpPr/>
+          <p:nvPr/>
+        </p:nvSpPr>
+        <p:spPr>
+          <a:xfrm>
+            <a:off x="8732520" y="109728"/>
+            <a:ext cx="2926080" cy="237744"/>
+          </a:xfrm>
+          <a:prstGeom prst="roundRect">
+            <a:avLst>
+              <a:gd name="adj" fmla="val 26923"/>
+            </a:avLst>
+          </a:prstGeom>
+          <a:solidFill>
+            <a:srgbClr val="0D1E2E"/>
+          </a:solidFill>
+          <a:ln w="12700">
+            <a:solidFill>
+              <a:srgbClr val="0D1E2E"/>
+            </a:solidFill>
+            <a:prstDash val="solid"/>
+          </a:ln>
+        </p:spPr>
+      </p:sp>
+      <p:sp>
+        <p:nvSpPr>
+          <p:cNvPr id="7" name="Shape 4"/>
+          <p:cNvSpPr/>
+          <p:nvPr/>
+        </p:nvSpPr>
+        <p:spPr>
+          <a:xfrm>
+            <a:off x="8823960" y="182880"/>
+            <a:ext cx="91440" cy="91440"/>
+          </a:xfrm>
+          <a:prstGeom prst="ellipse">
+            <a:avLst/>
+          </a:prstGeom>
+          <a:solidFill>
+            <a:srgbClr val="E8837A"/>
+          </a:solidFill>
+          <a:ln w="12700">
+            <a:solidFill>
+              <a:srgbClr val="E8837A"/>
+            </a:solidFill>
+            <a:prstDash val="solid"/>
+          </a:ln>
+        </p:spPr>
+      </p:sp>
+      <p:sp>
+        <p:nvSpPr>
+          <p:cNvPr id="8" name="Shape 5"/>
+          <p:cNvSpPr/>
+          <p:nvPr/>
+        </p:nvSpPr>
+        <p:spPr>
+          <a:xfrm>
+            <a:off x="8970264" y="182880"/>
+            <a:ext cx="91440" cy="91440"/>
+          </a:xfrm>
+          <a:prstGeom prst="ellipse">
+            <a:avLst/>
+          </a:prstGeom>
+          <a:solidFill>
+            <a:srgbClr val="F4A825"/>
+          </a:solidFill>
+          <a:ln w="12700">
+            <a:solidFill>
+              <a:srgbClr val="F4A825"/>
+            </a:solidFill>
+            <a:prstDash val="solid"/>
+          </a:ln>
+        </p:spPr>
+      </p:sp>
+      <p:sp>
+        <p:nvSpPr>
+          <p:cNvPr id="9" name="Shape 6"/>
+          <p:cNvSpPr/>
+          <p:nvPr/>
+        </p:nvSpPr>
+        <p:spPr>
+          <a:xfrm>
+            <a:off x="9116568" y="182880"/>
+            <a:ext cx="91440" cy="91440"/>
+          </a:xfrm>
+          <a:prstGeom prst="ellipse">
+            <a:avLst/>
+          </a:prstGeom>
+          <a:solidFill>
+            <a:srgbClr val="2E7D5B"/>
+          </a:solidFill>
+          <a:ln w="12700">
+            <a:solidFill>
+              <a:srgbClr val="2E7D5B"/>
+            </a:solidFill>
+            <a:prstDash val="solid"/>
+          </a:ln>
+        </p:spPr>
+      </p:sp>
+      <p:sp>
+        <p:nvSpPr>
+          <p:cNvPr id="10" name="Text 7"/>
+          <p:cNvSpPr/>
+          <p:nvPr/>
+        </p:nvSpPr>
+        <p:spPr>
+          <a:xfrm>
+            <a:off x="9299448" y="109728"/>
+            <a:ext cx="2286000" cy="237744"/>
+          </a:xfrm>
+          <a:prstGeom prst="rect">
+            <a:avLst/>
+          </a:prstGeom>
+          <a:noFill/>
+          <a:ln/>
+        </p:spPr>
+        <p:txBody>
+          <a:bodyPr wrap="square" lIns="0" tIns="0" rIns="0" bIns="0" rtlCol="0" anchor="ctr"/>
+          <a:lstStyle/>
+          <a:p>
+            <a:pPr indent="0" marL="0">
+              <a:buNone/>
+            </a:pPr>
+            <a:r>
+              <a:rPr lang="en-US" sz="800" b="1" spc="100" kern="0" dirty="0">
+                <a:solidFill>
+                  <a:srgbClr val="9FB2C2"/>
+                </a:solidFill>
+                <a:latin typeface="Inter" pitchFamily="34" charset="0"/>
+                <a:ea typeface="Inter" pitchFamily="34" charset="-122"/>
+                <a:cs typeface="Inter" pitchFamily="34" charset="-120"/>
+              </a:rPr>
+              <a:t>MS. RIVERA'S SCREEN · SO FAR</a:t>
+            </a:r>
+            <a:endParaRPr lang="en-US" sz="800" dirty="0"/>
+          </a:p>
+        </p:txBody>
+      </p:sp>
+      <p:sp>
+        <p:nvSpPr>
+          <p:cNvPr id="11" name="Text 8"/>
+          <p:cNvSpPr/>
+          <p:nvPr/>
+        </p:nvSpPr>
+        <p:spPr>
+          <a:xfrm>
+            <a:off x="8860536" y="365760"/>
+            <a:ext cx="2670048" cy="566928"/>
+          </a:xfrm>
+          <a:prstGeom prst="rect">
+            <a:avLst/>
+          </a:prstGeom>
+          <a:noFill/>
+          <a:ln/>
+        </p:spPr>
+        <p:txBody>
+          <a:bodyPr wrap="square" lIns="0" tIns="0" rIns="0" bIns="0" rtlCol="0" anchor="ctr"/>
+          <a:lstStyle/>
+          <a:p>
+            <a:pPr indent="0" marL="0">
+              <a:buNone/>
+            </a:pPr>
+            <a:r>
+              <a:rPr lang="en-US" sz="1000" dirty="0">
+                <a:solidFill>
+                  <a:srgbClr val="1B1F24"/>
+                </a:solidFill>
+                <a:latin typeface="Inter" pitchFamily="34" charset="0"/>
+                <a:ea typeface="Inter" pitchFamily="34" charset="-122"/>
+                <a:cs typeface="Inter" pitchFamily="34" charset="-120"/>
+              </a:rPr>
+              <a:t>Her exit ticket: one technique taken, one task still wanted.</a:t>
+            </a:r>
+            <a:endParaRPr lang="en-US" sz="1000" dirty="0"/>
+          </a:p>
+        </p:txBody>
+      </p:sp>
+      <p:sp>
+        <p:nvSpPr>
+          <p:cNvPr id="12" name="Text 9"/>
           <p:cNvSpPr/>
           <p:nvPr/>
         </p:nvSpPr>
@@ -14352,7 +18699,7 @@
       </p:sp>
       <p:sp>
         <p:nvSpPr>
-          <p:cNvPr id="6" name="Text 3"/>
+          <p:cNvPr id="13" name="Text 10"/>
           <p:cNvSpPr/>
           <p:nvPr/>
         </p:nvSpPr>
@@ -14391,7 +18738,7 @@
       </p:sp>
       <p:sp>
         <p:nvSpPr>
-          <p:cNvPr id="7" name="Text 4"/>
+          <p:cNvPr id="14" name="Text 11"/>
           <p:cNvSpPr/>
           <p:nvPr/>
         </p:nvSpPr>
@@ -14476,7 +18823,7 @@
       </p:sp>
       <p:sp>
         <p:nvSpPr>
-          <p:cNvPr id="8" name="Text 5"/>
+          <p:cNvPr id="15" name="Text 12"/>
           <p:cNvSpPr/>
           <p:nvPr/>
         </p:nvSpPr>
@@ -14663,7 +19010,214 @@
       </p:sp>
       <p:sp>
         <p:nvSpPr>
-          <p:cNvPr id="5" name="Text 2"/>
+          <p:cNvPr id="5" name="Shape 2"/>
+          <p:cNvSpPr/>
+          <p:nvPr/>
+        </p:nvSpPr>
+        <p:spPr>
+          <a:xfrm>
+            <a:off x="8732520" y="109728"/>
+            <a:ext cx="2926080" cy="896112"/>
+          </a:xfrm>
+          <a:prstGeom prst="roundRect">
+            <a:avLst>
+              <a:gd name="adj" fmla="val 7143"/>
+            </a:avLst>
+          </a:prstGeom>
+          <a:solidFill>
+            <a:srgbClr val="F7F5F0"/>
+          </a:solidFill>
+          <a:ln w="12700">
+            <a:solidFill>
+              <a:srgbClr val="DCE3EA"/>
+            </a:solidFill>
+            <a:prstDash val="solid"/>
+          </a:ln>
+        </p:spPr>
+      </p:sp>
+      <p:sp>
+        <p:nvSpPr>
+          <p:cNvPr id="6" name="Shape 3"/>
+          <p:cNvSpPr/>
+          <p:nvPr/>
+        </p:nvSpPr>
+        <p:spPr>
+          <a:xfrm>
+            <a:off x="8732520" y="109728"/>
+            <a:ext cx="2926080" cy="237744"/>
+          </a:xfrm>
+          <a:prstGeom prst="roundRect">
+            <a:avLst>
+              <a:gd name="adj" fmla="val 26923"/>
+            </a:avLst>
+          </a:prstGeom>
+          <a:solidFill>
+            <a:srgbClr val="0D1E2E"/>
+          </a:solidFill>
+          <a:ln w="12700">
+            <a:solidFill>
+              <a:srgbClr val="0D1E2E"/>
+            </a:solidFill>
+            <a:prstDash val="solid"/>
+          </a:ln>
+        </p:spPr>
+      </p:sp>
+      <p:sp>
+        <p:nvSpPr>
+          <p:cNvPr id="7" name="Shape 4"/>
+          <p:cNvSpPr/>
+          <p:nvPr/>
+        </p:nvSpPr>
+        <p:spPr>
+          <a:xfrm>
+            <a:off x="8823960" y="182880"/>
+            <a:ext cx="91440" cy="91440"/>
+          </a:xfrm>
+          <a:prstGeom prst="ellipse">
+            <a:avLst/>
+          </a:prstGeom>
+          <a:solidFill>
+            <a:srgbClr val="E8837A"/>
+          </a:solidFill>
+          <a:ln w="12700">
+            <a:solidFill>
+              <a:srgbClr val="E8837A"/>
+            </a:solidFill>
+            <a:prstDash val="solid"/>
+          </a:ln>
+        </p:spPr>
+      </p:sp>
+      <p:sp>
+        <p:nvSpPr>
+          <p:cNvPr id="8" name="Shape 5"/>
+          <p:cNvSpPr/>
+          <p:nvPr/>
+        </p:nvSpPr>
+        <p:spPr>
+          <a:xfrm>
+            <a:off x="8970264" y="182880"/>
+            <a:ext cx="91440" cy="91440"/>
+          </a:xfrm>
+          <a:prstGeom prst="ellipse">
+            <a:avLst/>
+          </a:prstGeom>
+          <a:solidFill>
+            <a:srgbClr val="F4A825"/>
+          </a:solidFill>
+          <a:ln w="12700">
+            <a:solidFill>
+              <a:srgbClr val="F4A825"/>
+            </a:solidFill>
+            <a:prstDash val="solid"/>
+          </a:ln>
+        </p:spPr>
+      </p:sp>
+      <p:sp>
+        <p:nvSpPr>
+          <p:cNvPr id="9" name="Shape 6"/>
+          <p:cNvSpPr/>
+          <p:nvPr/>
+        </p:nvSpPr>
+        <p:spPr>
+          <a:xfrm>
+            <a:off x="9116568" y="182880"/>
+            <a:ext cx="91440" cy="91440"/>
+          </a:xfrm>
+          <a:prstGeom prst="ellipse">
+            <a:avLst/>
+          </a:prstGeom>
+          <a:solidFill>
+            <a:srgbClr val="2E7D5B"/>
+          </a:solidFill>
+          <a:ln w="12700">
+            <a:solidFill>
+              <a:srgbClr val="2E7D5B"/>
+            </a:solidFill>
+            <a:prstDash val="solid"/>
+          </a:ln>
+        </p:spPr>
+      </p:sp>
+      <p:sp>
+        <p:nvSpPr>
+          <p:cNvPr id="10" name="Text 7"/>
+          <p:cNvSpPr/>
+          <p:nvPr/>
+        </p:nvSpPr>
+        <p:spPr>
+          <a:xfrm>
+            <a:off x="9299448" y="109728"/>
+            <a:ext cx="2286000" cy="237744"/>
+          </a:xfrm>
+          <a:prstGeom prst="rect">
+            <a:avLst/>
+          </a:prstGeom>
+          <a:noFill/>
+          <a:ln/>
+        </p:spPr>
+        <p:txBody>
+          <a:bodyPr wrap="square" lIns="0" tIns="0" rIns="0" bIns="0" rtlCol="0" anchor="ctr"/>
+          <a:lstStyle/>
+          <a:p>
+            <a:pPr indent="0" marL="0">
+              <a:buNone/>
+            </a:pPr>
+            <a:r>
+              <a:rPr lang="en-US" sz="800" b="1" spc="100" kern="0" dirty="0">
+                <a:solidFill>
+                  <a:srgbClr val="9FB2C2"/>
+                </a:solidFill>
+                <a:latin typeface="Inter" pitchFamily="34" charset="0"/>
+                <a:ea typeface="Inter" pitchFamily="34" charset="-122"/>
+                <a:cs typeface="Inter" pitchFamily="34" charset="-120"/>
+              </a:rPr>
+              <a:t>MS. RIVERA'S SCREEN · SO FAR</a:t>
+            </a:r>
+            <a:endParaRPr lang="en-US" sz="800" dirty="0"/>
+          </a:p>
+        </p:txBody>
+      </p:sp>
+      <p:sp>
+        <p:nvSpPr>
+          <p:cNvPr id="11" name="Text 8"/>
+          <p:cNvSpPr/>
+          <p:nvPr/>
+        </p:nvSpPr>
+        <p:spPr>
+          <a:xfrm>
+            <a:off x="8860536" y="365760"/>
+            <a:ext cx="2670048" cy="566928"/>
+          </a:xfrm>
+          <a:prstGeom prst="rect">
+            <a:avLst/>
+          </a:prstGeom>
+          <a:noFill/>
+          <a:ln/>
+        </p:spPr>
+        <p:txBody>
+          <a:bodyPr wrap="square" lIns="0" tIns="0" rIns="0" bIns="0" rtlCol="0" anchor="ctr"/>
+          <a:lstStyle/>
+          <a:p>
+            <a:pPr indent="0" marL="0">
+              <a:buNone/>
+            </a:pPr>
+            <a:r>
+              <a:rPr lang="en-US" sz="1000" dirty="0">
+                <a:solidFill>
+                  <a:srgbClr val="1B1F24"/>
+                </a:solidFill>
+                <a:latin typeface="Inter" pitchFamily="34" charset="0"/>
+                <a:ea typeface="Inter" pitchFamily="34" charset="-122"/>
+                <a:cs typeface="Inter" pitchFamily="34" charset="-120"/>
+              </a:rPr>
+              <a:t>Her lesson learned: vague in, beige out. The model only has what she gives it.</a:t>
+            </a:r>
+            <a:endParaRPr lang="en-US" sz="1000" dirty="0"/>
+          </a:p>
+        </p:txBody>
+      </p:sp>
+      <p:sp>
+        <p:nvSpPr>
+          <p:cNvPr id="12" name="Text 9"/>
           <p:cNvSpPr/>
           <p:nvPr/>
         </p:nvSpPr>
@@ -14702,7 +19256,7 @@
       </p:sp>
       <p:sp>
         <p:nvSpPr>
-          <p:cNvPr id="6" name="Text 3"/>
+          <p:cNvPr id="13" name="Text 10"/>
           <p:cNvSpPr/>
           <p:nvPr/>
         </p:nvSpPr>
@@ -14741,7 +19295,7 @@
       </p:sp>
       <p:sp>
         <p:nvSpPr>
-          <p:cNvPr id="7" name="Text 4"/>
+          <p:cNvPr id="14" name="Text 11"/>
           <p:cNvSpPr/>
           <p:nvPr/>
         </p:nvSpPr>
@@ -14826,7 +19380,7 @@
       </p:sp>
       <p:sp>
         <p:nvSpPr>
-          <p:cNvPr id="8" name="Shape 5"/>
+          <p:cNvPr id="15" name="Shape 12"/>
           <p:cNvSpPr/>
           <p:nvPr/>
         </p:nvSpPr>
@@ -14853,7 +19407,7 @@
       </p:sp>
       <p:sp>
         <p:nvSpPr>
-          <p:cNvPr id="9" name="Text 6"/>
+          <p:cNvPr id="16" name="Text 13"/>
           <p:cNvSpPr/>
           <p:nvPr/>
         </p:nvSpPr>
@@ -15351,7 +19905,214 @@
       </p:sp>
       <p:sp>
         <p:nvSpPr>
-          <p:cNvPr id="5" name="Text 2"/>
+          <p:cNvPr id="5" name="Shape 2"/>
+          <p:cNvSpPr/>
+          <p:nvPr/>
+        </p:nvSpPr>
+        <p:spPr>
+          <a:xfrm>
+            <a:off x="8732520" y="109728"/>
+            <a:ext cx="2926080" cy="896112"/>
+          </a:xfrm>
+          <a:prstGeom prst="roundRect">
+            <a:avLst>
+              <a:gd name="adj" fmla="val 7143"/>
+            </a:avLst>
+          </a:prstGeom>
+          <a:solidFill>
+            <a:srgbClr val="F7F5F0"/>
+          </a:solidFill>
+          <a:ln w="12700">
+            <a:solidFill>
+              <a:srgbClr val="DCE3EA"/>
+            </a:solidFill>
+            <a:prstDash val="solid"/>
+          </a:ln>
+        </p:spPr>
+      </p:sp>
+      <p:sp>
+        <p:nvSpPr>
+          <p:cNvPr id="6" name="Shape 3"/>
+          <p:cNvSpPr/>
+          <p:nvPr/>
+        </p:nvSpPr>
+        <p:spPr>
+          <a:xfrm>
+            <a:off x="8732520" y="109728"/>
+            <a:ext cx="2926080" cy="237744"/>
+          </a:xfrm>
+          <a:prstGeom prst="roundRect">
+            <a:avLst>
+              <a:gd name="adj" fmla="val 26923"/>
+            </a:avLst>
+          </a:prstGeom>
+          <a:solidFill>
+            <a:srgbClr val="0D1E2E"/>
+          </a:solidFill>
+          <a:ln w="12700">
+            <a:solidFill>
+              <a:srgbClr val="0D1E2E"/>
+            </a:solidFill>
+            <a:prstDash val="solid"/>
+          </a:ln>
+        </p:spPr>
+      </p:sp>
+      <p:sp>
+        <p:nvSpPr>
+          <p:cNvPr id="7" name="Shape 4"/>
+          <p:cNvSpPr/>
+          <p:nvPr/>
+        </p:nvSpPr>
+        <p:spPr>
+          <a:xfrm>
+            <a:off x="8823960" y="182880"/>
+            <a:ext cx="91440" cy="91440"/>
+          </a:xfrm>
+          <a:prstGeom prst="ellipse">
+            <a:avLst/>
+          </a:prstGeom>
+          <a:solidFill>
+            <a:srgbClr val="E8837A"/>
+          </a:solidFill>
+          <a:ln w="12700">
+            <a:solidFill>
+              <a:srgbClr val="E8837A"/>
+            </a:solidFill>
+            <a:prstDash val="solid"/>
+          </a:ln>
+        </p:spPr>
+      </p:sp>
+      <p:sp>
+        <p:nvSpPr>
+          <p:cNvPr id="8" name="Shape 5"/>
+          <p:cNvSpPr/>
+          <p:nvPr/>
+        </p:nvSpPr>
+        <p:spPr>
+          <a:xfrm>
+            <a:off x="8970264" y="182880"/>
+            <a:ext cx="91440" cy="91440"/>
+          </a:xfrm>
+          <a:prstGeom prst="ellipse">
+            <a:avLst/>
+          </a:prstGeom>
+          <a:solidFill>
+            <a:srgbClr val="F4A825"/>
+          </a:solidFill>
+          <a:ln w="12700">
+            <a:solidFill>
+              <a:srgbClr val="F4A825"/>
+            </a:solidFill>
+            <a:prstDash val="solid"/>
+          </a:ln>
+        </p:spPr>
+      </p:sp>
+      <p:sp>
+        <p:nvSpPr>
+          <p:cNvPr id="9" name="Shape 6"/>
+          <p:cNvSpPr/>
+          <p:nvPr/>
+        </p:nvSpPr>
+        <p:spPr>
+          <a:xfrm>
+            <a:off x="9116568" y="182880"/>
+            <a:ext cx="91440" cy="91440"/>
+          </a:xfrm>
+          <a:prstGeom prst="ellipse">
+            <a:avLst/>
+          </a:prstGeom>
+          <a:solidFill>
+            <a:srgbClr val="2E7D5B"/>
+          </a:solidFill>
+          <a:ln w="12700">
+            <a:solidFill>
+              <a:srgbClr val="2E7D5B"/>
+            </a:solidFill>
+            <a:prstDash val="solid"/>
+          </a:ln>
+        </p:spPr>
+      </p:sp>
+      <p:sp>
+        <p:nvSpPr>
+          <p:cNvPr id="10" name="Text 7"/>
+          <p:cNvSpPr/>
+          <p:nvPr/>
+        </p:nvSpPr>
+        <p:spPr>
+          <a:xfrm>
+            <a:off x="9299448" y="109728"/>
+            <a:ext cx="2286000" cy="237744"/>
+          </a:xfrm>
+          <a:prstGeom prst="rect">
+            <a:avLst/>
+          </a:prstGeom>
+          <a:noFill/>
+          <a:ln/>
+        </p:spPr>
+        <p:txBody>
+          <a:bodyPr wrap="square" lIns="0" tIns="0" rIns="0" bIns="0" rtlCol="0" anchor="ctr"/>
+          <a:lstStyle/>
+          <a:p>
+            <a:pPr indent="0" marL="0">
+              <a:buNone/>
+            </a:pPr>
+            <a:r>
+              <a:rPr lang="en-US" sz="800" b="1" spc="100" kern="0" dirty="0">
+                <a:solidFill>
+                  <a:srgbClr val="9FB2C2"/>
+                </a:solidFill>
+                <a:latin typeface="Inter" pitchFamily="34" charset="0"/>
+                <a:ea typeface="Inter" pitchFamily="34" charset="-122"/>
+                <a:cs typeface="Inter" pitchFamily="34" charset="-120"/>
+              </a:rPr>
+              <a:t>MS. RIVERA'S SCREEN · SO FAR</a:t>
+            </a:r>
+            <a:endParaRPr lang="en-US" sz="800" dirty="0"/>
+          </a:p>
+        </p:txBody>
+      </p:sp>
+      <p:sp>
+        <p:nvSpPr>
+          <p:cNvPr id="11" name="Text 8"/>
+          <p:cNvSpPr/>
+          <p:nvPr/>
+        </p:nvSpPr>
+        <p:spPr>
+          <a:xfrm>
+            <a:off x="8860536" y="365760"/>
+            <a:ext cx="2670048" cy="566928"/>
+          </a:xfrm>
+          <a:prstGeom prst="rect">
+            <a:avLst/>
+          </a:prstGeom>
+          <a:noFill/>
+          <a:ln/>
+        </p:spPr>
+        <p:txBody>
+          <a:bodyPr wrap="square" lIns="0" tIns="0" rIns="0" bIns="0" rtlCol="0" anchor="ctr"/>
+          <a:lstStyle/>
+          <a:p>
+            <a:pPr indent="0" marL="0">
+              <a:buNone/>
+            </a:pPr>
+            <a:r>
+              <a:rPr lang="en-US" sz="1000" dirty="0">
+                <a:solidFill>
+                  <a:srgbClr val="1B1F24"/>
+                </a:solidFill>
+                <a:latin typeface="Inter" pitchFamily="34" charset="0"/>
+                <a:ea typeface="Inter" pitchFamily="34" charset="-122"/>
+                <a:cs typeface="Inter" pitchFamily="34" charset="-120"/>
+              </a:rPr>
+              <a:t>Her goal: leave owning one reusable prompt for a weekly task.</a:t>
+            </a:r>
+            <a:endParaRPr lang="en-US" sz="1000" dirty="0"/>
+          </a:p>
+        </p:txBody>
+      </p:sp>
+      <p:sp>
+        <p:nvSpPr>
+          <p:cNvPr id="12" name="Text 9"/>
           <p:cNvSpPr/>
           <p:nvPr/>
         </p:nvSpPr>
@@ -15390,7 +20151,7 @@
       </p:sp>
       <p:sp>
         <p:nvSpPr>
-          <p:cNvPr id="6" name="Text 3"/>
+          <p:cNvPr id="13" name="Text 10"/>
           <p:cNvSpPr/>
           <p:nvPr/>
         </p:nvSpPr>
@@ -15429,7 +20190,7 @@
       </p:sp>
       <p:sp>
         <p:nvSpPr>
-          <p:cNvPr id="7" name="Text 4"/>
+          <p:cNvPr id="14" name="Text 11"/>
           <p:cNvSpPr/>
           <p:nvPr/>
         </p:nvSpPr>
@@ -15468,7 +20229,7 @@
       </p:sp>
       <p:sp>
         <p:nvSpPr>
-          <p:cNvPr id="8" name="Text 5"/>
+          <p:cNvPr id="15" name="Text 12"/>
           <p:cNvSpPr/>
           <p:nvPr/>
         </p:nvSpPr>
@@ -15507,7 +20268,7 @@
       </p:sp>
       <p:sp>
         <p:nvSpPr>
-          <p:cNvPr id="9" name="Text 6"/>
+          <p:cNvPr id="16" name="Text 13"/>
           <p:cNvSpPr/>
           <p:nvPr/>
         </p:nvSpPr>
@@ -15546,7 +20307,7 @@
       </p:sp>
       <p:sp>
         <p:nvSpPr>
-          <p:cNvPr id="10" name="Text 7"/>
+          <p:cNvPr id="17" name="Text 14"/>
           <p:cNvSpPr/>
           <p:nvPr/>
         </p:nvSpPr>
@@ -15585,7 +20346,7 @@
       </p:sp>
       <p:sp>
         <p:nvSpPr>
-          <p:cNvPr id="11" name="Text 8"/>
+          <p:cNvPr id="18" name="Text 15"/>
           <p:cNvSpPr/>
           <p:nvPr/>
         </p:nvSpPr>
@@ -15624,7 +20385,7 @@
       </p:sp>
       <p:sp>
         <p:nvSpPr>
-          <p:cNvPr id="12" name="Text 9"/>
+          <p:cNvPr id="19" name="Text 16"/>
           <p:cNvSpPr/>
           <p:nvPr/>
         </p:nvSpPr>
@@ -15663,7 +20424,7 @@
       </p:sp>
       <p:sp>
         <p:nvSpPr>
-          <p:cNvPr id="13" name="Text 10"/>
+          <p:cNvPr id="20" name="Text 17"/>
           <p:cNvSpPr/>
           <p:nvPr/>
         </p:nvSpPr>
@@ -15702,7 +20463,7 @@
       </p:sp>
       <p:sp>
         <p:nvSpPr>
-          <p:cNvPr id="14" name="Text 11"/>
+          <p:cNvPr id="21" name="Text 18"/>
           <p:cNvSpPr/>
           <p:nvPr/>
         </p:nvSpPr>
@@ -15741,7 +20502,7 @@
       </p:sp>
       <p:sp>
         <p:nvSpPr>
-          <p:cNvPr id="15" name="Text 12"/>
+          <p:cNvPr id="22" name="Text 19"/>
           <p:cNvSpPr/>
           <p:nvPr/>
         </p:nvSpPr>
@@ -15780,7 +20541,7 @@
       </p:sp>
       <p:sp>
         <p:nvSpPr>
-          <p:cNvPr id="16" name="Text 13"/>
+          <p:cNvPr id="23" name="Text 20"/>
           <p:cNvSpPr/>
           <p:nvPr/>
         </p:nvSpPr>
@@ -15819,7 +20580,7 @@
       </p:sp>
       <p:sp>
         <p:nvSpPr>
-          <p:cNvPr id="17" name="Shape 14"/>
+          <p:cNvPr id="24" name="Shape 21"/>
           <p:cNvSpPr/>
           <p:nvPr/>
         </p:nvSpPr>
@@ -15846,7 +20607,7 @@
       </p:sp>
       <p:sp>
         <p:nvSpPr>
-          <p:cNvPr id="18" name="Text 15"/>
+          <p:cNvPr id="25" name="Text 22"/>
           <p:cNvSpPr/>
           <p:nvPr/>
         </p:nvSpPr>
@@ -15885,7 +20646,7 @@
       </p:sp>
       <p:sp>
         <p:nvSpPr>
-          <p:cNvPr id="19" name="Text 16"/>
+          <p:cNvPr id="26" name="Text 23"/>
           <p:cNvSpPr/>
           <p:nvPr/>
         </p:nvSpPr>
@@ -16072,7 +20833,214 @@
       </p:sp>
       <p:sp>
         <p:nvSpPr>
-          <p:cNvPr id="5" name="Text 2"/>
+          <p:cNvPr id="5" name="Shape 2"/>
+          <p:cNvSpPr/>
+          <p:nvPr/>
+        </p:nvSpPr>
+        <p:spPr>
+          <a:xfrm>
+            <a:off x="8732520" y="109728"/>
+            <a:ext cx="2926080" cy="896112"/>
+          </a:xfrm>
+          <a:prstGeom prst="roundRect">
+            <a:avLst>
+              <a:gd name="adj" fmla="val 7143"/>
+            </a:avLst>
+          </a:prstGeom>
+          <a:solidFill>
+            <a:srgbClr val="1E3A50"/>
+          </a:solidFill>
+          <a:ln w="12700">
+            <a:solidFill>
+              <a:srgbClr val="2A4A63"/>
+            </a:solidFill>
+            <a:prstDash val="solid"/>
+          </a:ln>
+        </p:spPr>
+      </p:sp>
+      <p:sp>
+        <p:nvSpPr>
+          <p:cNvPr id="6" name="Shape 3"/>
+          <p:cNvSpPr/>
+          <p:nvPr/>
+        </p:nvSpPr>
+        <p:spPr>
+          <a:xfrm>
+            <a:off x="8732520" y="109728"/>
+            <a:ext cx="2926080" cy="237744"/>
+          </a:xfrm>
+          <a:prstGeom prst="roundRect">
+            <a:avLst>
+              <a:gd name="adj" fmla="val 26923"/>
+            </a:avLst>
+          </a:prstGeom>
+          <a:solidFill>
+            <a:srgbClr val="0D1E2E"/>
+          </a:solidFill>
+          <a:ln w="12700">
+            <a:solidFill>
+              <a:srgbClr val="0D1E2E"/>
+            </a:solidFill>
+            <a:prstDash val="solid"/>
+          </a:ln>
+        </p:spPr>
+      </p:sp>
+      <p:sp>
+        <p:nvSpPr>
+          <p:cNvPr id="7" name="Shape 4"/>
+          <p:cNvSpPr/>
+          <p:nvPr/>
+        </p:nvSpPr>
+        <p:spPr>
+          <a:xfrm>
+            <a:off x="8823960" y="182880"/>
+            <a:ext cx="91440" cy="91440"/>
+          </a:xfrm>
+          <a:prstGeom prst="ellipse">
+            <a:avLst/>
+          </a:prstGeom>
+          <a:solidFill>
+            <a:srgbClr val="E8837A"/>
+          </a:solidFill>
+          <a:ln w="12700">
+            <a:solidFill>
+              <a:srgbClr val="E8837A"/>
+            </a:solidFill>
+            <a:prstDash val="solid"/>
+          </a:ln>
+        </p:spPr>
+      </p:sp>
+      <p:sp>
+        <p:nvSpPr>
+          <p:cNvPr id="8" name="Shape 5"/>
+          <p:cNvSpPr/>
+          <p:nvPr/>
+        </p:nvSpPr>
+        <p:spPr>
+          <a:xfrm>
+            <a:off x="8970264" y="182880"/>
+            <a:ext cx="91440" cy="91440"/>
+          </a:xfrm>
+          <a:prstGeom prst="ellipse">
+            <a:avLst/>
+          </a:prstGeom>
+          <a:solidFill>
+            <a:srgbClr val="F4A825"/>
+          </a:solidFill>
+          <a:ln w="12700">
+            <a:solidFill>
+              <a:srgbClr val="F4A825"/>
+            </a:solidFill>
+            <a:prstDash val="solid"/>
+          </a:ln>
+        </p:spPr>
+      </p:sp>
+      <p:sp>
+        <p:nvSpPr>
+          <p:cNvPr id="9" name="Shape 6"/>
+          <p:cNvSpPr/>
+          <p:nvPr/>
+        </p:nvSpPr>
+        <p:spPr>
+          <a:xfrm>
+            <a:off x="9116568" y="182880"/>
+            <a:ext cx="91440" cy="91440"/>
+          </a:xfrm>
+          <a:prstGeom prst="ellipse">
+            <a:avLst/>
+          </a:prstGeom>
+          <a:solidFill>
+            <a:srgbClr val="2E7D5B"/>
+          </a:solidFill>
+          <a:ln w="12700">
+            <a:solidFill>
+              <a:srgbClr val="2E7D5B"/>
+            </a:solidFill>
+            <a:prstDash val="solid"/>
+          </a:ln>
+        </p:spPr>
+      </p:sp>
+      <p:sp>
+        <p:nvSpPr>
+          <p:cNvPr id="10" name="Text 7"/>
+          <p:cNvSpPr/>
+          <p:nvPr/>
+        </p:nvSpPr>
+        <p:spPr>
+          <a:xfrm>
+            <a:off x="9299448" y="109728"/>
+            <a:ext cx="2286000" cy="237744"/>
+          </a:xfrm>
+          <a:prstGeom prst="rect">
+            <a:avLst/>
+          </a:prstGeom>
+          <a:noFill/>
+          <a:ln/>
+        </p:spPr>
+        <p:txBody>
+          <a:bodyPr wrap="square" lIns="0" tIns="0" rIns="0" bIns="0" rtlCol="0" anchor="ctr"/>
+          <a:lstStyle/>
+          <a:p>
+            <a:pPr indent="0" marL="0">
+              <a:buNone/>
+            </a:pPr>
+            <a:r>
+              <a:rPr lang="en-US" sz="800" b="1" spc="100" kern="0" dirty="0">
+                <a:solidFill>
+                  <a:srgbClr val="9FB2C2"/>
+                </a:solidFill>
+                <a:latin typeface="Inter" pitchFamily="34" charset="0"/>
+                <a:ea typeface="Inter" pitchFamily="34" charset="-122"/>
+                <a:cs typeface="Inter" pitchFamily="34" charset="-120"/>
+              </a:rPr>
+              <a:t>MS. RIVERA'S SCREEN · SO FAR</a:t>
+            </a:r>
+            <a:endParaRPr lang="en-US" sz="800" dirty="0"/>
+          </a:p>
+        </p:txBody>
+      </p:sp>
+      <p:sp>
+        <p:nvSpPr>
+          <p:cNvPr id="11" name="Text 8"/>
+          <p:cNvSpPr/>
+          <p:nvPr/>
+        </p:nvSpPr>
+        <p:spPr>
+          <a:xfrm>
+            <a:off x="8860536" y="365760"/>
+            <a:ext cx="2670048" cy="566928"/>
+          </a:xfrm>
+          <a:prstGeom prst="rect">
+            <a:avLst/>
+          </a:prstGeom>
+          <a:noFill/>
+          <a:ln/>
+        </p:spPr>
+        <p:txBody>
+          <a:bodyPr wrap="square" lIns="0" tIns="0" rIns="0" bIns="0" rtlCol="0" anchor="ctr"/>
+          <a:lstStyle/>
+          <a:p>
+            <a:pPr indent="0" marL="0">
+              <a:buNone/>
+            </a:pPr>
+            <a:r>
+              <a:rPr lang="en-US" sz="1000" dirty="0">
+                <a:solidFill>
+                  <a:srgbClr val="C9D4DE"/>
+                </a:solidFill>
+                <a:latin typeface="Inter" pitchFamily="34" charset="0"/>
+                <a:ea typeface="Inter" pitchFamily="34" charset="-122"/>
+                <a:cs typeface="Inter" pitchFamily="34" charset="-120"/>
+              </a:rPr>
+              <a:t>Her pre-flight: would a colleague with zero context get it?</a:t>
+            </a:r>
+            <a:endParaRPr lang="en-US" sz="1000" dirty="0"/>
+          </a:p>
+        </p:txBody>
+      </p:sp>
+      <p:sp>
+        <p:nvSpPr>
+          <p:cNvPr id="12" name="Text 9"/>
           <p:cNvSpPr/>
           <p:nvPr/>
         </p:nvSpPr>
@@ -16111,7 +21079,7 @@
       </p:sp>
       <p:sp>
         <p:nvSpPr>
-          <p:cNvPr id="6" name="Text 3"/>
+          <p:cNvPr id="13" name="Text 10"/>
           <p:cNvSpPr/>
           <p:nvPr/>
         </p:nvSpPr>
@@ -16150,7 +21118,7 @@
       </p:sp>
       <p:sp>
         <p:nvSpPr>
-          <p:cNvPr id="7" name="Text 4"/>
+          <p:cNvPr id="14" name="Text 11"/>
           <p:cNvSpPr/>
           <p:nvPr/>
         </p:nvSpPr>
@@ -16212,7 +21180,7 @@
       </p:sp>
       <p:sp>
         <p:nvSpPr>
-          <p:cNvPr id="8" name="Text 5"/>
+          <p:cNvPr id="15" name="Text 12"/>
           <p:cNvSpPr/>
           <p:nvPr/>
         </p:nvSpPr>
@@ -16399,7 +21367,214 @@
       </p:sp>
       <p:sp>
         <p:nvSpPr>
-          <p:cNvPr id="5" name="Text 2"/>
+          <p:cNvPr id="5" name="Shape 2"/>
+          <p:cNvSpPr/>
+          <p:nvPr/>
+        </p:nvSpPr>
+        <p:spPr>
+          <a:xfrm>
+            <a:off x="8732520" y="109728"/>
+            <a:ext cx="2926080" cy="896112"/>
+          </a:xfrm>
+          <a:prstGeom prst="roundRect">
+            <a:avLst>
+              <a:gd name="adj" fmla="val 7143"/>
+            </a:avLst>
+          </a:prstGeom>
+          <a:solidFill>
+            <a:srgbClr val="F7F5F0"/>
+          </a:solidFill>
+          <a:ln w="12700">
+            <a:solidFill>
+              <a:srgbClr val="DCE3EA"/>
+            </a:solidFill>
+            <a:prstDash val="solid"/>
+          </a:ln>
+        </p:spPr>
+      </p:sp>
+      <p:sp>
+        <p:nvSpPr>
+          <p:cNvPr id="6" name="Shape 3"/>
+          <p:cNvSpPr/>
+          <p:nvPr/>
+        </p:nvSpPr>
+        <p:spPr>
+          <a:xfrm>
+            <a:off x="8732520" y="109728"/>
+            <a:ext cx="2926080" cy="237744"/>
+          </a:xfrm>
+          <a:prstGeom prst="roundRect">
+            <a:avLst>
+              <a:gd name="adj" fmla="val 26923"/>
+            </a:avLst>
+          </a:prstGeom>
+          <a:solidFill>
+            <a:srgbClr val="0D1E2E"/>
+          </a:solidFill>
+          <a:ln w="12700">
+            <a:solidFill>
+              <a:srgbClr val="0D1E2E"/>
+            </a:solidFill>
+            <a:prstDash val="solid"/>
+          </a:ln>
+        </p:spPr>
+      </p:sp>
+      <p:sp>
+        <p:nvSpPr>
+          <p:cNvPr id="7" name="Shape 4"/>
+          <p:cNvSpPr/>
+          <p:nvPr/>
+        </p:nvSpPr>
+        <p:spPr>
+          <a:xfrm>
+            <a:off x="8823960" y="182880"/>
+            <a:ext cx="91440" cy="91440"/>
+          </a:xfrm>
+          <a:prstGeom prst="ellipse">
+            <a:avLst/>
+          </a:prstGeom>
+          <a:solidFill>
+            <a:srgbClr val="E8837A"/>
+          </a:solidFill>
+          <a:ln w="12700">
+            <a:solidFill>
+              <a:srgbClr val="E8837A"/>
+            </a:solidFill>
+            <a:prstDash val="solid"/>
+          </a:ln>
+        </p:spPr>
+      </p:sp>
+      <p:sp>
+        <p:nvSpPr>
+          <p:cNvPr id="8" name="Shape 5"/>
+          <p:cNvSpPr/>
+          <p:nvPr/>
+        </p:nvSpPr>
+        <p:spPr>
+          <a:xfrm>
+            <a:off x="8970264" y="182880"/>
+            <a:ext cx="91440" cy="91440"/>
+          </a:xfrm>
+          <a:prstGeom prst="ellipse">
+            <a:avLst/>
+          </a:prstGeom>
+          <a:solidFill>
+            <a:srgbClr val="F4A825"/>
+          </a:solidFill>
+          <a:ln w="12700">
+            <a:solidFill>
+              <a:srgbClr val="F4A825"/>
+            </a:solidFill>
+            <a:prstDash val="solid"/>
+          </a:ln>
+        </p:spPr>
+      </p:sp>
+      <p:sp>
+        <p:nvSpPr>
+          <p:cNvPr id="9" name="Shape 6"/>
+          <p:cNvSpPr/>
+          <p:nvPr/>
+        </p:nvSpPr>
+        <p:spPr>
+          <a:xfrm>
+            <a:off x="9116568" y="182880"/>
+            <a:ext cx="91440" cy="91440"/>
+          </a:xfrm>
+          <a:prstGeom prst="ellipse">
+            <a:avLst/>
+          </a:prstGeom>
+          <a:solidFill>
+            <a:srgbClr val="2E7D5B"/>
+          </a:solidFill>
+          <a:ln w="12700">
+            <a:solidFill>
+              <a:srgbClr val="2E7D5B"/>
+            </a:solidFill>
+            <a:prstDash val="solid"/>
+          </a:ln>
+        </p:spPr>
+      </p:sp>
+      <p:sp>
+        <p:nvSpPr>
+          <p:cNvPr id="10" name="Text 7"/>
+          <p:cNvSpPr/>
+          <p:nvPr/>
+        </p:nvSpPr>
+        <p:spPr>
+          <a:xfrm>
+            <a:off x="9299448" y="109728"/>
+            <a:ext cx="2286000" cy="237744"/>
+          </a:xfrm>
+          <a:prstGeom prst="rect">
+            <a:avLst/>
+          </a:prstGeom>
+          <a:noFill/>
+          <a:ln/>
+        </p:spPr>
+        <p:txBody>
+          <a:bodyPr wrap="square" lIns="0" tIns="0" rIns="0" bIns="0" rtlCol="0" anchor="ctr"/>
+          <a:lstStyle/>
+          <a:p>
+            <a:pPr indent="0" marL="0">
+              <a:buNone/>
+            </a:pPr>
+            <a:r>
+              <a:rPr lang="en-US" sz="800" b="1" spc="100" kern="0" dirty="0">
+                <a:solidFill>
+                  <a:srgbClr val="9FB2C2"/>
+                </a:solidFill>
+                <a:latin typeface="Inter" pitchFamily="34" charset="0"/>
+                <a:ea typeface="Inter" pitchFamily="34" charset="-122"/>
+                <a:cs typeface="Inter" pitchFamily="34" charset="-120"/>
+              </a:rPr>
+              <a:t>MS. RIVERA'S SCREEN · SO FAR</a:t>
+            </a:r>
+            <a:endParaRPr lang="en-US" sz="800" dirty="0"/>
+          </a:p>
+        </p:txBody>
+      </p:sp>
+      <p:sp>
+        <p:nvSpPr>
+          <p:cNvPr id="11" name="Text 8"/>
+          <p:cNvSpPr/>
+          <p:nvPr/>
+        </p:nvSpPr>
+        <p:spPr>
+          <a:xfrm>
+            <a:off x="8860536" y="365760"/>
+            <a:ext cx="2670048" cy="566928"/>
+          </a:xfrm>
+          <a:prstGeom prst="rect">
+            <a:avLst/>
+          </a:prstGeom>
+          <a:noFill/>
+          <a:ln/>
+        </p:spPr>
+        <p:txBody>
+          <a:bodyPr wrap="square" lIns="0" tIns="0" rIns="0" bIns="0" rtlCol="0" anchor="ctr"/>
+          <a:lstStyle/>
+          <a:p>
+            <a:pPr indent="0" marL="0">
+              <a:buNone/>
+            </a:pPr>
+            <a:r>
+              <a:rPr lang="en-US" sz="1000" dirty="0">
+                <a:solidFill>
+                  <a:srgbClr val="1B1F24"/>
+                </a:solidFill>
+                <a:latin typeface="Inter" pitchFamily="34" charset="0"/>
+                <a:ea typeface="Inter" pitchFamily="34" charset="-122"/>
+                <a:cs typeface="Inter" pitchFamily="34" charset="-120"/>
+              </a:rPr>
+              <a:t>Her formula, from now on: Role, Task, Context, Format.</a:t>
+            </a:r>
+            <a:endParaRPr lang="en-US" sz="1000" dirty="0"/>
+          </a:p>
+        </p:txBody>
+      </p:sp>
+      <p:sp>
+        <p:nvSpPr>
+          <p:cNvPr id="12" name="Text 9"/>
           <p:cNvSpPr/>
           <p:nvPr/>
         </p:nvSpPr>
@@ -16438,7 +21613,7 @@
       </p:sp>
       <p:sp>
         <p:nvSpPr>
-          <p:cNvPr id="6" name="Text 3"/>
+          <p:cNvPr id="13" name="Text 10"/>
           <p:cNvSpPr/>
           <p:nvPr/>
         </p:nvSpPr>
@@ -16477,7 +21652,7 @@
       </p:sp>
       <p:sp>
         <p:nvSpPr>
-          <p:cNvPr id="7" name="Shape 4"/>
+          <p:cNvPr id="14" name="Shape 11"/>
           <p:cNvSpPr/>
           <p:nvPr/>
         </p:nvSpPr>
@@ -16504,7 +21679,7 @@
       </p:sp>
       <p:sp>
         <p:nvSpPr>
-          <p:cNvPr id="8" name="Text 5"/>
+          <p:cNvPr id="15" name="Text 12"/>
           <p:cNvSpPr/>
           <p:nvPr/>
         </p:nvSpPr>
@@ -16543,7 +21718,7 @@
       </p:sp>
       <p:sp>
         <p:nvSpPr>
-          <p:cNvPr id="9" name="Text 6"/>
+          <p:cNvPr id="16" name="Text 13"/>
           <p:cNvSpPr/>
           <p:nvPr/>
         </p:nvSpPr>
@@ -16582,7 +21757,7 @@
       </p:sp>
       <p:sp>
         <p:nvSpPr>
-          <p:cNvPr id="10" name="Text 7"/>
+          <p:cNvPr id="17" name="Text 14"/>
           <p:cNvSpPr/>
           <p:nvPr/>
         </p:nvSpPr>
@@ -16621,7 +21796,7 @@
       </p:sp>
       <p:sp>
         <p:nvSpPr>
-          <p:cNvPr id="11" name="Shape 8"/>
+          <p:cNvPr id="18" name="Shape 15"/>
           <p:cNvSpPr/>
           <p:nvPr/>
         </p:nvSpPr>
@@ -16648,7 +21823,7 @@
       </p:sp>
       <p:sp>
         <p:nvSpPr>
-          <p:cNvPr id="12" name="Text 9"/>
+          <p:cNvPr id="19" name="Text 16"/>
           <p:cNvSpPr/>
           <p:nvPr/>
         </p:nvSpPr>
@@ -16687,7 +21862,7 @@
       </p:sp>
       <p:sp>
         <p:nvSpPr>
-          <p:cNvPr id="13" name="Text 10"/>
+          <p:cNvPr id="20" name="Text 17"/>
           <p:cNvSpPr/>
           <p:nvPr/>
         </p:nvSpPr>
@@ -16726,7 +21901,7 @@
       </p:sp>
       <p:sp>
         <p:nvSpPr>
-          <p:cNvPr id="14" name="Text 11"/>
+          <p:cNvPr id="21" name="Text 18"/>
           <p:cNvSpPr/>
           <p:nvPr/>
         </p:nvSpPr>
@@ -16765,7 +21940,7 @@
       </p:sp>
       <p:sp>
         <p:nvSpPr>
-          <p:cNvPr id="15" name="Shape 12"/>
+          <p:cNvPr id="22" name="Shape 19"/>
           <p:cNvSpPr/>
           <p:nvPr/>
         </p:nvSpPr>
@@ -16792,7 +21967,7 @@
       </p:sp>
       <p:sp>
         <p:nvSpPr>
-          <p:cNvPr id="16" name="Text 13"/>
+          <p:cNvPr id="23" name="Text 20"/>
           <p:cNvSpPr/>
           <p:nvPr/>
         </p:nvSpPr>
@@ -16831,7 +22006,7 @@
       </p:sp>
       <p:sp>
         <p:nvSpPr>
-          <p:cNvPr id="17" name="Text 14"/>
+          <p:cNvPr id="24" name="Text 21"/>
           <p:cNvSpPr/>
           <p:nvPr/>
         </p:nvSpPr>
@@ -16870,7 +22045,7 @@
       </p:sp>
       <p:sp>
         <p:nvSpPr>
-          <p:cNvPr id="18" name="Text 15"/>
+          <p:cNvPr id="25" name="Text 22"/>
           <p:cNvSpPr/>
           <p:nvPr/>
         </p:nvSpPr>
@@ -16909,7 +22084,7 @@
       </p:sp>
       <p:sp>
         <p:nvSpPr>
-          <p:cNvPr id="19" name="Shape 16"/>
+          <p:cNvPr id="26" name="Shape 23"/>
           <p:cNvSpPr/>
           <p:nvPr/>
         </p:nvSpPr>
@@ -16936,7 +22111,7 @@
       </p:sp>
       <p:sp>
         <p:nvSpPr>
-          <p:cNvPr id="20" name="Text 17"/>
+          <p:cNvPr id="27" name="Text 24"/>
           <p:cNvSpPr/>
           <p:nvPr/>
         </p:nvSpPr>
@@ -16975,7 +22150,7 @@
       </p:sp>
       <p:sp>
         <p:nvSpPr>
-          <p:cNvPr id="21" name="Text 18"/>
+          <p:cNvPr id="28" name="Text 25"/>
           <p:cNvSpPr/>
           <p:nvPr/>
         </p:nvSpPr>
@@ -17014,7 +22189,7 @@
       </p:sp>
       <p:sp>
         <p:nvSpPr>
-          <p:cNvPr id="22" name="Text 19"/>
+          <p:cNvPr id="29" name="Text 26"/>
           <p:cNvSpPr/>
           <p:nvPr/>
         </p:nvSpPr>
@@ -17053,7 +22228,7 @@
       </p:sp>
       <p:sp>
         <p:nvSpPr>
-          <p:cNvPr id="23" name="Text 20"/>
+          <p:cNvPr id="30" name="Text 27"/>
           <p:cNvSpPr/>
           <p:nvPr/>
         </p:nvSpPr>
@@ -17240,7 +22415,214 @@
       </p:sp>
       <p:sp>
         <p:nvSpPr>
-          <p:cNvPr id="5" name="Text 2"/>
+          <p:cNvPr id="5" name="Shape 2"/>
+          <p:cNvSpPr/>
+          <p:nvPr/>
+        </p:nvSpPr>
+        <p:spPr>
+          <a:xfrm>
+            <a:off x="8732520" y="109728"/>
+            <a:ext cx="2926080" cy="896112"/>
+          </a:xfrm>
+          <a:prstGeom prst="roundRect">
+            <a:avLst>
+              <a:gd name="adj" fmla="val 7143"/>
+            </a:avLst>
+          </a:prstGeom>
+          <a:solidFill>
+            <a:srgbClr val="F7F5F0"/>
+          </a:solidFill>
+          <a:ln w="12700">
+            <a:solidFill>
+              <a:srgbClr val="DCE3EA"/>
+            </a:solidFill>
+            <a:prstDash val="solid"/>
+          </a:ln>
+        </p:spPr>
+      </p:sp>
+      <p:sp>
+        <p:nvSpPr>
+          <p:cNvPr id="6" name="Shape 3"/>
+          <p:cNvSpPr/>
+          <p:nvPr/>
+        </p:nvSpPr>
+        <p:spPr>
+          <a:xfrm>
+            <a:off x="8732520" y="109728"/>
+            <a:ext cx="2926080" cy="237744"/>
+          </a:xfrm>
+          <a:prstGeom prst="roundRect">
+            <a:avLst>
+              <a:gd name="adj" fmla="val 26923"/>
+            </a:avLst>
+          </a:prstGeom>
+          <a:solidFill>
+            <a:srgbClr val="0D1E2E"/>
+          </a:solidFill>
+          <a:ln w="12700">
+            <a:solidFill>
+              <a:srgbClr val="0D1E2E"/>
+            </a:solidFill>
+            <a:prstDash val="solid"/>
+          </a:ln>
+        </p:spPr>
+      </p:sp>
+      <p:sp>
+        <p:nvSpPr>
+          <p:cNvPr id="7" name="Shape 4"/>
+          <p:cNvSpPr/>
+          <p:nvPr/>
+        </p:nvSpPr>
+        <p:spPr>
+          <a:xfrm>
+            <a:off x="8823960" y="182880"/>
+            <a:ext cx="91440" cy="91440"/>
+          </a:xfrm>
+          <a:prstGeom prst="ellipse">
+            <a:avLst/>
+          </a:prstGeom>
+          <a:solidFill>
+            <a:srgbClr val="E8837A"/>
+          </a:solidFill>
+          <a:ln w="12700">
+            <a:solidFill>
+              <a:srgbClr val="E8837A"/>
+            </a:solidFill>
+            <a:prstDash val="solid"/>
+          </a:ln>
+        </p:spPr>
+      </p:sp>
+      <p:sp>
+        <p:nvSpPr>
+          <p:cNvPr id="8" name="Shape 5"/>
+          <p:cNvSpPr/>
+          <p:nvPr/>
+        </p:nvSpPr>
+        <p:spPr>
+          <a:xfrm>
+            <a:off x="8970264" y="182880"/>
+            <a:ext cx="91440" cy="91440"/>
+          </a:xfrm>
+          <a:prstGeom prst="ellipse">
+            <a:avLst/>
+          </a:prstGeom>
+          <a:solidFill>
+            <a:srgbClr val="F4A825"/>
+          </a:solidFill>
+          <a:ln w="12700">
+            <a:solidFill>
+              <a:srgbClr val="F4A825"/>
+            </a:solidFill>
+            <a:prstDash val="solid"/>
+          </a:ln>
+        </p:spPr>
+      </p:sp>
+      <p:sp>
+        <p:nvSpPr>
+          <p:cNvPr id="9" name="Shape 6"/>
+          <p:cNvSpPr/>
+          <p:nvPr/>
+        </p:nvSpPr>
+        <p:spPr>
+          <a:xfrm>
+            <a:off x="9116568" y="182880"/>
+            <a:ext cx="91440" cy="91440"/>
+          </a:xfrm>
+          <a:prstGeom prst="ellipse">
+            <a:avLst/>
+          </a:prstGeom>
+          <a:solidFill>
+            <a:srgbClr val="2E7D5B"/>
+          </a:solidFill>
+          <a:ln w="12700">
+            <a:solidFill>
+              <a:srgbClr val="2E7D5B"/>
+            </a:solidFill>
+            <a:prstDash val="solid"/>
+          </a:ln>
+        </p:spPr>
+      </p:sp>
+      <p:sp>
+        <p:nvSpPr>
+          <p:cNvPr id="10" name="Text 7"/>
+          <p:cNvSpPr/>
+          <p:nvPr/>
+        </p:nvSpPr>
+        <p:spPr>
+          <a:xfrm>
+            <a:off x="9299448" y="109728"/>
+            <a:ext cx="2286000" cy="237744"/>
+          </a:xfrm>
+          <a:prstGeom prst="rect">
+            <a:avLst/>
+          </a:prstGeom>
+          <a:noFill/>
+          <a:ln/>
+        </p:spPr>
+        <p:txBody>
+          <a:bodyPr wrap="square" lIns="0" tIns="0" rIns="0" bIns="0" rtlCol="0" anchor="ctr"/>
+          <a:lstStyle/>
+          <a:p>
+            <a:pPr indent="0" marL="0">
+              <a:buNone/>
+            </a:pPr>
+            <a:r>
+              <a:rPr lang="en-US" sz="800" b="1" spc="100" kern="0" dirty="0">
+                <a:solidFill>
+                  <a:srgbClr val="9FB2C2"/>
+                </a:solidFill>
+                <a:latin typeface="Inter" pitchFamily="34" charset="0"/>
+                <a:ea typeface="Inter" pitchFamily="34" charset="-122"/>
+                <a:cs typeface="Inter" pitchFamily="34" charset="-120"/>
+              </a:rPr>
+              <a:t>MS. RIVERA'S SCREEN · SO FAR</a:t>
+            </a:r>
+            <a:endParaRPr lang="en-US" sz="800" dirty="0"/>
+          </a:p>
+        </p:txBody>
+      </p:sp>
+      <p:sp>
+        <p:nvSpPr>
+          <p:cNvPr id="11" name="Text 8"/>
+          <p:cNvSpPr/>
+          <p:nvPr/>
+        </p:nvSpPr>
+        <p:spPr>
+          <a:xfrm>
+            <a:off x="8860536" y="365760"/>
+            <a:ext cx="2670048" cy="566928"/>
+          </a:xfrm>
+          <a:prstGeom prst="rect">
+            <a:avLst/>
+          </a:prstGeom>
+          <a:noFill/>
+          <a:ln/>
+        </p:spPr>
+        <p:txBody>
+          <a:bodyPr wrap="square" lIns="0" tIns="0" rIns="0" bIns="0" rtlCol="0" anchor="ctr"/>
+          <a:lstStyle/>
+          <a:p>
+            <a:pPr indent="0" marL="0">
+              <a:buNone/>
+            </a:pPr>
+            <a:r>
+              <a:rPr lang="en-US" sz="1000" dirty="0">
+                <a:solidFill>
+                  <a:srgbClr val="1B1F24"/>
+                </a:solidFill>
+                <a:latin typeface="Inter" pitchFamily="34" charset="0"/>
+                <a:ea typeface="Inter" pitchFamily="34" charset="-122"/>
+                <a:cs typeface="Inter" pitchFamily="34" charset="-120"/>
+              </a:rPr>
+              <a:t>Her expectation, calibrated: structure buys measurably better output.</a:t>
+            </a:r>
+            <a:endParaRPr lang="en-US" sz="1000" dirty="0"/>
+          </a:p>
+        </p:txBody>
+      </p:sp>
+      <p:sp>
+        <p:nvSpPr>
+          <p:cNvPr id="12" name="Text 9"/>
           <p:cNvSpPr/>
           <p:nvPr/>
         </p:nvSpPr>
@@ -17279,7 +22661,7 @@
       </p:sp>
       <p:sp>
         <p:nvSpPr>
-          <p:cNvPr id="6" name="Text 3"/>
+          <p:cNvPr id="13" name="Text 10"/>
           <p:cNvSpPr/>
           <p:nvPr/>
         </p:nvSpPr>
@@ -17318,7 +22700,7 @@
       </p:sp>
       <p:sp>
         <p:nvSpPr>
-          <p:cNvPr id="7" name="Shape 4"/>
+          <p:cNvPr id="14" name="Shape 11"/>
           <p:cNvSpPr/>
           <p:nvPr/>
         </p:nvSpPr>
@@ -17345,7 +22727,7 @@
       </p:sp>
       <p:sp>
         <p:nvSpPr>
-          <p:cNvPr id="8" name="Text 5"/>
+          <p:cNvPr id="15" name="Text 12"/>
           <p:cNvSpPr/>
           <p:nvPr/>
         </p:nvSpPr>
@@ -17384,7 +22766,7 @@
       </p:sp>
       <p:sp>
         <p:nvSpPr>
-          <p:cNvPr id="9" name="Text 6"/>
+          <p:cNvPr id="16" name="Text 13"/>
           <p:cNvSpPr/>
           <p:nvPr/>
         </p:nvSpPr>
@@ -17423,7 +22805,7 @@
       </p:sp>
       <p:sp>
         <p:nvSpPr>
-          <p:cNvPr id="10" name="Text 7"/>
+          <p:cNvPr id="17" name="Text 14"/>
           <p:cNvSpPr/>
           <p:nvPr/>
         </p:nvSpPr>
@@ -17610,7 +22992,214 @@
       </p:sp>
       <p:sp>
         <p:nvSpPr>
-          <p:cNvPr id="5" name="Text 2"/>
+          <p:cNvPr id="5" name="Shape 2"/>
+          <p:cNvSpPr/>
+          <p:nvPr/>
+        </p:nvSpPr>
+        <p:spPr>
+          <a:xfrm>
+            <a:off x="8732520" y="109728"/>
+            <a:ext cx="2926080" cy="896112"/>
+          </a:xfrm>
+          <a:prstGeom prst="roundRect">
+            <a:avLst>
+              <a:gd name="adj" fmla="val 7143"/>
+            </a:avLst>
+          </a:prstGeom>
+          <a:solidFill>
+            <a:srgbClr val="F7F5F0"/>
+          </a:solidFill>
+          <a:ln w="12700">
+            <a:solidFill>
+              <a:srgbClr val="DCE3EA"/>
+            </a:solidFill>
+            <a:prstDash val="solid"/>
+          </a:ln>
+        </p:spPr>
+      </p:sp>
+      <p:sp>
+        <p:nvSpPr>
+          <p:cNvPr id="6" name="Shape 3"/>
+          <p:cNvSpPr/>
+          <p:nvPr/>
+        </p:nvSpPr>
+        <p:spPr>
+          <a:xfrm>
+            <a:off x="8732520" y="109728"/>
+            <a:ext cx="2926080" cy="237744"/>
+          </a:xfrm>
+          <a:prstGeom prst="roundRect">
+            <a:avLst>
+              <a:gd name="adj" fmla="val 26923"/>
+            </a:avLst>
+          </a:prstGeom>
+          <a:solidFill>
+            <a:srgbClr val="0D1E2E"/>
+          </a:solidFill>
+          <a:ln w="12700">
+            <a:solidFill>
+              <a:srgbClr val="0D1E2E"/>
+            </a:solidFill>
+            <a:prstDash val="solid"/>
+          </a:ln>
+        </p:spPr>
+      </p:sp>
+      <p:sp>
+        <p:nvSpPr>
+          <p:cNvPr id="7" name="Shape 4"/>
+          <p:cNvSpPr/>
+          <p:nvPr/>
+        </p:nvSpPr>
+        <p:spPr>
+          <a:xfrm>
+            <a:off x="8823960" y="182880"/>
+            <a:ext cx="91440" cy="91440"/>
+          </a:xfrm>
+          <a:prstGeom prst="ellipse">
+            <a:avLst/>
+          </a:prstGeom>
+          <a:solidFill>
+            <a:srgbClr val="E8837A"/>
+          </a:solidFill>
+          <a:ln w="12700">
+            <a:solidFill>
+              <a:srgbClr val="E8837A"/>
+            </a:solidFill>
+            <a:prstDash val="solid"/>
+          </a:ln>
+        </p:spPr>
+      </p:sp>
+      <p:sp>
+        <p:nvSpPr>
+          <p:cNvPr id="8" name="Shape 5"/>
+          <p:cNvSpPr/>
+          <p:nvPr/>
+        </p:nvSpPr>
+        <p:spPr>
+          <a:xfrm>
+            <a:off x="8970264" y="182880"/>
+            <a:ext cx="91440" cy="91440"/>
+          </a:xfrm>
+          <a:prstGeom prst="ellipse">
+            <a:avLst/>
+          </a:prstGeom>
+          <a:solidFill>
+            <a:srgbClr val="F4A825"/>
+          </a:solidFill>
+          <a:ln w="12700">
+            <a:solidFill>
+              <a:srgbClr val="F4A825"/>
+            </a:solidFill>
+            <a:prstDash val="solid"/>
+          </a:ln>
+        </p:spPr>
+      </p:sp>
+      <p:sp>
+        <p:nvSpPr>
+          <p:cNvPr id="9" name="Shape 6"/>
+          <p:cNvSpPr/>
+          <p:nvPr/>
+        </p:nvSpPr>
+        <p:spPr>
+          <a:xfrm>
+            <a:off x="9116568" y="182880"/>
+            <a:ext cx="91440" cy="91440"/>
+          </a:xfrm>
+          <a:prstGeom prst="ellipse">
+            <a:avLst/>
+          </a:prstGeom>
+          <a:solidFill>
+            <a:srgbClr val="2E7D5B"/>
+          </a:solidFill>
+          <a:ln w="12700">
+            <a:solidFill>
+              <a:srgbClr val="2E7D5B"/>
+            </a:solidFill>
+            <a:prstDash val="solid"/>
+          </a:ln>
+        </p:spPr>
+      </p:sp>
+      <p:sp>
+        <p:nvSpPr>
+          <p:cNvPr id="10" name="Text 7"/>
+          <p:cNvSpPr/>
+          <p:nvPr/>
+        </p:nvSpPr>
+        <p:spPr>
+          <a:xfrm>
+            <a:off x="9299448" y="109728"/>
+            <a:ext cx="2286000" cy="237744"/>
+          </a:xfrm>
+          <a:prstGeom prst="rect">
+            <a:avLst/>
+          </a:prstGeom>
+          <a:noFill/>
+          <a:ln/>
+        </p:spPr>
+        <p:txBody>
+          <a:bodyPr wrap="square" lIns="0" tIns="0" rIns="0" bIns="0" rtlCol="0" anchor="ctr"/>
+          <a:lstStyle/>
+          <a:p>
+            <a:pPr indent="0" marL="0">
+              <a:buNone/>
+            </a:pPr>
+            <a:r>
+              <a:rPr lang="en-US" sz="800" b="1" spc="100" kern="0" dirty="0">
+                <a:solidFill>
+                  <a:srgbClr val="9FB2C2"/>
+                </a:solidFill>
+                <a:latin typeface="Inter" pitchFamily="34" charset="0"/>
+                <a:ea typeface="Inter" pitchFamily="34" charset="-122"/>
+                <a:cs typeface="Inter" pitchFamily="34" charset="-120"/>
+              </a:rPr>
+              <a:t>MS. RIVERA'S SCREEN · SO FAR</a:t>
+            </a:r>
+            <a:endParaRPr lang="en-US" sz="800" dirty="0"/>
+          </a:p>
+        </p:txBody>
+      </p:sp>
+      <p:sp>
+        <p:nvSpPr>
+          <p:cNvPr id="11" name="Text 8"/>
+          <p:cNvSpPr/>
+          <p:nvPr/>
+        </p:nvSpPr>
+        <p:spPr>
+          <a:xfrm>
+            <a:off x="8860536" y="365760"/>
+            <a:ext cx="2670048" cy="566928"/>
+          </a:xfrm>
+          <a:prstGeom prst="rect">
+            <a:avLst/>
+          </a:prstGeom>
+          <a:noFill/>
+          <a:ln/>
+        </p:spPr>
+        <p:txBody>
+          <a:bodyPr wrap="square" lIns="0" tIns="0" rIns="0" bIns="0" rtlCol="0" anchor="ctr"/>
+          <a:lstStyle/>
+          <a:p>
+            <a:pPr indent="0" marL="0">
+              <a:buNone/>
+            </a:pPr>
+            <a:r>
+              <a:rPr lang="en-US" sz="1000" dirty="0">
+                <a:solidFill>
+                  <a:srgbClr val="1B1F24"/>
+                </a:solidFill>
+                <a:latin typeface="Inter" pitchFamily="34" charset="0"/>
+                <a:ea typeface="Inter" pitchFamily="34" charset="-122"/>
+                <a:cs typeface="Inter" pitchFamily="34" charset="-120"/>
+              </a:rPr>
+              <a:t>Her caveat, permanent: no prompt turns off hallucination. She still verifies.</a:t>
+            </a:r>
+            <a:endParaRPr lang="en-US" sz="1000" dirty="0"/>
+          </a:p>
+        </p:txBody>
+      </p:sp>
+      <p:sp>
+        <p:nvSpPr>
+          <p:cNvPr id="12" name="Text 9"/>
           <p:cNvSpPr/>
           <p:nvPr/>
         </p:nvSpPr>
@@ -17649,7 +23238,7 @@
       </p:sp>
       <p:sp>
         <p:nvSpPr>
-          <p:cNvPr id="6" name="Text 3"/>
+          <p:cNvPr id="13" name="Text 10"/>
           <p:cNvSpPr/>
           <p:nvPr/>
         </p:nvSpPr>
@@ -17688,7 +23277,7 @@
       </p:sp>
       <p:sp>
         <p:nvSpPr>
-          <p:cNvPr id="7" name="Shape 4"/>
+          <p:cNvPr id="14" name="Shape 11"/>
           <p:cNvSpPr/>
           <p:nvPr/>
         </p:nvSpPr>
@@ -17715,7 +23304,7 @@
       </p:sp>
       <p:sp>
         <p:nvSpPr>
-          <p:cNvPr id="8" name="Text 5"/>
+          <p:cNvPr id="15" name="Text 12"/>
           <p:cNvSpPr/>
           <p:nvPr/>
         </p:nvSpPr>
@@ -17754,7 +23343,7 @@
       </p:sp>
       <p:sp>
         <p:nvSpPr>
-          <p:cNvPr id="9" name="Text 6"/>
+          <p:cNvPr id="16" name="Text 13"/>
           <p:cNvSpPr/>
           <p:nvPr/>
         </p:nvSpPr>

--- a/kits/kit02/Kit02_PresentationDeck.pptx
+++ b/kits/kit02/Kit02_PresentationDeck.pptx
@@ -971,7 +971,7 @@
           <a:p>
             <a:r>
               <a:rPr lang="en-US" dirty="0"/>
-              <a:t>Researchers call these "prompt patterns" (White et al., 2023): documented, reusable solutions. We call it the staff prompt doc.</a:t>
+              <a:t>Researchers call these "prompt patterns" (White et al., 2023): documented, reusable solutions. We call it the school prompt library, on the member site.</a:t>
             </a:r>
             <a:endParaRPr lang="en-US" dirty="0"/>
           </a:p>
@@ -1675,7 +1675,7 @@
           <a:p>
             <a:r>
               <a:rPr lang="en-US" dirty="0"/>
-              <a:t>Project the staff prompt doc link. Watching entries appear live is the session’s proudest moment.</a:t>
+              <a:t>Project the school prompt library on the member site. Watching entries appear live is the session’s proudest moment.</a:t>
             </a:r>
             <a:endParaRPr lang="en-US" dirty="0"/>
           </a:p>
@@ -7468,7 +7468,7 @@
                 <a:ea typeface="Inter" pitchFamily="34" charset="-122"/>
                 <a:cs typeface="Inter" pitchFamily="34" charset="-120"/>
               </a:rPr>
-              <a:t>The staff prompt doc is where they live: nobody solves the same problem twice</a:t>
+              <a:t>The school prompt library is where they live: nobody solves the same problem twice</a:t>
             </a:r>
             <a:endParaRPr lang="en-US" sz="2000" dirty="0"/>
           </a:p>
@@ -13064,7 +13064,7 @@
                 <a:ea typeface="Inter" pitchFamily="34" charset="-122"/>
                 <a:cs typeface="Inter" pitchFamily="34" charset="-120"/>
               </a:rPr>
-              <a:t>Her template, saved: her name, one line on what it's for, in the staff doc.</a:t>
+              <a:t>Her template, saved to the school prompt library: title, subject, grades.</a:t>
             </a:r>
             <a:endParaRPr lang="en-US" sz="1000" dirty="0"/>
           </a:p>
@@ -13206,7 +13206,7 @@
                 <a:ea typeface="Inter" pitchFamily="34" charset="-122"/>
                 <a:cs typeface="Inter" pitchFamily="34" charset="-120"/>
               </a:rPr>
-              <a:t>Paste the final template into the staff prompt doc</a:t>
+              <a:t>Save the final template to the school prompt library</a:t>
             </a:r>
             <a:endParaRPr lang="en-US" sz="2100" dirty="0"/>
           </a:p>
@@ -13227,7 +13227,7 @@
                 <a:ea typeface="Inter" pitchFamily="34" charset="-122"/>
                 <a:cs typeface="Inter" pitchFamily="34" charset="-120"/>
               </a:rPr>
-              <a:t>Add your name and one line: what it’s for</a:t>
+              <a:t>Give it a title and pick subject and grades; your name rides along</a:t>
             </a:r>
             <a:endParaRPr lang="en-US" sz="2100" dirty="0"/>
           </a:p>
@@ -14992,7 +14992,7 @@
                 <a:ea typeface="Inter" pitchFamily="34" charset="-122"/>
                 <a:cs typeface="Inter" pitchFamily="34" charset="-120"/>
               </a:rPr>
-              <a:t>Template it, save it, share it in the staff doc</a:t>
+              <a:t>Template it, save it, share it in the prompt library</a:t>
             </a:r>
             <a:endParaRPr lang="en-US" sz="1900" dirty="0"/>
           </a:p>
@@ -16212,7 +16212,7 @@
                 <a:ea typeface="Inter" pitchFamily="34" charset="-122"/>
                 <a:cs typeface="Inter" pitchFamily="34" charset="-120"/>
               </a:rPr>
-              <a:t>Her new norm: working prompts go in the staff doc. Nobody solves twice.</a:t>
+              <a:t>Her new norm: working prompts go in the school library. Nobody solves twice.</a:t>
             </a:r>
             <a:endParaRPr lang="en-US" sz="1000" dirty="0"/>
           </a:p>
@@ -16332,7 +16332,7 @@
                 <a:ea typeface="Inter" pitchFamily="34" charset="-122"/>
                 <a:cs typeface="Inter" pitchFamily="34" charset="-120"/>
               </a:rPr>
-              <a:t>When a prompt works, it goes in the staff doc.</a:t>
+              <a:t>When a prompt works, it goes in the prompt library.</a:t>
             </a:r>
             <a:endParaRPr lang="en-US" sz="2800" dirty="0"/>
           </a:p>
@@ -18258,7 +18258,7 @@
                 <a:ea typeface="Inter" pitchFamily="34" charset="-122"/>
                 <a:cs typeface="Inter" pitchFamily="34" charset="-120"/>
               </a:rPr>
-              <a:t>Post to the staff doc</a:t>
+              <a:t>Save to the prompt library</a:t>
             </a:r>
             <a:endParaRPr lang="en-US" sz="2000" dirty="0"/>
           </a:p>
@@ -18297,7 +18297,7 @@
                 <a:ea typeface="Inter" pitchFamily="34" charset="-122"/>
                 <a:cs typeface="Inter" pitchFamily="34" charset="-120"/>
               </a:rPr>
-              <a:t>Your template, your name, one line about what it’s for</a:t>
+              <a:t>Your template, a title, one line about what it’s for</a:t>
             </a:r>
             <a:endParaRPr lang="en-US" sz="1600" dirty="0"/>
           </a:p>

--- a/kits/kit02/Kit02_PresentationDeck.pptx
+++ b/kits/kit02/Kit02_PresentationDeck.pptx
@@ -1323,7 +1323,7 @@
           <a:p>
             <a:r>
               <a:rPr lang="en-US" dirty="0"/>
-              <a:t>Pairs, devices out inside two minutes, announce the tool. The script’s worked example under slide 19 is a real reusable prompt from a working carpentry program.</a:t>
+              <a:t>Pairs, devices out inside two minutes, announce the tool. Ms. Rivera builds ONE artifact across all three steps: her weekly review-questions prompt, first draft to saved template. Her exemplar appears large on every step slide; anyone lost can copy her structure and still finish. The script’s worked example under slide 19 is a real reusable prompt from a working carpentry program.</a:t>
             </a:r>
             <a:endParaRPr lang="en-US" dirty="0"/>
           </a:p>
@@ -1411,7 +1411,7 @@
           <a:p>
             <a:r>
               <a:rPr lang="en-US" dirty="0"/>
-              <a:t>Circulate. Weak prompts usually lack context; nudge with "what would a substitute need to know to do this right?" Then read the real carpentry CNC table-leg prompt from the script as the worked example (three stacked roles, one task, SVG-for-CNC format).</a:t>
+              <a:t>Circulate. Weak prompts usually lack context; nudge with "what would a substitute need to know to do this right?" The big card is Ms. Rivera's first draft for her weekly review questions, the one artifact she carries through all three steps, color-coded like slide 9; anyone stuck can copy its shape. Then read the real carpentry CNC table-leg prompt from the script as the worked example (three stacked roles, one task, SVG-for-CNC format).</a:t>
             </a:r>
             <a:endParaRPr lang="en-US" dirty="0"/>
           </a:p>
@@ -1587,7 +1587,7 @@
           <a:p>
             <a:r>
               <a:rPr lang="en-US" dirty="0"/>
-              <a:t>45-min cut: one round instead of three, then straight to step 3.</a:t>
+              <a:t>45-min cut: one round instead of three, then straight to step 3. The big card is Ms. Rivera's three typed pushback lines, all on the same review prompt from step 1: content, then voice, then details. Lost participants copy her rhythm with their own draft.</a:t>
             </a:r>
             <a:endParaRPr lang="en-US" dirty="0"/>
           </a:p>
@@ -1675,7 +1675,7 @@
           <a:p>
             <a:r>
               <a:rPr lang="en-US" dirty="0"/>
-              <a:t>Project the school prompt library on the member site. Watching entries appear live is the session’s proudest moment.</a:t>
+              <a:t>Project the school prompt library on the member site. Watching entries appear live is the session’s proudest moment. The big card is Ms. Rivera's finished template: the same review prompt from steps 1 and 2 with the specifics swapped for blanks, saved under her name.</a:t>
             </a:r>
             <a:endParaRPr lang="en-US" dirty="0"/>
           </a:p>
@@ -1763,7 +1763,7 @@
           <a:p>
             <a:r>
               <a:rPr lang="en-US" dirty="0"/>
-              <a:t>One person reading their before AND after lets the room hear the delta. Keep each voice to a minute.</a:t>
+              <a:t>One person reading their before AND after lets the room hear the delta. Keep each voice to a minute. If the room is shy, read Ms. Rivera's delta yourself: her step 1 draft against her step 3 template.</a:t>
             </a:r>
             <a:endParaRPr lang="en-US" dirty="0"/>
           </a:p>
@@ -9818,7 +9818,7 @@
                 <a:ea typeface="Inter" pitchFamily="34" charset="-122"/>
                 <a:cs typeface="Inter" pitchFamily="34" charset="-120"/>
               </a:rPr>
-              <a:t>Her lab pick: the Friday newsletter. Weekly task, real payoff.</a:t>
+              <a:t>Her lab pick, one prompt through every step: her weekly review questions.</a:t>
             </a:r>
             <a:endParaRPr lang="en-US" sz="1000" dirty="0"/>
           </a:p>
@@ -9911,7 +9911,7 @@
         <p:spPr>
           <a:xfrm>
             <a:off x="640080" y="2377440"/>
-            <a:ext cx="10972800" cy="822960"/>
+            <a:ext cx="10972800" cy="914400"/>
           </a:xfrm>
           <a:prstGeom prst="rect">
             <a:avLst/>
@@ -9935,7 +9935,7 @@
                 <a:ea typeface="Inter" pitchFamily="34" charset="-122"/>
                 <a:cs typeface="Inter" pitchFamily="34" charset="-120"/>
               </a:rPr>
-              <a:t>Pick one task you do every week: the Friday newsletter, the weekly quiz, leveling a reading, station directions.</a:t>
+              <a:t>Pick one task you do every week: the Friday newsletter, the weekly quiz, leveling a reading, station directions. Ms. Rivera builds hers on screen the whole way: one prompt for her weekly review questions.</a:t>
             </a:r>
             <a:endParaRPr lang="en-US" sz="2000" dirty="0"/>
           </a:p>
@@ -10599,7 +10599,7 @@
                 <a:ea typeface="Inter" pitchFamily="34" charset="-122"/>
                 <a:cs typeface="Inter" pitchFamily="34" charset="-120"/>
               </a:rPr>
-              <a:t>On her screen: the four-part draft, run once, read like an editor.</a:t>
+              <a:t>Her review prompt, draft one: all four parts in, run once, read like an editor.</a:t>
             </a:r>
             <a:endParaRPr lang="en-US" sz="1000" dirty="0"/>
           </a:p>
@@ -10692,7 +10692,7 @@
         <p:spPr>
           <a:xfrm>
             <a:off x="640080" y="1508760"/>
-            <a:ext cx="10972800" cy="731520"/>
+            <a:ext cx="4892040" cy="731520"/>
           </a:xfrm>
           <a:prstGeom prst="roundRect">
             <a:avLst>
@@ -10718,24 +10718,24 @@
         </p:nvSpPr>
         <p:spPr>
           <a:xfrm>
-            <a:off x="960120" y="1563624"/>
-            <a:ext cx="10332720" cy="621792"/>
-          </a:xfrm>
-          <a:prstGeom prst="rect">
-            <a:avLst/>
-          </a:prstGeom>
-          <a:noFill/>
-          <a:ln/>
-        </p:spPr>
-        <p:txBody>
-          <a:bodyPr wrap="square" lIns="0" tIns="0" rIns="0" bIns="0" rtlCol="0" anchor="ctr"/>
-          <a:lstStyle/>
-          <a:p>
-            <a:pPr indent="0" marL="0">
-              <a:buNone/>
-            </a:pPr>
-            <a:r>
-              <a:rPr lang="en-US" sz="1900" dirty="0">
+            <a:off x="914400" y="1563624"/>
+            <a:ext cx="4389120" cy="621792"/>
+          </a:xfrm>
+          <a:prstGeom prst="rect">
+            <a:avLst/>
+          </a:prstGeom>
+          <a:noFill/>
+          <a:ln/>
+        </p:spPr>
+        <p:txBody>
+          <a:bodyPr wrap="square" lIns="0" tIns="0" rIns="0" bIns="0" rtlCol="0" anchor="ctr"/>
+          <a:lstStyle/>
+          <a:p>
+            <a:pPr indent="0" marL="0">
+              <a:buNone/>
+            </a:pPr>
+            <a:r>
+              <a:rPr lang="en-US" sz="1550" dirty="0">
                 <a:solidFill>
                   <a:srgbClr val="1B1F24"/>
                 </a:solidFill>
@@ -10745,7 +10745,7 @@
               </a:rPr>
               <a:t>Role: who should it be?</a:t>
             </a:r>
-            <a:endParaRPr lang="en-US" sz="1900" dirty="0"/>
+            <a:endParaRPr lang="en-US" sz="1550" dirty="0"/>
           </a:p>
         </p:txBody>
       </p:sp>
@@ -10758,7 +10758,7 @@
         <p:spPr>
           <a:xfrm>
             <a:off x="640080" y="2377440"/>
-            <a:ext cx="10972800" cy="731520"/>
+            <a:ext cx="4892040" cy="731520"/>
           </a:xfrm>
           <a:prstGeom prst="roundRect">
             <a:avLst>
@@ -10784,24 +10784,24 @@
         </p:nvSpPr>
         <p:spPr>
           <a:xfrm>
-            <a:off x="960120" y="2432304"/>
-            <a:ext cx="10332720" cy="621792"/>
-          </a:xfrm>
-          <a:prstGeom prst="rect">
-            <a:avLst/>
-          </a:prstGeom>
-          <a:noFill/>
-          <a:ln/>
-        </p:spPr>
-        <p:txBody>
-          <a:bodyPr wrap="square" lIns="0" tIns="0" rIns="0" bIns="0" rtlCol="0" anchor="ctr"/>
-          <a:lstStyle/>
-          <a:p>
-            <a:pPr indent="0" marL="0">
-              <a:buNone/>
-            </a:pPr>
-            <a:r>
-              <a:rPr lang="en-US" sz="1900" dirty="0">
+            <a:off x="914400" y="2432304"/>
+            <a:ext cx="4389120" cy="621792"/>
+          </a:xfrm>
+          <a:prstGeom prst="rect">
+            <a:avLst/>
+          </a:prstGeom>
+          <a:noFill/>
+          <a:ln/>
+        </p:spPr>
+        <p:txBody>
+          <a:bodyPr wrap="square" lIns="0" tIns="0" rIns="0" bIns="0" rtlCol="0" anchor="ctr"/>
+          <a:lstStyle/>
+          <a:p>
+            <a:pPr indent="0" marL="0">
+              <a:buNone/>
+            </a:pPr>
+            <a:r>
+              <a:rPr lang="en-US" sz="1550" dirty="0">
                 <a:solidFill>
                   <a:srgbClr val="1B1F24"/>
                 </a:solidFill>
@@ -10811,7 +10811,7 @@
               </a:rPr>
               <a:t>Task: one clear verb</a:t>
             </a:r>
-            <a:endParaRPr lang="en-US" sz="1900" dirty="0"/>
+            <a:endParaRPr lang="en-US" sz="1550" dirty="0"/>
           </a:p>
         </p:txBody>
       </p:sp>
@@ -10824,7 +10824,7 @@
         <p:spPr>
           <a:xfrm>
             <a:off x="640080" y="3246120"/>
-            <a:ext cx="10972800" cy="731520"/>
+            <a:ext cx="4892040" cy="731520"/>
           </a:xfrm>
           <a:prstGeom prst="roundRect">
             <a:avLst>
@@ -10850,24 +10850,24 @@
         </p:nvSpPr>
         <p:spPr>
           <a:xfrm>
-            <a:off x="960120" y="3300984"/>
-            <a:ext cx="10332720" cy="621792"/>
-          </a:xfrm>
-          <a:prstGeom prst="rect">
-            <a:avLst/>
-          </a:prstGeom>
-          <a:noFill/>
-          <a:ln/>
-        </p:spPr>
-        <p:txBody>
-          <a:bodyPr wrap="square" lIns="0" tIns="0" rIns="0" bIns="0" rtlCol="0" anchor="ctr"/>
-          <a:lstStyle/>
-          <a:p>
-            <a:pPr indent="0" marL="0">
-              <a:buNone/>
-            </a:pPr>
-            <a:r>
-              <a:rPr lang="en-US" sz="1900" dirty="0">
+            <a:off x="914400" y="3300984"/>
+            <a:ext cx="4389120" cy="621792"/>
+          </a:xfrm>
+          <a:prstGeom prst="rect">
+            <a:avLst/>
+          </a:prstGeom>
+          <a:noFill/>
+          <a:ln/>
+        </p:spPr>
+        <p:txBody>
+          <a:bodyPr wrap="square" lIns="0" tIns="0" rIns="0" bIns="0" rtlCol="0" anchor="ctr"/>
+          <a:lstStyle/>
+          <a:p>
+            <a:pPr indent="0" marL="0">
+              <a:buNone/>
+            </a:pPr>
+            <a:r>
+              <a:rPr lang="en-US" sz="1550" dirty="0">
                 <a:solidFill>
                   <a:srgbClr val="1B1F24"/>
                 </a:solidFill>
@@ -10877,7 +10877,7 @@
               </a:rPr>
               <a:t>Context: what would a substitute need to know?</a:t>
             </a:r>
-            <a:endParaRPr lang="en-US" sz="1900" dirty="0"/>
+            <a:endParaRPr lang="en-US" sz="1550" dirty="0"/>
           </a:p>
         </p:txBody>
       </p:sp>
@@ -10890,7 +10890,7 @@
         <p:spPr>
           <a:xfrm>
             <a:off x="640080" y="4114800"/>
-            <a:ext cx="10972800" cy="731520"/>
+            <a:ext cx="4892040" cy="731520"/>
           </a:xfrm>
           <a:prstGeom prst="roundRect">
             <a:avLst>
@@ -10916,24 +10916,24 @@
         </p:nvSpPr>
         <p:spPr>
           <a:xfrm>
-            <a:off x="960120" y="4169664"/>
-            <a:ext cx="10332720" cy="621792"/>
-          </a:xfrm>
-          <a:prstGeom prst="rect">
-            <a:avLst/>
-          </a:prstGeom>
-          <a:noFill/>
-          <a:ln/>
-        </p:spPr>
-        <p:txBody>
-          <a:bodyPr wrap="square" lIns="0" tIns="0" rIns="0" bIns="0" rtlCol="0" anchor="ctr"/>
-          <a:lstStyle/>
-          <a:p>
-            <a:pPr indent="0" marL="0">
-              <a:buNone/>
-            </a:pPr>
-            <a:r>
-              <a:rPr lang="en-US" sz="1900" dirty="0">
+            <a:off x="914400" y="4169664"/>
+            <a:ext cx="4389120" cy="621792"/>
+          </a:xfrm>
+          <a:prstGeom prst="rect">
+            <a:avLst/>
+          </a:prstGeom>
+          <a:noFill/>
+          <a:ln/>
+        </p:spPr>
+        <p:txBody>
+          <a:bodyPr wrap="square" lIns="0" tIns="0" rIns="0" bIns="0" rtlCol="0" anchor="ctr"/>
+          <a:lstStyle/>
+          <a:p>
+            <a:pPr indent="0" marL="0">
+              <a:buNone/>
+            </a:pPr>
+            <a:r>
+              <a:rPr lang="en-US" sz="1550" dirty="0">
                 <a:solidFill>
                   <a:srgbClr val="1B1F24"/>
                 </a:solidFill>
@@ -10943,13 +10943,211 @@
               </a:rPr>
               <a:t>Format: exactly what the output looks like</a:t>
             </a:r>
-            <a:endParaRPr lang="en-US" sz="1900" dirty="0"/>
-          </a:p>
-        </p:txBody>
-      </p:sp>
-      <p:sp>
-        <p:nvSpPr>
-          <p:cNvPr id="22" name="Text 19"/>
+            <a:endParaRPr lang="en-US" sz="1550" dirty="0"/>
+          </a:p>
+        </p:txBody>
+      </p:sp>
+      <p:sp>
+        <p:nvSpPr>
+          <p:cNvPr id="22" name="Shape 19"/>
+          <p:cNvSpPr/>
+          <p:nvPr/>
+        </p:nvSpPr>
+        <p:spPr>
+          <a:xfrm>
+            <a:off x="5806440" y="1508760"/>
+            <a:ext cx="5806440" cy="3429000"/>
+          </a:xfrm>
+          <a:prstGeom prst="roundRect">
+            <a:avLst>
+              <a:gd name="adj" fmla="val 2400"/>
+            </a:avLst>
+          </a:prstGeom>
+          <a:solidFill>
+            <a:srgbClr val="EAF5F3"/>
+          </a:solidFill>
+          <a:ln w="12700">
+            <a:solidFill>
+              <a:srgbClr val="EAF5F3"/>
+            </a:solidFill>
+            <a:prstDash val="solid"/>
+          </a:ln>
+        </p:spPr>
+      </p:sp>
+      <p:sp>
+        <p:nvSpPr>
+          <p:cNvPr id="23" name="Text 20"/>
+          <p:cNvSpPr/>
+          <p:nvPr/>
+        </p:nvSpPr>
+        <p:spPr>
+          <a:xfrm>
+            <a:off x="6080760" y="1691640"/>
+            <a:ext cx="5349240" cy="292608"/>
+          </a:xfrm>
+          <a:prstGeom prst="rect">
+            <a:avLst/>
+          </a:prstGeom>
+          <a:noFill/>
+          <a:ln/>
+        </p:spPr>
+        <p:txBody>
+          <a:bodyPr wrap="square" lIns="0" tIns="0" rIns="0" bIns="0" rtlCol="0" anchor="ctr"/>
+          <a:lstStyle/>
+          <a:p>
+            <a:pPr indent="0" marL="0">
+              <a:buNone/>
+            </a:pPr>
+            <a:r>
+              <a:rPr lang="en-US" sz="1250" b="1" spc="150" kern="0" dirty="0">
+                <a:solidFill>
+                  <a:srgbClr val="2A9D8F"/>
+                </a:solidFill>
+                <a:latin typeface="Inter" pitchFamily="34" charset="0"/>
+                <a:ea typeface="Inter" pitchFamily="34" charset="-122"/>
+                <a:cs typeface="Inter" pitchFamily="34" charset="-120"/>
+              </a:rPr>
+              <a:t>MS. RIVERA'S REVIEW PROMPT · STEP 1 · HER FIRST DRAFT</a:t>
+            </a:r>
+            <a:endParaRPr lang="en-US" sz="1250" dirty="0"/>
+          </a:p>
+        </p:txBody>
+      </p:sp>
+      <p:sp>
+        <p:nvSpPr>
+          <p:cNvPr id="24" name="Text 21"/>
+          <p:cNvSpPr/>
+          <p:nvPr/>
+        </p:nvSpPr>
+        <p:spPr>
+          <a:xfrm>
+            <a:off x="6080760" y="2103120"/>
+            <a:ext cx="5257800" cy="2331720"/>
+          </a:xfrm>
+          <a:prstGeom prst="rect">
+            <a:avLst/>
+          </a:prstGeom>
+          <a:noFill/>
+          <a:ln/>
+        </p:spPr>
+        <p:txBody>
+          <a:bodyPr wrap="square" lIns="0" tIns="0" rIns="0" bIns="0" rtlCol="0" anchor="t"/>
+          <a:lstStyle/>
+          <a:p>
+            <a:pPr indent="0" marL="0">
+              <a:lnSpc>
+                <a:spcPct val="120000"/>
+              </a:lnSpc>
+              <a:buNone/>
+            </a:pPr>
+            <a:r>
+              <a:rPr lang="en-US" sz="1700" b="1" dirty="0">
+                <a:solidFill>
+                  <a:srgbClr val="2A9D8F"/>
+                </a:solidFill>
+                <a:latin typeface="Inter" pitchFamily="34" charset="0"/>
+                <a:ea typeface="Inter" pitchFamily="34" charset="-122"/>
+                <a:cs typeface="Inter" pitchFamily="34" charset="-120"/>
+              </a:rPr>
+              <a:t>“You are an experienced 4th grade teacher. </a:t>
+            </a:r>
+            <a:pPr indent="0" marL="0">
+              <a:lnSpc>
+                <a:spcPct val="120000"/>
+              </a:lnSpc>
+              <a:buNone/>
+            </a:pPr>
+            <a:r>
+              <a:rPr lang="en-US" sz="1700" b="1" dirty="0">
+                <a:solidFill>
+                  <a:srgbClr val="13293D"/>
+                </a:solidFill>
+                <a:latin typeface="Inter" pitchFamily="34" charset="0"/>
+                <a:ea typeface="Inter" pitchFamily="34" charset="-122"/>
+                <a:cs typeface="Inter" pitchFamily="34" charset="-120"/>
+              </a:rPr>
+              <a:t>Write a 10-question Friday review on equivalent fractions </a:t>
+            </a:r>
+            <a:pPr indent="0" marL="0">
+              <a:lnSpc>
+                <a:spcPct val="120000"/>
+              </a:lnSpc>
+              <a:buNone/>
+            </a:pPr>
+            <a:r>
+              <a:rPr lang="en-US" sz="1700" b="1" dirty="0">
+                <a:solidFill>
+                  <a:srgbClr val="B07914"/>
+                </a:solidFill>
+                <a:latin typeface="Inter" pitchFamily="34" charset="0"/>
+                <a:ea typeface="Inter" pitchFamily="34" charset="-122"/>
+                <a:cs typeface="Inter" pitchFamily="34" charset="-120"/>
+              </a:rPr>
+              <a:t>for a class that still confuses numerator and denominator when simplifying. </a:t>
+            </a:r>
+            <a:pPr indent="0" marL="0">
+              <a:lnSpc>
+                <a:spcPct val="120000"/>
+              </a:lnSpc>
+              <a:buNone/>
+            </a:pPr>
+            <a:r>
+              <a:rPr lang="en-US" sz="1700" b="1" dirty="0">
+                <a:solidFill>
+                  <a:srgbClr val="2E7D5B"/>
+                </a:solidFill>
+                <a:latin typeface="Inter" pitchFamily="34" charset="0"/>
+                <a:ea typeface="Inter" pitchFamily="34" charset="-122"/>
+                <a:cs typeface="Inter" pitchFamily="34" charset="-120"/>
+              </a:rPr>
+              <a:t>Mix multiple choice and short answer. Include an answer key.”</a:t>
+            </a:r>
+            <a:endParaRPr lang="en-US" sz="1700" dirty="0"/>
+          </a:p>
+        </p:txBody>
+      </p:sp>
+      <p:sp>
+        <p:nvSpPr>
+          <p:cNvPr id="25" name="Text 22"/>
+          <p:cNvSpPr/>
+          <p:nvPr/>
+        </p:nvSpPr>
+        <p:spPr>
+          <a:xfrm>
+            <a:off x="6080760" y="4480560"/>
+            <a:ext cx="5257800" cy="365760"/>
+          </a:xfrm>
+          <a:prstGeom prst="rect">
+            <a:avLst/>
+          </a:prstGeom>
+          <a:noFill/>
+          <a:ln/>
+        </p:spPr>
+        <p:txBody>
+          <a:bodyPr wrap="square" lIns="0" tIns="0" rIns="0" bIns="0" rtlCol="0" anchor="ctr"/>
+          <a:lstStyle/>
+          <a:p>
+            <a:pPr indent="0" marL="0">
+              <a:buNone/>
+            </a:pPr>
+            <a:r>
+              <a:rPr lang="en-US" sz="1300" i="1" dirty="0">
+                <a:solidFill>
+                  <a:srgbClr val="5B6B7A"/>
+                </a:solidFill>
+                <a:latin typeface="Inter" pitchFamily="34" charset="0"/>
+                <a:ea typeface="Inter" pitchFamily="34" charset="-122"/>
+                <a:cs typeface="Inter" pitchFamily="34" charset="-120"/>
+              </a:rPr>
+              <a:t>Same colors as the makeover: role, task, context, format.</a:t>
+            </a:r>
+            <a:endParaRPr lang="en-US" sz="1300" dirty="0"/>
+          </a:p>
+        </p:txBody>
+      </p:sp>
+      <p:sp>
+        <p:nvSpPr>
+          <p:cNvPr id="26" name="Text 23"/>
           <p:cNvSpPr/>
           <p:nvPr/>
         </p:nvSpPr>
@@ -12085,7 +12283,7 @@
                 <a:ea typeface="Inter" pitchFamily="34" charset="-122"/>
                 <a:cs typeface="Inter" pitchFamily="34" charset="-120"/>
               </a:rPr>
-              <a:t>Her three rounds, live: fixed content, warmed the voice, tightened details.</a:t>
+              <a:t>Her review prompt, three rounds in: content fixed, voice warmed, details tight.</a:t>
             </a:r>
             <a:endParaRPr lang="en-US" sz="1000" dirty="0"/>
           </a:p>
@@ -12177,12 +12375,12 @@
         </p:nvSpPr>
         <p:spPr>
           <a:xfrm>
-            <a:off x="640080" y="1554480"/>
-            <a:ext cx="3520440" cy="2926080"/>
+            <a:off x="640080" y="1508760"/>
+            <a:ext cx="4160520" cy="1051560"/>
           </a:xfrm>
           <a:prstGeom prst="roundRect">
             <a:avLst>
-              <a:gd name="adj" fmla="val 2813"/>
+              <a:gd name="adj" fmla="val 7826"/>
             </a:avLst>
           </a:prstGeom>
           <a:solidFill>
@@ -12198,28 +12396,42 @@
       </p:sp>
       <p:sp>
         <p:nvSpPr>
-          <p:cNvPr id="15" name="Shape 12"/>
-          <p:cNvSpPr/>
-          <p:nvPr/>
-        </p:nvSpPr>
-        <p:spPr>
-          <a:xfrm>
-            <a:off x="1938528" y="1828800"/>
-            <a:ext cx="914400" cy="914400"/>
-          </a:xfrm>
-          <a:prstGeom prst="ellipse">
-            <a:avLst/>
-          </a:prstGeom>
-          <a:solidFill>
-            <a:srgbClr val="2A9D8F"/>
-          </a:solidFill>
-          <a:ln w="12700">
-            <a:solidFill>
-              <a:srgbClr val="2A9D8F"/>
-            </a:solidFill>
-            <a:prstDash val="solid"/>
-          </a:ln>
-        </p:spPr>
+          <p:cNvPr id="15" name="Text 12"/>
+          <p:cNvSpPr/>
+          <p:nvPr/>
+        </p:nvSpPr>
+        <p:spPr>
+          <a:xfrm>
+            <a:off x="914400" y="1618488"/>
+            <a:ext cx="3657600" cy="365760"/>
+          </a:xfrm>
+          <a:prstGeom prst="rect">
+            <a:avLst/>
+          </a:prstGeom>
+          <a:noFill/>
+          <a:ln/>
+        </p:spPr>
+        <p:txBody>
+          <a:bodyPr wrap="square" lIns="0" tIns="0" rIns="0" bIns="0" rtlCol="0" anchor="ctr"/>
+          <a:lstStyle/>
+          <a:p>
+            <a:pPr indent="0" marL="0">
+              <a:buNone/>
+            </a:pPr>
+            <a:r>
+              <a:rPr lang="en-US" sz="1700" b="1" dirty="0">
+                <a:solidFill>
+                  <a:srgbClr val="13293D"/>
+                </a:solidFill>
+                <a:latin typeface="Inter" pitchFamily="34" charset="0"/>
+                <a:ea typeface="Inter" pitchFamily="34" charset="-122"/>
+                <a:cs typeface="Inter" pitchFamily="34" charset="-120"/>
+              </a:rPr>
+              <a:t>1 · Content</a:t>
+            </a:r>
+            <a:endParaRPr lang="en-US" sz="1700" dirty="0"/>
+          </a:p>
+        </p:txBody>
       </p:sp>
       <p:sp>
         <p:nvSpPr>
@@ -12229,102 +12441,24 @@
         </p:nvSpPr>
         <p:spPr>
           <a:xfrm>
-            <a:off x="1938528" y="1828800"/>
-            <a:ext cx="914400" cy="914400"/>
-          </a:xfrm>
-          <a:prstGeom prst="rect">
-            <a:avLst/>
-          </a:prstGeom>
-          <a:noFill/>
-          <a:ln/>
-        </p:spPr>
-        <p:txBody>
-          <a:bodyPr wrap="square" lIns="0" tIns="0" rIns="0" bIns="0" rtlCol="0" anchor="ctr"/>
-          <a:lstStyle/>
-          <a:p>
-            <a:pPr algn="ctr" indent="0" marL="0">
-              <a:buNone/>
-            </a:pPr>
-            <a:r>
-              <a:rPr lang="en-US" sz="3000" b="1" dirty="0">
-                <a:solidFill>
-                  <a:srgbClr val="FFFFFF"/>
-                </a:solidFill>
-                <a:latin typeface="Inter" pitchFamily="34" charset="0"/>
-                <a:ea typeface="Inter" pitchFamily="34" charset="-122"/>
-                <a:cs typeface="Inter" pitchFamily="34" charset="-120"/>
-              </a:rPr>
-              <a:t>1</a:t>
-            </a:r>
-            <a:endParaRPr lang="en-US" sz="3000" dirty="0"/>
-          </a:p>
-        </p:txBody>
-      </p:sp>
-      <p:sp>
-        <p:nvSpPr>
-          <p:cNvPr id="17" name="Text 14"/>
-          <p:cNvSpPr/>
-          <p:nvPr/>
-        </p:nvSpPr>
-        <p:spPr>
-          <a:xfrm>
-            <a:off x="868680" y="2926080"/>
-            <a:ext cx="3063240" cy="457200"/>
-          </a:xfrm>
-          <a:prstGeom prst="rect">
-            <a:avLst/>
-          </a:prstGeom>
-          <a:noFill/>
-          <a:ln/>
-        </p:spPr>
-        <p:txBody>
-          <a:bodyPr wrap="square" lIns="0" tIns="0" rIns="0" bIns="0" rtlCol="0" anchor="ctr"/>
-          <a:lstStyle/>
-          <a:p>
-            <a:pPr algn="ctr" indent="0" marL="0">
-              <a:buNone/>
-            </a:pPr>
-            <a:r>
-              <a:rPr lang="en-US" sz="2000" b="1" dirty="0">
-                <a:solidFill>
-                  <a:srgbClr val="13293D"/>
-                </a:solidFill>
-                <a:latin typeface="Inter" pitchFamily="34" charset="0"/>
-                <a:ea typeface="Inter" pitchFamily="34" charset="-122"/>
-                <a:cs typeface="Inter" pitchFamily="34" charset="-120"/>
-              </a:rPr>
-              <a:t>Content</a:t>
-            </a:r>
-            <a:endParaRPr lang="en-US" sz="2000" dirty="0"/>
-          </a:p>
-        </p:txBody>
-      </p:sp>
-      <p:sp>
-        <p:nvSpPr>
-          <p:cNvPr id="18" name="Text 15"/>
-          <p:cNvSpPr/>
-          <p:nvPr/>
-        </p:nvSpPr>
-        <p:spPr>
-          <a:xfrm>
-            <a:off x="868680" y="3429000"/>
-            <a:ext cx="3063240" cy="914400"/>
-          </a:xfrm>
-          <a:prstGeom prst="rect">
-            <a:avLst/>
-          </a:prstGeom>
-          <a:noFill/>
-          <a:ln/>
-        </p:spPr>
-        <p:txBody>
-          <a:bodyPr wrap="square" lIns="0" tIns="0" rIns="0" bIns="0" rtlCol="0" anchor="ctr"/>
-          <a:lstStyle/>
-          <a:p>
-            <a:pPr algn="ctr" indent="0" marL="0">
-              <a:buNone/>
-            </a:pPr>
-            <a:r>
-              <a:rPr lang="en-US" sz="1500" dirty="0">
+            <a:off x="914400" y="1984248"/>
+            <a:ext cx="3657600" cy="502920"/>
+          </a:xfrm>
+          <a:prstGeom prst="rect">
+            <a:avLst/>
+          </a:prstGeom>
+          <a:noFill/>
+          <a:ln/>
+        </p:spPr>
+        <p:txBody>
+          <a:bodyPr wrap="square" lIns="0" tIns="0" rIns="0" bIns="0" rtlCol="0" anchor="ctr"/>
+          <a:lstStyle/>
+          <a:p>
+            <a:pPr indent="0" marL="0">
+              <a:buNone/>
+            </a:pPr>
+            <a:r>
+              <a:rPr lang="en-US" sz="1350" dirty="0">
                 <a:solidFill>
                   <a:srgbClr val="1B1F24"/>
                 </a:solidFill>
@@ -12334,24 +12468,24 @@
               </a:rPr>
               <a:t>What’s wrong or missing? Fix it first.</a:t>
             </a:r>
-            <a:endParaRPr lang="en-US" sz="1500" dirty="0"/>
-          </a:p>
-        </p:txBody>
-      </p:sp>
-      <p:sp>
-        <p:nvSpPr>
-          <p:cNvPr id="19" name="Shape 16"/>
-          <p:cNvSpPr/>
-          <p:nvPr/>
-        </p:nvSpPr>
-        <p:spPr>
-          <a:xfrm>
-            <a:off x="4407408" y="1554480"/>
-            <a:ext cx="3520440" cy="2926080"/>
+            <a:endParaRPr lang="en-US" sz="1350" dirty="0"/>
+          </a:p>
+        </p:txBody>
+      </p:sp>
+      <p:sp>
+        <p:nvSpPr>
+          <p:cNvPr id="17" name="Shape 14"/>
+          <p:cNvSpPr/>
+          <p:nvPr/>
+        </p:nvSpPr>
+        <p:spPr>
+          <a:xfrm>
+            <a:off x="640080" y="2697480"/>
+            <a:ext cx="4160520" cy="1051560"/>
           </a:xfrm>
           <a:prstGeom prst="roundRect">
             <a:avLst>
-              <a:gd name="adj" fmla="val 2813"/>
+              <a:gd name="adj" fmla="val 7826"/>
             </a:avLst>
           </a:prstGeom>
           <a:solidFill>
@@ -12367,160 +12501,96 @@
       </p:sp>
       <p:sp>
         <p:nvSpPr>
+          <p:cNvPr id="18" name="Text 15"/>
+          <p:cNvSpPr/>
+          <p:nvPr/>
+        </p:nvSpPr>
+        <p:spPr>
+          <a:xfrm>
+            <a:off x="914400" y="2807208"/>
+            <a:ext cx="3657600" cy="365760"/>
+          </a:xfrm>
+          <a:prstGeom prst="rect">
+            <a:avLst/>
+          </a:prstGeom>
+          <a:noFill/>
+          <a:ln/>
+        </p:spPr>
+        <p:txBody>
+          <a:bodyPr wrap="square" lIns="0" tIns="0" rIns="0" bIns="0" rtlCol="0" anchor="ctr"/>
+          <a:lstStyle/>
+          <a:p>
+            <a:pPr indent="0" marL="0">
+              <a:buNone/>
+            </a:pPr>
+            <a:r>
+              <a:rPr lang="en-US" sz="1700" b="1" dirty="0">
+                <a:solidFill>
+                  <a:srgbClr val="13293D"/>
+                </a:solidFill>
+                <a:latin typeface="Inter" pitchFamily="34" charset="0"/>
+                <a:ea typeface="Inter" pitchFamily="34" charset="-122"/>
+                <a:cs typeface="Inter" pitchFamily="34" charset="-120"/>
+              </a:rPr>
+              <a:t>2 · Voice</a:t>
+            </a:r>
+            <a:endParaRPr lang="en-US" sz="1700" dirty="0"/>
+          </a:p>
+        </p:txBody>
+      </p:sp>
+      <p:sp>
+        <p:nvSpPr>
+          <p:cNvPr id="19" name="Text 16"/>
+          <p:cNvSpPr/>
+          <p:nvPr/>
+        </p:nvSpPr>
+        <p:spPr>
+          <a:xfrm>
+            <a:off x="914400" y="3172968"/>
+            <a:ext cx="3657600" cy="502920"/>
+          </a:xfrm>
+          <a:prstGeom prst="rect">
+            <a:avLst/>
+          </a:prstGeom>
+          <a:noFill/>
+          <a:ln/>
+        </p:spPr>
+        <p:txBody>
+          <a:bodyPr wrap="square" lIns="0" tIns="0" rIns="0" bIns="0" rtlCol="0" anchor="ctr"/>
+          <a:lstStyle/>
+          <a:p>
+            <a:pPr indent="0" marL="0">
+              <a:buNone/>
+            </a:pPr>
+            <a:r>
+              <a:rPr lang="en-US" sz="1350" dirty="0">
+                <a:solidFill>
+                  <a:srgbClr val="1B1F24"/>
+                </a:solidFill>
+                <a:latin typeface="Inter" pitchFamily="34" charset="0"/>
+                <a:ea typeface="Inter" pitchFamily="34" charset="-122"/>
+                <a:cs typeface="Inter" pitchFamily="34" charset="-120"/>
+              </a:rPr>
+              <a:t>Does it sound like you? Read it aloud.</a:t>
+            </a:r>
+            <a:endParaRPr lang="en-US" sz="1350" dirty="0"/>
+          </a:p>
+        </p:txBody>
+      </p:sp>
+      <p:sp>
+        <p:nvSpPr>
           <p:cNvPr id="20" name="Shape 17"/>
           <p:cNvSpPr/>
           <p:nvPr/>
         </p:nvSpPr>
         <p:spPr>
           <a:xfrm>
-            <a:off x="5705856" y="1828800"/>
-            <a:ext cx="914400" cy="914400"/>
-          </a:xfrm>
-          <a:prstGeom prst="ellipse">
-            <a:avLst/>
-          </a:prstGeom>
-          <a:solidFill>
-            <a:srgbClr val="2A9D8F"/>
-          </a:solidFill>
-          <a:ln w="12700">
-            <a:solidFill>
-              <a:srgbClr val="2A9D8F"/>
-            </a:solidFill>
-            <a:prstDash val="solid"/>
-          </a:ln>
-        </p:spPr>
-      </p:sp>
-      <p:sp>
-        <p:nvSpPr>
-          <p:cNvPr id="21" name="Text 18"/>
-          <p:cNvSpPr/>
-          <p:nvPr/>
-        </p:nvSpPr>
-        <p:spPr>
-          <a:xfrm>
-            <a:off x="5705856" y="1828800"/>
-            <a:ext cx="914400" cy="914400"/>
-          </a:xfrm>
-          <a:prstGeom prst="rect">
-            <a:avLst/>
-          </a:prstGeom>
-          <a:noFill/>
-          <a:ln/>
-        </p:spPr>
-        <p:txBody>
-          <a:bodyPr wrap="square" lIns="0" tIns="0" rIns="0" bIns="0" rtlCol="0" anchor="ctr"/>
-          <a:lstStyle/>
-          <a:p>
-            <a:pPr algn="ctr" indent="0" marL="0">
-              <a:buNone/>
-            </a:pPr>
-            <a:r>
-              <a:rPr lang="en-US" sz="3000" b="1" dirty="0">
-                <a:solidFill>
-                  <a:srgbClr val="FFFFFF"/>
-                </a:solidFill>
-                <a:latin typeface="Inter" pitchFamily="34" charset="0"/>
-                <a:ea typeface="Inter" pitchFamily="34" charset="-122"/>
-                <a:cs typeface="Inter" pitchFamily="34" charset="-120"/>
-              </a:rPr>
-              <a:t>2</a:t>
-            </a:r>
-            <a:endParaRPr lang="en-US" sz="3000" dirty="0"/>
-          </a:p>
-        </p:txBody>
-      </p:sp>
-      <p:sp>
-        <p:nvSpPr>
-          <p:cNvPr id="22" name="Text 19"/>
-          <p:cNvSpPr/>
-          <p:nvPr/>
-        </p:nvSpPr>
-        <p:spPr>
-          <a:xfrm>
-            <a:off x="4636008" y="2926080"/>
-            <a:ext cx="3063240" cy="457200"/>
-          </a:xfrm>
-          <a:prstGeom prst="rect">
-            <a:avLst/>
-          </a:prstGeom>
-          <a:noFill/>
-          <a:ln/>
-        </p:spPr>
-        <p:txBody>
-          <a:bodyPr wrap="square" lIns="0" tIns="0" rIns="0" bIns="0" rtlCol="0" anchor="ctr"/>
-          <a:lstStyle/>
-          <a:p>
-            <a:pPr algn="ctr" indent="0" marL="0">
-              <a:buNone/>
-            </a:pPr>
-            <a:r>
-              <a:rPr lang="en-US" sz="2000" b="1" dirty="0">
-                <a:solidFill>
-                  <a:srgbClr val="13293D"/>
-                </a:solidFill>
-                <a:latin typeface="Inter" pitchFamily="34" charset="0"/>
-                <a:ea typeface="Inter" pitchFamily="34" charset="-122"/>
-                <a:cs typeface="Inter" pitchFamily="34" charset="-120"/>
-              </a:rPr>
-              <a:t>Voice</a:t>
-            </a:r>
-            <a:endParaRPr lang="en-US" sz="2000" dirty="0"/>
-          </a:p>
-        </p:txBody>
-      </p:sp>
-      <p:sp>
-        <p:nvSpPr>
-          <p:cNvPr id="23" name="Text 20"/>
-          <p:cNvSpPr/>
-          <p:nvPr/>
-        </p:nvSpPr>
-        <p:spPr>
-          <a:xfrm>
-            <a:off x="4636008" y="3429000"/>
-            <a:ext cx="3063240" cy="914400"/>
-          </a:xfrm>
-          <a:prstGeom prst="rect">
-            <a:avLst/>
-          </a:prstGeom>
-          <a:noFill/>
-          <a:ln/>
-        </p:spPr>
-        <p:txBody>
-          <a:bodyPr wrap="square" lIns="0" tIns="0" rIns="0" bIns="0" rtlCol="0" anchor="ctr"/>
-          <a:lstStyle/>
-          <a:p>
-            <a:pPr algn="ctr" indent="0" marL="0">
-              <a:buNone/>
-            </a:pPr>
-            <a:r>
-              <a:rPr lang="en-US" sz="1500" dirty="0">
-                <a:solidFill>
-                  <a:srgbClr val="1B1F24"/>
-                </a:solidFill>
-                <a:latin typeface="Inter" pitchFamily="34" charset="0"/>
-                <a:ea typeface="Inter" pitchFamily="34" charset="-122"/>
-                <a:cs typeface="Inter" pitchFamily="34" charset="-120"/>
-              </a:rPr>
-              <a:t>Does it sound like you? Read it aloud.</a:t>
-            </a:r>
-            <a:endParaRPr lang="en-US" sz="1500" dirty="0"/>
-          </a:p>
-        </p:txBody>
-      </p:sp>
-      <p:sp>
-        <p:nvSpPr>
-          <p:cNvPr id="24" name="Shape 21"/>
-          <p:cNvSpPr/>
-          <p:nvPr/>
-        </p:nvSpPr>
-        <p:spPr>
-          <a:xfrm>
-            <a:off x="8174736" y="1554480"/>
-            <a:ext cx="3520440" cy="2926080"/>
+            <a:off x="640080" y="3886200"/>
+            <a:ext cx="4160520" cy="1051560"/>
           </a:xfrm>
           <a:prstGeom prst="roundRect">
             <a:avLst>
-              <a:gd name="adj" fmla="val 2813"/>
+              <a:gd name="adj" fmla="val 7826"/>
             </a:avLst>
           </a:prstGeom>
           <a:solidFill>
@@ -12536,24 +12606,104 @@
       </p:sp>
       <p:sp>
         <p:nvSpPr>
-          <p:cNvPr id="25" name="Shape 22"/>
-          <p:cNvSpPr/>
-          <p:nvPr/>
-        </p:nvSpPr>
-        <p:spPr>
-          <a:xfrm>
-            <a:off x="9473184" y="1828800"/>
-            <a:ext cx="914400" cy="914400"/>
-          </a:xfrm>
-          <a:prstGeom prst="ellipse">
-            <a:avLst/>
+          <p:cNvPr id="21" name="Text 18"/>
+          <p:cNvSpPr/>
+          <p:nvPr/>
+        </p:nvSpPr>
+        <p:spPr>
+          <a:xfrm>
+            <a:off x="914400" y="3995928"/>
+            <a:ext cx="3657600" cy="365760"/>
+          </a:xfrm>
+          <a:prstGeom prst="rect">
+            <a:avLst/>
+          </a:prstGeom>
+          <a:noFill/>
+          <a:ln/>
+        </p:spPr>
+        <p:txBody>
+          <a:bodyPr wrap="square" lIns="0" tIns="0" rIns="0" bIns="0" rtlCol="0" anchor="ctr"/>
+          <a:lstStyle/>
+          <a:p>
+            <a:pPr indent="0" marL="0">
+              <a:buNone/>
+            </a:pPr>
+            <a:r>
+              <a:rPr lang="en-US" sz="1700" b="1" dirty="0">
+                <a:solidFill>
+                  <a:srgbClr val="13293D"/>
+                </a:solidFill>
+                <a:latin typeface="Inter" pitchFamily="34" charset="0"/>
+                <a:ea typeface="Inter" pitchFamily="34" charset="-122"/>
+                <a:cs typeface="Inter" pitchFamily="34" charset="-120"/>
+              </a:rPr>
+              <a:t>3 · Details</a:t>
+            </a:r>
+            <a:endParaRPr lang="en-US" sz="1700" dirty="0"/>
+          </a:p>
+        </p:txBody>
+      </p:sp>
+      <p:sp>
+        <p:nvSpPr>
+          <p:cNvPr id="22" name="Text 19"/>
+          <p:cNvSpPr/>
+          <p:nvPr/>
+        </p:nvSpPr>
+        <p:spPr>
+          <a:xfrm>
+            <a:off x="914400" y="4361688"/>
+            <a:ext cx="3657600" cy="502920"/>
+          </a:xfrm>
+          <a:prstGeom prst="rect">
+            <a:avLst/>
+          </a:prstGeom>
+          <a:noFill/>
+          <a:ln/>
+        </p:spPr>
+        <p:txBody>
+          <a:bodyPr wrap="square" lIns="0" tIns="0" rIns="0" bIns="0" rtlCol="0" anchor="ctr"/>
+          <a:lstStyle/>
+          <a:p>
+            <a:pPr indent="0" marL="0">
+              <a:buNone/>
+            </a:pPr>
+            <a:r>
+              <a:rPr lang="en-US" sz="1350" dirty="0">
+                <a:solidFill>
+                  <a:srgbClr val="1B1F24"/>
+                </a:solidFill>
+                <a:latin typeface="Inter" pitchFamily="34" charset="0"/>
+                <a:ea typeface="Inter" pitchFamily="34" charset="-122"/>
+                <a:cs typeface="Inter" pitchFamily="34" charset="-120"/>
+              </a:rPr>
+              <a:t>Length, level, layout: make them exact.</a:t>
+            </a:r>
+            <a:endParaRPr lang="en-US" sz="1350" dirty="0"/>
+          </a:p>
+        </p:txBody>
+      </p:sp>
+      <p:sp>
+        <p:nvSpPr>
+          <p:cNvPr id="23" name="Shape 20"/>
+          <p:cNvSpPr/>
+          <p:nvPr/>
+        </p:nvSpPr>
+        <p:spPr>
+          <a:xfrm>
+            <a:off x="5029200" y="1508760"/>
+            <a:ext cx="6629400" cy="3566160"/>
+          </a:xfrm>
+          <a:prstGeom prst="roundRect">
+            <a:avLst>
+              <a:gd name="adj" fmla="val 2308"/>
+            </a:avLst>
           </a:prstGeom>
           <a:solidFill>
-            <a:srgbClr val="2A9D8F"/>
+            <a:srgbClr val="EAF5F3"/>
           </a:solidFill>
           <a:ln w="12700">
             <a:solidFill>
-              <a:srgbClr val="2A9D8F"/>
+              <a:srgbClr val="EAF5F3"/>
             </a:solidFill>
             <a:prstDash val="solid"/>
           </a:ln>
@@ -12561,130 +12711,181 @@
       </p:sp>
       <p:sp>
         <p:nvSpPr>
+          <p:cNvPr id="24" name="Text 21"/>
+          <p:cNvSpPr/>
+          <p:nvPr/>
+        </p:nvSpPr>
+        <p:spPr>
+          <a:xfrm>
+            <a:off x="5303520" y="1691640"/>
+            <a:ext cx="6126480" cy="292608"/>
+          </a:xfrm>
+          <a:prstGeom prst="rect">
+            <a:avLst/>
+          </a:prstGeom>
+          <a:noFill/>
+          <a:ln/>
+        </p:spPr>
+        <p:txBody>
+          <a:bodyPr wrap="square" lIns="0" tIns="0" rIns="0" bIns="0" rtlCol="0" anchor="ctr"/>
+          <a:lstStyle/>
+          <a:p>
+            <a:pPr indent="0" marL="0">
+              <a:buNone/>
+            </a:pPr>
+            <a:r>
+              <a:rPr lang="en-US" sz="1250" b="1" spc="150" kern="0" dirty="0">
+                <a:solidFill>
+                  <a:srgbClr val="2A9D8F"/>
+                </a:solidFill>
+                <a:latin typeface="Inter" pitchFamily="34" charset="0"/>
+                <a:ea typeface="Inter" pitchFamily="34" charset="-122"/>
+                <a:cs typeface="Inter" pitchFamily="34" charset="-120"/>
+              </a:rPr>
+              <a:t>MS. RIVERA'S REVIEW PROMPT · STEP 2 · HER THREE ROUNDS</a:t>
+            </a:r>
+            <a:endParaRPr lang="en-US" sz="1250" dirty="0"/>
+          </a:p>
+        </p:txBody>
+      </p:sp>
+      <p:sp>
+        <p:nvSpPr>
+          <p:cNvPr id="25" name="Text 22"/>
+          <p:cNvSpPr/>
+          <p:nvPr/>
+        </p:nvSpPr>
+        <p:spPr>
+          <a:xfrm>
+            <a:off x="5303520" y="2103120"/>
+            <a:ext cx="6080760" cy="2834640"/>
+          </a:xfrm>
+          <a:prstGeom prst="rect">
+            <a:avLst/>
+          </a:prstGeom>
+          <a:noFill/>
+          <a:ln/>
+        </p:spPr>
+        <p:txBody>
+          <a:bodyPr wrap="square" lIns="0" tIns="0" rIns="0" bIns="0" rtlCol="0" anchor="t"/>
+          <a:lstStyle/>
+          <a:p>
+            <a:pPr indent="0" marL="0">
+              <a:lnSpc>
+                <a:spcPct val="125000"/>
+              </a:lnSpc>
+              <a:buNone/>
+            </a:pPr>
+            <a:r>
+              <a:rPr lang="en-US" sz="1650" b="1" dirty="0">
+                <a:solidFill>
+                  <a:srgbClr val="13293D"/>
+                </a:solidFill>
+                <a:latin typeface="Inter" pitchFamily="34" charset="0"/>
+                <a:ea typeface="Inter" pitchFamily="34" charset="-122"/>
+                <a:cs typeface="Inter" pitchFamily="34" charset="-120"/>
+              </a:rPr>
+              <a:t>Content  </a:t>
+            </a:r>
+            <a:pPr indent="0" marL="0">
+              <a:lnSpc>
+                <a:spcPct val="125000"/>
+              </a:lnSpc>
+              <a:buNone/>
+            </a:pPr>
+            <a:r>
+              <a:rPr lang="en-US" sz="1650" i="1" dirty="0">
+                <a:solidFill>
+                  <a:srgbClr val="1B1F24"/>
+                </a:solidFill>
+                <a:latin typeface="Inter" pitchFamily="34" charset="0"/>
+                <a:ea typeface="Inter" pitchFamily="34" charset="-122"/>
+                <a:cs typeface="Inter" pitchFamily="34" charset="-120"/>
+              </a:rPr>
+              <a:t>“Question 3 is mixed numbers; we haven’t gotten there. Swap in a comparing-fractions item.”
+</a:t>
+            </a:r>
+            <a:pPr indent="0" marL="0">
+              <a:lnSpc>
+                <a:spcPct val="125000"/>
+              </a:lnSpc>
+              <a:buNone/>
+            </a:pPr>
+            <a:r>
+              <a:rPr lang="en-US" sz="1650" b="1" dirty="0">
+                <a:solidFill>
+                  <a:srgbClr val="13293D"/>
+                </a:solidFill>
+                <a:latin typeface="Inter" pitchFamily="34" charset="0"/>
+                <a:ea typeface="Inter" pitchFamily="34" charset="-122"/>
+                <a:cs typeface="Inter" pitchFamily="34" charset="-120"/>
+              </a:rPr>
+              <a:t>Voice  </a:t>
+            </a:r>
+            <a:pPr indent="0" marL="0">
+              <a:lnSpc>
+                <a:spcPct val="125000"/>
+              </a:lnSpc>
+              <a:buNone/>
+            </a:pPr>
+            <a:r>
+              <a:rPr lang="en-US" sz="1650" i="1" dirty="0">
+                <a:solidFill>
+                  <a:srgbClr val="1B1F24"/>
+                </a:solidFill>
+                <a:latin typeface="Inter" pitchFamily="34" charset="0"/>
+                <a:ea typeface="Inter" pitchFamily="34" charset="-122"/>
+                <a:cs typeface="Inter" pitchFamily="34" charset="-120"/>
+              </a:rPr>
+              <a:t>“The directions don’t sound like me. Warmer, and lose ‘utilize.’”
+</a:t>
+            </a:r>
+            <a:pPr indent="0" marL="0">
+              <a:lnSpc>
+                <a:spcPct val="125000"/>
+              </a:lnSpc>
+              <a:buNone/>
+            </a:pPr>
+            <a:r>
+              <a:rPr lang="en-US" sz="1650" b="1" dirty="0">
+                <a:solidFill>
+                  <a:srgbClr val="13293D"/>
+                </a:solidFill>
+                <a:latin typeface="Inter" pitchFamily="34" charset="0"/>
+                <a:ea typeface="Inter" pitchFamily="34" charset="-122"/>
+                <a:cs typeface="Inter" pitchFamily="34" charset="-120"/>
+              </a:rPr>
+              <a:t>Details  </a:t>
+            </a:r>
+            <a:pPr indent="0" marL="0">
+              <a:lnSpc>
+                <a:spcPct val="125000"/>
+              </a:lnSpc>
+              <a:buNone/>
+            </a:pPr>
+            <a:r>
+              <a:rPr lang="en-US" sz="1650" i="1" dirty="0">
+                <a:solidFill>
+                  <a:srgbClr val="1B1F24"/>
+                </a:solidFill>
+                <a:latin typeface="Inter" pitchFamily="34" charset="0"/>
+                <a:ea typeface="Inter" pitchFamily="34" charset="-122"/>
+                <a:cs typeface="Inter" pitchFamily="34" charset="-120"/>
+              </a:rPr>
+              <a:t>“Exactly ten questions, numbered, answer key on its own page.”</a:t>
+            </a:r>
+            <a:endParaRPr lang="en-US" sz="1650" dirty="0"/>
+          </a:p>
+        </p:txBody>
+      </p:sp>
+      <p:sp>
+        <p:nvSpPr>
           <p:cNvPr id="26" name="Text 23"/>
           <p:cNvSpPr/>
           <p:nvPr/>
         </p:nvSpPr>
         <p:spPr>
           <a:xfrm>
-            <a:off x="9473184" y="1828800"/>
-            <a:ext cx="914400" cy="914400"/>
-          </a:xfrm>
-          <a:prstGeom prst="rect">
-            <a:avLst/>
-          </a:prstGeom>
-          <a:noFill/>
-          <a:ln/>
-        </p:spPr>
-        <p:txBody>
-          <a:bodyPr wrap="square" lIns="0" tIns="0" rIns="0" bIns="0" rtlCol="0" anchor="ctr"/>
-          <a:lstStyle/>
-          <a:p>
-            <a:pPr algn="ctr" indent="0" marL="0">
-              <a:buNone/>
-            </a:pPr>
-            <a:r>
-              <a:rPr lang="en-US" sz="3000" b="1" dirty="0">
-                <a:solidFill>
-                  <a:srgbClr val="FFFFFF"/>
-                </a:solidFill>
-                <a:latin typeface="Inter" pitchFamily="34" charset="0"/>
-                <a:ea typeface="Inter" pitchFamily="34" charset="-122"/>
-                <a:cs typeface="Inter" pitchFamily="34" charset="-120"/>
-              </a:rPr>
-              <a:t>3</a:t>
-            </a:r>
-            <a:endParaRPr lang="en-US" sz="3000" dirty="0"/>
-          </a:p>
-        </p:txBody>
-      </p:sp>
-      <p:sp>
-        <p:nvSpPr>
-          <p:cNvPr id="27" name="Text 24"/>
-          <p:cNvSpPr/>
-          <p:nvPr/>
-        </p:nvSpPr>
-        <p:spPr>
-          <a:xfrm>
-            <a:off x="8403336" y="2926080"/>
-            <a:ext cx="3063240" cy="457200"/>
-          </a:xfrm>
-          <a:prstGeom prst="rect">
-            <a:avLst/>
-          </a:prstGeom>
-          <a:noFill/>
-          <a:ln/>
-        </p:spPr>
-        <p:txBody>
-          <a:bodyPr wrap="square" lIns="0" tIns="0" rIns="0" bIns="0" rtlCol="0" anchor="ctr"/>
-          <a:lstStyle/>
-          <a:p>
-            <a:pPr algn="ctr" indent="0" marL="0">
-              <a:buNone/>
-            </a:pPr>
-            <a:r>
-              <a:rPr lang="en-US" sz="2000" b="1" dirty="0">
-                <a:solidFill>
-                  <a:srgbClr val="13293D"/>
-                </a:solidFill>
-                <a:latin typeface="Inter" pitchFamily="34" charset="0"/>
-                <a:ea typeface="Inter" pitchFamily="34" charset="-122"/>
-                <a:cs typeface="Inter" pitchFamily="34" charset="-120"/>
-              </a:rPr>
-              <a:t>Details</a:t>
-            </a:r>
-            <a:endParaRPr lang="en-US" sz="2000" dirty="0"/>
-          </a:p>
-        </p:txBody>
-      </p:sp>
-      <p:sp>
-        <p:nvSpPr>
-          <p:cNvPr id="28" name="Text 25"/>
-          <p:cNvSpPr/>
-          <p:nvPr/>
-        </p:nvSpPr>
-        <p:spPr>
-          <a:xfrm>
-            <a:off x="8403336" y="3429000"/>
-            <a:ext cx="3063240" cy="914400"/>
-          </a:xfrm>
-          <a:prstGeom prst="rect">
-            <a:avLst/>
-          </a:prstGeom>
-          <a:noFill/>
-          <a:ln/>
-        </p:spPr>
-        <p:txBody>
-          <a:bodyPr wrap="square" lIns="0" tIns="0" rIns="0" bIns="0" rtlCol="0" anchor="ctr"/>
-          <a:lstStyle/>
-          <a:p>
-            <a:pPr algn="ctr" indent="0" marL="0">
-              <a:buNone/>
-            </a:pPr>
-            <a:r>
-              <a:rPr lang="en-US" sz="1500" dirty="0">
-                <a:solidFill>
-                  <a:srgbClr val="1B1F24"/>
-                </a:solidFill>
-                <a:latin typeface="Inter" pitchFamily="34" charset="0"/>
-                <a:ea typeface="Inter" pitchFamily="34" charset="-122"/>
-                <a:cs typeface="Inter" pitchFamily="34" charset="-120"/>
-              </a:rPr>
-              <a:t>Length, level, layout: make them exact.</a:t>
-            </a:r>
-            <a:endParaRPr lang="en-US" sz="1500" dirty="0"/>
-          </a:p>
-        </p:txBody>
-      </p:sp>
-      <p:sp>
-        <p:nvSpPr>
-          <p:cNvPr id="29" name="Text 26"/>
-          <p:cNvSpPr/>
-          <p:nvPr/>
-        </p:nvSpPr>
-        <p:spPr>
-          <a:xfrm>
-            <a:off x="640080" y="4937760"/>
+            <a:off x="640080" y="5303520"/>
             <a:ext cx="10972800" cy="457200"/>
           </a:xfrm>
           <a:prstGeom prst="rect">
@@ -13064,7 +13265,7 @@
                 <a:ea typeface="Inter" pitchFamily="34" charset="-122"/>
                 <a:cs typeface="Inter" pitchFamily="34" charset="-120"/>
               </a:rPr>
-              <a:t>Her template, saved to the school prompt library: title, subject, grades.</a:t>
+              <a:t>Her review prompt, bracketed into a template and saved to the school prompt library.</a:t>
             </a:r>
             <a:endParaRPr lang="en-US" sz="1000" dirty="0"/>
           </a:p>
@@ -13156,8 +13357,8 @@
         </p:nvSpPr>
         <p:spPr>
           <a:xfrm>
-            <a:off x="640080" y="1463040"/>
-            <a:ext cx="10908792" cy="2286000"/>
+            <a:off x="640080" y="1508760"/>
+            <a:ext cx="4846320" cy="3108960"/>
           </a:xfrm>
           <a:prstGeom prst="rect">
             <a:avLst/>
@@ -13177,7 +13378,7 @@
               <a:buChar char="•"/>
             </a:pPr>
             <a:r>
-              <a:rPr lang="en-US" sz="2100" dirty="0">
+              <a:rPr lang="en-US" sz="1700" dirty="0">
                 <a:solidFill>
                   <a:srgbClr val="1B1F24"/>
                 </a:solidFill>
@@ -13187,7 +13388,7 @@
               </a:rPr>
               <a:t>Replace the specifics with blanks: [topic], [grade], [number of questions]</a:t>
             </a:r>
-            <a:endParaRPr lang="en-US" sz="2100" dirty="0"/>
+            <a:endParaRPr lang="en-US" sz="1700" dirty="0"/>
           </a:p>
           <a:p>
             <a:pPr marL="342900" indent="-342900">
@@ -13198,7 +13399,7 @@
               <a:buChar char="•"/>
             </a:pPr>
             <a:r>
-              <a:rPr lang="en-US" sz="2100" dirty="0">
+              <a:rPr lang="en-US" sz="1700" dirty="0">
                 <a:solidFill>
                   <a:srgbClr val="1B1F24"/>
                 </a:solidFill>
@@ -13208,7 +13409,7 @@
               </a:rPr>
               <a:t>Save the final template to the school prompt library</a:t>
             </a:r>
-            <a:endParaRPr lang="en-US" sz="2100" dirty="0"/>
+            <a:endParaRPr lang="en-US" sz="1700" dirty="0"/>
           </a:p>
           <a:p>
             <a:pPr marL="342900" indent="-342900">
@@ -13219,7 +13420,7 @@
               <a:buChar char="•"/>
             </a:pPr>
             <a:r>
-              <a:rPr lang="en-US" sz="2100" dirty="0">
+              <a:rPr lang="en-US" sz="1700" dirty="0">
                 <a:solidFill>
                   <a:srgbClr val="1B1F24"/>
                 </a:solidFill>
@@ -13229,7 +13430,7 @@
               </a:rPr>
               <a:t>Give it a title and pick subject and grades; your name rides along</a:t>
             </a:r>
-            <a:endParaRPr lang="en-US" sz="2100" dirty="0"/>
+            <a:endParaRPr lang="en-US" sz="1700" dirty="0"/>
           </a:p>
         </p:txBody>
       </p:sp>
@@ -13241,12 +13442,12 @@
         </p:nvSpPr>
         <p:spPr>
           <a:xfrm>
-            <a:off x="640080" y="3931920"/>
-            <a:ext cx="10972800" cy="1737360"/>
+            <a:off x="5806440" y="1508760"/>
+            <a:ext cx="5806440" cy="3429000"/>
           </a:xfrm>
           <a:prstGeom prst="roundRect">
             <a:avLst>
-              <a:gd name="adj" fmla="val 4737"/>
+              <a:gd name="adj" fmla="val 2400"/>
             </a:avLst>
           </a:prstGeom>
           <a:solidFill>
@@ -13268,24 +13469,66 @@
         </p:nvSpPr>
         <p:spPr>
           <a:xfrm>
-            <a:off x="960120" y="4160520"/>
-            <a:ext cx="10332720" cy="1280160"/>
-          </a:xfrm>
-          <a:prstGeom prst="rect">
-            <a:avLst/>
-          </a:prstGeom>
-          <a:noFill/>
-          <a:ln/>
-        </p:spPr>
-        <p:txBody>
-          <a:bodyPr wrap="square" lIns="0" tIns="0" rIns="0" bIns="0" rtlCol="0" anchor="ctr"/>
-          <a:lstStyle/>
-          <a:p>
-            <a:pPr indent="0" marL="0">
-              <a:buNone/>
-            </a:pPr>
-            <a:r>
-              <a:rPr lang="en-US" sz="2100" b="1" dirty="0">
+            <a:off x="6080760" y="1691640"/>
+            <a:ext cx="5349240" cy="292608"/>
+          </a:xfrm>
+          <a:prstGeom prst="rect">
+            <a:avLst/>
+          </a:prstGeom>
+          <a:noFill/>
+          <a:ln/>
+        </p:spPr>
+        <p:txBody>
+          <a:bodyPr wrap="square" lIns="0" tIns="0" rIns="0" bIns="0" rtlCol="0" anchor="ctr"/>
+          <a:lstStyle/>
+          <a:p>
+            <a:pPr indent="0" marL="0">
+              <a:buNone/>
+            </a:pPr>
+            <a:r>
+              <a:rPr lang="en-US" sz="1200" b="1" spc="120" kern="0" dirty="0">
+                <a:solidFill>
+                  <a:srgbClr val="2A9D8F"/>
+                </a:solidFill>
+                <a:latin typeface="Inter" pitchFamily="34" charset="0"/>
+                <a:ea typeface="Inter" pitchFamily="34" charset="-122"/>
+                <a:cs typeface="Inter" pitchFamily="34" charset="-120"/>
+              </a:rPr>
+              <a:t>MS. RIVERA'S REVIEW PROMPT · STEP 3 · HER TEMPLATE, SAVED</a:t>
+            </a:r>
+            <a:endParaRPr lang="en-US" sz="1200" dirty="0"/>
+          </a:p>
+        </p:txBody>
+      </p:sp>
+      <p:sp>
+        <p:nvSpPr>
+          <p:cNvPr id="17" name="Text 14"/>
+          <p:cNvSpPr/>
+          <p:nvPr/>
+        </p:nvSpPr>
+        <p:spPr>
+          <a:xfrm>
+            <a:off x="6080760" y="2103120"/>
+            <a:ext cx="5257800" cy="2103120"/>
+          </a:xfrm>
+          <a:prstGeom prst="rect">
+            <a:avLst/>
+          </a:prstGeom>
+          <a:noFill/>
+          <a:ln/>
+        </p:spPr>
+        <p:txBody>
+          <a:bodyPr wrap="square" lIns="0" tIns="0" rIns="0" bIns="0" rtlCol="0" anchor="t"/>
+          <a:lstStyle/>
+          <a:p>
+            <a:pPr indent="0" marL="0">
+              <a:lnSpc>
+                <a:spcPct val="120000"/>
+              </a:lnSpc>
+              <a:buNone/>
+            </a:pPr>
+            <a:r>
+              <a:rPr lang="en-US" sz="1650" b="1" i="1" dirty="0">
                 <a:solidFill>
                   <a:srgbClr val="13293D"/>
                 </a:solidFill>
@@ -13293,9 +13536,114 @@
                 <a:ea typeface="Inter" pitchFamily="34" charset="-122"/>
                 <a:cs typeface="Inter" pitchFamily="34" charset="-120"/>
               </a:rPr>
+              <a:t>“You are an experienced [grade] teacher. Write a [number]-question review on [topic] for a class that still confuses [what they mix up]. Mix multiple choice and short answer. Include an answer key.”</a:t>
+            </a:r>
+            <a:endParaRPr lang="en-US" sz="1650" dirty="0"/>
+          </a:p>
+        </p:txBody>
+      </p:sp>
+      <p:sp>
+        <p:nvSpPr>
+          <p:cNvPr id="18" name="Text 15"/>
+          <p:cNvSpPr/>
+          <p:nvPr/>
+        </p:nvSpPr>
+        <p:spPr>
+          <a:xfrm>
+            <a:off x="6080760" y="4343400"/>
+            <a:ext cx="5257800" cy="457200"/>
+          </a:xfrm>
+          <a:prstGeom prst="rect">
+            <a:avLst/>
+          </a:prstGeom>
+          <a:noFill/>
+          <a:ln/>
+        </p:spPr>
+        <p:txBody>
+          <a:bodyPr wrap="square" lIns="0" tIns="0" rIns="0" bIns="0" rtlCol="0" anchor="ctr"/>
+          <a:lstStyle/>
+          <a:p>
+            <a:pPr indent="0" marL="0">
+              <a:buNone/>
+            </a:pPr>
+            <a:r>
+              <a:rPr lang="en-US" sz="1200" dirty="0">
+                <a:solidFill>
+                  <a:srgbClr val="5B6B7A"/>
+                </a:solidFill>
+                <a:latin typeface="Inter" pitchFamily="34" charset="0"/>
+                <a:ea typeface="Inter" pitchFamily="34" charset="-122"/>
+                <a:cs typeface="Inter" pitchFamily="34" charset="-120"/>
+              </a:rPr>
+              <a:t>Saved: “Weekly review questions” · Math · Grades 3–5 · Ms. Rivera</a:t>
+            </a:r>
+            <a:endParaRPr lang="en-US" sz="1200" dirty="0"/>
+          </a:p>
+        </p:txBody>
+      </p:sp>
+      <p:sp>
+        <p:nvSpPr>
+          <p:cNvPr id="19" name="Shape 16"/>
+          <p:cNvSpPr/>
+          <p:nvPr/>
+        </p:nvSpPr>
+        <p:spPr>
+          <a:xfrm>
+            <a:off x="640080" y="5120640"/>
+            <a:ext cx="10972800" cy="914400"/>
+          </a:xfrm>
+          <a:prstGeom prst="roundRect">
+            <a:avLst>
+              <a:gd name="adj" fmla="val 9000"/>
+            </a:avLst>
+          </a:prstGeom>
+          <a:solidFill>
+            <a:srgbClr val="EAF5F3"/>
+          </a:solidFill>
+          <a:ln w="12700">
+            <a:solidFill>
+              <a:srgbClr val="EAF5F3"/>
+            </a:solidFill>
+            <a:prstDash val="solid"/>
+          </a:ln>
+        </p:spPr>
+      </p:sp>
+      <p:sp>
+        <p:nvSpPr>
+          <p:cNvPr id="20" name="Text 17"/>
+          <p:cNvSpPr/>
+          <p:nvPr/>
+        </p:nvSpPr>
+        <p:spPr>
+          <a:xfrm>
+            <a:off x="960120" y="5212080"/>
+            <a:ext cx="10332720" cy="731520"/>
+          </a:xfrm>
+          <a:prstGeom prst="rect">
+            <a:avLst/>
+          </a:prstGeom>
+          <a:noFill/>
+          <a:ln/>
+        </p:spPr>
+        <p:txBody>
+          <a:bodyPr wrap="square" lIns="0" tIns="0" rIns="0" bIns="0" rtlCol="0" anchor="ctr"/>
+          <a:lstStyle/>
+          <a:p>
+            <a:pPr indent="0" marL="0">
+              <a:buNone/>
+            </a:pPr>
+            <a:r>
+              <a:rPr lang="en-US" sz="1800" b="1" dirty="0">
+                <a:solidFill>
+                  <a:srgbClr val="13293D"/>
+                </a:solidFill>
+                <a:latin typeface="Inter" pitchFamily="34" charset="0"/>
+                <a:ea typeface="Inter" pitchFamily="34" charset="-122"/>
+                <a:cs typeface="Inter" pitchFamily="34" charset="-120"/>
+              </a:rPr>
               <a:t>You just wrote the first entry in your professional prompt library. Kit 18 grows it into a whole collection.</a:t>
             </a:r>
-            <a:endParaRPr lang="en-US" sz="2100" dirty="0"/>
+            <a:endParaRPr lang="en-US" sz="1800" dirty="0"/>
           </a:p>
         </p:txBody>
       </p:sp>
@@ -13648,7 +13996,7 @@
                 <a:ea typeface="Inter" pitchFamily="34" charset="-122"/>
                 <a:cs typeface="Inter" pitchFamily="34" charset="-120"/>
               </a:rPr>
-              <a:t>Her before and after, read aloud: the delta is the lesson.</a:t>
+              <a:t>Her review prompt, before and after: the delta is the lesson.</a:t>
             </a:r>
             <a:endParaRPr lang="en-US" sz="1000" dirty="0"/>
           </a:p>
@@ -14166,7 +14514,7 @@
                 <a:ea typeface="Inter" pitchFamily="34" charset="-122"/>
                 <a:cs typeface="Inter" pitchFamily="34" charset="-120"/>
               </a:rPr>
-              <a:t>Her library: one entry today. It compounds from here.</a:t>
+              <a:t>Her library: one entry today, the review-questions template. It compounds.</a:t>
             </a:r>
             <a:endParaRPr lang="en-US" sz="1000" dirty="0"/>
           </a:p>
@@ -17841,7 +18189,7 @@
         <p:spPr>
           <a:xfrm>
             <a:off x="548640" y="384048"/>
-            <a:ext cx="11091672" cy="777240"/>
+            <a:ext cx="7955280" cy="777240"/>
           </a:xfrm>
           <a:prstGeom prst="rect">
             <a:avLst/>

--- a/kits/kit02/Kit02_PresentationDeck.pptx
+++ b/kits/kit02/Kit02_PresentationDeck.pptx
@@ -4076,7 +4076,7 @@
         <p:spPr>
           <a:xfrm>
             <a:off x="566928" y="128016"/>
-            <a:ext cx="11055096" cy="274320"/>
+            <a:ext cx="7955280" cy="274320"/>
           </a:xfrm>
           <a:prstGeom prst="rect">
             <a:avLst/>
@@ -4115,7 +4115,7 @@
         <p:spPr>
           <a:xfrm>
             <a:off x="548640" y="384048"/>
-            <a:ext cx="11091672" cy="777240"/>
+            <a:ext cx="7955280" cy="777240"/>
           </a:xfrm>
           <a:prstGeom prst="rect">
             <a:avLst/>
@@ -4719,7 +4719,7 @@
         <p:spPr>
           <a:xfrm>
             <a:off x="566928" y="128016"/>
-            <a:ext cx="11055096" cy="274320"/>
+            <a:ext cx="7955280" cy="274320"/>
           </a:xfrm>
           <a:prstGeom prst="rect">
             <a:avLst/>
@@ -4758,7 +4758,7 @@
         <p:spPr>
           <a:xfrm>
             <a:off x="548640" y="384048"/>
-            <a:ext cx="11091672" cy="777240"/>
+            <a:ext cx="7955280" cy="777240"/>
           </a:xfrm>
           <a:prstGeom prst="rect">
             <a:avLst/>
@@ -5401,7 +5401,7 @@
         <p:spPr>
           <a:xfrm>
             <a:off x="566928" y="128016"/>
-            <a:ext cx="11055096" cy="274320"/>
+            <a:ext cx="7955280" cy="274320"/>
           </a:xfrm>
           <a:prstGeom prst="rect">
             <a:avLst/>
@@ -5440,7 +5440,7 @@
         <p:spPr>
           <a:xfrm>
             <a:off x="548640" y="384048"/>
-            <a:ext cx="11091672" cy="777240"/>
+            <a:ext cx="7955280" cy="777240"/>
           </a:xfrm>
           <a:prstGeom prst="rect">
             <a:avLst/>
@@ -6254,7 +6254,7 @@
         <p:spPr>
           <a:xfrm>
             <a:off x="566928" y="128016"/>
-            <a:ext cx="11055096" cy="274320"/>
+            <a:ext cx="7955280" cy="274320"/>
           </a:xfrm>
           <a:prstGeom prst="rect">
             <a:avLst/>
@@ -6293,7 +6293,7 @@
         <p:spPr>
           <a:xfrm>
             <a:off x="548640" y="384048"/>
-            <a:ext cx="11091672" cy="777240"/>
+            <a:ext cx="7955280" cy="777240"/>
           </a:xfrm>
           <a:prstGeom prst="rect">
             <a:avLst/>
@@ -7254,7 +7254,7 @@
         <p:spPr>
           <a:xfrm>
             <a:off x="566928" y="128016"/>
-            <a:ext cx="11055096" cy="274320"/>
+            <a:ext cx="7955280" cy="274320"/>
           </a:xfrm>
           <a:prstGeom prst="rect">
             <a:avLst/>
@@ -7293,7 +7293,7 @@
         <p:spPr>
           <a:xfrm>
             <a:off x="548640" y="384048"/>
-            <a:ext cx="11091672" cy="777240"/>
+            <a:ext cx="7955280" cy="777240"/>
           </a:xfrm>
           <a:prstGeom prst="rect">
             <a:avLst/>
@@ -7838,7 +7838,7 @@
         <p:spPr>
           <a:xfrm>
             <a:off x="566928" y="128016"/>
-            <a:ext cx="11055096" cy="274320"/>
+            <a:ext cx="7955280" cy="274320"/>
           </a:xfrm>
           <a:prstGeom prst="rect">
             <a:avLst/>
@@ -8567,7 +8567,7 @@
         <p:spPr>
           <a:xfrm>
             <a:off x="566928" y="128016"/>
-            <a:ext cx="11055096" cy="274320"/>
+            <a:ext cx="7955280" cy="274320"/>
           </a:xfrm>
           <a:prstGeom prst="rect">
             <a:avLst/>
@@ -8606,7 +8606,7 @@
         <p:spPr>
           <a:xfrm>
             <a:off x="548640" y="384048"/>
-            <a:ext cx="11091672" cy="777240"/>
+            <a:ext cx="7955280" cy="777240"/>
           </a:xfrm>
           <a:prstGeom prst="rect">
             <a:avLst/>
@@ -9249,7 +9249,7 @@
         <p:spPr>
           <a:xfrm>
             <a:off x="566928" y="128016"/>
-            <a:ext cx="11055096" cy="274320"/>
+            <a:ext cx="7955280" cy="274320"/>
           </a:xfrm>
           <a:prstGeom prst="rect">
             <a:avLst/>
@@ -9288,7 +9288,7 @@
         <p:spPr>
           <a:xfrm>
             <a:off x="548640" y="384048"/>
-            <a:ext cx="11091672" cy="777240"/>
+            <a:ext cx="7955280" cy="777240"/>
           </a:xfrm>
           <a:prstGeom prst="rect">
             <a:avLst/>
@@ -9833,7 +9833,7 @@
         <p:spPr>
           <a:xfrm>
             <a:off x="566928" y="128016"/>
-            <a:ext cx="11055096" cy="274320"/>
+            <a:ext cx="7955280" cy="274320"/>
           </a:xfrm>
           <a:prstGeom prst="rect">
             <a:avLst/>
@@ -10614,7 +10614,7 @@
         <p:spPr>
           <a:xfrm>
             <a:off x="566928" y="128016"/>
-            <a:ext cx="11055096" cy="274320"/>
+            <a:ext cx="7955280" cy="274320"/>
           </a:xfrm>
           <a:prstGeom prst="rect">
             <a:avLst/>
@@ -10653,7 +10653,7 @@
         <p:spPr>
           <a:xfrm>
             <a:off x="548640" y="384048"/>
-            <a:ext cx="11091672" cy="777240"/>
+            <a:ext cx="7955280" cy="777240"/>
           </a:xfrm>
           <a:prstGeom prst="rect">
             <a:avLst/>
@@ -11548,7 +11548,7 @@
         <p:spPr>
           <a:xfrm>
             <a:off x="566928" y="128016"/>
-            <a:ext cx="11055096" cy="274320"/>
+            <a:ext cx="7955280" cy="274320"/>
           </a:xfrm>
           <a:prstGeom prst="rect">
             <a:avLst/>
@@ -11587,23 +11587,23 @@
         <p:spPr>
           <a:xfrm>
             <a:off x="548640" y="384048"/>
-            <a:ext cx="11091672" cy="777240"/>
-          </a:xfrm>
-          <a:prstGeom prst="rect">
-            <a:avLst/>
-          </a:prstGeom>
-          <a:noFill/>
-          <a:ln/>
-        </p:spPr>
-        <p:txBody>
-          <a:bodyPr wrap="square" lIns="0" tIns="0" rIns="0" bIns="0" rtlCol="0" anchor="ctr"/>
-          <a:lstStyle/>
-          <a:p>
-            <a:pPr indent="0" marL="0">
-              <a:buNone/>
-            </a:pPr>
-            <a:r>
-              <a:rPr lang="en-US" sz="3200" b="1" dirty="0">
+            <a:ext cx="7955280" cy="777240"/>
+          </a:xfrm>
+          <a:prstGeom prst="rect">
+            <a:avLst/>
+          </a:prstGeom>
+          <a:noFill/>
+          <a:ln/>
+        </p:spPr>
+        <p:txBody>
+          <a:bodyPr wrap="square" lIns="0" tIns="0" rIns="0" bIns="0" rtlCol="0" anchor="ctr"/>
+          <a:lstStyle/>
+          <a:p>
+            <a:pPr indent="0" marL="0">
+              <a:buNone/>
+            </a:pPr>
+            <a:r>
+              <a:rPr lang="en-US" sz="2800" b="1" dirty="0">
                 <a:solidFill>
                   <a:srgbClr val="13293D"/>
                 </a:solidFill>
@@ -11613,7 +11613,7 @@
               </a:rPr>
               <a:t>Same tools. Very different results.</a:t>
             </a:r>
-            <a:endParaRPr lang="en-US" sz="3200" dirty="0"/>
+            <a:endParaRPr lang="en-US" sz="2800" dirty="0"/>
           </a:p>
         </p:txBody>
       </p:sp>
@@ -12298,7 +12298,7 @@
         <p:spPr>
           <a:xfrm>
             <a:off x="566928" y="128016"/>
-            <a:ext cx="11055096" cy="274320"/>
+            <a:ext cx="7955280" cy="274320"/>
           </a:xfrm>
           <a:prstGeom prst="rect">
             <a:avLst/>
@@ -12337,7 +12337,7 @@
         <p:spPr>
           <a:xfrm>
             <a:off x="548640" y="384048"/>
-            <a:ext cx="11091672" cy="777240"/>
+            <a:ext cx="7955280" cy="777240"/>
           </a:xfrm>
           <a:prstGeom prst="rect">
             <a:avLst/>
@@ -13280,7 +13280,7 @@
         <p:spPr>
           <a:xfrm>
             <a:off x="566928" y="128016"/>
-            <a:ext cx="11055096" cy="274320"/>
+            <a:ext cx="7955280" cy="274320"/>
           </a:xfrm>
           <a:prstGeom prst="rect">
             <a:avLst/>
@@ -13319,7 +13319,7 @@
         <p:spPr>
           <a:xfrm>
             <a:off x="548640" y="384048"/>
-            <a:ext cx="11091672" cy="777240"/>
+            <a:ext cx="7955280" cy="777240"/>
           </a:xfrm>
           <a:prstGeom prst="rect">
             <a:avLst/>
@@ -14011,7 +14011,7 @@
         <p:spPr>
           <a:xfrm>
             <a:off x="566928" y="128016"/>
-            <a:ext cx="11055096" cy="274320"/>
+            <a:ext cx="7955280" cy="274320"/>
           </a:xfrm>
           <a:prstGeom prst="rect">
             <a:avLst/>
@@ -14050,7 +14050,7 @@
         <p:spPr>
           <a:xfrm>
             <a:off x="548640" y="384048"/>
-            <a:ext cx="11091672" cy="777240"/>
+            <a:ext cx="7955280" cy="777240"/>
           </a:xfrm>
           <a:prstGeom prst="rect">
             <a:avLst/>
@@ -14529,7 +14529,7 @@
         <p:spPr>
           <a:xfrm>
             <a:off x="566928" y="128016"/>
-            <a:ext cx="11055096" cy="274320"/>
+            <a:ext cx="7955280" cy="274320"/>
           </a:xfrm>
           <a:prstGeom prst="rect">
             <a:avLst/>
@@ -14568,7 +14568,7 @@
         <p:spPr>
           <a:xfrm>
             <a:off x="548640" y="384048"/>
-            <a:ext cx="11091672" cy="777240"/>
+            <a:ext cx="7955280" cy="777240"/>
           </a:xfrm>
           <a:prstGeom prst="rect">
             <a:avLst/>
@@ -15043,7 +15043,7 @@
         <p:spPr>
           <a:xfrm>
             <a:off x="566928" y="128016"/>
-            <a:ext cx="11055096" cy="274320"/>
+            <a:ext cx="7955280" cy="274320"/>
           </a:xfrm>
           <a:prstGeom prst="rect">
             <a:avLst/>
@@ -15788,7 +15788,7 @@
         <p:spPr>
           <a:xfrm>
             <a:off x="566928" y="128016"/>
-            <a:ext cx="11055096" cy="274320"/>
+            <a:ext cx="7955280" cy="274320"/>
           </a:xfrm>
           <a:prstGeom prst="rect">
             <a:avLst/>
@@ -15827,7 +15827,7 @@
         <p:spPr>
           <a:xfrm>
             <a:off x="548640" y="384048"/>
-            <a:ext cx="11091672" cy="777240"/>
+            <a:ext cx="7955280" cy="777240"/>
           </a:xfrm>
           <a:prstGeom prst="rect">
             <a:avLst/>
@@ -16575,7 +16575,7 @@
         <p:spPr>
           <a:xfrm>
             <a:off x="566928" y="128016"/>
-            <a:ext cx="11055096" cy="274320"/>
+            <a:ext cx="7955280" cy="274320"/>
           </a:xfrm>
           <a:prstGeom prst="rect">
             <a:avLst/>
@@ -17109,7 +17109,7 @@
         <p:spPr>
           <a:xfrm>
             <a:off x="566928" y="128016"/>
-            <a:ext cx="11055096" cy="274320"/>
+            <a:ext cx="7955280" cy="274320"/>
           </a:xfrm>
           <a:prstGeom prst="rect">
             <a:avLst/>
@@ -17148,7 +17148,7 @@
         <p:spPr>
           <a:xfrm>
             <a:off x="548640" y="384048"/>
-            <a:ext cx="11091672" cy="777240"/>
+            <a:ext cx="7955280" cy="777240"/>
           </a:xfrm>
           <a:prstGeom prst="rect">
             <a:avLst/>
@@ -18150,7 +18150,7 @@
         <p:spPr>
           <a:xfrm>
             <a:off x="566928" y="128016"/>
-            <a:ext cx="11055096" cy="274320"/>
+            <a:ext cx="7955280" cy="274320"/>
           </a:xfrm>
           <a:prstGeom prst="rect">
             <a:avLst/>
@@ -18205,7 +18205,7 @@
               <a:buNone/>
             </a:pPr>
             <a:r>
-              <a:rPr lang="en-US" sz="3200" b="1" dirty="0">
+              <a:rPr lang="en-US" sz="2800" b="1" dirty="0">
                 <a:solidFill>
                   <a:srgbClr val="13293D"/>
                 </a:solidFill>
@@ -18215,7 +18215,7 @@
               </a:rPr>
               <a:t>Your first 48 hours: three small things</a:t>
             </a:r>
-            <a:endParaRPr lang="en-US" sz="3200" dirty="0"/>
+            <a:endParaRPr lang="en-US" sz="2800" dirty="0"/>
           </a:p>
         </p:txBody>
       </p:sp>
@@ -19015,7 +19015,7 @@
         <p:spPr>
           <a:xfrm>
             <a:off x="566928" y="128016"/>
-            <a:ext cx="11055096" cy="274320"/>
+            <a:ext cx="7955280" cy="274320"/>
           </a:xfrm>
           <a:prstGeom prst="rect">
             <a:avLst/>
@@ -19054,7 +19054,7 @@
         <p:spPr>
           <a:xfrm>
             <a:off x="548640" y="384048"/>
-            <a:ext cx="11091672" cy="777240"/>
+            <a:ext cx="7955280" cy="777240"/>
           </a:xfrm>
           <a:prstGeom prst="rect">
             <a:avLst/>
@@ -19572,7 +19572,7 @@
         <p:spPr>
           <a:xfrm>
             <a:off x="566928" y="128016"/>
-            <a:ext cx="11055096" cy="274320"/>
+            <a:ext cx="7955280" cy="274320"/>
           </a:xfrm>
           <a:prstGeom prst="rect">
             <a:avLst/>
@@ -19611,7 +19611,7 @@
         <p:spPr>
           <a:xfrm>
             <a:off x="548640" y="384048"/>
-            <a:ext cx="11091672" cy="777240"/>
+            <a:ext cx="7955280" cy="777240"/>
           </a:xfrm>
           <a:prstGeom prst="rect">
             <a:avLst/>
@@ -20467,7 +20467,7 @@
         <p:spPr>
           <a:xfrm>
             <a:off x="566928" y="128016"/>
-            <a:ext cx="11055096" cy="274320"/>
+            <a:ext cx="7955280" cy="274320"/>
           </a:xfrm>
           <a:prstGeom prst="rect">
             <a:avLst/>
@@ -20506,7 +20506,7 @@
         <p:spPr>
           <a:xfrm>
             <a:off x="548640" y="384048"/>
-            <a:ext cx="11091672" cy="777240"/>
+            <a:ext cx="7955280" cy="777240"/>
           </a:xfrm>
           <a:prstGeom prst="rect">
             <a:avLst/>
@@ -21395,7 +21395,7 @@
         <p:spPr>
           <a:xfrm>
             <a:off x="566928" y="128016"/>
-            <a:ext cx="11055096" cy="274320"/>
+            <a:ext cx="7955280" cy="274320"/>
           </a:xfrm>
           <a:prstGeom prst="rect">
             <a:avLst/>
@@ -21929,7 +21929,7 @@
         <p:spPr>
           <a:xfrm>
             <a:off x="566928" y="128016"/>
-            <a:ext cx="11055096" cy="274320"/>
+            <a:ext cx="7955280" cy="274320"/>
           </a:xfrm>
           <a:prstGeom prst="rect">
             <a:avLst/>
@@ -21968,7 +21968,7 @@
         <p:spPr>
           <a:xfrm>
             <a:off x="548640" y="384048"/>
-            <a:ext cx="11091672" cy="777240"/>
+            <a:ext cx="7955280" cy="777240"/>
           </a:xfrm>
           <a:prstGeom prst="rect">
             <a:avLst/>
@@ -22977,7 +22977,7 @@
         <p:spPr>
           <a:xfrm>
             <a:off x="566928" y="128016"/>
-            <a:ext cx="11055096" cy="274320"/>
+            <a:ext cx="7955280" cy="274320"/>
           </a:xfrm>
           <a:prstGeom prst="rect">
             <a:avLst/>
@@ -23016,7 +23016,7 @@
         <p:spPr>
           <a:xfrm>
             <a:off x="548640" y="384048"/>
-            <a:ext cx="11091672" cy="777240"/>
+            <a:ext cx="7955280" cy="777240"/>
           </a:xfrm>
           <a:prstGeom prst="rect">
             <a:avLst/>
@@ -23554,7 +23554,7 @@
         <p:spPr>
           <a:xfrm>
             <a:off x="566928" y="128016"/>
-            <a:ext cx="11055096" cy="274320"/>
+            <a:ext cx="7955280" cy="274320"/>
           </a:xfrm>
           <a:prstGeom prst="rect">
             <a:avLst/>
@@ -23593,7 +23593,7 @@
         <p:spPr>
           <a:xfrm>
             <a:off x="548640" y="384048"/>
-            <a:ext cx="11091672" cy="777240"/>
+            <a:ext cx="7955280" cy="777240"/>
           </a:xfrm>
           <a:prstGeom prst="rect">
             <a:avLst/>

--- a/kits/kit02/Kit02_PresentationDeck.pptx
+++ b/kits/kit02/Kit02_PresentationDeck.pptx
@@ -12253,17 +12253,17 @@
         </p:nvSpPr>
         <p:spPr>
           <a:xfrm>
-            <a:off x="548640" y="384048"/>
-            <a:ext cx="7955280" cy="777240"/>
-          </a:xfrm>
-          <a:prstGeom prst="rect">
-            <a:avLst/>
-          </a:prstGeom>
-          <a:noFill/>
-          <a:ln/>
-        </p:spPr>
-        <p:txBody>
-          <a:bodyPr wrap="square" lIns="0" tIns="0" rIns="0" bIns="0" rtlCol="0" anchor="ctr"/>
+            <a:off x="548640" y="457200"/>
+            <a:ext cx="7955280" cy="914400"/>
+          </a:xfrm>
+          <a:prstGeom prst="rect">
+            <a:avLst/>
+          </a:prstGeom>
+          <a:noFill/>
+          <a:ln/>
+        </p:spPr>
+        <p:txBody>
+          <a:bodyPr wrap="square" lIns="0" tIns="0" rIns="0" bIns="0" rtlCol="0" anchor="t"/>
           <a:lstStyle/>
           <a:p>
             <a:pPr indent="0" marL="0">
@@ -15575,24 +15575,24 @@
         </p:nvSpPr>
         <p:spPr>
           <a:xfrm>
-            <a:off x="548640" y="384048"/>
-            <a:ext cx="7955280" cy="777240"/>
-          </a:xfrm>
-          <a:prstGeom prst="rect">
-            <a:avLst/>
-          </a:prstGeom>
-          <a:noFill/>
-          <a:ln/>
-        </p:spPr>
-        <p:txBody>
-          <a:bodyPr wrap="square" lIns="0" tIns="0" rIns="0" bIns="0" rtlCol="0" anchor="ctr"/>
-          <a:lstStyle/>
-          <a:p>
-            <a:pPr indent="0" marL="0">
-              <a:buNone/>
-            </a:pPr>
-            <a:r>
-              <a:rPr lang="en-US" sz="3200" b="1" dirty="0">
+            <a:off x="548640" y="457200"/>
+            <a:ext cx="7955280" cy="914400"/>
+          </a:xfrm>
+          <a:prstGeom prst="rect">
+            <a:avLst/>
+          </a:prstGeom>
+          <a:noFill/>
+          <a:ln/>
+        </p:spPr>
+        <p:txBody>
+          <a:bodyPr wrap="square" lIns="0" tIns="0" rIns="0" bIns="0" rtlCol="0" anchor="t"/>
+          <a:lstStyle/>
+          <a:p>
+            <a:pPr indent="0" marL="0">
+              <a:buNone/>
+            </a:pPr>
+            <a:r>
+              <a:rPr lang="en-US" sz="2800" b="1" dirty="0">
                 <a:solidFill>
                   <a:srgbClr val="13293D"/>
                 </a:solidFill>
@@ -15602,7 +15602,7 @@
               </a:rPr>
               <a:t>Template it. Save it. Share it.</a:t>
             </a:r>
-            <a:endParaRPr lang="en-US" sz="3200" dirty="0"/>
+            <a:endParaRPr lang="en-US" sz="2800" dirty="0"/>
           </a:p>
         </p:txBody>
       </p:sp>
@@ -17607,24 +17607,24 @@
         </p:nvSpPr>
         <p:spPr>
           <a:xfrm>
-            <a:off x="548640" y="384048"/>
-            <a:ext cx="7955280" cy="777240"/>
-          </a:xfrm>
-          <a:prstGeom prst="rect">
-            <a:avLst/>
-          </a:prstGeom>
-          <a:noFill/>
-          <a:ln/>
-        </p:spPr>
-        <p:txBody>
-          <a:bodyPr wrap="square" lIns="0" tIns="0" rIns="0" bIns="0" rtlCol="0" anchor="ctr"/>
-          <a:lstStyle/>
-          <a:p>
-            <a:pPr indent="0" marL="0">
-              <a:buNone/>
-            </a:pPr>
-            <a:r>
-              <a:rPr lang="en-US" sz="3200" b="1" dirty="0">
+            <a:off x="548640" y="457200"/>
+            <a:ext cx="7955280" cy="914400"/>
+          </a:xfrm>
+          <a:prstGeom prst="rect">
+            <a:avLst/>
+          </a:prstGeom>
+          <a:noFill/>
+          <a:ln/>
+        </p:spPr>
+        <p:txBody>
+          <a:bodyPr wrap="square" lIns="0" tIns="0" rIns="0" bIns="0" rtlCol="0" anchor="t"/>
+          <a:lstStyle/>
+          <a:p>
+            <a:pPr indent="0" marL="0">
+              <a:buNone/>
+            </a:pPr>
+            <a:r>
+              <a:rPr lang="en-US" sz="2800" b="1" dirty="0">
                 <a:solidFill>
                   <a:srgbClr val="13293D"/>
                 </a:solidFill>
@@ -17634,7 +17634,7 @@
               </a:rPr>
               <a:t>You went from asking to owning</a:t>
             </a:r>
-            <a:endParaRPr lang="en-US" sz="3200" dirty="0"/>
+            <a:endParaRPr lang="en-US" sz="2800" dirty="0"/>
           </a:p>
         </p:txBody>
       </p:sp>
@@ -20187,24 +20187,24 @@
         </p:nvSpPr>
         <p:spPr>
           <a:xfrm>
-            <a:off x="548640" y="384048"/>
-            <a:ext cx="7955280" cy="777240"/>
-          </a:xfrm>
-          <a:prstGeom prst="rect">
-            <a:avLst/>
-          </a:prstGeom>
-          <a:noFill/>
-          <a:ln/>
-        </p:spPr>
-        <p:txBody>
-          <a:bodyPr wrap="square" lIns="0" tIns="0" rIns="0" bIns="0" rtlCol="0" anchor="ctr"/>
-          <a:lstStyle/>
-          <a:p>
-            <a:pPr indent="0" marL="0">
-              <a:buNone/>
-            </a:pPr>
-            <a:r>
-              <a:rPr lang="en-US" sz="3200" b="1" dirty="0">
+            <a:off x="548640" y="457200"/>
+            <a:ext cx="7955280" cy="914400"/>
+          </a:xfrm>
+          <a:prstGeom prst="rect">
+            <a:avLst/>
+          </a:prstGeom>
+          <a:noFill/>
+          <a:ln/>
+        </p:spPr>
+        <p:txBody>
+          <a:bodyPr wrap="square" lIns="0" tIns="0" rIns="0" bIns="0" rtlCol="0" anchor="t"/>
+          <a:lstStyle/>
+          <a:p>
+            <a:pPr indent="0" marL="0">
+              <a:buNone/>
+            </a:pPr>
+            <a:r>
+              <a:rPr lang="en-US" sz="2800" b="1" dirty="0">
                 <a:solidFill>
                   <a:srgbClr val="13293D"/>
                 </a:solidFill>
@@ -20214,7 +20214,7 @@
               </a:rPr>
               <a:t>Why “just ask” gets beige answers</a:t>
             </a:r>
-            <a:endParaRPr lang="en-US" sz="3200" dirty="0"/>
+            <a:endParaRPr lang="en-US" sz="2800" dirty="0"/>
           </a:p>
         </p:txBody>
       </p:sp>
@@ -21812,17 +21812,17 @@
         </p:nvSpPr>
         <p:spPr>
           <a:xfrm>
-            <a:off x="548640" y="384048"/>
-            <a:ext cx="7955280" cy="777240"/>
-          </a:xfrm>
-          <a:prstGeom prst="rect">
-            <a:avLst/>
-          </a:prstGeom>
-          <a:noFill/>
-          <a:ln/>
-        </p:spPr>
-        <p:txBody>
-          <a:bodyPr wrap="square" lIns="0" tIns="0" rIns="0" bIns="0" rtlCol="0" anchor="ctr"/>
+            <a:off x="548640" y="457200"/>
+            <a:ext cx="7955280" cy="914400"/>
+          </a:xfrm>
+          <a:prstGeom prst="rect">
+            <a:avLst/>
+          </a:prstGeom>
+          <a:noFill/>
+          <a:ln/>
+        </p:spPr>
+        <p:txBody>
+          <a:bodyPr wrap="square" lIns="0" tIns="0" rIns="0" bIns="0" rtlCol="0" anchor="t"/>
           <a:lstStyle/>
           <a:p>
             <a:pPr indent="0" marL="0">
@@ -26632,24 +26632,24 @@
         </p:nvSpPr>
         <p:spPr>
           <a:xfrm>
-            <a:off x="548640" y="384048"/>
-            <a:ext cx="7955280" cy="777240"/>
-          </a:xfrm>
-          <a:prstGeom prst="rect">
-            <a:avLst/>
-          </a:prstGeom>
-          <a:noFill/>
-          <a:ln/>
-        </p:spPr>
-        <p:txBody>
-          <a:bodyPr wrap="square" lIns="0" tIns="0" rIns="0" bIns="0" rtlCol="0" anchor="ctr"/>
-          <a:lstStyle/>
-          <a:p>
-            <a:pPr indent="0" marL="0">
-              <a:buNone/>
-            </a:pPr>
-            <a:r>
-              <a:rPr lang="en-US" sz="3200" b="1" dirty="0">
+            <a:off x="548640" y="457200"/>
+            <a:ext cx="7955280" cy="914400"/>
+          </a:xfrm>
+          <a:prstGeom prst="rect">
+            <a:avLst/>
+          </a:prstGeom>
+          <a:noFill/>
+          <a:ln/>
+        </p:spPr>
+        <p:txBody>
+          <a:bodyPr wrap="square" lIns="0" tIns="0" rIns="0" bIns="0" rtlCol="0" anchor="t"/>
+          <a:lstStyle/>
+          <a:p>
+            <a:pPr indent="0" marL="0">
+              <a:buNone/>
+            </a:pPr>
+            <a:r>
+              <a:rPr lang="en-US" sz="2800" b="1" dirty="0">
                 <a:solidFill>
                   <a:srgbClr val="13293D"/>
                 </a:solidFill>
@@ -26659,7 +26659,7 @@
               </a:rPr>
               <a:t>The one thing prompts can’t fix</a:t>
             </a:r>
-            <a:endParaRPr lang="en-US" sz="3200" dirty="0"/>
+            <a:endParaRPr lang="en-US" sz="2800" dirty="0"/>
           </a:p>
         </p:txBody>
       </p:sp>

--- a/kits/kit02/Kit02_PresentationDeck.pptx
+++ b/kits/kit02/Kit02_PresentationDeck.pptx
@@ -3174,7 +3174,7 @@
           <a:p>
             <a:r>
               <a:rPr lang="en-US" dirty="0"/>
-              <a:t>Benchmark study: 26 prompt-design principles improved GPT-4 response quality by 57.7% on average (accuracy by 36.4%). Labeled a preprint in the References. Keep it one beat; don’t oversell.</a:t>
+              <a:t>Benchmark study: 26 prompt-design principles improved GPT-4 response quality by 57.7% on average (accuracy by 36.4%) on the authors' own ATLAS benchmark. Say the scope out loud: this is a benchmark result on one model family, not a measured effect for ordinary classroom prompting. Labeled a preprint in the References. Keep it one beat; don't oversell.</a:t>
             </a:r>
             <a:endParaRPr lang="en-US" dirty="0"/>
           </a:p>
@@ -26160,8 +26160,8 @@
         </p:nvSpPr>
         <p:spPr>
           <a:xfrm>
-            <a:off x="1280160" y="3383280"/>
-            <a:ext cx="9601200" cy="1005840"/>
+            <a:off x="1280160" y="3337560"/>
+            <a:ext cx="9601200" cy="1143000"/>
           </a:xfrm>
           <a:prstGeom prst="rect">
             <a:avLst/>
@@ -26177,7 +26177,7 @@
               <a:buNone/>
             </a:pPr>
             <a:r>
-              <a:rPr lang="en-US" sz="1600" dirty="0">
+              <a:rPr lang="en-US" sz="1500" dirty="0">
                 <a:solidFill>
                   <a:srgbClr val="1B1F24"/>
                 </a:solidFill>
@@ -26185,9 +26185,9 @@
                 <a:ea typeface="Inter" pitchFamily="34" charset="-122"/>
                 <a:cs typeface="Inter" pitchFamily="34" charset="-120"/>
               </a:rPr>
-              <a:t>Researchers testing structured, principled prompts against casual ones measured response-quality improvements of more than half on the strongest models. (Bsharat et al., 2024, preprint)</a:t>
-            </a:r>
-            <a:endParaRPr lang="en-US" sz="1600" dirty="0"/>
+              <a:t>On the benchmark its authors built, a set of 26 prompt-design principles raised GPT-4 response-quality scores by about 58%. One benchmark, not a universal rule, but the direction is clear. (Bsharat et al., 2024, preprint)</a:t>
+            </a:r>
+            <a:endParaRPr lang="en-US" sz="1500" dirty="0"/>
           </a:p>
         </p:txBody>
       </p:sp>
